--- a/docs/Fig MyM.pptx
+++ b/docs/Fig MyM.pptx
@@ -20,6 +20,9 @@
     <p:sldId id="265" r:id="rId16"/>
     <p:sldId id="266" r:id="rId17"/>
     <p:sldId id="267" r:id="rId18"/>
+    <p:sldId id="268" r:id="rId19"/>
+    <p:sldId id="269" r:id="rId20"/>
+    <p:sldId id="270" r:id="rId21"/>
   </p:sldIdLst>
   <p:sldSz cy="5143500" cx="9144000"/>
   <p:notesSz cx="6858000" cy="9144000"/>
@@ -273,7 +276,7 @@
 
 <file path=ppt/commentAuthors.xml><?xml version="1.0" encoding="utf-8"?>
 <p:cmAuthorLst xmlns:a="http://schemas.openxmlformats.org/drawingml/2006/main" xmlns:r="http://schemas.openxmlformats.org/officeDocument/2006/relationships" xmlns:mc="http://schemas.openxmlformats.org/markup-compatibility/2006" xmlns:mv="urn:schemas-microsoft-com:mac:vml" xmlns:p="http://schemas.openxmlformats.org/presentationml/2006/main" xmlns:c="http://schemas.openxmlformats.org/drawingml/2006/chart" xmlns:dgm="http://schemas.openxmlformats.org/drawingml/2006/diagram" xmlns:o="urn:schemas-microsoft-com:office:office" xmlns:v="urn:schemas-microsoft-com:vml" xmlns:pvml="urn:schemas-microsoft-com:office:powerpoint" xmlns:com="http://schemas.openxmlformats.org/drawingml/2006/compatibility" xmlns:p14="http://schemas.microsoft.com/office/powerpoint/2010/main" xmlns:p15="http://schemas.microsoft.com/office/powerpoint/2012/main" xmlns:ahyp="http://schemas.microsoft.com/office/drawing/2018/hyperlinkcolor">
-  <p:cmAuthor clrIdx="0" id="0" initials="" lastIdx="4" name="Martin Iungman"/>
+  <p:cmAuthor clrIdx="0" id="0" initials="" lastIdx="3" name="Martin Iungman"/>
 </p:cmAuthorLst>
 </file>
 
@@ -288,25 +291,16 @@
 
 <file path=ppt/comments/comment2.xml><?xml version="1.0" encoding="utf-8"?>
 <p:cmLst xmlns:a="http://schemas.openxmlformats.org/drawingml/2006/main" xmlns:r="http://schemas.openxmlformats.org/officeDocument/2006/relationships" xmlns:mc="http://schemas.openxmlformats.org/markup-compatibility/2006" xmlns:mv="urn:schemas-microsoft-com:mac:vml" xmlns:p="http://schemas.openxmlformats.org/presentationml/2006/main" xmlns:c="http://schemas.openxmlformats.org/drawingml/2006/chart" xmlns:dgm="http://schemas.openxmlformats.org/drawingml/2006/diagram" xmlns:o="urn:schemas-microsoft-com:office:office" xmlns:v="urn:schemas-microsoft-com:vml" xmlns:pvml="urn:schemas-microsoft-com:office:powerpoint" xmlns:com="http://schemas.openxmlformats.org/drawingml/2006/compatibility" xmlns:p14="http://schemas.microsoft.com/office/powerpoint/2010/main" xmlns:p15="http://schemas.microsoft.com/office/powerpoint/2012/main" xmlns:ahyp="http://schemas.microsoft.com/office/drawing/2018/hyperlinkcolor">
-  <p:cm authorId="0" idx="2" dt="2026-03-30T16:02:38.443">
-    <p:pos x="202" y="203"/>
-    <p:text>editar imagen para agregar ref de calles</p:text>
+  <p:cm authorId="0" idx="2" dt="2026-03-09T20:27:41.679">
+    <p:pos x="441" y="316"/>
+    <p:text>cambiar de color...</p:text>
   </p:cm>
 </p:cmLst>
 </file>
 
 <file path=ppt/comments/comment3.xml><?xml version="1.0" encoding="utf-8"?>
 <p:cmLst xmlns:a="http://schemas.openxmlformats.org/drawingml/2006/main" xmlns:r="http://schemas.openxmlformats.org/officeDocument/2006/relationships" xmlns:mc="http://schemas.openxmlformats.org/markup-compatibility/2006" xmlns:mv="urn:schemas-microsoft-com:mac:vml" xmlns:p="http://schemas.openxmlformats.org/presentationml/2006/main" xmlns:c="http://schemas.openxmlformats.org/drawingml/2006/chart" xmlns:dgm="http://schemas.openxmlformats.org/drawingml/2006/diagram" xmlns:o="urn:schemas-microsoft-com:office:office" xmlns:v="urn:schemas-microsoft-com:vml" xmlns:pvml="urn:schemas-microsoft-com:office:powerpoint" xmlns:com="http://schemas.openxmlformats.org/drawingml/2006/compatibility" xmlns:p14="http://schemas.microsoft.com/office/powerpoint/2010/main" xmlns:p15="http://schemas.microsoft.com/office/powerpoint/2012/main" xmlns:ahyp="http://schemas.microsoft.com/office/drawing/2018/hyperlinkcolor">
-  <p:cm authorId="0" idx="3" dt="2026-03-09T20:27:41.679">
-    <p:pos x="441" y="316"/>
-    <p:text>cambiar de color...</p:text>
-  </p:cm>
-</p:cmLst>
-</file>
-
-<file path=ppt/comments/comment4.xml><?xml version="1.0" encoding="utf-8"?>
-<p:cmLst xmlns:a="http://schemas.openxmlformats.org/drawingml/2006/main" xmlns:r="http://schemas.openxmlformats.org/officeDocument/2006/relationships" xmlns:mc="http://schemas.openxmlformats.org/markup-compatibility/2006" xmlns:mv="urn:schemas-microsoft-com:mac:vml" xmlns:p="http://schemas.openxmlformats.org/presentationml/2006/main" xmlns:c="http://schemas.openxmlformats.org/drawingml/2006/chart" xmlns:dgm="http://schemas.openxmlformats.org/drawingml/2006/diagram" xmlns:o="urn:schemas-microsoft-com:office:office" xmlns:v="urn:schemas-microsoft-com:vml" xmlns:pvml="urn:schemas-microsoft-com:office:powerpoint" xmlns:com="http://schemas.openxmlformats.org/drawingml/2006/compatibility" xmlns:p14="http://schemas.microsoft.com/office/powerpoint/2010/main" xmlns:p15="http://schemas.microsoft.com/office/powerpoint/2012/main" xmlns:ahyp="http://schemas.microsoft.com/office/drawing/2018/hyperlinkcolor">
-  <p:cm authorId="0" idx="4" dt="2026-03-20T16:29:37.389">
+  <p:cm authorId="0" idx="3" dt="2026-03-20T16:29:37.389">
     <p:pos x="3019" y="1276"/>
     <p:text>agrandar texto</p:text>
   </p:cm>
@@ -843,7 +837,7 @@
   <p:cSld>
     <p:spTree>
       <p:nvGrpSpPr>
-        <p:cNvPr id="148" name="Shape 148"/>
+        <p:cNvPr id="133" name="Shape 133"/>
         <p:cNvGrpSpPr/>
         <p:nvPr/>
       </p:nvGrpSpPr>
@@ -857,7 +851,7 @@
       </p:grpSpPr>
       <p:sp>
         <p:nvSpPr>
-          <p:cNvPr id="149" name="Google Shape;149;g39631daccbb_0_43:notes"/>
+          <p:cNvPr id="134" name="Google Shape;134;g39631daccbb_0_0:notes"/>
           <p:cNvSpPr/>
           <p:nvPr>
             <p:ph idx="2" type="sldImg"/>
@@ -892,7 +886,7 @@
       </p:sp>
       <p:sp>
         <p:nvSpPr>
-          <p:cNvPr id="150" name="Google Shape;150;g39631daccbb_0_43:notes"/>
+          <p:cNvPr id="135" name="Google Shape;135;g39631daccbb_0_0:notes"/>
           <p:cNvSpPr txBox="1"/>
           <p:nvPr>
             <p:ph idx="1" type="body"/>
@@ -942,7 +936,7 @@
   <p:cSld>
     <p:spTree>
       <p:nvGrpSpPr>
-        <p:cNvPr id="157" name="Shape 157"/>
+        <p:cNvPr id="167" name="Shape 167"/>
         <p:cNvGrpSpPr/>
         <p:nvPr/>
       </p:nvGrpSpPr>
@@ -956,7 +950,7 @@
       </p:grpSpPr>
       <p:sp>
         <p:nvSpPr>
-          <p:cNvPr id="158" name="Google Shape;158;g39631daccbb_0_37:notes"/>
+          <p:cNvPr id="168" name="Google Shape;168;g39631daccbb_0_43:notes"/>
           <p:cNvSpPr/>
           <p:nvPr>
             <p:ph idx="2" type="sldImg"/>
@@ -991,7 +985,7 @@
       </p:sp>
       <p:sp>
         <p:nvSpPr>
-          <p:cNvPr id="159" name="Google Shape;159;g39631daccbb_0_37:notes"/>
+          <p:cNvPr id="169" name="Google Shape;169;g39631daccbb_0_43:notes"/>
           <p:cNvSpPr txBox="1"/>
           <p:nvPr>
             <p:ph idx="1" type="body"/>
@@ -1041,7 +1035,7 @@
   <p:cSld>
     <p:spTree>
       <p:nvGrpSpPr>
-        <p:cNvPr id="167" name="Shape 167"/>
+        <p:cNvPr id="176" name="Shape 176"/>
         <p:cNvGrpSpPr/>
         <p:nvPr/>
       </p:nvGrpSpPr>
@@ -1055,7 +1049,7 @@
       </p:grpSpPr>
       <p:sp>
         <p:nvSpPr>
-          <p:cNvPr id="168" name="Google Shape;168;g3f01cac90a2_0_0:notes"/>
+          <p:cNvPr id="177" name="Google Shape;177;g39631daccbb_0_37:notes"/>
           <p:cNvSpPr/>
           <p:nvPr>
             <p:ph idx="2" type="sldImg"/>
@@ -1090,7 +1084,7 @@
       </p:sp>
       <p:sp>
         <p:nvSpPr>
-          <p:cNvPr id="169" name="Google Shape;169;g3f01cac90a2_0_0:notes"/>
+          <p:cNvPr id="178" name="Google Shape;178;g39631daccbb_0_37:notes"/>
           <p:cNvSpPr txBox="1"/>
           <p:nvPr>
             <p:ph idx="1" type="body"/>
@@ -1135,12 +1129,12 @@
 </p:notes>
 </file>
 
-<file path=ppt/notesSlides/notesSlide2.xml><?xml version="1.0" encoding="utf-8"?>
+<file path=ppt/notesSlides/notesSlide13.xml><?xml version="1.0" encoding="utf-8"?>
 <p:notes xmlns:a="http://schemas.openxmlformats.org/drawingml/2006/main" xmlns:r="http://schemas.openxmlformats.org/officeDocument/2006/relationships" xmlns:mc="http://schemas.openxmlformats.org/markup-compatibility/2006" xmlns:mv="urn:schemas-microsoft-com:mac:vml" xmlns:p="http://schemas.openxmlformats.org/presentationml/2006/main" xmlns:c="http://schemas.openxmlformats.org/drawingml/2006/chart" xmlns:dgm="http://schemas.openxmlformats.org/drawingml/2006/diagram" xmlns:o="urn:schemas-microsoft-com:office:office" xmlns:v="urn:schemas-microsoft-com:vml" xmlns:pvml="urn:schemas-microsoft-com:office:powerpoint" xmlns:com="http://schemas.openxmlformats.org/drawingml/2006/compatibility" xmlns:p14="http://schemas.microsoft.com/office/powerpoint/2010/main" xmlns:p15="http://schemas.microsoft.com/office/powerpoint/2012/main" xmlns:ahyp="http://schemas.microsoft.com/office/drawing/2018/hyperlinkcolor" showMasterPhAnim="0" showMasterSp="0">
   <p:cSld>
     <p:spTree>
       <p:nvGrpSpPr>
-        <p:cNvPr id="55" name="Shape 55"/>
+        <p:cNvPr id="186" name="Shape 186"/>
         <p:cNvGrpSpPr/>
         <p:nvPr/>
       </p:nvGrpSpPr>
@@ -1154,7 +1148,7 @@
       </p:grpSpPr>
       <p:sp>
         <p:nvSpPr>
-          <p:cNvPr id="56" name="Google Shape;56;g3cdb3e813f6_0_1:notes"/>
+          <p:cNvPr id="187" name="Google Shape;187;g3f584734f4e_0_5:notes"/>
           <p:cNvSpPr/>
           <p:nvPr>
             <p:ph idx="2" type="sldImg"/>
@@ -1189,7 +1183,7 @@
       </p:sp>
       <p:sp>
         <p:nvSpPr>
-          <p:cNvPr id="57" name="Google Shape;57;g3cdb3e813f6_0_1:notes"/>
+          <p:cNvPr id="188" name="Google Shape;188;g3f584734f4e_0_5:notes"/>
           <p:cNvSpPr txBox="1"/>
           <p:nvPr>
             <p:ph idx="1" type="body"/>
@@ -1234,12 +1228,12 @@
 </p:notes>
 </file>
 
-<file path=ppt/notesSlides/notesSlide3.xml><?xml version="1.0" encoding="utf-8"?>
+<file path=ppt/notesSlides/notesSlide14.xml><?xml version="1.0" encoding="utf-8"?>
 <p:notes xmlns:a="http://schemas.openxmlformats.org/drawingml/2006/main" xmlns:r="http://schemas.openxmlformats.org/officeDocument/2006/relationships" xmlns:mc="http://schemas.openxmlformats.org/markup-compatibility/2006" xmlns:mv="urn:schemas-microsoft-com:mac:vml" xmlns:p="http://schemas.openxmlformats.org/presentationml/2006/main" xmlns:c="http://schemas.openxmlformats.org/drawingml/2006/chart" xmlns:dgm="http://schemas.openxmlformats.org/drawingml/2006/diagram" xmlns:o="urn:schemas-microsoft-com:office:office" xmlns:v="urn:schemas-microsoft-com:vml" xmlns:pvml="urn:schemas-microsoft-com:office:powerpoint" xmlns:com="http://schemas.openxmlformats.org/drawingml/2006/compatibility" xmlns:p14="http://schemas.microsoft.com/office/powerpoint/2010/main" xmlns:p15="http://schemas.microsoft.com/office/powerpoint/2012/main" xmlns:ahyp="http://schemas.microsoft.com/office/drawing/2018/hyperlinkcolor" showMasterPhAnim="0" showMasterSp="0">
   <p:cSld>
     <p:spTree>
       <p:nvGrpSpPr>
-        <p:cNvPr id="72" name="Shape 72"/>
+        <p:cNvPr id="192" name="Shape 192"/>
         <p:cNvGrpSpPr/>
         <p:nvPr/>
       </p:nvGrpSpPr>
@@ -1253,7 +1247,7 @@
       </p:grpSpPr>
       <p:sp>
         <p:nvSpPr>
-          <p:cNvPr id="73" name="Google Shape;73;g3df342a180f_0_8:notes"/>
+          <p:cNvPr id="193" name="Google Shape;193;g3f565a8e473_0_5:notes"/>
           <p:cNvSpPr/>
           <p:nvPr>
             <p:ph idx="2" type="sldImg"/>
@@ -1288,7 +1282,7 @@
       </p:sp>
       <p:sp>
         <p:nvSpPr>
-          <p:cNvPr id="74" name="Google Shape;74;g3df342a180f_0_8:notes"/>
+          <p:cNvPr id="194" name="Google Shape;194;g3f565a8e473_0_5:notes"/>
           <p:cNvSpPr txBox="1"/>
           <p:nvPr>
             <p:ph idx="1" type="body"/>
@@ -1333,12 +1327,12 @@
 </p:notes>
 </file>
 
-<file path=ppt/notesSlides/notesSlide4.xml><?xml version="1.0" encoding="utf-8"?>
+<file path=ppt/notesSlides/notesSlide15.xml><?xml version="1.0" encoding="utf-8"?>
 <p:notes xmlns:a="http://schemas.openxmlformats.org/drawingml/2006/main" xmlns:r="http://schemas.openxmlformats.org/officeDocument/2006/relationships" xmlns:mc="http://schemas.openxmlformats.org/markup-compatibility/2006" xmlns:mv="urn:schemas-microsoft-com:mac:vml" xmlns:p="http://schemas.openxmlformats.org/presentationml/2006/main" xmlns:c="http://schemas.openxmlformats.org/drawingml/2006/chart" xmlns:dgm="http://schemas.openxmlformats.org/drawingml/2006/diagram" xmlns:o="urn:schemas-microsoft-com:office:office" xmlns:v="urn:schemas-microsoft-com:vml" xmlns:pvml="urn:schemas-microsoft-com:office:powerpoint" xmlns:com="http://schemas.openxmlformats.org/drawingml/2006/compatibility" xmlns:p14="http://schemas.microsoft.com/office/powerpoint/2010/main" xmlns:p15="http://schemas.microsoft.com/office/powerpoint/2012/main" xmlns:ahyp="http://schemas.microsoft.com/office/drawing/2018/hyperlinkcolor" showMasterPhAnim="0" showMasterSp="0">
   <p:cSld>
     <p:spTree>
       <p:nvGrpSpPr>
-        <p:cNvPr id="78" name="Shape 78"/>
+        <p:cNvPr id="199" name="Shape 199"/>
         <p:cNvGrpSpPr/>
         <p:nvPr/>
       </p:nvGrpSpPr>
@@ -1352,7 +1346,7 @@
       </p:grpSpPr>
       <p:sp>
         <p:nvSpPr>
-          <p:cNvPr id="79" name="Google Shape;79;g3df342a180f_0_3:notes"/>
+          <p:cNvPr id="200" name="Google Shape;200;g3f584734f4e_0_0:notes"/>
           <p:cNvSpPr/>
           <p:nvPr>
             <p:ph idx="2" type="sldImg"/>
@@ -1387,7 +1381,7 @@
       </p:sp>
       <p:sp>
         <p:nvSpPr>
-          <p:cNvPr id="80" name="Google Shape;80;g3df342a180f_0_3:notes"/>
+          <p:cNvPr id="201" name="Google Shape;201;g3f584734f4e_0_0:notes"/>
           <p:cNvSpPr txBox="1"/>
           <p:nvPr>
             <p:ph idx="1" type="body"/>
@@ -1432,12 +1426,12 @@
 </p:notes>
 </file>
 
-<file path=ppt/notesSlides/notesSlide5.xml><?xml version="1.0" encoding="utf-8"?>
+<file path=ppt/notesSlides/notesSlide2.xml><?xml version="1.0" encoding="utf-8"?>
 <p:notes xmlns:a="http://schemas.openxmlformats.org/drawingml/2006/main" xmlns:r="http://schemas.openxmlformats.org/officeDocument/2006/relationships" xmlns:mc="http://schemas.openxmlformats.org/markup-compatibility/2006" xmlns:mv="urn:schemas-microsoft-com:mac:vml" xmlns:p="http://schemas.openxmlformats.org/presentationml/2006/main" xmlns:c="http://schemas.openxmlformats.org/drawingml/2006/chart" xmlns:dgm="http://schemas.openxmlformats.org/drawingml/2006/diagram" xmlns:o="urn:schemas-microsoft-com:office:office" xmlns:v="urn:schemas-microsoft-com:vml" xmlns:pvml="urn:schemas-microsoft-com:office:powerpoint" xmlns:com="http://schemas.openxmlformats.org/drawingml/2006/compatibility" xmlns:p14="http://schemas.microsoft.com/office/powerpoint/2010/main" xmlns:p15="http://schemas.microsoft.com/office/powerpoint/2012/main" xmlns:ahyp="http://schemas.microsoft.com/office/drawing/2018/hyperlinkcolor" showMasterPhAnim="0" showMasterSp="0">
   <p:cSld>
     <p:spTree>
       <p:nvGrpSpPr>
-        <p:cNvPr id="87" name="Shape 87"/>
+        <p:cNvPr id="69" name="Shape 69"/>
         <p:cNvGrpSpPr/>
         <p:nvPr/>
       </p:nvGrpSpPr>
@@ -1451,7 +1445,7 @@
       </p:grpSpPr>
       <p:sp>
         <p:nvSpPr>
-          <p:cNvPr id="88" name="Google Shape;88;g3cdb3e813f6_0_16:notes"/>
+          <p:cNvPr id="70" name="Google Shape;70;g3cdb3e813f6_0_1:notes"/>
           <p:cNvSpPr/>
           <p:nvPr>
             <p:ph idx="2" type="sldImg"/>
@@ -1486,7 +1480,7 @@
       </p:sp>
       <p:sp>
         <p:nvSpPr>
-          <p:cNvPr id="89" name="Google Shape;89;g3cdb3e813f6_0_16:notes"/>
+          <p:cNvPr id="71" name="Google Shape;71;g3cdb3e813f6_0_1:notes"/>
           <p:cNvSpPr txBox="1"/>
           <p:nvPr>
             <p:ph idx="1" type="body"/>
@@ -1531,12 +1525,12 @@
 </p:notes>
 </file>
 
-<file path=ppt/notesSlides/notesSlide6.xml><?xml version="1.0" encoding="utf-8"?>
+<file path=ppt/notesSlides/notesSlide3.xml><?xml version="1.0" encoding="utf-8"?>
 <p:notes xmlns:a="http://schemas.openxmlformats.org/drawingml/2006/main" xmlns:r="http://schemas.openxmlformats.org/officeDocument/2006/relationships" xmlns:mc="http://schemas.openxmlformats.org/markup-compatibility/2006" xmlns:mv="urn:schemas-microsoft-com:mac:vml" xmlns:p="http://schemas.openxmlformats.org/presentationml/2006/main" xmlns:c="http://schemas.openxmlformats.org/drawingml/2006/chart" xmlns:dgm="http://schemas.openxmlformats.org/drawingml/2006/diagram" xmlns:o="urn:schemas-microsoft-com:office:office" xmlns:v="urn:schemas-microsoft-com:vml" xmlns:pvml="urn:schemas-microsoft-com:office:powerpoint" xmlns:com="http://schemas.openxmlformats.org/drawingml/2006/compatibility" xmlns:p14="http://schemas.microsoft.com/office/powerpoint/2010/main" xmlns:p15="http://schemas.microsoft.com/office/powerpoint/2012/main" xmlns:ahyp="http://schemas.microsoft.com/office/drawing/2018/hyperlinkcolor" showMasterPhAnim="0" showMasterSp="0">
   <p:cSld>
     <p:spTree>
       <p:nvGrpSpPr>
-        <p:cNvPr id="93" name="Shape 93"/>
+        <p:cNvPr id="80" name="Shape 80"/>
         <p:cNvGrpSpPr/>
         <p:nvPr/>
       </p:nvGrpSpPr>
@@ -1550,7 +1544,7 @@
       </p:grpSpPr>
       <p:sp>
         <p:nvSpPr>
-          <p:cNvPr id="94" name="Google Shape;94;g395e832e9a1_0_1:notes"/>
+          <p:cNvPr id="81" name="Google Shape;81;g3f584734f4e_0_10:notes"/>
           <p:cNvSpPr/>
           <p:nvPr>
             <p:ph idx="2" type="sldImg"/>
@@ -1585,7 +1579,7 @@
       </p:sp>
       <p:sp>
         <p:nvSpPr>
-          <p:cNvPr id="95" name="Google Shape;95;g395e832e9a1_0_1:notes"/>
+          <p:cNvPr id="82" name="Google Shape;82;g3f584734f4e_0_10:notes"/>
           <p:cNvSpPr txBox="1"/>
           <p:nvPr>
             <p:ph idx="1" type="body"/>
@@ -1630,12 +1624,12 @@
 </p:notes>
 </file>
 
-<file path=ppt/notesSlides/notesSlide7.xml><?xml version="1.0" encoding="utf-8"?>
+<file path=ppt/notesSlides/notesSlide4.xml><?xml version="1.0" encoding="utf-8"?>
 <p:notes xmlns:a="http://schemas.openxmlformats.org/drawingml/2006/main" xmlns:r="http://schemas.openxmlformats.org/officeDocument/2006/relationships" xmlns:mc="http://schemas.openxmlformats.org/markup-compatibility/2006" xmlns:mv="urn:schemas-microsoft-com:mac:vml" xmlns:p="http://schemas.openxmlformats.org/presentationml/2006/main" xmlns:c="http://schemas.openxmlformats.org/drawingml/2006/chart" xmlns:dgm="http://schemas.openxmlformats.org/drawingml/2006/diagram" xmlns:o="urn:schemas-microsoft-com:office:office" xmlns:v="urn:schemas-microsoft-com:vml" xmlns:pvml="urn:schemas-microsoft-com:office:powerpoint" xmlns:com="http://schemas.openxmlformats.org/drawingml/2006/compatibility" xmlns:p14="http://schemas.microsoft.com/office/powerpoint/2010/main" xmlns:p15="http://schemas.microsoft.com/office/powerpoint/2012/main" xmlns:ahyp="http://schemas.microsoft.com/office/drawing/2018/hyperlinkcolor" showMasterPhAnim="0" showMasterSp="0">
   <p:cSld>
     <p:spTree>
       <p:nvGrpSpPr>
-        <p:cNvPr id="99" name="Shape 99"/>
+        <p:cNvPr id="91" name="Shape 91"/>
         <p:cNvGrpSpPr/>
         <p:nvPr/>
       </p:nvGrpSpPr>
@@ -1649,7 +1643,7 @@
       </p:grpSpPr>
       <p:sp>
         <p:nvSpPr>
-          <p:cNvPr id="100" name="Google Shape;100;g395e832e9a1_0_14:notes"/>
+          <p:cNvPr id="92" name="Google Shape;92;g3df342a180f_0_8:notes"/>
           <p:cNvSpPr/>
           <p:nvPr>
             <p:ph idx="2" type="sldImg"/>
@@ -1684,7 +1678,7 @@
       </p:sp>
       <p:sp>
         <p:nvSpPr>
-          <p:cNvPr id="101" name="Google Shape;101;g395e832e9a1_0_14:notes"/>
+          <p:cNvPr id="93" name="Google Shape;93;g3df342a180f_0_8:notes"/>
           <p:cNvSpPr txBox="1"/>
           <p:nvPr>
             <p:ph idx="1" type="body"/>
@@ -1729,12 +1723,12 @@
 </p:notes>
 </file>
 
-<file path=ppt/notesSlides/notesSlide8.xml><?xml version="1.0" encoding="utf-8"?>
+<file path=ppt/notesSlides/notesSlide5.xml><?xml version="1.0" encoding="utf-8"?>
 <p:notes xmlns:a="http://schemas.openxmlformats.org/drawingml/2006/main" xmlns:r="http://schemas.openxmlformats.org/officeDocument/2006/relationships" xmlns:mc="http://schemas.openxmlformats.org/markup-compatibility/2006" xmlns:mv="urn:schemas-microsoft-com:mac:vml" xmlns:p="http://schemas.openxmlformats.org/presentationml/2006/main" xmlns:c="http://schemas.openxmlformats.org/drawingml/2006/chart" xmlns:dgm="http://schemas.openxmlformats.org/drawingml/2006/diagram" xmlns:o="urn:schemas-microsoft-com:office:office" xmlns:v="urn:schemas-microsoft-com:vml" xmlns:pvml="urn:schemas-microsoft-com:office:powerpoint" xmlns:com="http://schemas.openxmlformats.org/drawingml/2006/compatibility" xmlns:p14="http://schemas.microsoft.com/office/powerpoint/2010/main" xmlns:p15="http://schemas.microsoft.com/office/powerpoint/2012/main" xmlns:ahyp="http://schemas.microsoft.com/office/drawing/2018/hyperlinkcolor" showMasterPhAnim="0" showMasterSp="0">
   <p:cSld>
     <p:spTree>
       <p:nvGrpSpPr>
-        <p:cNvPr id="107" name="Shape 107"/>
+        <p:cNvPr id="97" name="Shape 97"/>
         <p:cNvGrpSpPr/>
         <p:nvPr/>
       </p:nvGrpSpPr>
@@ -1748,7 +1742,7 @@
       </p:grpSpPr>
       <p:sp>
         <p:nvSpPr>
-          <p:cNvPr id="108" name="Google Shape;108;g395e832e9a1_0_7:notes"/>
+          <p:cNvPr id="98" name="Google Shape;98;g3df342a180f_0_3:notes"/>
           <p:cNvSpPr/>
           <p:nvPr>
             <p:ph idx="2" type="sldImg"/>
@@ -1783,7 +1777,7 @@
       </p:sp>
       <p:sp>
         <p:nvSpPr>
-          <p:cNvPr id="109" name="Google Shape;109;g395e832e9a1_0_7:notes"/>
+          <p:cNvPr id="99" name="Google Shape;99;g3df342a180f_0_3:notes"/>
           <p:cNvSpPr txBox="1"/>
           <p:nvPr>
             <p:ph idx="1" type="body"/>
@@ -1828,12 +1822,12 @@
 </p:notes>
 </file>
 
-<file path=ppt/notesSlides/notesSlide9.xml><?xml version="1.0" encoding="utf-8"?>
+<file path=ppt/notesSlides/notesSlide6.xml><?xml version="1.0" encoding="utf-8"?>
 <p:notes xmlns:a="http://schemas.openxmlformats.org/drawingml/2006/main" xmlns:r="http://schemas.openxmlformats.org/officeDocument/2006/relationships" xmlns:mc="http://schemas.openxmlformats.org/markup-compatibility/2006" xmlns:mv="urn:schemas-microsoft-com:mac:vml" xmlns:p="http://schemas.openxmlformats.org/presentationml/2006/main" xmlns:c="http://schemas.openxmlformats.org/drawingml/2006/chart" xmlns:dgm="http://schemas.openxmlformats.org/drawingml/2006/diagram" xmlns:o="urn:schemas-microsoft-com:office:office" xmlns:v="urn:schemas-microsoft-com:vml" xmlns:pvml="urn:schemas-microsoft-com:office:powerpoint" xmlns:com="http://schemas.openxmlformats.org/drawingml/2006/compatibility" xmlns:p14="http://schemas.microsoft.com/office/powerpoint/2010/main" xmlns:p15="http://schemas.microsoft.com/office/powerpoint/2012/main" xmlns:ahyp="http://schemas.microsoft.com/office/drawing/2018/hyperlinkcolor" showMasterPhAnim="0" showMasterSp="0">
   <p:cSld>
     <p:spTree>
       <p:nvGrpSpPr>
-        <p:cNvPr id="114" name="Shape 114"/>
+        <p:cNvPr id="106" name="Shape 106"/>
         <p:cNvGrpSpPr/>
         <p:nvPr/>
       </p:nvGrpSpPr>
@@ -1847,7 +1841,7 @@
       </p:grpSpPr>
       <p:sp>
         <p:nvSpPr>
-          <p:cNvPr id="115" name="Google Shape;115;g39631daccbb_0_0:notes"/>
+          <p:cNvPr id="107" name="Google Shape;107;g3cdb3e813f6_0_16:notes"/>
           <p:cNvSpPr/>
           <p:nvPr>
             <p:ph idx="2" type="sldImg"/>
@@ -1882,7 +1876,304 @@
       </p:sp>
       <p:sp>
         <p:nvSpPr>
-          <p:cNvPr id="116" name="Google Shape;116;g39631daccbb_0_0:notes"/>
+          <p:cNvPr id="108" name="Google Shape;108;g3cdb3e813f6_0_16:notes"/>
+          <p:cNvSpPr txBox="1"/>
+          <p:nvPr>
+            <p:ph idx="1" type="body"/>
+          </p:nvPr>
+        </p:nvSpPr>
+        <p:spPr>
+          <a:xfrm>
+            <a:off x="685800" y="4343400"/>
+            <a:ext cx="5486400" cy="4114800"/>
+          </a:xfrm>
+          <a:prstGeom prst="rect">
+            <a:avLst/>
+          </a:prstGeom>
+        </p:spPr>
+        <p:txBody>
+          <a:bodyPr anchorCtr="0" anchor="t" bIns="91425" lIns="91425" spcFirstLastPara="1" rIns="91425" wrap="square" tIns="91425">
+            <a:noAutofit/>
+          </a:bodyPr>
+          <a:lstStyle/>
+          <a:p>
+            <a:pPr indent="0" lvl="0" marL="0" rtl="0" algn="l">
+              <a:spcBef>
+                <a:spcPts val="0"/>
+              </a:spcBef>
+              <a:spcAft>
+                <a:spcPts val="0"/>
+              </a:spcAft>
+              <a:buNone/>
+            </a:pPr>
+            <a:r>
+              <a:t/>
+            </a:r>
+            <a:endParaRPr/>
+          </a:p>
+        </p:txBody>
+      </p:sp>
+    </p:spTree>
+  </p:cSld>
+  <p:clrMapOvr>
+    <a:masterClrMapping/>
+  </p:clrMapOvr>
+</p:notes>
+</file>
+
+<file path=ppt/notesSlides/notesSlide7.xml><?xml version="1.0" encoding="utf-8"?>
+<p:notes xmlns:a="http://schemas.openxmlformats.org/drawingml/2006/main" xmlns:r="http://schemas.openxmlformats.org/officeDocument/2006/relationships" xmlns:mc="http://schemas.openxmlformats.org/markup-compatibility/2006" xmlns:mv="urn:schemas-microsoft-com:mac:vml" xmlns:p="http://schemas.openxmlformats.org/presentationml/2006/main" xmlns:c="http://schemas.openxmlformats.org/drawingml/2006/chart" xmlns:dgm="http://schemas.openxmlformats.org/drawingml/2006/diagram" xmlns:o="urn:schemas-microsoft-com:office:office" xmlns:v="urn:schemas-microsoft-com:vml" xmlns:pvml="urn:schemas-microsoft-com:office:powerpoint" xmlns:com="http://schemas.openxmlformats.org/drawingml/2006/compatibility" xmlns:p14="http://schemas.microsoft.com/office/powerpoint/2010/main" xmlns:p15="http://schemas.microsoft.com/office/powerpoint/2012/main" xmlns:ahyp="http://schemas.microsoft.com/office/drawing/2018/hyperlinkcolor" showMasterPhAnim="0" showMasterSp="0">
+  <p:cSld>
+    <p:spTree>
+      <p:nvGrpSpPr>
+        <p:cNvPr id="112" name="Shape 112"/>
+        <p:cNvGrpSpPr/>
+        <p:nvPr/>
+      </p:nvGrpSpPr>
+      <p:grpSpPr>
+        <a:xfrm>
+          <a:off x="0" y="0"/>
+          <a:ext cx="0" cy="0"/>
+          <a:chOff x="0" y="0"/>
+          <a:chExt cx="0" cy="0"/>
+        </a:xfrm>
+      </p:grpSpPr>
+      <p:sp>
+        <p:nvSpPr>
+          <p:cNvPr id="113" name="Google Shape;113;g395e832e9a1_0_1:notes"/>
+          <p:cNvSpPr/>
+          <p:nvPr>
+            <p:ph idx="2" type="sldImg"/>
+          </p:nvPr>
+        </p:nvSpPr>
+        <p:spPr>
+          <a:xfrm>
+            <a:off x="381300" y="685800"/>
+            <a:ext cx="6096000" cy="3429000"/>
+          </a:xfrm>
+          <a:custGeom>
+            <a:rect b="b" l="l" r="r" t="t"/>
+            <a:pathLst>
+              <a:path extrusionOk="0" h="120000" w="120000">
+                <a:moveTo>
+                  <a:pt x="0" y="0"/>
+                </a:moveTo>
+                <a:lnTo>
+                  <a:pt x="120000" y="0"/>
+                </a:lnTo>
+                <a:lnTo>
+                  <a:pt x="120000" y="120000"/>
+                </a:lnTo>
+                <a:lnTo>
+                  <a:pt x="0" y="120000"/>
+                </a:lnTo>
+                <a:close/>
+              </a:path>
+            </a:pathLst>
+          </a:custGeom>
+        </p:spPr>
+      </p:sp>
+      <p:sp>
+        <p:nvSpPr>
+          <p:cNvPr id="114" name="Google Shape;114;g395e832e9a1_0_1:notes"/>
+          <p:cNvSpPr txBox="1"/>
+          <p:nvPr>
+            <p:ph idx="1" type="body"/>
+          </p:nvPr>
+        </p:nvSpPr>
+        <p:spPr>
+          <a:xfrm>
+            <a:off x="685800" y="4343400"/>
+            <a:ext cx="5486400" cy="4114800"/>
+          </a:xfrm>
+          <a:prstGeom prst="rect">
+            <a:avLst/>
+          </a:prstGeom>
+        </p:spPr>
+        <p:txBody>
+          <a:bodyPr anchorCtr="0" anchor="t" bIns="91425" lIns="91425" spcFirstLastPara="1" rIns="91425" wrap="square" tIns="91425">
+            <a:noAutofit/>
+          </a:bodyPr>
+          <a:lstStyle/>
+          <a:p>
+            <a:pPr indent="0" lvl="0" marL="0" rtl="0" algn="l">
+              <a:spcBef>
+                <a:spcPts val="0"/>
+              </a:spcBef>
+              <a:spcAft>
+                <a:spcPts val="0"/>
+              </a:spcAft>
+              <a:buNone/>
+            </a:pPr>
+            <a:r>
+              <a:t/>
+            </a:r>
+            <a:endParaRPr/>
+          </a:p>
+        </p:txBody>
+      </p:sp>
+    </p:spTree>
+  </p:cSld>
+  <p:clrMapOvr>
+    <a:masterClrMapping/>
+  </p:clrMapOvr>
+</p:notes>
+</file>
+
+<file path=ppt/notesSlides/notesSlide8.xml><?xml version="1.0" encoding="utf-8"?>
+<p:notes xmlns:a="http://schemas.openxmlformats.org/drawingml/2006/main" xmlns:r="http://schemas.openxmlformats.org/officeDocument/2006/relationships" xmlns:mc="http://schemas.openxmlformats.org/markup-compatibility/2006" xmlns:mv="urn:schemas-microsoft-com:mac:vml" xmlns:p="http://schemas.openxmlformats.org/presentationml/2006/main" xmlns:c="http://schemas.openxmlformats.org/drawingml/2006/chart" xmlns:dgm="http://schemas.openxmlformats.org/drawingml/2006/diagram" xmlns:o="urn:schemas-microsoft-com:office:office" xmlns:v="urn:schemas-microsoft-com:vml" xmlns:pvml="urn:schemas-microsoft-com:office:powerpoint" xmlns:com="http://schemas.openxmlformats.org/drawingml/2006/compatibility" xmlns:p14="http://schemas.microsoft.com/office/powerpoint/2010/main" xmlns:p15="http://schemas.microsoft.com/office/powerpoint/2012/main" xmlns:ahyp="http://schemas.microsoft.com/office/drawing/2018/hyperlinkcolor" showMasterPhAnim="0" showMasterSp="0">
+  <p:cSld>
+    <p:spTree>
+      <p:nvGrpSpPr>
+        <p:cNvPr id="118" name="Shape 118"/>
+        <p:cNvGrpSpPr/>
+        <p:nvPr/>
+      </p:nvGrpSpPr>
+      <p:grpSpPr>
+        <a:xfrm>
+          <a:off x="0" y="0"/>
+          <a:ext cx="0" cy="0"/>
+          <a:chOff x="0" y="0"/>
+          <a:chExt cx="0" cy="0"/>
+        </a:xfrm>
+      </p:grpSpPr>
+      <p:sp>
+        <p:nvSpPr>
+          <p:cNvPr id="119" name="Google Shape;119;g395e832e9a1_0_14:notes"/>
+          <p:cNvSpPr/>
+          <p:nvPr>
+            <p:ph idx="2" type="sldImg"/>
+          </p:nvPr>
+        </p:nvSpPr>
+        <p:spPr>
+          <a:xfrm>
+            <a:off x="381300" y="685800"/>
+            <a:ext cx="6096000" cy="3429000"/>
+          </a:xfrm>
+          <a:custGeom>
+            <a:rect b="b" l="l" r="r" t="t"/>
+            <a:pathLst>
+              <a:path extrusionOk="0" h="120000" w="120000">
+                <a:moveTo>
+                  <a:pt x="0" y="0"/>
+                </a:moveTo>
+                <a:lnTo>
+                  <a:pt x="120000" y="0"/>
+                </a:lnTo>
+                <a:lnTo>
+                  <a:pt x="120000" y="120000"/>
+                </a:lnTo>
+                <a:lnTo>
+                  <a:pt x="0" y="120000"/>
+                </a:lnTo>
+                <a:close/>
+              </a:path>
+            </a:pathLst>
+          </a:custGeom>
+        </p:spPr>
+      </p:sp>
+      <p:sp>
+        <p:nvSpPr>
+          <p:cNvPr id="120" name="Google Shape;120;g395e832e9a1_0_14:notes"/>
+          <p:cNvSpPr txBox="1"/>
+          <p:nvPr>
+            <p:ph idx="1" type="body"/>
+          </p:nvPr>
+        </p:nvSpPr>
+        <p:spPr>
+          <a:xfrm>
+            <a:off x="685800" y="4343400"/>
+            <a:ext cx="5486400" cy="4114800"/>
+          </a:xfrm>
+          <a:prstGeom prst="rect">
+            <a:avLst/>
+          </a:prstGeom>
+        </p:spPr>
+        <p:txBody>
+          <a:bodyPr anchorCtr="0" anchor="t" bIns="91425" lIns="91425" spcFirstLastPara="1" rIns="91425" wrap="square" tIns="91425">
+            <a:noAutofit/>
+          </a:bodyPr>
+          <a:lstStyle/>
+          <a:p>
+            <a:pPr indent="0" lvl="0" marL="0" rtl="0" algn="l">
+              <a:spcBef>
+                <a:spcPts val="0"/>
+              </a:spcBef>
+              <a:spcAft>
+                <a:spcPts val="0"/>
+              </a:spcAft>
+              <a:buNone/>
+            </a:pPr>
+            <a:r>
+              <a:t/>
+            </a:r>
+            <a:endParaRPr/>
+          </a:p>
+        </p:txBody>
+      </p:sp>
+    </p:spTree>
+  </p:cSld>
+  <p:clrMapOvr>
+    <a:masterClrMapping/>
+  </p:clrMapOvr>
+</p:notes>
+</file>
+
+<file path=ppt/notesSlides/notesSlide9.xml><?xml version="1.0" encoding="utf-8"?>
+<p:notes xmlns:a="http://schemas.openxmlformats.org/drawingml/2006/main" xmlns:r="http://schemas.openxmlformats.org/officeDocument/2006/relationships" xmlns:mc="http://schemas.openxmlformats.org/markup-compatibility/2006" xmlns:mv="urn:schemas-microsoft-com:mac:vml" xmlns:p="http://schemas.openxmlformats.org/presentationml/2006/main" xmlns:c="http://schemas.openxmlformats.org/drawingml/2006/chart" xmlns:dgm="http://schemas.openxmlformats.org/drawingml/2006/diagram" xmlns:o="urn:schemas-microsoft-com:office:office" xmlns:v="urn:schemas-microsoft-com:vml" xmlns:pvml="urn:schemas-microsoft-com:office:powerpoint" xmlns:com="http://schemas.openxmlformats.org/drawingml/2006/compatibility" xmlns:p14="http://schemas.microsoft.com/office/powerpoint/2010/main" xmlns:p15="http://schemas.microsoft.com/office/powerpoint/2012/main" xmlns:ahyp="http://schemas.microsoft.com/office/drawing/2018/hyperlinkcolor" showMasterPhAnim="0" showMasterSp="0">
+  <p:cSld>
+    <p:spTree>
+      <p:nvGrpSpPr>
+        <p:cNvPr id="126" name="Shape 126"/>
+        <p:cNvGrpSpPr/>
+        <p:nvPr/>
+      </p:nvGrpSpPr>
+      <p:grpSpPr>
+        <a:xfrm>
+          <a:off x="0" y="0"/>
+          <a:ext cx="0" cy="0"/>
+          <a:chOff x="0" y="0"/>
+          <a:chExt cx="0" cy="0"/>
+        </a:xfrm>
+      </p:grpSpPr>
+      <p:sp>
+        <p:nvSpPr>
+          <p:cNvPr id="127" name="Google Shape;127;g395e832e9a1_0_7:notes"/>
+          <p:cNvSpPr/>
+          <p:nvPr>
+            <p:ph idx="2" type="sldImg"/>
+          </p:nvPr>
+        </p:nvSpPr>
+        <p:spPr>
+          <a:xfrm>
+            <a:off x="381300" y="685800"/>
+            <a:ext cx="6096000" cy="3429000"/>
+          </a:xfrm>
+          <a:custGeom>
+            <a:rect b="b" l="l" r="r" t="t"/>
+            <a:pathLst>
+              <a:path extrusionOk="0" h="120000" w="120000">
+                <a:moveTo>
+                  <a:pt x="0" y="0"/>
+                </a:moveTo>
+                <a:lnTo>
+                  <a:pt x="120000" y="0"/>
+                </a:lnTo>
+                <a:lnTo>
+                  <a:pt x="120000" y="120000"/>
+                </a:lnTo>
+                <a:lnTo>
+                  <a:pt x="0" y="120000"/>
+                </a:lnTo>
+                <a:close/>
+              </a:path>
+            </a:pathLst>
+          </a:custGeom>
+        </p:spPr>
+      </p:sp>
+      <p:sp>
+        <p:nvSpPr>
+          <p:cNvPr id="128" name="Google Shape;128;g395e832e9a1_0_7:notes"/>
           <p:cNvSpPr txBox="1"/>
           <p:nvPr>
             <p:ph idx="1" type="body"/>
@@ -6595,7 +6886,7 @@
       </p:grpSpPr>
       <p:pic>
         <p:nvPicPr>
-          <p:cNvPr id="54" name="Google Shape;54;p13"/>
+          <p:cNvPr id="54" name="Google Shape;54;p13" title="b0ed0c90-99a1-4f6a-8e12-c30cd3a3dcdd.png"/>
           <p:cNvPicPr preferRelativeResize="0"/>
           <p:nvPr/>
         </p:nvPicPr>
@@ -6609,8 +6900,8 @@
         </p:blipFill>
         <p:spPr>
           <a:xfrm>
-            <a:off x="152400" y="152400"/>
-            <a:ext cx="8839200" cy="4167867"/>
+            <a:off x="0" y="0"/>
+            <a:ext cx="8839200" cy="4165600"/>
           </a:xfrm>
           <a:prstGeom prst="rect">
             <a:avLst/>
@@ -6621,6 +6912,584 @@
           </a:ln>
         </p:spPr>
       </p:pic>
+      <p:sp>
+        <p:nvSpPr>
+          <p:cNvPr id="55" name="Google Shape;55;p13"/>
+          <p:cNvSpPr txBox="1"/>
+          <p:nvPr/>
+        </p:nvSpPr>
+        <p:spPr>
+          <a:xfrm>
+            <a:off x="5953855" y="1020000"/>
+            <a:ext cx="330600" cy="184800"/>
+          </a:xfrm>
+          <a:prstGeom prst="rect">
+            <a:avLst/>
+          </a:prstGeom>
+          <a:solidFill>
+            <a:schemeClr val="lt1"/>
+          </a:solidFill>
+          <a:ln>
+            <a:noFill/>
+          </a:ln>
+        </p:spPr>
+        <p:txBody>
+          <a:bodyPr anchorCtr="0" anchor="t" bIns="0" lIns="0" spcFirstLastPara="1" rIns="0" wrap="square" tIns="0">
+            <a:spAutoFit/>
+          </a:bodyPr>
+          <a:lstStyle/>
+          <a:p>
+            <a:pPr indent="0" lvl="0" marL="0" rtl="0" algn="l">
+              <a:spcBef>
+                <a:spcPts val="0"/>
+              </a:spcBef>
+              <a:spcAft>
+                <a:spcPts val="0"/>
+              </a:spcAft>
+              <a:buNone/>
+            </a:pPr>
+            <a:r>
+              <a:rPr lang="es-419" sz="600">
+                <a:solidFill>
+                  <a:schemeClr val="dk2"/>
+                </a:solidFill>
+                <a:highlight>
+                  <a:schemeClr val="lt1"/>
+                </a:highlight>
+              </a:rPr>
+              <a:t>Fracción</a:t>
+            </a:r>
+            <a:endParaRPr sz="600">
+              <a:solidFill>
+                <a:schemeClr val="dk2"/>
+              </a:solidFill>
+              <a:highlight>
+                <a:schemeClr val="lt1"/>
+              </a:highlight>
+            </a:endParaRPr>
+          </a:p>
+          <a:p>
+            <a:pPr indent="0" lvl="0" marL="0" rtl="0" algn="l">
+              <a:spcBef>
+                <a:spcPts val="0"/>
+              </a:spcBef>
+              <a:spcAft>
+                <a:spcPts val="0"/>
+              </a:spcAft>
+              <a:buNone/>
+            </a:pPr>
+            <a:r>
+              <a:rPr lang="es-419" sz="600">
+                <a:solidFill>
+                  <a:schemeClr val="dk2"/>
+                </a:solidFill>
+                <a:highlight>
+                  <a:schemeClr val="lt1"/>
+                </a:highlight>
+              </a:rPr>
+              <a:t>celular</a:t>
+            </a:r>
+            <a:endParaRPr sz="600">
+              <a:solidFill>
+                <a:schemeClr val="dk2"/>
+              </a:solidFill>
+              <a:highlight>
+                <a:schemeClr val="lt1"/>
+              </a:highlight>
+            </a:endParaRPr>
+          </a:p>
+        </p:txBody>
+      </p:sp>
+      <p:sp>
+        <p:nvSpPr>
+          <p:cNvPr id="56" name="Google Shape;56;p13"/>
+          <p:cNvSpPr txBox="1"/>
+          <p:nvPr/>
+        </p:nvSpPr>
+        <p:spPr>
+          <a:xfrm>
+            <a:off x="7483289" y="3757775"/>
+            <a:ext cx="635400" cy="92400"/>
+          </a:xfrm>
+          <a:prstGeom prst="rect">
+            <a:avLst/>
+          </a:prstGeom>
+          <a:solidFill>
+            <a:schemeClr val="lt1"/>
+          </a:solidFill>
+          <a:ln>
+            <a:noFill/>
+          </a:ln>
+        </p:spPr>
+        <p:txBody>
+          <a:bodyPr anchorCtr="0" anchor="t" bIns="0" lIns="0" spcFirstLastPara="1" rIns="0" wrap="square" tIns="0">
+            <a:spAutoFit/>
+          </a:bodyPr>
+          <a:lstStyle/>
+          <a:p>
+            <a:pPr indent="0" lvl="0" marL="0" rtl="0" algn="l">
+              <a:spcBef>
+                <a:spcPts val="0"/>
+              </a:spcBef>
+              <a:spcAft>
+                <a:spcPts val="0"/>
+              </a:spcAft>
+              <a:buNone/>
+            </a:pPr>
+            <a:r>
+              <a:rPr b="1" lang="es-419" sz="600">
+                <a:solidFill>
+                  <a:schemeClr val="dk2"/>
+                </a:solidFill>
+                <a:highlight>
+                  <a:schemeClr val="lt1"/>
+                </a:highlight>
+              </a:rPr>
+              <a:t>Fracción celular</a:t>
+            </a:r>
+            <a:endParaRPr b="1" sz="600">
+              <a:solidFill>
+                <a:schemeClr val="dk2"/>
+              </a:solidFill>
+              <a:highlight>
+                <a:schemeClr val="lt1"/>
+              </a:highlight>
+            </a:endParaRPr>
+          </a:p>
+        </p:txBody>
+      </p:sp>
+      <p:sp>
+        <p:nvSpPr>
+          <p:cNvPr id="57" name="Google Shape;57;p13"/>
+          <p:cNvSpPr txBox="1"/>
+          <p:nvPr/>
+        </p:nvSpPr>
+        <p:spPr>
+          <a:xfrm>
+            <a:off x="216950" y="4109200"/>
+            <a:ext cx="8381400" cy="861900"/>
+          </a:xfrm>
+          <a:prstGeom prst="rect">
+            <a:avLst/>
+          </a:prstGeom>
+          <a:noFill/>
+          <a:ln>
+            <a:noFill/>
+          </a:ln>
+        </p:spPr>
+        <p:txBody>
+          <a:bodyPr anchorCtr="0" anchor="t" bIns="91425" lIns="91425" spcFirstLastPara="1" rIns="91425" wrap="square" tIns="91425">
+            <a:spAutoFit/>
+          </a:bodyPr>
+          <a:lstStyle/>
+          <a:p>
+            <a:pPr indent="0" lvl="0" marL="0" rtl="0" algn="l">
+              <a:spcBef>
+                <a:spcPts val="0"/>
+              </a:spcBef>
+              <a:spcAft>
+                <a:spcPts val="0"/>
+              </a:spcAft>
+              <a:buNone/>
+            </a:pPr>
+            <a:r>
+              <a:rPr b="1" lang="es-419" sz="1100">
+                <a:solidFill>
+                  <a:schemeClr val="dk1"/>
+                </a:solidFill>
+              </a:rPr>
+              <a:t>Fig. M1. Esquema general del pipeline experimental.</a:t>
+            </a:r>
+            <a:r>
+              <a:rPr lang="es-419" sz="1100">
+                <a:solidFill>
+                  <a:schemeClr val="dk1"/>
+                </a:solidFill>
+              </a:rPr>
+              <a:t> La </a:t>
+            </a:r>
+            <a:r>
+              <a:rPr i="1" lang="es-419" sz="1100">
+                <a:solidFill>
+                  <a:schemeClr val="dk1"/>
+                </a:solidFill>
+              </a:rPr>
+              <a:t>library</a:t>
+            </a:r>
+            <a:r>
+              <a:rPr lang="es-419" sz="1100">
+                <a:solidFill>
+                  <a:schemeClr val="dk1"/>
+                </a:solidFill>
+              </a:rPr>
+              <a:t> de promotores se clonó río arriba de EGFP y se integró en células HEK293T mediante RMCE. Las células se separaron por citometría en siete fracciones según fluorescencia, y la abundancia de cada promotor en cada fracción se cuantificó por Amplicon-seq, permitiendo reconstruir su distribución de expresión y estimar media y ruido transcripcional. </a:t>
+            </a:r>
+            <a:endParaRPr sz="1800">
+              <a:solidFill>
+                <a:schemeClr val="dk2"/>
+              </a:solidFill>
+            </a:endParaRPr>
+          </a:p>
+        </p:txBody>
+      </p:sp>
+      <p:sp>
+        <p:nvSpPr>
+          <p:cNvPr id="58" name="Google Shape;58;p13"/>
+          <p:cNvSpPr/>
+          <p:nvPr/>
+        </p:nvSpPr>
+        <p:spPr>
+          <a:xfrm>
+            <a:off x="4120311" y="2213979"/>
+            <a:ext cx="232200" cy="519900"/>
+          </a:xfrm>
+          <a:prstGeom prst="rect">
+            <a:avLst/>
+          </a:prstGeom>
+          <a:solidFill>
+            <a:schemeClr val="lt1"/>
+          </a:solidFill>
+          <a:ln cap="flat" cmpd="sng" w="4675">
+            <a:solidFill>
+              <a:schemeClr val="lt1"/>
+            </a:solidFill>
+            <a:prstDash val="solid"/>
+            <a:round/>
+            <a:headEnd len="sm" w="sm" type="none"/>
+            <a:tailEnd len="sm" w="sm" type="none"/>
+          </a:ln>
+        </p:spPr>
+        <p:txBody>
+          <a:bodyPr anchorCtr="0" anchor="ctr" bIns="45050" lIns="45050" spcFirstLastPara="1" rIns="45050" wrap="square" tIns="45050">
+            <a:noAutofit/>
+          </a:bodyPr>
+          <a:lstStyle/>
+          <a:p>
+            <a:pPr indent="0" lvl="0" marL="0" rtl="0" algn="ctr">
+              <a:spcBef>
+                <a:spcPts val="0"/>
+              </a:spcBef>
+              <a:spcAft>
+                <a:spcPts val="0"/>
+              </a:spcAft>
+              <a:buNone/>
+            </a:pPr>
+            <a:r>
+              <a:t/>
+            </a:r>
+            <a:endParaRPr sz="690">
+              <a:solidFill>
+                <a:srgbClr val="FFFFFF"/>
+              </a:solidFill>
+              <a:highlight>
+                <a:schemeClr val="lt1"/>
+              </a:highlight>
+            </a:endParaRPr>
+          </a:p>
+        </p:txBody>
+      </p:sp>
+      <p:sp>
+        <p:nvSpPr>
+          <p:cNvPr id="59" name="Google Shape;59;p13"/>
+          <p:cNvSpPr/>
+          <p:nvPr/>
+        </p:nvSpPr>
+        <p:spPr>
+          <a:xfrm>
+            <a:off x="3891800" y="988725"/>
+            <a:ext cx="2355000" cy="1225200"/>
+          </a:xfrm>
+          <a:prstGeom prst="rect">
+            <a:avLst/>
+          </a:prstGeom>
+          <a:solidFill>
+            <a:schemeClr val="lt1"/>
+          </a:solidFill>
+          <a:ln cap="flat" cmpd="sng" w="9525">
+            <a:solidFill>
+              <a:schemeClr val="lt1"/>
+            </a:solidFill>
+            <a:prstDash val="solid"/>
+            <a:round/>
+            <a:headEnd len="sm" w="sm" type="none"/>
+            <a:tailEnd len="sm" w="sm" type="none"/>
+          </a:ln>
+        </p:spPr>
+        <p:txBody>
+          <a:bodyPr anchorCtr="0" anchor="ctr" bIns="91425" lIns="91425" spcFirstLastPara="1" rIns="91425" wrap="square" tIns="91425">
+            <a:noAutofit/>
+          </a:bodyPr>
+          <a:lstStyle/>
+          <a:p>
+            <a:pPr indent="0" lvl="0" marL="0" rtl="0" algn="ctr">
+              <a:spcBef>
+                <a:spcPts val="0"/>
+              </a:spcBef>
+              <a:spcAft>
+                <a:spcPts val="0"/>
+              </a:spcAft>
+              <a:buNone/>
+            </a:pPr>
+            <a:r>
+              <a:t/>
+            </a:r>
+            <a:endParaRPr/>
+          </a:p>
+        </p:txBody>
+      </p:sp>
+      <p:grpSp>
+        <p:nvGrpSpPr>
+          <p:cNvPr id="60" name="Google Shape;60;p13"/>
+          <p:cNvGrpSpPr/>
+          <p:nvPr/>
+        </p:nvGrpSpPr>
+        <p:grpSpPr>
+          <a:xfrm>
+            <a:off x="4295011" y="932225"/>
+            <a:ext cx="1732451" cy="1303650"/>
+            <a:chOff x="3690303" y="1648551"/>
+            <a:chExt cx="3784297" cy="2847019"/>
+          </a:xfrm>
+        </p:grpSpPr>
+        <p:pic>
+          <p:nvPicPr>
+            <p:cNvPr id="61" name="Google Shape;61;p13"/>
+            <p:cNvPicPr preferRelativeResize="0"/>
+            <p:nvPr/>
+          </p:nvPicPr>
+          <p:blipFill rotWithShape="1">
+            <a:blip r:embed="rId4">
+              <a:alphaModFix/>
+            </a:blip>
+            <a:srcRect b="10385" l="7083" r="36614" t="1001"/>
+            <a:stretch/>
+          </p:blipFill>
+          <p:spPr>
+            <a:xfrm>
+              <a:off x="3690303" y="1648551"/>
+              <a:ext cx="3022881" cy="2847019"/>
+            </a:xfrm>
+            <a:prstGeom prst="rect">
+              <a:avLst/>
+            </a:prstGeom>
+            <a:noFill/>
+            <a:ln>
+              <a:noFill/>
+            </a:ln>
+          </p:spPr>
+        </p:pic>
+        <p:pic>
+          <p:nvPicPr>
+            <p:cNvPr id="62" name="Google Shape;62;p13"/>
+            <p:cNvPicPr preferRelativeResize="0"/>
+            <p:nvPr/>
+          </p:nvPicPr>
+          <p:blipFill rotWithShape="1">
+            <a:blip r:embed="rId4">
+              <a:alphaModFix/>
+            </a:blip>
+            <a:srcRect b="10385" l="75216" r="9076" t="1001"/>
+            <a:stretch/>
+          </p:blipFill>
+          <p:spPr>
+            <a:xfrm>
+              <a:off x="6631219" y="1648552"/>
+              <a:ext cx="843381" cy="2847019"/>
+            </a:xfrm>
+            <a:prstGeom prst="rect">
+              <a:avLst/>
+            </a:prstGeom>
+            <a:noFill/>
+            <a:ln>
+              <a:noFill/>
+            </a:ln>
+          </p:spPr>
+        </p:pic>
+      </p:grpSp>
+      <p:pic>
+        <p:nvPicPr>
+          <p:cNvPr id="63" name="Google Shape;63;p13"/>
+          <p:cNvPicPr preferRelativeResize="0"/>
+          <p:nvPr/>
+        </p:nvPicPr>
+        <p:blipFill rotWithShape="1">
+          <a:blip r:embed="rId4">
+            <a:alphaModFix/>
+          </a:blip>
+          <a:srcRect b="38424" l="615" r="95941" t="30972"/>
+          <a:stretch/>
+        </p:blipFill>
+        <p:spPr>
+          <a:xfrm>
+            <a:off x="4189324" y="1298175"/>
+            <a:ext cx="97725" cy="519900"/>
+          </a:xfrm>
+          <a:prstGeom prst="rect">
+            <a:avLst/>
+          </a:prstGeom>
+          <a:noFill/>
+          <a:ln>
+            <a:noFill/>
+          </a:ln>
+        </p:spPr>
+      </p:pic>
+      <p:pic>
+        <p:nvPicPr>
+          <p:cNvPr id="64" name="Google Shape;64;p13"/>
+          <p:cNvPicPr preferRelativeResize="0"/>
+          <p:nvPr/>
+        </p:nvPicPr>
+        <p:blipFill rotWithShape="1">
+          <a:blip r:embed="rId4">
+            <a:alphaModFix/>
+          </a:blip>
+          <a:srcRect b="29266" l="77745" r="9667" t="25114"/>
+          <a:stretch/>
+        </p:blipFill>
+        <p:spPr>
+          <a:xfrm>
+            <a:off x="5697425" y="1173025"/>
+            <a:ext cx="397401" cy="861900"/>
+          </a:xfrm>
+          <a:prstGeom prst="rect">
+            <a:avLst/>
+          </a:prstGeom>
+          <a:noFill/>
+          <a:ln>
+            <a:noFill/>
+          </a:ln>
+        </p:spPr>
+      </p:pic>
+      <p:pic>
+        <p:nvPicPr>
+          <p:cNvPr id="65" name="Google Shape;65;p13"/>
+          <p:cNvPicPr preferRelativeResize="0"/>
+          <p:nvPr/>
+        </p:nvPicPr>
+        <p:blipFill rotWithShape="1">
+          <a:blip r:embed="rId5">
+            <a:alphaModFix/>
+          </a:blip>
+          <a:srcRect b="0" l="367" r="81635" t="0"/>
+          <a:stretch/>
+        </p:blipFill>
+        <p:spPr>
+          <a:xfrm>
+            <a:off x="4160115" y="2620875"/>
+            <a:ext cx="286475" cy="902375"/>
+          </a:xfrm>
+          <a:prstGeom prst="rect">
+            <a:avLst/>
+          </a:prstGeom>
+          <a:noFill/>
+          <a:ln>
+            <a:noFill/>
+          </a:ln>
+        </p:spPr>
+      </p:pic>
+      <p:sp>
+        <p:nvSpPr>
+          <p:cNvPr id="66" name="Google Shape;66;p13"/>
+          <p:cNvSpPr/>
+          <p:nvPr/>
+        </p:nvSpPr>
+        <p:spPr>
+          <a:xfrm>
+            <a:off x="5863600" y="1445687"/>
+            <a:ext cx="330600" cy="479100"/>
+          </a:xfrm>
+          <a:prstGeom prst="rect">
+            <a:avLst/>
+          </a:prstGeom>
+          <a:solidFill>
+            <a:schemeClr val="lt1"/>
+          </a:solidFill>
+          <a:ln cap="flat" cmpd="sng" w="9525">
+            <a:solidFill>
+              <a:schemeClr val="lt1"/>
+            </a:solidFill>
+            <a:prstDash val="solid"/>
+            <a:round/>
+            <a:headEnd len="sm" w="sm" type="none"/>
+            <a:tailEnd len="sm" w="sm" type="none"/>
+          </a:ln>
+        </p:spPr>
+        <p:txBody>
+          <a:bodyPr anchorCtr="0" anchor="ctr" bIns="91425" lIns="91425" spcFirstLastPara="1" rIns="91425" wrap="square" tIns="91425">
+            <a:noAutofit/>
+          </a:bodyPr>
+          <a:lstStyle/>
+          <a:p>
+            <a:pPr indent="0" lvl="0" marL="0" rtl="0" algn="ctr">
+              <a:spcBef>
+                <a:spcPts val="0"/>
+              </a:spcBef>
+              <a:spcAft>
+                <a:spcPts val="0"/>
+              </a:spcAft>
+              <a:buNone/>
+            </a:pPr>
+            <a:r>
+              <a:t/>
+            </a:r>
+            <a:endParaRPr/>
+          </a:p>
+        </p:txBody>
+      </p:sp>
+      <p:pic>
+        <p:nvPicPr>
+          <p:cNvPr descr="podes hacer que los colores de los circulos sean en esta escala, en orden:  &quot;#97e196&quot; &quot;#6cc08b&quot; &quot;#4c9b82&quot; &quot;#217a79&quot; &quot;#105965&quot; &quot;#074050&quot;" id="67" name="Google Shape;67;p13"/>
+          <p:cNvPicPr preferRelativeResize="0"/>
+          <p:nvPr/>
+        </p:nvPicPr>
+        <p:blipFill>
+          <a:blip r:embed="rId6">
+            <a:alphaModFix/>
+          </a:blip>
+          <a:stretch>
+            <a:fillRect/>
+          </a:stretch>
+        </p:blipFill>
+        <p:spPr>
+          <a:xfrm>
+            <a:off x="4441098" y="2624331"/>
+            <a:ext cx="1593144" cy="902375"/>
+          </a:xfrm>
+          <a:prstGeom prst="rect">
+            <a:avLst/>
+          </a:prstGeom>
+          <a:noFill/>
+          <a:ln>
+            <a:noFill/>
+          </a:ln>
+        </p:spPr>
+      </p:pic>
+      <p:cxnSp>
+        <p:nvCxnSpPr>
+          <p:cNvPr id="68" name="Google Shape;68;p13"/>
+          <p:cNvCxnSpPr/>
+          <p:nvPr/>
+        </p:nvCxnSpPr>
+        <p:spPr>
+          <a:xfrm>
+            <a:off x="4370975" y="2685700"/>
+            <a:ext cx="724500" cy="0"/>
+          </a:xfrm>
+          <a:prstGeom prst="straightConnector1">
+            <a:avLst/>
+          </a:prstGeom>
+          <a:noFill/>
+          <a:ln cap="flat" cmpd="sng" w="9525">
+            <a:solidFill>
+              <a:schemeClr val="dk2"/>
+            </a:solidFill>
+            <a:prstDash val="solid"/>
+            <a:round/>
+            <a:headEnd len="med" w="med" type="none"/>
+            <a:tailEnd len="med" w="med" type="none"/>
+          </a:ln>
+        </p:spPr>
+      </p:cxnSp>
     </p:spTree>
   </p:cSld>
   <p:clrMapOvr>
@@ -6634,7 +7503,7 @@
   <p:cSld>
     <p:spTree>
       <p:nvGrpSpPr>
-        <p:cNvPr id="151" name="Shape 151"/>
+        <p:cNvPr id="136" name="Shape 136"/>
         <p:cNvGrpSpPr/>
         <p:nvPr/>
       </p:nvGrpSpPr>
@@ -6646,16 +7515,171 @@
           <a:chExt cx="0" cy="0"/>
         </a:xfrm>
       </p:grpSpPr>
+      <p:cxnSp>
+        <p:nvCxnSpPr>
+          <p:cNvPr id="137" name="Google Shape;137;p22"/>
+          <p:cNvCxnSpPr/>
+          <p:nvPr/>
+        </p:nvCxnSpPr>
+        <p:spPr>
+          <a:xfrm>
+            <a:off x="1576363" y="667625"/>
+            <a:ext cx="3766200" cy="0"/>
+          </a:xfrm>
+          <a:prstGeom prst="straightConnector1">
+            <a:avLst/>
+          </a:prstGeom>
+          <a:noFill/>
+          <a:ln cap="flat" cmpd="sng" w="9525">
+            <a:solidFill>
+              <a:schemeClr val="dk2"/>
+            </a:solidFill>
+            <a:prstDash val="solid"/>
+            <a:round/>
+            <a:headEnd len="med" w="med" type="none"/>
+            <a:tailEnd len="med" w="med" type="none"/>
+          </a:ln>
+        </p:spPr>
+      </p:cxnSp>
       <p:sp>
         <p:nvSpPr>
-          <p:cNvPr id="152" name="Google Shape;152;p22"/>
+          <p:cNvPr id="138" name="Google Shape;138;p22"/>
+          <p:cNvSpPr/>
+          <p:nvPr/>
+        </p:nvSpPr>
+        <p:spPr>
+          <a:xfrm>
+            <a:off x="1971263" y="561725"/>
+            <a:ext cx="2952000" cy="163800"/>
+          </a:xfrm>
+          <a:prstGeom prst="roundRect">
+            <a:avLst>
+              <a:gd fmla="val 16667" name="adj"/>
+            </a:avLst>
+          </a:prstGeom>
+          <a:solidFill>
+            <a:srgbClr val="A8D7CF"/>
+          </a:solidFill>
+          <a:ln cap="flat" cmpd="sng" w="9525">
+            <a:solidFill>
+              <a:schemeClr val="dk2"/>
+            </a:solidFill>
+            <a:prstDash val="solid"/>
+            <a:round/>
+            <a:headEnd len="sm" w="sm" type="none"/>
+            <a:tailEnd len="sm" w="sm" type="none"/>
+          </a:ln>
+        </p:spPr>
+        <p:txBody>
+          <a:bodyPr anchorCtr="0" anchor="ctr" bIns="91425" lIns="91425" spcFirstLastPara="1" rIns="91425" wrap="square" tIns="91425">
+            <a:noAutofit/>
+          </a:bodyPr>
+          <a:lstStyle/>
+          <a:p>
+            <a:pPr indent="0" lvl="0" marL="0" rtl="0" algn="ctr">
+              <a:spcBef>
+                <a:spcPts val="0"/>
+              </a:spcBef>
+              <a:spcAft>
+                <a:spcPts val="0"/>
+              </a:spcAft>
+              <a:buNone/>
+            </a:pPr>
+            <a:r>
+              <a:t/>
+            </a:r>
+            <a:endParaRPr/>
+          </a:p>
+        </p:txBody>
+      </p:sp>
+      <p:cxnSp>
+        <p:nvCxnSpPr>
+          <p:cNvPr id="139" name="Google Shape;139;p22"/>
+          <p:cNvCxnSpPr/>
+          <p:nvPr/>
+        </p:nvCxnSpPr>
+        <p:spPr>
+          <a:xfrm>
+            <a:off x="4398549" y="388350"/>
+            <a:ext cx="0" cy="183000"/>
+          </a:xfrm>
+          <a:prstGeom prst="straightConnector1">
+            <a:avLst/>
+          </a:prstGeom>
+          <a:noFill/>
+          <a:ln cap="flat" cmpd="sng" w="9525">
+            <a:solidFill>
+              <a:schemeClr val="dk2"/>
+            </a:solidFill>
+            <a:prstDash val="solid"/>
+            <a:round/>
+            <a:headEnd len="med" w="med" type="none"/>
+            <a:tailEnd len="med" w="med" type="none"/>
+          </a:ln>
+        </p:spPr>
+      </p:cxnSp>
+      <p:cxnSp>
+        <p:nvCxnSpPr>
+          <p:cNvPr id="140" name="Google Shape;140;p22"/>
+          <p:cNvCxnSpPr/>
+          <p:nvPr/>
+        </p:nvCxnSpPr>
+        <p:spPr>
+          <a:xfrm>
+            <a:off x="4398527" y="388343"/>
+            <a:ext cx="154200" cy="0"/>
+          </a:xfrm>
+          <a:prstGeom prst="straightConnector1">
+            <a:avLst/>
+          </a:prstGeom>
+          <a:noFill/>
+          <a:ln cap="flat" cmpd="sng" w="9525">
+            <a:solidFill>
+              <a:schemeClr val="dk2"/>
+            </a:solidFill>
+            <a:prstDash val="solid"/>
+            <a:round/>
+            <a:headEnd len="med" w="med" type="none"/>
+            <a:tailEnd len="med" w="med" type="triangle"/>
+          </a:ln>
+        </p:spPr>
+      </p:cxnSp>
+      <p:cxnSp>
+        <p:nvCxnSpPr>
+          <p:cNvPr id="141" name="Google Shape;141;p22"/>
+          <p:cNvCxnSpPr/>
+          <p:nvPr/>
+        </p:nvCxnSpPr>
+        <p:spPr>
+          <a:xfrm>
+            <a:off x="4398549" y="542450"/>
+            <a:ext cx="0" cy="192600"/>
+          </a:xfrm>
+          <a:prstGeom prst="straightConnector1">
+            <a:avLst/>
+          </a:prstGeom>
+          <a:noFill/>
+          <a:ln cap="flat" cmpd="sng" w="9525">
+            <a:solidFill>
+              <a:schemeClr val="dk2"/>
+            </a:solidFill>
+            <a:prstDash val="dash"/>
+            <a:round/>
+            <a:headEnd len="med" w="med" type="none"/>
+            <a:tailEnd len="med" w="med" type="none"/>
+          </a:ln>
+        </p:spPr>
+      </p:cxnSp>
+      <p:sp>
+        <p:nvSpPr>
+          <p:cNvPr id="142" name="Google Shape;142;p22"/>
           <p:cNvSpPr txBox="1"/>
           <p:nvPr/>
         </p:nvSpPr>
         <p:spPr>
           <a:xfrm>
-            <a:off x="5338075" y="418025"/>
-            <a:ext cx="3822000" cy="1569900"/>
+            <a:off x="4427420" y="638716"/>
+            <a:ext cx="529800" cy="323100"/>
           </a:xfrm>
           <a:prstGeom prst="rect">
             <a:avLst/>
@@ -6681,27 +7705,45 @@
               <a:buNone/>
             </a:pPr>
             <a:r>
-              <a:rPr b="1" lang="es-419" sz="1000">
+              <a:rPr lang="es-419" sz="900">
                 <a:solidFill>
                   <a:schemeClr val="dk2"/>
                 </a:solidFill>
               </a:rPr>
-              <a:t>Frecuencia de elementos de secuencia típicos de promotores en la </a:t>
-            </a:r>
-            <a:r>
-              <a:rPr b="1" i="1" lang="es-419" sz="1000">
-                <a:solidFill>
-                  <a:schemeClr val="dk2"/>
-                </a:solidFill>
-              </a:rPr>
-              <a:t>library.</a:t>
-            </a:r>
-            <a:endParaRPr b="1" i="1" sz="1000">
+              <a:t>16pb</a:t>
+            </a:r>
+            <a:endParaRPr sz="900">
               <a:solidFill>
                 <a:schemeClr val="dk2"/>
               </a:solidFill>
             </a:endParaRPr>
           </a:p>
+        </p:txBody>
+      </p:sp>
+      <p:sp>
+        <p:nvSpPr>
+          <p:cNvPr id="143" name="Google Shape;143;p22"/>
+          <p:cNvSpPr txBox="1"/>
+          <p:nvPr/>
+        </p:nvSpPr>
+        <p:spPr>
+          <a:xfrm>
+            <a:off x="3250600" y="638828"/>
+            <a:ext cx="529800" cy="323100"/>
+          </a:xfrm>
+          <a:prstGeom prst="rect">
+            <a:avLst/>
+          </a:prstGeom>
+          <a:noFill/>
+          <a:ln>
+            <a:noFill/>
+          </a:ln>
+        </p:spPr>
+        <p:txBody>
+          <a:bodyPr anchorCtr="0" anchor="t" bIns="91425" lIns="91425" spcFirstLastPara="1" rIns="91425" wrap="square" tIns="91425">
+            <a:spAutoFit/>
+          </a:bodyPr>
+          <a:lstStyle/>
           <a:p>
             <a:pPr indent="0" lvl="0" marL="0" rtl="0" algn="l">
               <a:spcBef>
@@ -6713,36 +7755,786 @@
               <a:buNone/>
             </a:pPr>
             <a:r>
-              <a:rPr b="1" lang="es-419" sz="1000">
+              <a:rPr lang="es-419" sz="900">
                 <a:solidFill>
                   <a:schemeClr val="dk2"/>
                 </a:solidFill>
               </a:rPr>
-              <a:t>A,B,D- Frecuencia, respecto</a:t>
-            </a:r>
+              <a:t>235</a:t>
+            </a:r>
+            <a:r>
+              <a:rPr lang="es-419" sz="900">
+                <a:solidFill>
+                  <a:schemeClr val="dk2"/>
+                </a:solidFill>
+              </a:rPr>
+              <a:t>pb</a:t>
+            </a:r>
+            <a:endParaRPr sz="900">
+              <a:solidFill>
+                <a:schemeClr val="dk2"/>
+              </a:solidFill>
+            </a:endParaRPr>
+          </a:p>
+        </p:txBody>
+      </p:sp>
+      <p:sp>
+        <p:nvSpPr>
+          <p:cNvPr id="144" name="Google Shape;144;p22"/>
+          <p:cNvSpPr txBox="1"/>
+          <p:nvPr/>
+        </p:nvSpPr>
+        <p:spPr>
+          <a:xfrm>
+            <a:off x="1624513" y="725475"/>
+            <a:ext cx="722400" cy="461700"/>
+          </a:xfrm>
+          <a:prstGeom prst="rect">
+            <a:avLst/>
+          </a:prstGeom>
+          <a:noFill/>
+          <a:ln>
+            <a:noFill/>
+          </a:ln>
+        </p:spPr>
+        <p:txBody>
+          <a:bodyPr anchorCtr="0" anchor="t" bIns="91425" lIns="91425" spcFirstLastPara="1" rIns="91425" wrap="square" tIns="91425">
+            <a:spAutoFit/>
+          </a:bodyPr>
+          <a:lstStyle/>
+          <a:p>
+            <a:pPr indent="0" lvl="0" marL="0" rtl="0" algn="l">
+              <a:spcBef>
+                <a:spcPts val="0"/>
+              </a:spcBef>
+              <a:spcAft>
+                <a:spcPts val="0"/>
+              </a:spcAft>
+              <a:buNone/>
+            </a:pPr>
+            <a:r>
+              <a:t/>
+            </a:r>
+            <a:endParaRPr sz="1800">
+              <a:solidFill>
+                <a:schemeClr val="dk2"/>
+              </a:solidFill>
+            </a:endParaRPr>
+          </a:p>
+        </p:txBody>
+      </p:sp>
+      <p:sp>
+        <p:nvSpPr>
+          <p:cNvPr id="145" name="Google Shape;145;p22"/>
+          <p:cNvSpPr txBox="1"/>
+          <p:nvPr/>
+        </p:nvSpPr>
+        <p:spPr>
+          <a:xfrm>
+            <a:off x="1537822" y="600199"/>
+            <a:ext cx="529800" cy="323100"/>
+          </a:xfrm>
+          <a:prstGeom prst="rect">
+            <a:avLst/>
+          </a:prstGeom>
+          <a:noFill/>
+          <a:ln>
+            <a:noFill/>
+          </a:ln>
+        </p:spPr>
+        <p:txBody>
+          <a:bodyPr anchorCtr="0" anchor="t" bIns="91425" lIns="91425" spcFirstLastPara="1" rIns="91425" wrap="square" tIns="91425">
+            <a:spAutoFit/>
+          </a:bodyPr>
+          <a:lstStyle/>
+          <a:p>
+            <a:pPr indent="0" lvl="0" marL="0" rtl="0" algn="l">
+              <a:spcBef>
+                <a:spcPts val="0"/>
+              </a:spcBef>
+              <a:spcAft>
+                <a:spcPts val="0"/>
+              </a:spcAft>
+              <a:buNone/>
+            </a:pPr>
+            <a:r>
+              <a:rPr lang="es-419" sz="900">
+                <a:solidFill>
+                  <a:schemeClr val="dk2"/>
+                </a:solidFill>
+              </a:rPr>
+              <a:t>24pb</a:t>
+            </a:r>
+            <a:endParaRPr sz="900">
+              <a:solidFill>
+                <a:schemeClr val="dk2"/>
+              </a:solidFill>
+            </a:endParaRPr>
+          </a:p>
+        </p:txBody>
+      </p:sp>
+      <p:sp>
+        <p:nvSpPr>
+          <p:cNvPr id="146" name="Google Shape;146;p22"/>
+          <p:cNvSpPr txBox="1"/>
+          <p:nvPr/>
+        </p:nvSpPr>
+        <p:spPr>
+          <a:xfrm>
+            <a:off x="4915218" y="609831"/>
+            <a:ext cx="529800" cy="323100"/>
+          </a:xfrm>
+          <a:prstGeom prst="rect">
+            <a:avLst/>
+          </a:prstGeom>
+          <a:noFill/>
+          <a:ln>
+            <a:noFill/>
+          </a:ln>
+        </p:spPr>
+        <p:txBody>
+          <a:bodyPr anchorCtr="0" anchor="t" bIns="91425" lIns="91425" spcFirstLastPara="1" rIns="91425" wrap="square" tIns="91425">
+            <a:spAutoFit/>
+          </a:bodyPr>
+          <a:lstStyle/>
+          <a:p>
+            <a:pPr indent="0" lvl="0" marL="0" rtl="0" algn="l">
+              <a:spcBef>
+                <a:spcPts val="0"/>
+              </a:spcBef>
+              <a:spcAft>
+                <a:spcPts val="0"/>
+              </a:spcAft>
+              <a:buNone/>
+            </a:pPr>
+            <a:r>
+              <a:rPr lang="es-419" sz="900">
+                <a:solidFill>
+                  <a:schemeClr val="dk2"/>
+                </a:solidFill>
+              </a:rPr>
+              <a:t>24pb</a:t>
+            </a:r>
+            <a:endParaRPr sz="900">
+              <a:solidFill>
+                <a:schemeClr val="dk2"/>
+              </a:solidFill>
+            </a:endParaRPr>
+          </a:p>
+        </p:txBody>
+      </p:sp>
+      <p:cxnSp>
+        <p:nvCxnSpPr>
+          <p:cNvPr id="147" name="Google Shape;147;p22"/>
+          <p:cNvCxnSpPr/>
+          <p:nvPr/>
+        </p:nvCxnSpPr>
+        <p:spPr>
+          <a:xfrm>
+            <a:off x="1605270" y="1455742"/>
+            <a:ext cx="3766200" cy="0"/>
+          </a:xfrm>
+          <a:prstGeom prst="straightConnector1">
+            <a:avLst/>
+          </a:prstGeom>
+          <a:noFill/>
+          <a:ln cap="flat" cmpd="sng" w="9525">
+            <a:solidFill>
+              <a:schemeClr val="dk2"/>
+            </a:solidFill>
+            <a:prstDash val="solid"/>
+            <a:round/>
+            <a:headEnd len="med" w="med" type="none"/>
+            <a:tailEnd len="med" w="med" type="none"/>
+          </a:ln>
+        </p:spPr>
+      </p:cxnSp>
+      <p:sp>
+        <p:nvSpPr>
+          <p:cNvPr id="148" name="Google Shape;148;p22"/>
+          <p:cNvSpPr/>
+          <p:nvPr/>
+        </p:nvSpPr>
+        <p:spPr>
+          <a:xfrm>
+            <a:off x="2000170" y="1349842"/>
+            <a:ext cx="2952000" cy="163800"/>
+          </a:xfrm>
+          <a:prstGeom prst="roundRect">
+            <a:avLst>
+              <a:gd fmla="val 16667" name="adj"/>
+            </a:avLst>
+          </a:prstGeom>
+          <a:solidFill>
+            <a:srgbClr val="A8D7CF"/>
+          </a:solidFill>
+          <a:ln cap="flat" cmpd="sng" w="9525">
+            <a:solidFill>
+              <a:schemeClr val="dk2"/>
+            </a:solidFill>
+            <a:prstDash val="solid"/>
+            <a:round/>
+            <a:headEnd len="sm" w="sm" type="none"/>
+            <a:tailEnd len="sm" w="sm" type="none"/>
+          </a:ln>
+        </p:spPr>
+        <p:txBody>
+          <a:bodyPr anchorCtr="0" anchor="ctr" bIns="91425" lIns="91425" spcFirstLastPara="1" rIns="91425" wrap="square" tIns="91425">
+            <a:noAutofit/>
+          </a:bodyPr>
+          <a:lstStyle/>
+          <a:p>
+            <a:pPr indent="0" lvl="0" marL="0" rtl="0" algn="ctr">
+              <a:spcBef>
+                <a:spcPts val="0"/>
+              </a:spcBef>
+              <a:spcAft>
+                <a:spcPts val="0"/>
+              </a:spcAft>
+              <a:buNone/>
+            </a:pPr>
+            <a:r>
+              <a:t/>
+            </a:r>
+            <a:endParaRPr/>
+          </a:p>
+        </p:txBody>
+      </p:sp>
+      <p:cxnSp>
+        <p:nvCxnSpPr>
+          <p:cNvPr id="149" name="Google Shape;149;p22"/>
+          <p:cNvCxnSpPr/>
+          <p:nvPr/>
+        </p:nvCxnSpPr>
+        <p:spPr>
+          <a:xfrm>
+            <a:off x="4427457" y="1176467"/>
+            <a:ext cx="0" cy="183000"/>
+          </a:xfrm>
+          <a:prstGeom prst="straightConnector1">
+            <a:avLst/>
+          </a:prstGeom>
+          <a:noFill/>
+          <a:ln cap="flat" cmpd="sng" w="9525">
+            <a:solidFill>
+              <a:schemeClr val="dk2"/>
+            </a:solidFill>
+            <a:prstDash val="solid"/>
+            <a:round/>
+            <a:headEnd len="med" w="med" type="none"/>
+            <a:tailEnd len="med" w="med" type="none"/>
+          </a:ln>
+        </p:spPr>
+      </p:cxnSp>
+      <p:cxnSp>
+        <p:nvCxnSpPr>
+          <p:cNvPr id="150" name="Google Shape;150;p22"/>
+          <p:cNvCxnSpPr/>
+          <p:nvPr/>
+        </p:nvCxnSpPr>
+        <p:spPr>
+          <a:xfrm>
+            <a:off x="4427435" y="1176460"/>
+            <a:ext cx="154200" cy="0"/>
+          </a:xfrm>
+          <a:prstGeom prst="straightConnector1">
+            <a:avLst/>
+          </a:prstGeom>
+          <a:noFill/>
+          <a:ln cap="flat" cmpd="sng" w="9525">
+            <a:solidFill>
+              <a:schemeClr val="dk2"/>
+            </a:solidFill>
+            <a:prstDash val="solid"/>
+            <a:round/>
+            <a:headEnd len="med" w="med" type="none"/>
+            <a:tailEnd len="med" w="med" type="triangle"/>
+          </a:ln>
+        </p:spPr>
+      </p:cxnSp>
+      <p:cxnSp>
+        <p:nvCxnSpPr>
+          <p:cNvPr id="151" name="Google Shape;151;p22"/>
+          <p:cNvCxnSpPr/>
+          <p:nvPr/>
+        </p:nvCxnSpPr>
+        <p:spPr>
+          <a:xfrm>
+            <a:off x="4427457" y="1330567"/>
+            <a:ext cx="0" cy="192600"/>
+          </a:xfrm>
+          <a:prstGeom prst="straightConnector1">
+            <a:avLst/>
+          </a:prstGeom>
+          <a:noFill/>
+          <a:ln cap="flat" cmpd="sng" w="9525">
+            <a:solidFill>
+              <a:schemeClr val="dk2"/>
+            </a:solidFill>
+            <a:prstDash val="dash"/>
+            <a:round/>
+            <a:headEnd len="med" w="med" type="none"/>
+            <a:tailEnd len="med" w="med" type="none"/>
+          </a:ln>
+        </p:spPr>
+      </p:cxnSp>
+      <p:sp>
+        <p:nvSpPr>
+          <p:cNvPr id="152" name="Google Shape;152;p22"/>
+          <p:cNvSpPr txBox="1"/>
+          <p:nvPr/>
+        </p:nvSpPr>
+        <p:spPr>
+          <a:xfrm>
+            <a:off x="4128839" y="1426833"/>
+            <a:ext cx="529800" cy="323100"/>
+          </a:xfrm>
+          <a:prstGeom prst="rect">
+            <a:avLst/>
+          </a:prstGeom>
+          <a:noFill/>
+          <a:ln>
+            <a:noFill/>
+          </a:ln>
+        </p:spPr>
+        <p:txBody>
+          <a:bodyPr anchorCtr="0" anchor="t" bIns="91425" lIns="91425" spcFirstLastPara="1" rIns="91425" wrap="square" tIns="91425">
+            <a:spAutoFit/>
+          </a:bodyPr>
+          <a:lstStyle/>
+          <a:p>
+            <a:pPr indent="0" lvl="0" marL="0" rtl="0" algn="l">
+              <a:spcBef>
+                <a:spcPts val="0"/>
+              </a:spcBef>
+              <a:spcAft>
+                <a:spcPts val="0"/>
+              </a:spcAft>
+              <a:buNone/>
+            </a:pPr>
+            <a:r>
+              <a:rPr lang="es-419" sz="900">
+                <a:solidFill>
+                  <a:schemeClr val="dk2"/>
+                </a:solidFill>
+              </a:rPr>
+              <a:t>100pb</a:t>
+            </a:r>
+            <a:endParaRPr sz="900">
+              <a:solidFill>
+                <a:schemeClr val="dk2"/>
+              </a:solidFill>
+            </a:endParaRPr>
+          </a:p>
+        </p:txBody>
+      </p:sp>
+      <p:sp>
+        <p:nvSpPr>
+          <p:cNvPr id="153" name="Google Shape;153;p22"/>
+          <p:cNvSpPr txBox="1"/>
+          <p:nvPr/>
+        </p:nvSpPr>
+        <p:spPr>
+          <a:xfrm>
+            <a:off x="2557106" y="1426945"/>
+            <a:ext cx="529800" cy="323100"/>
+          </a:xfrm>
+          <a:prstGeom prst="rect">
+            <a:avLst/>
+          </a:prstGeom>
+          <a:noFill/>
+          <a:ln>
+            <a:noFill/>
+          </a:ln>
+        </p:spPr>
+        <p:txBody>
+          <a:bodyPr anchorCtr="0" anchor="t" bIns="91425" lIns="91425" spcFirstLastPara="1" rIns="91425" wrap="square" tIns="91425">
+            <a:spAutoFit/>
+          </a:bodyPr>
+          <a:lstStyle/>
+          <a:p>
+            <a:pPr indent="0" lvl="0" marL="0" rtl="0" algn="l">
+              <a:spcBef>
+                <a:spcPts val="0"/>
+              </a:spcBef>
+              <a:spcAft>
+                <a:spcPts val="0"/>
+              </a:spcAft>
+              <a:buNone/>
+            </a:pPr>
+            <a:r>
+              <a:rPr lang="es-419" sz="900">
+                <a:solidFill>
+                  <a:schemeClr val="dk2"/>
+                </a:solidFill>
+              </a:rPr>
+              <a:t>152</a:t>
+            </a:r>
+            <a:r>
+              <a:rPr lang="es-419" sz="900">
+                <a:solidFill>
+                  <a:schemeClr val="dk2"/>
+                </a:solidFill>
+              </a:rPr>
+              <a:t>pb</a:t>
+            </a:r>
+            <a:endParaRPr sz="900">
+              <a:solidFill>
+                <a:schemeClr val="dk2"/>
+              </a:solidFill>
+            </a:endParaRPr>
+          </a:p>
+        </p:txBody>
+      </p:sp>
+      <p:sp>
+        <p:nvSpPr>
+          <p:cNvPr id="154" name="Google Shape;154;p22"/>
+          <p:cNvSpPr txBox="1"/>
+          <p:nvPr/>
+        </p:nvSpPr>
+        <p:spPr>
+          <a:xfrm>
+            <a:off x="1653420" y="1513592"/>
+            <a:ext cx="722400" cy="461700"/>
+          </a:xfrm>
+          <a:prstGeom prst="rect">
+            <a:avLst/>
+          </a:prstGeom>
+          <a:noFill/>
+          <a:ln>
+            <a:noFill/>
+          </a:ln>
+        </p:spPr>
+        <p:txBody>
+          <a:bodyPr anchorCtr="0" anchor="t" bIns="91425" lIns="91425" spcFirstLastPara="1" rIns="91425" wrap="square" tIns="91425">
+            <a:spAutoFit/>
+          </a:bodyPr>
+          <a:lstStyle/>
+          <a:p>
+            <a:pPr indent="0" lvl="0" marL="0" rtl="0" algn="l">
+              <a:spcBef>
+                <a:spcPts val="0"/>
+              </a:spcBef>
+              <a:spcAft>
+                <a:spcPts val="0"/>
+              </a:spcAft>
+              <a:buNone/>
+            </a:pPr>
+            <a:r>
+              <a:t/>
+            </a:r>
+            <a:endParaRPr sz="1800">
+              <a:solidFill>
+                <a:schemeClr val="dk2"/>
+              </a:solidFill>
+            </a:endParaRPr>
+          </a:p>
+        </p:txBody>
+      </p:sp>
+      <p:sp>
+        <p:nvSpPr>
+          <p:cNvPr id="155" name="Google Shape;155;p22"/>
+          <p:cNvSpPr txBox="1"/>
+          <p:nvPr/>
+        </p:nvSpPr>
+        <p:spPr>
+          <a:xfrm>
+            <a:off x="1566730" y="1388317"/>
+            <a:ext cx="529800" cy="323100"/>
+          </a:xfrm>
+          <a:prstGeom prst="rect">
+            <a:avLst/>
+          </a:prstGeom>
+          <a:noFill/>
+          <a:ln>
+            <a:noFill/>
+          </a:ln>
+        </p:spPr>
+        <p:txBody>
+          <a:bodyPr anchorCtr="0" anchor="t" bIns="91425" lIns="91425" spcFirstLastPara="1" rIns="91425" wrap="square" tIns="91425">
+            <a:spAutoFit/>
+          </a:bodyPr>
+          <a:lstStyle/>
+          <a:p>
+            <a:pPr indent="0" lvl="0" marL="0" rtl="0" algn="l">
+              <a:spcBef>
+                <a:spcPts val="0"/>
+              </a:spcBef>
+              <a:spcAft>
+                <a:spcPts val="0"/>
+              </a:spcAft>
+              <a:buNone/>
+            </a:pPr>
+            <a:r>
+              <a:rPr lang="es-419" sz="900">
+                <a:solidFill>
+                  <a:schemeClr val="dk2"/>
+                </a:solidFill>
+              </a:rPr>
+              <a:t>24pb</a:t>
+            </a:r>
+            <a:endParaRPr sz="900">
+              <a:solidFill>
+                <a:schemeClr val="dk2"/>
+              </a:solidFill>
+            </a:endParaRPr>
+          </a:p>
+        </p:txBody>
+      </p:sp>
+      <p:sp>
+        <p:nvSpPr>
+          <p:cNvPr id="156" name="Google Shape;156;p22"/>
+          <p:cNvSpPr txBox="1"/>
+          <p:nvPr/>
+        </p:nvSpPr>
+        <p:spPr>
+          <a:xfrm>
+            <a:off x="4944126" y="1397949"/>
+            <a:ext cx="529800" cy="323100"/>
+          </a:xfrm>
+          <a:prstGeom prst="rect">
+            <a:avLst/>
+          </a:prstGeom>
+          <a:noFill/>
+          <a:ln>
+            <a:noFill/>
+          </a:ln>
+        </p:spPr>
+        <p:txBody>
+          <a:bodyPr anchorCtr="0" anchor="t" bIns="91425" lIns="91425" spcFirstLastPara="1" rIns="91425" wrap="square" tIns="91425">
+            <a:spAutoFit/>
+          </a:bodyPr>
+          <a:lstStyle/>
+          <a:p>
+            <a:pPr indent="0" lvl="0" marL="0" rtl="0" algn="l">
+              <a:spcBef>
+                <a:spcPts val="0"/>
+              </a:spcBef>
+              <a:spcAft>
+                <a:spcPts val="0"/>
+              </a:spcAft>
+              <a:buNone/>
+            </a:pPr>
+            <a:r>
+              <a:rPr lang="es-419" sz="900">
+                <a:solidFill>
+                  <a:schemeClr val="dk2"/>
+                </a:solidFill>
+              </a:rPr>
+              <a:t>24pb</a:t>
+            </a:r>
+            <a:endParaRPr sz="900">
+              <a:solidFill>
+                <a:schemeClr val="dk2"/>
+              </a:solidFill>
+            </a:endParaRPr>
+          </a:p>
+        </p:txBody>
+      </p:sp>
+      <p:sp>
+        <p:nvSpPr>
+          <p:cNvPr id="157" name="Google Shape;157;p22"/>
+          <p:cNvSpPr/>
+          <p:nvPr/>
+        </p:nvSpPr>
+        <p:spPr>
+          <a:xfrm>
+            <a:off x="3656863" y="1351557"/>
+            <a:ext cx="1300500" cy="163800"/>
+          </a:xfrm>
+          <a:prstGeom prst="roundRect">
+            <a:avLst>
+              <a:gd fmla="val 16667" name="adj"/>
+            </a:avLst>
+          </a:prstGeom>
+          <a:solidFill>
+            <a:srgbClr val="358AA9"/>
+          </a:solidFill>
+          <a:ln cap="flat" cmpd="sng" w="9525">
+            <a:solidFill>
+              <a:schemeClr val="dk2"/>
+            </a:solidFill>
+            <a:prstDash val="solid"/>
+            <a:round/>
+            <a:headEnd len="sm" w="sm" type="none"/>
+            <a:tailEnd len="sm" w="sm" type="none"/>
+          </a:ln>
+        </p:spPr>
+        <p:txBody>
+          <a:bodyPr anchorCtr="0" anchor="ctr" bIns="91425" lIns="91425" spcFirstLastPara="1" rIns="91425" wrap="square" tIns="91425">
+            <a:noAutofit/>
+          </a:bodyPr>
+          <a:lstStyle/>
+          <a:p>
+            <a:pPr indent="0" lvl="0" marL="0" rtl="0" algn="ctr">
+              <a:spcBef>
+                <a:spcPts val="0"/>
+              </a:spcBef>
+              <a:spcAft>
+                <a:spcPts val="0"/>
+              </a:spcAft>
+              <a:buNone/>
+            </a:pPr>
+            <a:r>
+              <a:t/>
+            </a:r>
+            <a:endParaRPr>
+              <a:highlight>
+                <a:srgbClr val="666666"/>
+              </a:highlight>
+            </a:endParaRPr>
+          </a:p>
+        </p:txBody>
+      </p:sp>
+      <p:sp>
+        <p:nvSpPr>
+          <p:cNvPr id="158" name="Google Shape;158;p22"/>
+          <p:cNvSpPr txBox="1"/>
+          <p:nvPr/>
+        </p:nvSpPr>
+        <p:spPr>
+          <a:xfrm>
+            <a:off x="5517591" y="509102"/>
+            <a:ext cx="1918200" cy="369300"/>
+          </a:xfrm>
+          <a:prstGeom prst="rect">
+            <a:avLst/>
+          </a:prstGeom>
+          <a:noFill/>
+          <a:ln>
+            <a:noFill/>
+          </a:ln>
+        </p:spPr>
+        <p:txBody>
+          <a:bodyPr anchorCtr="0" anchor="t" bIns="91425" lIns="91425" spcFirstLastPara="1" rIns="91425" wrap="square" tIns="91425">
+            <a:spAutoFit/>
+          </a:bodyPr>
+          <a:lstStyle/>
+          <a:p>
+            <a:pPr indent="0" lvl="0" marL="0" rtl="0" algn="l">
+              <a:spcBef>
+                <a:spcPts val="0"/>
+              </a:spcBef>
+              <a:spcAft>
+                <a:spcPts val="0"/>
+              </a:spcAft>
+              <a:buNone/>
+            </a:pPr>
+            <a:r>
+              <a:rPr lang="es-419" sz="1200">
+                <a:solidFill>
+                  <a:schemeClr val="dk2"/>
+                </a:solidFill>
+              </a:rPr>
+              <a:t>Promotor EPD (n=20851)</a:t>
+            </a:r>
+            <a:endParaRPr sz="1200">
+              <a:solidFill>
+                <a:schemeClr val="dk2"/>
+              </a:solidFill>
+            </a:endParaRPr>
+          </a:p>
+        </p:txBody>
+      </p:sp>
+      <p:sp>
+        <p:nvSpPr>
+          <p:cNvPr id="159" name="Google Shape;159;p22"/>
+          <p:cNvSpPr txBox="1"/>
+          <p:nvPr/>
+        </p:nvSpPr>
+        <p:spPr>
+          <a:xfrm>
+            <a:off x="5517591" y="1259827"/>
+            <a:ext cx="1918200" cy="369300"/>
+          </a:xfrm>
+          <a:prstGeom prst="rect">
+            <a:avLst/>
+          </a:prstGeom>
+          <a:noFill/>
+          <a:ln>
+            <a:noFill/>
+          </a:ln>
+        </p:spPr>
+        <p:txBody>
+          <a:bodyPr anchorCtr="0" anchor="t" bIns="91425" lIns="91425" spcFirstLastPara="1" rIns="91425" wrap="square" tIns="91425">
+            <a:spAutoFit/>
+          </a:bodyPr>
+          <a:lstStyle/>
+          <a:p>
+            <a:pPr indent="0" lvl="0" marL="0" rtl="0" algn="l">
+              <a:spcBef>
+                <a:spcPts val="0"/>
+              </a:spcBef>
+              <a:spcAft>
+                <a:spcPts val="0"/>
+              </a:spcAft>
+              <a:buNone/>
+            </a:pPr>
+            <a:r>
+              <a:rPr lang="es-419" sz="1200">
+                <a:solidFill>
+                  <a:schemeClr val="dk2"/>
+                </a:solidFill>
+              </a:rPr>
+              <a:t>Enhancer</a:t>
+            </a:r>
+            <a:r>
+              <a:rPr lang="es-419" sz="1200">
+                <a:solidFill>
+                  <a:schemeClr val="dk2"/>
+                </a:solidFill>
+              </a:rPr>
+              <a:t> (n=3000)</a:t>
+            </a:r>
+            <a:endParaRPr sz="1200">
+              <a:solidFill>
+                <a:schemeClr val="dk2"/>
+              </a:solidFill>
+            </a:endParaRPr>
+          </a:p>
+        </p:txBody>
+      </p:sp>
+      <p:sp>
+        <p:nvSpPr>
+          <p:cNvPr id="160" name="Google Shape;160;p22"/>
+          <p:cNvSpPr txBox="1"/>
+          <p:nvPr/>
+        </p:nvSpPr>
+        <p:spPr>
+          <a:xfrm>
+            <a:off x="2467326" y="1608888"/>
+            <a:ext cx="1261800" cy="338700"/>
+          </a:xfrm>
+          <a:prstGeom prst="rect">
+            <a:avLst/>
+          </a:prstGeom>
+          <a:noFill/>
+          <a:ln>
+            <a:noFill/>
+          </a:ln>
+        </p:spPr>
+        <p:txBody>
+          <a:bodyPr anchorCtr="0" anchor="t" bIns="91425" lIns="91425" spcFirstLastPara="1" rIns="91425" wrap="square" tIns="91425">
+            <a:spAutoFit/>
+          </a:bodyPr>
+          <a:lstStyle/>
+          <a:p>
+            <a:pPr indent="0" lvl="0" marL="0" rtl="0" algn="l">
+              <a:spcBef>
+                <a:spcPts val="0"/>
+              </a:spcBef>
+              <a:spcAft>
+                <a:spcPts val="0"/>
+              </a:spcAft>
+              <a:buNone/>
+            </a:pPr>
             <a:r>
               <a:rPr lang="es-419" sz="1000">
                 <a:solidFill>
                   <a:schemeClr val="dk2"/>
                 </a:solidFill>
               </a:rPr>
-              <a:t> a los 20851 promotores en la librería, de los promotores conteniendo cada uno de los motivos presentes en la base EPD (A), conteniendo </a:t>
-            </a:r>
-            <a:r>
-              <a:rPr lang="es-419" sz="1000">
-                <a:solidFill>
-                  <a:schemeClr val="dk2"/>
-                </a:solidFill>
-              </a:rPr>
-              <a:t>superposición</a:t>
-            </a:r>
-            <a:r>
-              <a:rPr lang="es-419" sz="1000">
-                <a:solidFill>
-                  <a:schemeClr val="dk2"/>
-                </a:solidFill>
-              </a:rPr>
-              <a:t> con islas CpG (B) o con cada patrón de secuencias alrededor del sitio TSS (D).</a:t>
+              <a:t>Enhancer</a:t>
             </a:r>
             <a:endParaRPr sz="1000">
               <a:solidFill>
@@ -6750,6 +8542,32 @@
               </a:solidFill>
             </a:endParaRPr>
           </a:p>
+        </p:txBody>
+      </p:sp>
+      <p:sp>
+        <p:nvSpPr>
+          <p:cNvPr id="161" name="Google Shape;161;p22"/>
+          <p:cNvSpPr txBox="1"/>
+          <p:nvPr/>
+        </p:nvSpPr>
+        <p:spPr>
+          <a:xfrm>
+            <a:off x="3873626" y="1609864"/>
+            <a:ext cx="1261800" cy="338700"/>
+          </a:xfrm>
+          <a:prstGeom prst="rect">
+            <a:avLst/>
+          </a:prstGeom>
+          <a:noFill/>
+          <a:ln>
+            <a:noFill/>
+          </a:ln>
+        </p:spPr>
+        <p:txBody>
+          <a:bodyPr anchorCtr="0" anchor="t" bIns="91425" lIns="91425" spcFirstLastPara="1" rIns="91425" wrap="square" tIns="91425">
+            <a:spAutoFit/>
+          </a:bodyPr>
+          <a:lstStyle/>
           <a:p>
             <a:pPr indent="0" lvl="0" marL="0" rtl="0" algn="l">
               <a:spcBef>
@@ -6766,7 +8584,107 @@
                   <a:schemeClr val="dk2"/>
                 </a:solidFill>
               </a:rPr>
-              <a:t>C- Densidad de la distribución del contenido de G y C a lo largo de los 20851 promotores. </a:t>
+              <a:t>FN1 promoter</a:t>
+            </a:r>
+            <a:endParaRPr sz="1000">
+              <a:solidFill>
+                <a:schemeClr val="dk2"/>
+              </a:solidFill>
+            </a:endParaRPr>
+          </a:p>
+        </p:txBody>
+      </p:sp>
+      <p:sp>
+        <p:nvSpPr>
+          <p:cNvPr id="162" name="Google Shape;162;p22"/>
+          <p:cNvSpPr txBox="1"/>
+          <p:nvPr/>
+        </p:nvSpPr>
+        <p:spPr>
+          <a:xfrm>
+            <a:off x="1406475" y="1607700"/>
+            <a:ext cx="861900" cy="338700"/>
+          </a:xfrm>
+          <a:prstGeom prst="rect">
+            <a:avLst/>
+          </a:prstGeom>
+          <a:noFill/>
+          <a:ln>
+            <a:noFill/>
+          </a:ln>
+        </p:spPr>
+        <p:txBody>
+          <a:bodyPr anchorCtr="0" anchor="t" bIns="91425" lIns="91425" spcFirstLastPara="1" rIns="91425" wrap="square" tIns="91425">
+            <a:spAutoFit/>
+          </a:bodyPr>
+          <a:lstStyle/>
+          <a:p>
+            <a:pPr indent="0" lvl="0" marL="0" rtl="0" algn="l">
+              <a:spcBef>
+                <a:spcPts val="0"/>
+              </a:spcBef>
+              <a:spcAft>
+                <a:spcPts val="0"/>
+              </a:spcAft>
+              <a:buNone/>
+            </a:pPr>
+            <a:r>
+              <a:rPr lang="es-419" sz="1000">
+                <a:solidFill>
+                  <a:schemeClr val="dk2"/>
+                </a:solidFill>
+              </a:rPr>
+              <a:t>Adaptador</a:t>
+            </a:r>
+            <a:endParaRPr sz="1000">
+              <a:solidFill>
+                <a:schemeClr val="dk2"/>
+              </a:solidFill>
+            </a:endParaRPr>
+          </a:p>
+        </p:txBody>
+      </p:sp>
+      <p:sp>
+        <p:nvSpPr>
+          <p:cNvPr id="163" name="Google Shape;163;p22"/>
+          <p:cNvSpPr txBox="1"/>
+          <p:nvPr/>
+        </p:nvSpPr>
+        <p:spPr>
+          <a:xfrm>
+            <a:off x="4893660" y="1609875"/>
+            <a:ext cx="861900" cy="338700"/>
+          </a:xfrm>
+          <a:prstGeom prst="rect">
+            <a:avLst/>
+          </a:prstGeom>
+          <a:noFill/>
+          <a:ln>
+            <a:noFill/>
+          </a:ln>
+        </p:spPr>
+        <p:txBody>
+          <a:bodyPr anchorCtr="0" anchor="t" bIns="91425" lIns="91425" spcFirstLastPara="1" rIns="91425" wrap="square" tIns="91425">
+            <a:spAutoFit/>
+          </a:bodyPr>
+          <a:lstStyle/>
+          <a:p>
+            <a:pPr indent="0" lvl="0" marL="0" rtl="0" algn="l">
+              <a:spcBef>
+                <a:spcPts val="0"/>
+              </a:spcBef>
+              <a:spcAft>
+                <a:spcPts val="0"/>
+              </a:spcAft>
+              <a:buNone/>
+            </a:pPr>
+            <a:r>
+              <a:rPr lang="es-419" sz="1000">
+                <a:solidFill>
+                  <a:schemeClr val="dk2"/>
+                </a:solidFill>
+              </a:rPr>
+              <a:t>Adaptador</a:t>
             </a:r>
             <a:endParaRPr sz="1000">
               <a:solidFill>
@@ -6778,35 +8696,7 @@
       </p:sp>
       <p:pic>
         <p:nvPicPr>
-          <p:cNvPr id="153" name="Google Shape;153;p22" title="lib_gc.jpg"/>
-          <p:cNvPicPr preferRelativeResize="0"/>
-          <p:nvPr/>
-        </p:nvPicPr>
-        <p:blipFill>
-          <a:blip r:embed="rId3">
-            <a:alphaModFix/>
-          </a:blip>
-          <a:stretch>
-            <a:fillRect/>
-          </a:stretch>
-        </p:blipFill>
-        <p:spPr>
-          <a:xfrm>
-            <a:off x="0" y="2962643"/>
-            <a:ext cx="2608799" cy="1956607"/>
-          </a:xfrm>
-          <a:prstGeom prst="rect">
-            <a:avLst/>
-          </a:prstGeom>
-          <a:noFill/>
-          <a:ln>
-            <a:noFill/>
-          </a:ln>
-        </p:spPr>
-      </p:pic>
-      <p:pic>
-        <p:nvPicPr>
-          <p:cNvPr id="154" name="Google Shape;154;p22" title="lib_epd_motif.jpg"/>
+          <p:cNvPr id="164" name="Google Shape;164;p22" title="tss_relpos_zoom.jpg"/>
           <p:cNvPicPr preferRelativeResize="0"/>
           <p:nvPr/>
         </p:nvPicPr>
@@ -6820,8 +8710,8 @@
         </p:blipFill>
         <p:spPr>
           <a:xfrm>
-            <a:off x="2" y="812699"/>
-            <a:ext cx="2608799" cy="1956599"/>
+            <a:off x="4793085" y="2026427"/>
+            <a:ext cx="4126915" cy="3095186"/>
           </a:xfrm>
           <a:prstGeom prst="rect">
             <a:avLst/>
@@ -6832,9 +8722,163 @@
           </a:ln>
         </p:spPr>
       </p:pic>
+      <p:sp>
+        <p:nvSpPr>
+          <p:cNvPr id="165" name="Google Shape;165;p22"/>
+          <p:cNvSpPr txBox="1"/>
+          <p:nvPr/>
+        </p:nvSpPr>
+        <p:spPr>
+          <a:xfrm>
+            <a:off x="7918675" y="218875"/>
+            <a:ext cx="3477600" cy="2185800"/>
+          </a:xfrm>
+          <a:prstGeom prst="rect">
+            <a:avLst/>
+          </a:prstGeom>
+          <a:noFill/>
+          <a:ln>
+            <a:noFill/>
+          </a:ln>
+        </p:spPr>
+        <p:txBody>
+          <a:bodyPr anchorCtr="0" anchor="t" bIns="91425" lIns="91425" spcFirstLastPara="1" rIns="91425" wrap="square" tIns="91425">
+            <a:spAutoFit/>
+          </a:bodyPr>
+          <a:lstStyle/>
+          <a:p>
+            <a:pPr indent="0" lvl="0" marL="0" rtl="0" algn="l">
+              <a:spcBef>
+                <a:spcPts val="0"/>
+              </a:spcBef>
+              <a:spcAft>
+                <a:spcPts val="0"/>
+              </a:spcAft>
+              <a:buNone/>
+            </a:pPr>
+            <a:r>
+              <a:rPr b="1" lang="es-419" sz="1000">
+                <a:solidFill>
+                  <a:schemeClr val="dk2"/>
+                </a:solidFill>
+              </a:rPr>
+              <a:t>Diseño experimental de la library y corroboración de los sitios de inicio de la transcripción (TSS).</a:t>
+            </a:r>
+            <a:endParaRPr b="1" sz="1000">
+              <a:solidFill>
+                <a:schemeClr val="dk2"/>
+              </a:solidFill>
+            </a:endParaRPr>
+          </a:p>
+          <a:p>
+            <a:pPr indent="0" lvl="0" marL="0" rtl="0" algn="l">
+              <a:spcBef>
+                <a:spcPts val="0"/>
+              </a:spcBef>
+              <a:spcAft>
+                <a:spcPts val="0"/>
+              </a:spcAft>
+              <a:buNone/>
+            </a:pPr>
+            <a:r>
+              <a:rPr lang="es-419" sz="1000">
+                <a:solidFill>
+                  <a:schemeClr val="dk2"/>
+                </a:solidFill>
+              </a:rPr>
+              <a:t>A- Esquema representativo de la estructura de las secuencias promotoras y enhancers presentes en la </a:t>
+            </a:r>
+            <a:r>
+              <a:rPr lang="es-419" sz="1000">
+                <a:solidFill>
+                  <a:schemeClr val="dk2"/>
+                </a:solidFill>
+              </a:rPr>
+              <a:t>librería</a:t>
+            </a:r>
+            <a:r>
+              <a:rPr lang="es-419" sz="1000">
+                <a:solidFill>
+                  <a:schemeClr val="dk2"/>
+                </a:solidFill>
+              </a:rPr>
+              <a:t>. Con flecha se indica el TSS anotado, y se incluyen las 24pb de los adaptadores ligados a cada extremo de la secuencia. </a:t>
+            </a:r>
+            <a:endParaRPr sz="1000">
+              <a:solidFill>
+                <a:schemeClr val="dk2"/>
+              </a:solidFill>
+            </a:endParaRPr>
+          </a:p>
+          <a:p>
+            <a:pPr indent="0" lvl="0" marL="0" rtl="0" algn="l">
+              <a:spcBef>
+                <a:spcPts val="0"/>
+              </a:spcBef>
+              <a:spcAft>
+                <a:spcPts val="0"/>
+              </a:spcAft>
+              <a:buNone/>
+            </a:pPr>
+            <a:r>
+              <a:rPr lang="es-419" sz="1000">
+                <a:solidFill>
+                  <a:schemeClr val="dk2"/>
+                </a:solidFill>
+              </a:rPr>
+              <a:t>B- Cantidades que cada tipo de secuencias presentes en la </a:t>
+            </a:r>
+            <a:r>
+              <a:rPr lang="es-419" sz="1000">
+                <a:solidFill>
+                  <a:schemeClr val="dk2"/>
+                </a:solidFill>
+              </a:rPr>
+              <a:t>librería</a:t>
+            </a:r>
+            <a:r>
+              <a:rPr lang="es-419" sz="1000">
+                <a:solidFill>
+                  <a:schemeClr val="dk2"/>
+                </a:solidFill>
+              </a:rPr>
+              <a:t>. </a:t>
+            </a:r>
+            <a:endParaRPr sz="1000">
+              <a:solidFill>
+                <a:schemeClr val="dk2"/>
+              </a:solidFill>
+            </a:endParaRPr>
+          </a:p>
+          <a:p>
+            <a:pPr indent="0" lvl="0" marL="0" rtl="0" algn="l">
+              <a:spcBef>
+                <a:spcPts val="0"/>
+              </a:spcBef>
+              <a:spcAft>
+                <a:spcPts val="0"/>
+              </a:spcAft>
+              <a:buNone/>
+            </a:pPr>
+            <a:r>
+              <a:rPr lang="es-419" sz="1000">
+                <a:solidFill>
+                  <a:schemeClr val="dk2"/>
+                </a:solidFill>
+              </a:rPr>
+              <a:t>C- Mapa de calor indicando, para cada promotor, la frecuencia relativa con que se utiliza como TSS cada base, con su posición relativa al TSS anotado, en muestras de CAGE de cultivos primarios humanos.. </a:t>
+            </a:r>
+            <a:endParaRPr sz="1000">
+              <a:solidFill>
+                <a:schemeClr val="dk2"/>
+              </a:solidFill>
+            </a:endParaRPr>
+          </a:p>
+        </p:txBody>
+      </p:sp>
       <p:pic>
         <p:nvPicPr>
-          <p:cNvPr id="155" name="Google Shape;155;p22" title="lib_cpg.jpg"/>
+          <p:cNvPr id="166" name="Google Shape;166;p22"/>
           <p:cNvPicPr preferRelativeResize="0"/>
           <p:nvPr/>
         </p:nvPicPr>
@@ -6848,36 +8892,8 @@
         </p:blipFill>
         <p:spPr>
           <a:xfrm>
-            <a:off x="2538000" y="759600"/>
-            <a:ext cx="893201" cy="2009701"/>
-          </a:xfrm>
-          <a:prstGeom prst="rect">
-            <a:avLst/>
-          </a:prstGeom>
-          <a:noFill/>
-          <a:ln>
-            <a:noFill/>
-          </a:ln>
-        </p:spPr>
-      </p:pic>
-      <p:pic>
-        <p:nvPicPr>
-          <p:cNvPr id="156" name="Google Shape;156;p22" title="lib_tss_motif.jpg"/>
-          <p:cNvPicPr preferRelativeResize="0"/>
-          <p:nvPr/>
-        </p:nvPicPr>
-        <p:blipFill>
-          <a:blip r:embed="rId6">
-            <a:alphaModFix/>
-          </a:blip>
-          <a:stretch>
-            <a:fillRect/>
-          </a:stretch>
-        </p:blipFill>
-        <p:spPr>
-          <a:xfrm>
-            <a:off x="2538001" y="2769299"/>
-            <a:ext cx="2866601" cy="2149951"/>
+            <a:off x="152400" y="2127692"/>
+            <a:ext cx="3801279" cy="2863409"/>
           </a:xfrm>
           <a:prstGeom prst="rect">
             <a:avLst/>
@@ -6897,443 +8913,6 @@
 </file>
 
 <file path=ppt/slides/slide11.xml><?xml version="1.0" encoding="utf-8"?>
-<p:sld xmlns:a="http://schemas.openxmlformats.org/drawingml/2006/main" xmlns:r="http://schemas.openxmlformats.org/officeDocument/2006/relationships" xmlns:mc="http://schemas.openxmlformats.org/markup-compatibility/2006" xmlns:mv="urn:schemas-microsoft-com:mac:vml" xmlns:p="http://schemas.openxmlformats.org/presentationml/2006/main" xmlns:c="http://schemas.openxmlformats.org/drawingml/2006/chart" xmlns:dgm="http://schemas.openxmlformats.org/drawingml/2006/diagram" xmlns:o="urn:schemas-microsoft-com:office:office" xmlns:v="urn:schemas-microsoft-com:vml" xmlns:pvml="urn:schemas-microsoft-com:office:powerpoint" xmlns:com="http://schemas.openxmlformats.org/drawingml/2006/compatibility" xmlns:p14="http://schemas.microsoft.com/office/powerpoint/2010/main" xmlns:p15="http://schemas.microsoft.com/office/powerpoint/2012/main" xmlns:ahyp="http://schemas.microsoft.com/office/drawing/2018/hyperlinkcolor">
-  <p:cSld>
-    <p:spTree>
-      <p:nvGrpSpPr>
-        <p:cNvPr id="160" name="Shape 160"/>
-        <p:cNvGrpSpPr/>
-        <p:nvPr/>
-      </p:nvGrpSpPr>
-      <p:grpSpPr>
-        <a:xfrm>
-          <a:off x="0" y="0"/>
-          <a:ext cx="0" cy="0"/>
-          <a:chOff x="0" y="0"/>
-          <a:chExt cx="0" cy="0"/>
-        </a:xfrm>
-      </p:grpSpPr>
-      <p:pic>
-        <p:nvPicPr>
-          <p:cNvPr id="161" name="Google Shape;161;p23" title="conservacion_func_barplot.jpg"/>
-          <p:cNvPicPr preferRelativeResize="0"/>
-          <p:nvPr/>
-        </p:nvPicPr>
-        <p:blipFill>
-          <a:blip r:embed="rId3">
-            <a:alphaModFix/>
-          </a:blip>
-          <a:stretch>
-            <a:fillRect/>
-          </a:stretch>
-        </p:blipFill>
-        <p:spPr>
-          <a:xfrm>
-            <a:off x="4411600" y="79498"/>
-            <a:ext cx="4579999" cy="3434999"/>
-          </a:xfrm>
-          <a:prstGeom prst="rect">
-            <a:avLst/>
-          </a:prstGeom>
-          <a:noFill/>
-          <a:ln>
-            <a:noFill/>
-          </a:ln>
-        </p:spPr>
-      </p:pic>
-      <p:sp>
-        <p:nvSpPr>
-          <p:cNvPr id="162" name="Google Shape;162;p23"/>
-          <p:cNvSpPr txBox="1"/>
-          <p:nvPr/>
-        </p:nvSpPr>
-        <p:spPr>
-          <a:xfrm>
-            <a:off x="360025" y="3440773"/>
-            <a:ext cx="5891400" cy="2077800"/>
-          </a:xfrm>
-          <a:prstGeom prst="rect">
-            <a:avLst/>
-          </a:prstGeom>
-          <a:noFill/>
-          <a:ln>
-            <a:noFill/>
-          </a:ln>
-        </p:spPr>
-        <p:txBody>
-          <a:bodyPr anchorCtr="0" anchor="t" bIns="91425" lIns="91425" spcFirstLastPara="1" rIns="91425" wrap="square" tIns="91425">
-            <a:spAutoFit/>
-          </a:bodyPr>
-          <a:lstStyle/>
-          <a:p>
-            <a:pPr indent="0" lvl="0" marL="0" rtl="0" algn="l">
-              <a:spcBef>
-                <a:spcPts val="0"/>
-              </a:spcBef>
-              <a:spcAft>
-                <a:spcPts val="0"/>
-              </a:spcAft>
-              <a:buNone/>
-            </a:pPr>
-            <a:r>
-              <a:rPr b="1" lang="es-419" sz="1200">
-                <a:solidFill>
-                  <a:schemeClr val="dk2"/>
-                </a:solidFill>
-              </a:rPr>
-              <a:t>Niveles de conservación de secuencia en el metapromotor y evolución funcional de la actividad regulatoria</a:t>
-            </a:r>
-            <a:r>
-              <a:rPr lang="es-419" sz="1200">
-                <a:solidFill>
-                  <a:schemeClr val="dk2"/>
-                </a:solidFill>
-              </a:rPr>
-              <a:t>. </a:t>
-            </a:r>
-            <a:r>
-              <a:rPr b="1" lang="es-419" sz="1100">
-                <a:solidFill>
-                  <a:schemeClr val="dk1"/>
-                </a:solidFill>
-              </a:rPr>
-              <a:t>(A)</a:t>
-            </a:r>
-            <a:r>
-              <a:rPr lang="es-419" sz="1100">
-                <a:solidFill>
-                  <a:schemeClr val="dk1"/>
-                </a:solidFill>
-              </a:rPr>
-              <a:t> Perfil de conservación nucleotídica del metapromotor basado en el </a:t>
-            </a:r>
-            <a:r>
-              <a:rPr i="1" lang="es-419" sz="1100">
-                <a:solidFill>
-                  <a:schemeClr val="dk1"/>
-                </a:solidFill>
-              </a:rPr>
-              <a:t>PhyloP score</a:t>
-            </a:r>
-            <a:r>
-              <a:rPr lang="es-419" sz="1100">
-                <a:solidFill>
-                  <a:schemeClr val="dk1"/>
-                </a:solidFill>
-              </a:rPr>
-              <a:t> (comparación de 100 especies de mamíferos). Se observan </a:t>
-            </a:r>
-            <a:r>
-              <a:rPr i="1" lang="es-419" sz="1100">
-                <a:solidFill>
-                  <a:schemeClr val="dk1"/>
-                </a:solidFill>
-              </a:rPr>
-              <a:t>picos</a:t>
-            </a:r>
-            <a:r>
-              <a:rPr lang="es-419" sz="1100">
-                <a:solidFill>
-                  <a:schemeClr val="dk1"/>
-                </a:solidFill>
-              </a:rPr>
-              <a:t> de alta conservación en la región proximal al </a:t>
-            </a:r>
-            <a:r>
-              <a:rPr i="1" lang="es-419" sz="1100">
-                <a:solidFill>
-                  <a:schemeClr val="dk1"/>
-                </a:solidFill>
-              </a:rPr>
-              <a:t>TSS</a:t>
-            </a:r>
-            <a:r>
-              <a:rPr lang="es-419" sz="1100">
-                <a:solidFill>
-                  <a:schemeClr val="dk1"/>
-                </a:solidFill>
-              </a:rPr>
-              <a:t> y en la zona del </a:t>
-            </a:r>
-            <a:r>
-              <a:rPr i="1" lang="es-419" sz="1100">
-                <a:solidFill>
-                  <a:schemeClr val="dk1"/>
-                </a:solidFill>
-              </a:rPr>
-              <a:t>TATA-box</a:t>
-            </a:r>
-            <a:r>
-              <a:rPr lang="es-419" sz="1100">
-                <a:solidFill>
-                  <a:schemeClr val="dk1"/>
-                </a:solidFill>
-              </a:rPr>
-              <a:t> (~-30 pb), con un descenso hacia niveles de evolución neutra en las regiones distales</a:t>
-            </a:r>
-            <a:r>
-              <a:rPr lang="es-419" sz="1100">
-                <a:solidFill>
-                  <a:schemeClr val="dk1"/>
-                </a:solidFill>
-              </a:rPr>
-              <a:t>.En línea punteada se indican los límites de las regiones en las que se subdividieron a los promotores para evaluar su conservación nucleotídica: Proximal, Intermedio y Distal, respecto al TSS.</a:t>
-            </a:r>
-            <a:r>
-              <a:rPr lang="es-419" sz="1100">
-                <a:solidFill>
-                  <a:schemeClr val="dk1"/>
-                </a:solidFill>
-              </a:rPr>
-              <a:t> </a:t>
-            </a:r>
-            <a:r>
-              <a:rPr b="1" lang="es-419" sz="1100">
-                <a:solidFill>
-                  <a:schemeClr val="dk1"/>
-                </a:solidFill>
-              </a:rPr>
-              <a:t>(B)</a:t>
-            </a:r>
-            <a:r>
-              <a:rPr lang="es-419" sz="1100">
-                <a:solidFill>
-                  <a:schemeClr val="dk1"/>
-                </a:solidFill>
-              </a:rPr>
-              <a:t> Clasificación de los promotores según Young et al (2015) por su historia evolutiva funcional entre humano y ratón. Las categorías indican si la actividad promotora es compartida entre ambas especies o si fue adquirida o perdida en alguno de los linajes en secuencias homólogas. </a:t>
-            </a:r>
-            <a:endParaRPr sz="1200">
-              <a:solidFill>
-                <a:schemeClr val="dk2"/>
-              </a:solidFill>
-            </a:endParaRPr>
-          </a:p>
-        </p:txBody>
-      </p:sp>
-      <p:pic>
-        <p:nvPicPr>
-          <p:cNvPr id="163" name="Google Shape;163;p23" title="phylop_con_rangos.jpg"/>
-          <p:cNvPicPr preferRelativeResize="0"/>
-          <p:nvPr/>
-        </p:nvPicPr>
-        <p:blipFill>
-          <a:blip r:embed="rId4">
-            <a:alphaModFix/>
-          </a:blip>
-          <a:stretch>
-            <a:fillRect/>
-          </a:stretch>
-        </p:blipFill>
-        <p:spPr>
-          <a:xfrm>
-            <a:off x="152400" y="256546"/>
-            <a:ext cx="4106798" cy="3080099"/>
-          </a:xfrm>
-          <a:prstGeom prst="rect">
-            <a:avLst/>
-          </a:prstGeom>
-          <a:noFill/>
-          <a:ln>
-            <a:noFill/>
-          </a:ln>
-        </p:spPr>
-      </p:pic>
-      <p:sp>
-        <p:nvSpPr>
-          <p:cNvPr id="164" name="Google Shape;164;p23"/>
-          <p:cNvSpPr/>
-          <p:nvPr/>
-        </p:nvSpPr>
-        <p:spPr>
-          <a:xfrm>
-            <a:off x="1009150" y="170871"/>
-            <a:ext cx="697800" cy="246300"/>
-          </a:xfrm>
-          <a:prstGeom prst="roundRect">
-            <a:avLst>
-              <a:gd fmla="val 16667" name="adj"/>
-            </a:avLst>
-          </a:prstGeom>
-          <a:solidFill>
-            <a:schemeClr val="lt2"/>
-          </a:solidFill>
-          <a:ln cap="flat" cmpd="sng" w="9525">
-            <a:solidFill>
-              <a:schemeClr val="dk2"/>
-            </a:solidFill>
-            <a:prstDash val="solid"/>
-            <a:round/>
-            <a:headEnd len="sm" w="sm" type="none"/>
-            <a:tailEnd len="sm" w="sm" type="none"/>
-          </a:ln>
-        </p:spPr>
-        <p:txBody>
-          <a:bodyPr anchorCtr="0" anchor="ctr" bIns="91425" lIns="18000" spcFirstLastPara="1" rIns="18000" wrap="square" tIns="91425">
-            <a:noAutofit/>
-          </a:bodyPr>
-          <a:lstStyle/>
-          <a:p>
-            <a:pPr indent="0" lvl="0" marL="0" rtl="0" algn="ctr">
-              <a:spcBef>
-                <a:spcPts val="0"/>
-              </a:spcBef>
-              <a:spcAft>
-                <a:spcPts val="0"/>
-              </a:spcAft>
-              <a:buNone/>
-            </a:pPr>
-            <a:r>
-              <a:rPr lang="es-419" sz="1000">
-                <a:latin typeface="Courier New"/>
-                <a:ea typeface="Courier New"/>
-                <a:cs typeface="Courier New"/>
-                <a:sym typeface="Courier New"/>
-              </a:rPr>
-              <a:t>Distal</a:t>
-            </a:r>
-            <a:endParaRPr sz="1000">
-              <a:latin typeface="Courier New"/>
-              <a:ea typeface="Courier New"/>
-              <a:cs typeface="Courier New"/>
-              <a:sym typeface="Courier New"/>
-            </a:endParaRPr>
-          </a:p>
-        </p:txBody>
-      </p:sp>
-      <p:sp>
-        <p:nvSpPr>
-          <p:cNvPr id="165" name="Google Shape;165;p23"/>
-          <p:cNvSpPr/>
-          <p:nvPr/>
-        </p:nvSpPr>
-        <p:spPr>
-          <a:xfrm>
-            <a:off x="2201863" y="170871"/>
-            <a:ext cx="635400" cy="246300"/>
-          </a:xfrm>
-          <a:prstGeom prst="roundRect">
-            <a:avLst>
-              <a:gd fmla="val 16667" name="adj"/>
-            </a:avLst>
-          </a:prstGeom>
-          <a:solidFill>
-            <a:schemeClr val="lt2"/>
-          </a:solidFill>
-          <a:ln cap="flat" cmpd="sng" w="9525">
-            <a:solidFill>
-              <a:schemeClr val="dk2"/>
-            </a:solidFill>
-            <a:prstDash val="solid"/>
-            <a:round/>
-            <a:headEnd len="sm" w="sm" type="none"/>
-            <a:tailEnd len="sm" w="sm" type="none"/>
-          </a:ln>
-        </p:spPr>
-        <p:txBody>
-          <a:bodyPr anchorCtr="0" anchor="ctr" bIns="91425" lIns="18000" spcFirstLastPara="1" rIns="18000" wrap="square" tIns="91425">
-            <a:noAutofit/>
-          </a:bodyPr>
-          <a:lstStyle/>
-          <a:p>
-            <a:pPr indent="0" lvl="0" marL="0" rtl="0" algn="ctr">
-              <a:spcBef>
-                <a:spcPts val="0"/>
-              </a:spcBef>
-              <a:spcAft>
-                <a:spcPts val="0"/>
-              </a:spcAft>
-              <a:buNone/>
-            </a:pPr>
-            <a:r>
-              <a:rPr lang="es-419" sz="1000">
-                <a:latin typeface="Courier New"/>
-                <a:ea typeface="Courier New"/>
-                <a:cs typeface="Courier New"/>
-                <a:sym typeface="Courier New"/>
-              </a:rPr>
-              <a:t>Central</a:t>
-            </a:r>
-            <a:endParaRPr sz="1000">
-              <a:latin typeface="Courier New"/>
-              <a:ea typeface="Courier New"/>
-              <a:cs typeface="Courier New"/>
-              <a:sym typeface="Courier New"/>
-            </a:endParaRPr>
-          </a:p>
-        </p:txBody>
-      </p:sp>
-      <p:sp>
-        <p:nvSpPr>
-          <p:cNvPr id="166" name="Google Shape;166;p23"/>
-          <p:cNvSpPr/>
-          <p:nvPr/>
-        </p:nvSpPr>
-        <p:spPr>
-          <a:xfrm>
-            <a:off x="3332200" y="170871"/>
-            <a:ext cx="781200" cy="246300"/>
-          </a:xfrm>
-          <a:prstGeom prst="roundRect">
-            <a:avLst>
-              <a:gd fmla="val 16667" name="adj"/>
-            </a:avLst>
-          </a:prstGeom>
-          <a:solidFill>
-            <a:schemeClr val="lt2"/>
-          </a:solidFill>
-          <a:ln cap="flat" cmpd="sng" w="9525">
-            <a:solidFill>
-              <a:schemeClr val="dk2"/>
-            </a:solidFill>
-            <a:prstDash val="solid"/>
-            <a:round/>
-            <a:headEnd len="sm" w="sm" type="none"/>
-            <a:tailEnd len="sm" w="sm" type="none"/>
-          </a:ln>
-        </p:spPr>
-        <p:txBody>
-          <a:bodyPr anchorCtr="0" anchor="ctr" bIns="91425" lIns="18000" spcFirstLastPara="1" rIns="18000" wrap="square" tIns="91425">
-            <a:noAutofit/>
-          </a:bodyPr>
-          <a:lstStyle/>
-          <a:p>
-            <a:pPr indent="0" lvl="0" marL="0" rtl="0" algn="ctr">
-              <a:spcBef>
-                <a:spcPts val="0"/>
-              </a:spcBef>
-              <a:spcAft>
-                <a:spcPts val="0"/>
-              </a:spcAft>
-              <a:buNone/>
-            </a:pPr>
-            <a:r>
-              <a:rPr lang="es-419" sz="1000">
-                <a:latin typeface="Courier New"/>
-                <a:ea typeface="Courier New"/>
-                <a:cs typeface="Courier New"/>
-                <a:sym typeface="Courier New"/>
-              </a:rPr>
-              <a:t>Proximal</a:t>
-            </a:r>
-            <a:endParaRPr sz="1000">
-              <a:latin typeface="Courier New"/>
-              <a:ea typeface="Courier New"/>
-              <a:cs typeface="Courier New"/>
-              <a:sym typeface="Courier New"/>
-            </a:endParaRPr>
-          </a:p>
-        </p:txBody>
-      </p:sp>
-    </p:spTree>
-  </p:cSld>
-  <p:clrMapOvr>
-    <a:masterClrMapping/>
-  </p:clrMapOvr>
-</p:sld>
-</file>
-
-<file path=ppt/slides/slide12.xml><?xml version="1.0" encoding="utf-8"?>
 <p:sld xmlns:a="http://schemas.openxmlformats.org/drawingml/2006/main" xmlns:r="http://schemas.openxmlformats.org/officeDocument/2006/relationships" xmlns:mc="http://schemas.openxmlformats.org/markup-compatibility/2006" xmlns:mv="urn:schemas-microsoft-com:mac:vml" xmlns:p="http://schemas.openxmlformats.org/presentationml/2006/main" xmlns:c="http://schemas.openxmlformats.org/drawingml/2006/chart" xmlns:dgm="http://schemas.openxmlformats.org/drawingml/2006/diagram" xmlns:o="urn:schemas-microsoft-com:office:office" xmlns:v="urn:schemas-microsoft-com:vml" xmlns:pvml="urn:schemas-microsoft-com:office:powerpoint" xmlns:com="http://schemas.openxmlformats.org/drawingml/2006/compatibility" xmlns:p14="http://schemas.microsoft.com/office/powerpoint/2010/main" xmlns:p15="http://schemas.microsoft.com/office/powerpoint/2012/main" xmlns:ahyp="http://schemas.microsoft.com/office/drawing/2018/hyperlinkcolor">
   <p:cSld>
     <p:spTree>
@@ -7352,7 +8931,711 @@
       </p:grpSpPr>
       <p:sp>
         <p:nvSpPr>
-          <p:cNvPr id="171" name="Google Shape;171;p24"/>
+          <p:cNvPr id="171" name="Google Shape;171;p23"/>
+          <p:cNvSpPr txBox="1"/>
+          <p:nvPr/>
+        </p:nvSpPr>
+        <p:spPr>
+          <a:xfrm>
+            <a:off x="5338075" y="418025"/>
+            <a:ext cx="3822000" cy="1569900"/>
+          </a:xfrm>
+          <a:prstGeom prst="rect">
+            <a:avLst/>
+          </a:prstGeom>
+          <a:noFill/>
+          <a:ln>
+            <a:noFill/>
+          </a:ln>
+        </p:spPr>
+        <p:txBody>
+          <a:bodyPr anchorCtr="0" anchor="t" bIns="91425" lIns="91425" spcFirstLastPara="1" rIns="91425" wrap="square" tIns="91425">
+            <a:spAutoFit/>
+          </a:bodyPr>
+          <a:lstStyle/>
+          <a:p>
+            <a:pPr indent="0" lvl="0" marL="0" rtl="0" algn="l">
+              <a:spcBef>
+                <a:spcPts val="0"/>
+              </a:spcBef>
+              <a:spcAft>
+                <a:spcPts val="0"/>
+              </a:spcAft>
+              <a:buNone/>
+            </a:pPr>
+            <a:r>
+              <a:rPr b="1" lang="es-419" sz="1000">
+                <a:solidFill>
+                  <a:schemeClr val="dk2"/>
+                </a:solidFill>
+              </a:rPr>
+              <a:t>Frecuencia de elementos de secuencia típicos de promotores en la </a:t>
+            </a:r>
+            <a:r>
+              <a:rPr b="1" i="1" lang="es-419" sz="1000">
+                <a:solidFill>
+                  <a:schemeClr val="dk2"/>
+                </a:solidFill>
+              </a:rPr>
+              <a:t>library.</a:t>
+            </a:r>
+            <a:endParaRPr b="1" i="1" sz="1000">
+              <a:solidFill>
+                <a:schemeClr val="dk2"/>
+              </a:solidFill>
+            </a:endParaRPr>
+          </a:p>
+          <a:p>
+            <a:pPr indent="0" lvl="0" marL="0" rtl="0" algn="l">
+              <a:spcBef>
+                <a:spcPts val="0"/>
+              </a:spcBef>
+              <a:spcAft>
+                <a:spcPts val="0"/>
+              </a:spcAft>
+              <a:buNone/>
+            </a:pPr>
+            <a:r>
+              <a:rPr b="1" lang="es-419" sz="1000">
+                <a:solidFill>
+                  <a:schemeClr val="dk2"/>
+                </a:solidFill>
+              </a:rPr>
+              <a:t>A,B,D- Frecuencia, respecto</a:t>
+            </a:r>
+            <a:r>
+              <a:rPr lang="es-419" sz="1000">
+                <a:solidFill>
+                  <a:schemeClr val="dk2"/>
+                </a:solidFill>
+              </a:rPr>
+              <a:t> a los 20851 promotores en la librería, de los promotores conteniendo cada uno de los motivos presentes en la base EPD (A), conteniendo </a:t>
+            </a:r>
+            <a:r>
+              <a:rPr lang="es-419" sz="1000">
+                <a:solidFill>
+                  <a:schemeClr val="dk2"/>
+                </a:solidFill>
+              </a:rPr>
+              <a:t>superposición</a:t>
+            </a:r>
+            <a:r>
+              <a:rPr lang="es-419" sz="1000">
+                <a:solidFill>
+                  <a:schemeClr val="dk2"/>
+                </a:solidFill>
+              </a:rPr>
+              <a:t> con islas CpG (B) o con cada patrón de secuencias alrededor del sitio TSS (D).</a:t>
+            </a:r>
+            <a:endParaRPr sz="1000">
+              <a:solidFill>
+                <a:schemeClr val="dk2"/>
+              </a:solidFill>
+            </a:endParaRPr>
+          </a:p>
+          <a:p>
+            <a:pPr indent="0" lvl="0" marL="0" rtl="0" algn="l">
+              <a:spcBef>
+                <a:spcPts val="0"/>
+              </a:spcBef>
+              <a:spcAft>
+                <a:spcPts val="0"/>
+              </a:spcAft>
+              <a:buNone/>
+            </a:pPr>
+            <a:r>
+              <a:rPr lang="es-419" sz="1000">
+                <a:solidFill>
+                  <a:schemeClr val="dk2"/>
+                </a:solidFill>
+              </a:rPr>
+              <a:t>C- Densidad de la distribución del contenido de G y C a lo largo de los 20851 promotores. </a:t>
+            </a:r>
+            <a:endParaRPr sz="1000">
+              <a:solidFill>
+                <a:schemeClr val="dk2"/>
+              </a:solidFill>
+            </a:endParaRPr>
+          </a:p>
+        </p:txBody>
+      </p:sp>
+      <p:pic>
+        <p:nvPicPr>
+          <p:cNvPr id="172" name="Google Shape;172;p23" title="lib_gc.jpg"/>
+          <p:cNvPicPr preferRelativeResize="0"/>
+          <p:nvPr/>
+        </p:nvPicPr>
+        <p:blipFill>
+          <a:blip r:embed="rId3">
+            <a:alphaModFix/>
+          </a:blip>
+          <a:stretch>
+            <a:fillRect/>
+          </a:stretch>
+        </p:blipFill>
+        <p:spPr>
+          <a:xfrm>
+            <a:off x="0" y="2962643"/>
+            <a:ext cx="2608799" cy="1956607"/>
+          </a:xfrm>
+          <a:prstGeom prst="rect">
+            <a:avLst/>
+          </a:prstGeom>
+          <a:noFill/>
+          <a:ln>
+            <a:noFill/>
+          </a:ln>
+        </p:spPr>
+      </p:pic>
+      <p:pic>
+        <p:nvPicPr>
+          <p:cNvPr id="173" name="Google Shape;173;p23" title="lib_epd_motif.jpg"/>
+          <p:cNvPicPr preferRelativeResize="0"/>
+          <p:nvPr/>
+        </p:nvPicPr>
+        <p:blipFill>
+          <a:blip r:embed="rId4">
+            <a:alphaModFix/>
+          </a:blip>
+          <a:stretch>
+            <a:fillRect/>
+          </a:stretch>
+        </p:blipFill>
+        <p:spPr>
+          <a:xfrm>
+            <a:off x="2" y="812699"/>
+            <a:ext cx="2608799" cy="1956599"/>
+          </a:xfrm>
+          <a:prstGeom prst="rect">
+            <a:avLst/>
+          </a:prstGeom>
+          <a:noFill/>
+          <a:ln>
+            <a:noFill/>
+          </a:ln>
+        </p:spPr>
+      </p:pic>
+      <p:pic>
+        <p:nvPicPr>
+          <p:cNvPr id="174" name="Google Shape;174;p23" title="lib_cpg.jpg"/>
+          <p:cNvPicPr preferRelativeResize="0"/>
+          <p:nvPr/>
+        </p:nvPicPr>
+        <p:blipFill>
+          <a:blip r:embed="rId5">
+            <a:alphaModFix/>
+          </a:blip>
+          <a:stretch>
+            <a:fillRect/>
+          </a:stretch>
+        </p:blipFill>
+        <p:spPr>
+          <a:xfrm>
+            <a:off x="2538000" y="759600"/>
+            <a:ext cx="893201" cy="2009701"/>
+          </a:xfrm>
+          <a:prstGeom prst="rect">
+            <a:avLst/>
+          </a:prstGeom>
+          <a:noFill/>
+          <a:ln>
+            <a:noFill/>
+          </a:ln>
+        </p:spPr>
+      </p:pic>
+      <p:pic>
+        <p:nvPicPr>
+          <p:cNvPr id="175" name="Google Shape;175;p23" title="lib_tss_motif.jpg"/>
+          <p:cNvPicPr preferRelativeResize="0"/>
+          <p:nvPr/>
+        </p:nvPicPr>
+        <p:blipFill>
+          <a:blip r:embed="rId6">
+            <a:alphaModFix/>
+          </a:blip>
+          <a:stretch>
+            <a:fillRect/>
+          </a:stretch>
+        </p:blipFill>
+        <p:spPr>
+          <a:xfrm>
+            <a:off x="2538001" y="2769299"/>
+            <a:ext cx="2866601" cy="2149951"/>
+          </a:xfrm>
+          <a:prstGeom prst="rect">
+            <a:avLst/>
+          </a:prstGeom>
+          <a:noFill/>
+          <a:ln>
+            <a:noFill/>
+          </a:ln>
+        </p:spPr>
+      </p:pic>
+    </p:spTree>
+  </p:cSld>
+  <p:clrMapOvr>
+    <a:masterClrMapping/>
+  </p:clrMapOvr>
+</p:sld>
+</file>
+
+<file path=ppt/slides/slide12.xml><?xml version="1.0" encoding="utf-8"?>
+<p:sld xmlns:a="http://schemas.openxmlformats.org/drawingml/2006/main" xmlns:r="http://schemas.openxmlformats.org/officeDocument/2006/relationships" xmlns:mc="http://schemas.openxmlformats.org/markup-compatibility/2006" xmlns:mv="urn:schemas-microsoft-com:mac:vml" xmlns:p="http://schemas.openxmlformats.org/presentationml/2006/main" xmlns:c="http://schemas.openxmlformats.org/drawingml/2006/chart" xmlns:dgm="http://schemas.openxmlformats.org/drawingml/2006/diagram" xmlns:o="urn:schemas-microsoft-com:office:office" xmlns:v="urn:schemas-microsoft-com:vml" xmlns:pvml="urn:schemas-microsoft-com:office:powerpoint" xmlns:com="http://schemas.openxmlformats.org/drawingml/2006/compatibility" xmlns:p14="http://schemas.microsoft.com/office/powerpoint/2010/main" xmlns:p15="http://schemas.microsoft.com/office/powerpoint/2012/main" xmlns:ahyp="http://schemas.microsoft.com/office/drawing/2018/hyperlinkcolor">
+  <p:cSld>
+    <p:spTree>
+      <p:nvGrpSpPr>
+        <p:cNvPr id="179" name="Shape 179"/>
+        <p:cNvGrpSpPr/>
+        <p:nvPr/>
+      </p:nvGrpSpPr>
+      <p:grpSpPr>
+        <a:xfrm>
+          <a:off x="0" y="0"/>
+          <a:ext cx="0" cy="0"/>
+          <a:chOff x="0" y="0"/>
+          <a:chExt cx="0" cy="0"/>
+        </a:xfrm>
+      </p:grpSpPr>
+      <p:pic>
+        <p:nvPicPr>
+          <p:cNvPr id="180" name="Google Shape;180;p24" title="conservacion_func_barplot.jpg"/>
+          <p:cNvPicPr preferRelativeResize="0"/>
+          <p:nvPr/>
+        </p:nvPicPr>
+        <p:blipFill>
+          <a:blip r:embed="rId3">
+            <a:alphaModFix/>
+          </a:blip>
+          <a:stretch>
+            <a:fillRect/>
+          </a:stretch>
+        </p:blipFill>
+        <p:spPr>
+          <a:xfrm>
+            <a:off x="4411600" y="79498"/>
+            <a:ext cx="4579999" cy="3434999"/>
+          </a:xfrm>
+          <a:prstGeom prst="rect">
+            <a:avLst/>
+          </a:prstGeom>
+          <a:noFill/>
+          <a:ln>
+            <a:noFill/>
+          </a:ln>
+        </p:spPr>
+      </p:pic>
+      <p:sp>
+        <p:nvSpPr>
+          <p:cNvPr id="181" name="Google Shape;181;p24"/>
+          <p:cNvSpPr txBox="1"/>
+          <p:nvPr/>
+        </p:nvSpPr>
+        <p:spPr>
+          <a:xfrm>
+            <a:off x="360025" y="3440773"/>
+            <a:ext cx="5891400" cy="2077800"/>
+          </a:xfrm>
+          <a:prstGeom prst="rect">
+            <a:avLst/>
+          </a:prstGeom>
+          <a:noFill/>
+          <a:ln>
+            <a:noFill/>
+          </a:ln>
+        </p:spPr>
+        <p:txBody>
+          <a:bodyPr anchorCtr="0" anchor="t" bIns="91425" lIns="91425" spcFirstLastPara="1" rIns="91425" wrap="square" tIns="91425">
+            <a:spAutoFit/>
+          </a:bodyPr>
+          <a:lstStyle/>
+          <a:p>
+            <a:pPr indent="0" lvl="0" marL="0" rtl="0" algn="l">
+              <a:spcBef>
+                <a:spcPts val="0"/>
+              </a:spcBef>
+              <a:spcAft>
+                <a:spcPts val="0"/>
+              </a:spcAft>
+              <a:buNone/>
+            </a:pPr>
+            <a:r>
+              <a:rPr b="1" lang="es-419" sz="1200">
+                <a:solidFill>
+                  <a:schemeClr val="dk2"/>
+                </a:solidFill>
+              </a:rPr>
+              <a:t>Niveles de conservación de secuencia en el metapromotor y evolución funcional de la actividad regulatoria</a:t>
+            </a:r>
+            <a:r>
+              <a:rPr lang="es-419" sz="1200">
+                <a:solidFill>
+                  <a:schemeClr val="dk2"/>
+                </a:solidFill>
+              </a:rPr>
+              <a:t>. </a:t>
+            </a:r>
+            <a:r>
+              <a:rPr b="1" lang="es-419" sz="1100">
+                <a:solidFill>
+                  <a:schemeClr val="dk1"/>
+                </a:solidFill>
+              </a:rPr>
+              <a:t>(A)</a:t>
+            </a:r>
+            <a:r>
+              <a:rPr lang="es-419" sz="1100">
+                <a:solidFill>
+                  <a:schemeClr val="dk1"/>
+                </a:solidFill>
+              </a:rPr>
+              <a:t> Perfil de conservación nucleotídica del metapromotor basado en el </a:t>
+            </a:r>
+            <a:r>
+              <a:rPr i="1" lang="es-419" sz="1100">
+                <a:solidFill>
+                  <a:schemeClr val="dk1"/>
+                </a:solidFill>
+              </a:rPr>
+              <a:t>PhyloP score</a:t>
+            </a:r>
+            <a:r>
+              <a:rPr lang="es-419" sz="1100">
+                <a:solidFill>
+                  <a:schemeClr val="dk1"/>
+                </a:solidFill>
+              </a:rPr>
+              <a:t> (comparación de 100 especies de mamíferos). Se observan </a:t>
+            </a:r>
+            <a:r>
+              <a:rPr i="1" lang="es-419" sz="1100">
+                <a:solidFill>
+                  <a:schemeClr val="dk1"/>
+                </a:solidFill>
+              </a:rPr>
+              <a:t>picos</a:t>
+            </a:r>
+            <a:r>
+              <a:rPr lang="es-419" sz="1100">
+                <a:solidFill>
+                  <a:schemeClr val="dk1"/>
+                </a:solidFill>
+              </a:rPr>
+              <a:t> de alta conservación en la región proximal al </a:t>
+            </a:r>
+            <a:r>
+              <a:rPr i="1" lang="es-419" sz="1100">
+                <a:solidFill>
+                  <a:schemeClr val="dk1"/>
+                </a:solidFill>
+              </a:rPr>
+              <a:t>TSS</a:t>
+            </a:r>
+            <a:r>
+              <a:rPr lang="es-419" sz="1100">
+                <a:solidFill>
+                  <a:schemeClr val="dk1"/>
+                </a:solidFill>
+              </a:rPr>
+              <a:t> y en la zona del </a:t>
+            </a:r>
+            <a:r>
+              <a:rPr i="1" lang="es-419" sz="1100">
+                <a:solidFill>
+                  <a:schemeClr val="dk1"/>
+                </a:solidFill>
+              </a:rPr>
+              <a:t>TATA-box</a:t>
+            </a:r>
+            <a:r>
+              <a:rPr lang="es-419" sz="1100">
+                <a:solidFill>
+                  <a:schemeClr val="dk1"/>
+                </a:solidFill>
+              </a:rPr>
+              <a:t> (~-30 pb), con un descenso hacia niveles de evolución neutra en las regiones distales</a:t>
+            </a:r>
+            <a:r>
+              <a:rPr lang="es-419" sz="1100">
+                <a:solidFill>
+                  <a:schemeClr val="dk1"/>
+                </a:solidFill>
+              </a:rPr>
+              <a:t>.En línea punteada se indican los límites de las regiones en las que se subdividieron a los promotores para evaluar su conservación nucleotídica: Proximal, Intermedio y Distal, respecto al TSS.</a:t>
+            </a:r>
+            <a:r>
+              <a:rPr lang="es-419" sz="1100">
+                <a:solidFill>
+                  <a:schemeClr val="dk1"/>
+                </a:solidFill>
+              </a:rPr>
+              <a:t> </a:t>
+            </a:r>
+            <a:r>
+              <a:rPr b="1" lang="es-419" sz="1100">
+                <a:solidFill>
+                  <a:schemeClr val="dk1"/>
+                </a:solidFill>
+              </a:rPr>
+              <a:t>(B)</a:t>
+            </a:r>
+            <a:r>
+              <a:rPr lang="es-419" sz="1100">
+                <a:solidFill>
+                  <a:schemeClr val="dk1"/>
+                </a:solidFill>
+              </a:rPr>
+              <a:t> Clasificación de los promotores según Young et al (2015) por su historia evolutiva funcional entre humano y ratón. Las categorías indican si la actividad promotora es compartida entre ambas especies o si fue adquirida o perdida en alguno de los linajes en secuencias homólogas. </a:t>
+            </a:r>
+            <a:endParaRPr sz="1200">
+              <a:solidFill>
+                <a:schemeClr val="dk2"/>
+              </a:solidFill>
+            </a:endParaRPr>
+          </a:p>
+        </p:txBody>
+      </p:sp>
+      <p:pic>
+        <p:nvPicPr>
+          <p:cNvPr id="182" name="Google Shape;182;p24" title="phylop_con_rangos.jpg"/>
+          <p:cNvPicPr preferRelativeResize="0"/>
+          <p:nvPr/>
+        </p:nvPicPr>
+        <p:blipFill>
+          <a:blip r:embed="rId4">
+            <a:alphaModFix/>
+          </a:blip>
+          <a:stretch>
+            <a:fillRect/>
+          </a:stretch>
+        </p:blipFill>
+        <p:spPr>
+          <a:xfrm>
+            <a:off x="152400" y="256546"/>
+            <a:ext cx="4106798" cy="3080099"/>
+          </a:xfrm>
+          <a:prstGeom prst="rect">
+            <a:avLst/>
+          </a:prstGeom>
+          <a:noFill/>
+          <a:ln>
+            <a:noFill/>
+          </a:ln>
+        </p:spPr>
+      </p:pic>
+      <p:sp>
+        <p:nvSpPr>
+          <p:cNvPr id="183" name="Google Shape;183;p24"/>
+          <p:cNvSpPr/>
+          <p:nvPr/>
+        </p:nvSpPr>
+        <p:spPr>
+          <a:xfrm>
+            <a:off x="1009150" y="170871"/>
+            <a:ext cx="697800" cy="246300"/>
+          </a:xfrm>
+          <a:prstGeom prst="roundRect">
+            <a:avLst>
+              <a:gd fmla="val 16667" name="adj"/>
+            </a:avLst>
+          </a:prstGeom>
+          <a:solidFill>
+            <a:schemeClr val="lt2"/>
+          </a:solidFill>
+          <a:ln cap="flat" cmpd="sng" w="9525">
+            <a:solidFill>
+              <a:schemeClr val="dk2"/>
+            </a:solidFill>
+            <a:prstDash val="solid"/>
+            <a:round/>
+            <a:headEnd len="sm" w="sm" type="none"/>
+            <a:tailEnd len="sm" w="sm" type="none"/>
+          </a:ln>
+        </p:spPr>
+        <p:txBody>
+          <a:bodyPr anchorCtr="0" anchor="ctr" bIns="91425" lIns="18000" spcFirstLastPara="1" rIns="18000" wrap="square" tIns="91425">
+            <a:noAutofit/>
+          </a:bodyPr>
+          <a:lstStyle/>
+          <a:p>
+            <a:pPr indent="0" lvl="0" marL="0" rtl="0" algn="ctr">
+              <a:spcBef>
+                <a:spcPts val="0"/>
+              </a:spcBef>
+              <a:spcAft>
+                <a:spcPts val="0"/>
+              </a:spcAft>
+              <a:buNone/>
+            </a:pPr>
+            <a:r>
+              <a:rPr lang="es-419" sz="1000">
+                <a:latin typeface="Courier New"/>
+                <a:ea typeface="Courier New"/>
+                <a:cs typeface="Courier New"/>
+                <a:sym typeface="Courier New"/>
+              </a:rPr>
+              <a:t>Distal</a:t>
+            </a:r>
+            <a:endParaRPr sz="1000">
+              <a:latin typeface="Courier New"/>
+              <a:ea typeface="Courier New"/>
+              <a:cs typeface="Courier New"/>
+              <a:sym typeface="Courier New"/>
+            </a:endParaRPr>
+          </a:p>
+        </p:txBody>
+      </p:sp>
+      <p:sp>
+        <p:nvSpPr>
+          <p:cNvPr id="184" name="Google Shape;184;p24"/>
+          <p:cNvSpPr/>
+          <p:nvPr/>
+        </p:nvSpPr>
+        <p:spPr>
+          <a:xfrm>
+            <a:off x="2201863" y="170871"/>
+            <a:ext cx="635400" cy="246300"/>
+          </a:xfrm>
+          <a:prstGeom prst="roundRect">
+            <a:avLst>
+              <a:gd fmla="val 16667" name="adj"/>
+            </a:avLst>
+          </a:prstGeom>
+          <a:solidFill>
+            <a:schemeClr val="lt2"/>
+          </a:solidFill>
+          <a:ln cap="flat" cmpd="sng" w="9525">
+            <a:solidFill>
+              <a:schemeClr val="dk2"/>
+            </a:solidFill>
+            <a:prstDash val="solid"/>
+            <a:round/>
+            <a:headEnd len="sm" w="sm" type="none"/>
+            <a:tailEnd len="sm" w="sm" type="none"/>
+          </a:ln>
+        </p:spPr>
+        <p:txBody>
+          <a:bodyPr anchorCtr="0" anchor="ctr" bIns="91425" lIns="18000" spcFirstLastPara="1" rIns="18000" wrap="square" tIns="91425">
+            <a:noAutofit/>
+          </a:bodyPr>
+          <a:lstStyle/>
+          <a:p>
+            <a:pPr indent="0" lvl="0" marL="0" rtl="0" algn="ctr">
+              <a:spcBef>
+                <a:spcPts val="0"/>
+              </a:spcBef>
+              <a:spcAft>
+                <a:spcPts val="0"/>
+              </a:spcAft>
+              <a:buNone/>
+            </a:pPr>
+            <a:r>
+              <a:rPr lang="es-419" sz="1000">
+                <a:latin typeface="Courier New"/>
+                <a:ea typeface="Courier New"/>
+                <a:cs typeface="Courier New"/>
+                <a:sym typeface="Courier New"/>
+              </a:rPr>
+              <a:t>Central</a:t>
+            </a:r>
+            <a:endParaRPr sz="1000">
+              <a:latin typeface="Courier New"/>
+              <a:ea typeface="Courier New"/>
+              <a:cs typeface="Courier New"/>
+              <a:sym typeface="Courier New"/>
+            </a:endParaRPr>
+          </a:p>
+        </p:txBody>
+      </p:sp>
+      <p:sp>
+        <p:nvSpPr>
+          <p:cNvPr id="185" name="Google Shape;185;p24"/>
+          <p:cNvSpPr/>
+          <p:nvPr/>
+        </p:nvSpPr>
+        <p:spPr>
+          <a:xfrm>
+            <a:off x="3332200" y="170871"/>
+            <a:ext cx="781200" cy="246300"/>
+          </a:xfrm>
+          <a:prstGeom prst="roundRect">
+            <a:avLst>
+              <a:gd fmla="val 16667" name="adj"/>
+            </a:avLst>
+          </a:prstGeom>
+          <a:solidFill>
+            <a:schemeClr val="lt2"/>
+          </a:solidFill>
+          <a:ln cap="flat" cmpd="sng" w="9525">
+            <a:solidFill>
+              <a:schemeClr val="dk2"/>
+            </a:solidFill>
+            <a:prstDash val="solid"/>
+            <a:round/>
+            <a:headEnd len="sm" w="sm" type="none"/>
+            <a:tailEnd len="sm" w="sm" type="none"/>
+          </a:ln>
+        </p:spPr>
+        <p:txBody>
+          <a:bodyPr anchorCtr="0" anchor="ctr" bIns="91425" lIns="18000" spcFirstLastPara="1" rIns="18000" wrap="square" tIns="91425">
+            <a:noAutofit/>
+          </a:bodyPr>
+          <a:lstStyle/>
+          <a:p>
+            <a:pPr indent="0" lvl="0" marL="0" rtl="0" algn="ctr">
+              <a:spcBef>
+                <a:spcPts val="0"/>
+              </a:spcBef>
+              <a:spcAft>
+                <a:spcPts val="0"/>
+              </a:spcAft>
+              <a:buNone/>
+            </a:pPr>
+            <a:r>
+              <a:rPr lang="es-419" sz="1000">
+                <a:latin typeface="Courier New"/>
+                <a:ea typeface="Courier New"/>
+                <a:cs typeface="Courier New"/>
+                <a:sym typeface="Courier New"/>
+              </a:rPr>
+              <a:t>Proximal</a:t>
+            </a:r>
+            <a:endParaRPr sz="1000">
+              <a:latin typeface="Courier New"/>
+              <a:ea typeface="Courier New"/>
+              <a:cs typeface="Courier New"/>
+              <a:sym typeface="Courier New"/>
+            </a:endParaRPr>
+          </a:p>
+        </p:txBody>
+      </p:sp>
+    </p:spTree>
+  </p:cSld>
+  <p:clrMapOvr>
+    <a:masterClrMapping/>
+  </p:clrMapOvr>
+</p:sld>
+</file>
+
+<file path=ppt/slides/slide13.xml><?xml version="1.0" encoding="utf-8"?>
+<p:sld xmlns:a="http://schemas.openxmlformats.org/drawingml/2006/main" xmlns:r="http://schemas.openxmlformats.org/officeDocument/2006/relationships" xmlns:mc="http://schemas.openxmlformats.org/markup-compatibility/2006" xmlns:mv="urn:schemas-microsoft-com:mac:vml" xmlns:p="http://schemas.openxmlformats.org/presentationml/2006/main" xmlns:c="http://schemas.openxmlformats.org/drawingml/2006/chart" xmlns:dgm="http://schemas.openxmlformats.org/drawingml/2006/diagram" xmlns:o="urn:schemas-microsoft-com:office:office" xmlns:v="urn:schemas-microsoft-com:vml" xmlns:pvml="urn:schemas-microsoft-com:office:powerpoint" xmlns:com="http://schemas.openxmlformats.org/drawingml/2006/compatibility" xmlns:p14="http://schemas.microsoft.com/office/powerpoint/2010/main" xmlns:p15="http://schemas.microsoft.com/office/powerpoint/2012/main" xmlns:ahyp="http://schemas.microsoft.com/office/drawing/2018/hyperlinkcolor">
+  <p:cSld>
+    <p:spTree>
+      <p:nvGrpSpPr>
+        <p:cNvPr id="189" name="Shape 189"/>
+        <p:cNvGrpSpPr/>
+        <p:nvPr/>
+      </p:nvGrpSpPr>
+      <p:grpSpPr>
+        <a:xfrm>
+          <a:off x="0" y="0"/>
+          <a:ext cx="0" cy="0"/>
+          <a:chOff x="0" y="0"/>
+          <a:chExt cx="0" cy="0"/>
+        </a:xfrm>
+      </p:grpSpPr>
+      <p:sp>
+        <p:nvSpPr>
+          <p:cNvPr id="190" name="Google Shape;190;p25"/>
           <p:cNvSpPr txBox="1"/>
           <p:nvPr>
             <p:ph type="title"/>
@@ -7384,7 +9667,1019 @@
             </a:pPr>
             <a:r>
               <a:rPr lang="es-419"/>
-              <a:t>co-ocurrencia</a:t>
+              <a:t>shape y tissue specific</a:t>
+            </a:r>
+            <a:endParaRPr/>
+          </a:p>
+        </p:txBody>
+      </p:sp>
+      <p:sp>
+        <p:nvSpPr>
+          <p:cNvPr id="191" name="Google Shape;191;p25"/>
+          <p:cNvSpPr txBox="1"/>
+          <p:nvPr>
+            <p:ph idx="1" type="body"/>
+          </p:nvPr>
+        </p:nvSpPr>
+        <p:spPr>
+          <a:xfrm>
+            <a:off x="311700" y="1152475"/>
+            <a:ext cx="8520600" cy="3416400"/>
+          </a:xfrm>
+          <a:prstGeom prst="rect">
+            <a:avLst/>
+          </a:prstGeom>
+        </p:spPr>
+        <p:txBody>
+          <a:bodyPr anchorCtr="0" anchor="t" bIns="91425" lIns="91425" spcFirstLastPara="1" rIns="91425" wrap="square" tIns="91425">
+            <a:normAutofit/>
+          </a:bodyPr>
+          <a:lstStyle/>
+          <a:p>
+            <a:pPr indent="0" lvl="0" marL="0" rtl="0" algn="l">
+              <a:spcBef>
+                <a:spcPts val="0"/>
+              </a:spcBef>
+              <a:spcAft>
+                <a:spcPts val="1200"/>
+              </a:spcAft>
+              <a:buNone/>
+            </a:pPr>
+            <a:r>
+              <a:t/>
+            </a:r>
+            <a:endParaRPr/>
+          </a:p>
+        </p:txBody>
+      </p:sp>
+    </p:spTree>
+  </p:cSld>
+  <p:clrMapOvr>
+    <a:masterClrMapping/>
+  </p:clrMapOvr>
+</p:sld>
+</file>
+
+<file path=ppt/slides/slide14.xml><?xml version="1.0" encoding="utf-8"?>
+<p:sld xmlns:a="http://schemas.openxmlformats.org/drawingml/2006/main" xmlns:r="http://schemas.openxmlformats.org/officeDocument/2006/relationships" xmlns:mc="http://schemas.openxmlformats.org/markup-compatibility/2006" xmlns:mv="urn:schemas-microsoft-com:mac:vml" xmlns:p="http://schemas.openxmlformats.org/presentationml/2006/main" xmlns:c="http://schemas.openxmlformats.org/drawingml/2006/chart" xmlns:dgm="http://schemas.openxmlformats.org/drawingml/2006/diagram" xmlns:o="urn:schemas-microsoft-com:office:office" xmlns:v="urn:schemas-microsoft-com:vml" xmlns:pvml="urn:schemas-microsoft-com:office:powerpoint" xmlns:com="http://schemas.openxmlformats.org/drawingml/2006/compatibility" xmlns:p14="http://schemas.microsoft.com/office/powerpoint/2010/main" xmlns:p15="http://schemas.microsoft.com/office/powerpoint/2012/main" xmlns:ahyp="http://schemas.microsoft.com/office/drawing/2018/hyperlinkcolor">
+  <p:cSld>
+    <p:spTree>
+      <p:nvGrpSpPr>
+        <p:cNvPr id="195" name="Shape 195"/>
+        <p:cNvGrpSpPr/>
+        <p:nvPr/>
+      </p:nvGrpSpPr>
+      <p:grpSpPr>
+        <a:xfrm>
+          <a:off x="0" y="0"/>
+          <a:ext cx="0" cy="0"/>
+          <a:chOff x="0" y="0"/>
+          <a:chExt cx="0" cy="0"/>
+        </a:xfrm>
+      </p:grpSpPr>
+      <p:pic>
+        <p:nvPicPr>
+          <p:cNvPr id="196" name="Google Shape;196;p26" title="cooccurrence_jaccard.jpg"/>
+          <p:cNvPicPr preferRelativeResize="0"/>
+          <p:nvPr/>
+        </p:nvPicPr>
+        <p:blipFill>
+          <a:blip r:embed="rId3">
+            <a:alphaModFix/>
+          </a:blip>
+          <a:stretch>
+            <a:fillRect/>
+          </a:stretch>
+        </p:blipFill>
+        <p:spPr>
+          <a:xfrm>
+            <a:off x="0" y="0"/>
+            <a:ext cx="4216402" cy="3162301"/>
+          </a:xfrm>
+          <a:prstGeom prst="rect">
+            <a:avLst/>
+          </a:prstGeom>
+          <a:noFill/>
+          <a:ln>
+            <a:noFill/>
+          </a:ln>
+        </p:spPr>
+      </p:pic>
+      <p:pic>
+        <p:nvPicPr>
+          <p:cNvPr id="197" name="Google Shape;197;p26" title="cooccurrence_phi_signif.jpg"/>
+          <p:cNvPicPr preferRelativeResize="0"/>
+          <p:nvPr/>
+        </p:nvPicPr>
+        <p:blipFill>
+          <a:blip r:embed="rId4">
+            <a:alphaModFix/>
+          </a:blip>
+          <a:stretch>
+            <a:fillRect/>
+          </a:stretch>
+        </p:blipFill>
+        <p:spPr>
+          <a:xfrm>
+            <a:off x="4216400" y="0"/>
+            <a:ext cx="4128973" cy="3096726"/>
+          </a:xfrm>
+          <a:prstGeom prst="rect">
+            <a:avLst/>
+          </a:prstGeom>
+          <a:noFill/>
+          <a:ln>
+            <a:noFill/>
+          </a:ln>
+        </p:spPr>
+      </p:pic>
+      <p:sp>
+        <p:nvSpPr>
+          <p:cNvPr id="198" name="Google Shape;198;p26"/>
+          <p:cNvSpPr txBox="1"/>
+          <p:nvPr/>
+        </p:nvSpPr>
+        <p:spPr>
+          <a:xfrm>
+            <a:off x="5240575" y="3190875"/>
+            <a:ext cx="3918000" cy="461700"/>
+          </a:xfrm>
+          <a:prstGeom prst="rect">
+            <a:avLst/>
+          </a:prstGeom>
+          <a:noFill/>
+          <a:ln>
+            <a:noFill/>
+          </a:ln>
+        </p:spPr>
+        <p:txBody>
+          <a:bodyPr anchorCtr="0" anchor="t" bIns="91425" lIns="91425" spcFirstLastPara="1" rIns="91425" wrap="square" tIns="91425">
+            <a:spAutoFit/>
+          </a:bodyPr>
+          <a:lstStyle/>
+          <a:p>
+            <a:pPr indent="0" lvl="0" marL="0" rtl="0" algn="l">
+              <a:spcBef>
+                <a:spcPts val="0"/>
+              </a:spcBef>
+              <a:spcAft>
+                <a:spcPts val="0"/>
+              </a:spcAft>
+              <a:buNone/>
+            </a:pPr>
+            <a:r>
+              <a:rPr lang="es-419" sz="1800">
+                <a:solidFill>
+                  <a:schemeClr val="dk2"/>
+                </a:solidFill>
+              </a:rPr>
+              <a:t>creo que deberia elegir uno</a:t>
+            </a:r>
+            <a:endParaRPr sz="1800">
+              <a:solidFill>
+                <a:schemeClr val="dk2"/>
+              </a:solidFill>
+            </a:endParaRPr>
+          </a:p>
+        </p:txBody>
+      </p:sp>
+    </p:spTree>
+  </p:cSld>
+  <p:clrMapOvr>
+    <a:masterClrMapping/>
+  </p:clrMapOvr>
+</p:sld>
+</file>
+
+<file path=ppt/slides/slide15.xml><?xml version="1.0" encoding="utf-8"?>
+<p:sld xmlns:a="http://schemas.openxmlformats.org/drawingml/2006/main" xmlns:r="http://schemas.openxmlformats.org/officeDocument/2006/relationships" xmlns:mc="http://schemas.openxmlformats.org/markup-compatibility/2006" xmlns:mv="urn:schemas-microsoft-com:mac:vml" xmlns:p="http://schemas.openxmlformats.org/presentationml/2006/main" xmlns:c="http://schemas.openxmlformats.org/drawingml/2006/chart" xmlns:dgm="http://schemas.openxmlformats.org/drawingml/2006/diagram" xmlns:o="urn:schemas-microsoft-com:office:office" xmlns:v="urn:schemas-microsoft-com:vml" xmlns:pvml="urn:schemas-microsoft-com:office:powerpoint" xmlns:com="http://schemas.openxmlformats.org/drawingml/2006/compatibility" xmlns:p14="http://schemas.microsoft.com/office/powerpoint/2010/main" xmlns:p15="http://schemas.microsoft.com/office/powerpoint/2012/main" xmlns:ahyp="http://schemas.microsoft.com/office/drawing/2018/hyperlinkcolor">
+  <p:cSld>
+    <p:spTree>
+      <p:nvGrpSpPr>
+        <p:cNvPr id="202" name="Shape 202"/>
+        <p:cNvGrpSpPr/>
+        <p:nvPr/>
+      </p:nvGrpSpPr>
+      <p:grpSpPr>
+        <a:xfrm>
+          <a:off x="0" y="0"/>
+          <a:ext cx="0" cy="0"/>
+          <a:chOff x="0" y="0"/>
+          <a:chExt cx="0" cy="0"/>
+        </a:xfrm>
+      </p:grpSpPr>
+      <p:cxnSp>
+        <p:nvCxnSpPr>
+          <p:cNvPr id="203" name="Google Shape;203;p27"/>
+          <p:cNvCxnSpPr/>
+          <p:nvPr/>
+        </p:nvCxnSpPr>
+        <p:spPr>
+          <a:xfrm>
+            <a:off x="3413975" y="1789875"/>
+            <a:ext cx="3153600" cy="0"/>
+          </a:xfrm>
+          <a:prstGeom prst="straightConnector1">
+            <a:avLst/>
+          </a:prstGeom>
+          <a:noFill/>
+          <a:ln cap="flat" cmpd="sng" w="19050">
+            <a:solidFill>
+              <a:schemeClr val="dk2"/>
+            </a:solidFill>
+            <a:prstDash val="solid"/>
+            <a:round/>
+            <a:headEnd len="med" w="med" type="none"/>
+            <a:tailEnd len="med" w="med" type="none"/>
+          </a:ln>
+        </p:spPr>
+      </p:cxnSp>
+      <p:sp>
+        <p:nvSpPr>
+          <p:cNvPr id="204" name="Google Shape;204;p27"/>
+          <p:cNvSpPr/>
+          <p:nvPr/>
+        </p:nvSpPr>
+        <p:spPr>
+          <a:xfrm>
+            <a:off x="4079976" y="1683975"/>
+            <a:ext cx="2068200" cy="163800"/>
+          </a:xfrm>
+          <a:prstGeom prst="roundRect">
+            <a:avLst>
+              <a:gd fmla="val 16667" name="adj"/>
+            </a:avLst>
+          </a:prstGeom>
+          <a:solidFill>
+            <a:srgbClr val="DFEDF6"/>
+          </a:solidFill>
+          <a:ln cap="flat" cmpd="sng" w="9525">
+            <a:solidFill>
+              <a:schemeClr val="dk2"/>
+            </a:solidFill>
+            <a:prstDash val="solid"/>
+            <a:round/>
+            <a:headEnd len="sm" w="sm" type="none"/>
+            <a:tailEnd len="sm" w="sm" type="none"/>
+          </a:ln>
+        </p:spPr>
+        <p:txBody>
+          <a:bodyPr anchorCtr="0" anchor="ctr" bIns="91425" lIns="91425" spcFirstLastPara="1" rIns="91425" wrap="square" tIns="91425">
+            <a:noAutofit/>
+          </a:bodyPr>
+          <a:lstStyle/>
+          <a:p>
+            <a:pPr indent="0" lvl="0" marL="0" rtl="0" algn="ctr">
+              <a:spcBef>
+                <a:spcPts val="0"/>
+              </a:spcBef>
+              <a:spcAft>
+                <a:spcPts val="0"/>
+              </a:spcAft>
+              <a:buNone/>
+            </a:pPr>
+            <a:r>
+              <a:t/>
+            </a:r>
+            <a:endParaRPr/>
+          </a:p>
+        </p:txBody>
+      </p:sp>
+      <p:cxnSp>
+        <p:nvCxnSpPr>
+          <p:cNvPr id="205" name="Google Shape;205;p27"/>
+          <p:cNvCxnSpPr/>
+          <p:nvPr/>
+        </p:nvCxnSpPr>
+        <p:spPr>
+          <a:xfrm>
+            <a:off x="5623649" y="1510600"/>
+            <a:ext cx="0" cy="183000"/>
+          </a:xfrm>
+          <a:prstGeom prst="straightConnector1">
+            <a:avLst/>
+          </a:prstGeom>
+          <a:noFill/>
+          <a:ln cap="flat" cmpd="sng" w="9525">
+            <a:solidFill>
+              <a:schemeClr val="dk2"/>
+            </a:solidFill>
+            <a:prstDash val="solid"/>
+            <a:round/>
+            <a:headEnd len="med" w="med" type="none"/>
+            <a:tailEnd len="med" w="med" type="none"/>
+          </a:ln>
+        </p:spPr>
+      </p:cxnSp>
+      <p:cxnSp>
+        <p:nvCxnSpPr>
+          <p:cNvPr id="206" name="Google Shape;206;p27"/>
+          <p:cNvCxnSpPr/>
+          <p:nvPr/>
+        </p:nvCxnSpPr>
+        <p:spPr>
+          <a:xfrm>
+            <a:off x="5623627" y="1510593"/>
+            <a:ext cx="154200" cy="0"/>
+          </a:xfrm>
+          <a:prstGeom prst="straightConnector1">
+            <a:avLst/>
+          </a:prstGeom>
+          <a:noFill/>
+          <a:ln cap="flat" cmpd="sng" w="9525">
+            <a:solidFill>
+              <a:schemeClr val="dk2"/>
+            </a:solidFill>
+            <a:prstDash val="solid"/>
+            <a:round/>
+            <a:headEnd len="med" w="med" type="none"/>
+            <a:tailEnd len="med" w="med" type="triangle"/>
+          </a:ln>
+        </p:spPr>
+      </p:cxnSp>
+      <p:cxnSp>
+        <p:nvCxnSpPr>
+          <p:cNvPr id="207" name="Google Shape;207;p27"/>
+          <p:cNvCxnSpPr/>
+          <p:nvPr/>
+        </p:nvCxnSpPr>
+        <p:spPr>
+          <a:xfrm>
+            <a:off x="5623649" y="1664700"/>
+            <a:ext cx="0" cy="192600"/>
+          </a:xfrm>
+          <a:prstGeom prst="straightConnector1">
+            <a:avLst/>
+          </a:prstGeom>
+          <a:noFill/>
+          <a:ln cap="flat" cmpd="sng" w="9525">
+            <a:solidFill>
+              <a:schemeClr val="dk2"/>
+            </a:solidFill>
+            <a:prstDash val="dash"/>
+            <a:round/>
+            <a:headEnd len="med" w="med" type="none"/>
+            <a:tailEnd len="med" w="med" type="none"/>
+          </a:ln>
+        </p:spPr>
+      </p:cxnSp>
+      <p:sp>
+        <p:nvSpPr>
+          <p:cNvPr id="208" name="Google Shape;208;p27"/>
+          <p:cNvSpPr txBox="1"/>
+          <p:nvPr/>
+        </p:nvSpPr>
+        <p:spPr>
+          <a:xfrm>
+            <a:off x="4640486" y="1789875"/>
+            <a:ext cx="853500" cy="369300"/>
+          </a:xfrm>
+          <a:prstGeom prst="rect">
+            <a:avLst/>
+          </a:prstGeom>
+          <a:noFill/>
+          <a:ln>
+            <a:noFill/>
+          </a:ln>
+        </p:spPr>
+        <p:txBody>
+          <a:bodyPr anchorCtr="0" anchor="t" bIns="91425" lIns="91425" spcFirstLastPara="1" rIns="91425" wrap="square" tIns="91425">
+            <a:spAutoFit/>
+          </a:bodyPr>
+          <a:lstStyle/>
+          <a:p>
+            <a:pPr indent="0" lvl="0" marL="0" rtl="0" algn="l">
+              <a:spcBef>
+                <a:spcPts val="0"/>
+              </a:spcBef>
+              <a:spcAft>
+                <a:spcPts val="0"/>
+              </a:spcAft>
+              <a:buNone/>
+            </a:pPr>
+            <a:r>
+              <a:rPr lang="es-419" sz="1200">
+                <a:solidFill>
+                  <a:schemeClr val="dk2"/>
+                </a:solidFill>
+              </a:rPr>
+              <a:t>Promotor</a:t>
+            </a:r>
+            <a:endParaRPr sz="1200">
+              <a:solidFill>
+                <a:schemeClr val="dk2"/>
+              </a:solidFill>
+            </a:endParaRPr>
+          </a:p>
+        </p:txBody>
+      </p:sp>
+      <p:sp>
+        <p:nvSpPr>
+          <p:cNvPr id="209" name="Google Shape;209;p27"/>
+          <p:cNvSpPr/>
+          <p:nvPr/>
+        </p:nvSpPr>
+        <p:spPr>
+          <a:xfrm>
+            <a:off x="6567671" y="1679100"/>
+            <a:ext cx="1991100" cy="163800"/>
+          </a:xfrm>
+          <a:prstGeom prst="roundRect">
+            <a:avLst>
+              <a:gd fmla="val 16667" name="adj"/>
+            </a:avLst>
+          </a:prstGeom>
+          <a:solidFill>
+            <a:srgbClr val="97E196"/>
+          </a:solidFill>
+          <a:ln cap="flat" cmpd="sng" w="9525">
+            <a:solidFill>
+              <a:schemeClr val="dk2"/>
+            </a:solidFill>
+            <a:prstDash val="solid"/>
+            <a:round/>
+            <a:headEnd len="sm" w="sm" type="none"/>
+            <a:tailEnd len="sm" w="sm" type="none"/>
+          </a:ln>
+        </p:spPr>
+        <p:txBody>
+          <a:bodyPr anchorCtr="0" anchor="ctr" bIns="91425" lIns="91425" spcFirstLastPara="1" rIns="91425" wrap="square" tIns="91425">
+            <a:noAutofit/>
+          </a:bodyPr>
+          <a:lstStyle/>
+          <a:p>
+            <a:pPr indent="0" lvl="0" marL="0" rtl="0" algn="ctr">
+              <a:spcBef>
+                <a:spcPts val="0"/>
+              </a:spcBef>
+              <a:spcAft>
+                <a:spcPts val="0"/>
+              </a:spcAft>
+              <a:buNone/>
+            </a:pPr>
+            <a:r>
+              <a:t/>
+            </a:r>
+            <a:endParaRPr/>
+          </a:p>
+        </p:txBody>
+      </p:sp>
+      <p:cxnSp>
+        <p:nvCxnSpPr>
+          <p:cNvPr id="210" name="Google Shape;210;p27"/>
+          <p:cNvCxnSpPr/>
+          <p:nvPr/>
+        </p:nvCxnSpPr>
+        <p:spPr>
+          <a:xfrm>
+            <a:off x="1205877" y="1789875"/>
+            <a:ext cx="2151000" cy="0"/>
+          </a:xfrm>
+          <a:prstGeom prst="straightConnector1">
+            <a:avLst/>
+          </a:prstGeom>
+          <a:noFill/>
+          <a:ln cap="flat" cmpd="sng" w="19050">
+            <a:solidFill>
+              <a:srgbClr val="E06666"/>
+            </a:solidFill>
+            <a:prstDash val="solid"/>
+            <a:round/>
+            <a:headEnd len="med" w="med" type="none"/>
+            <a:tailEnd len="med" w="med" type="none"/>
+          </a:ln>
+        </p:spPr>
+      </p:cxnSp>
+      <p:sp>
+        <p:nvSpPr>
+          <p:cNvPr id="211" name="Google Shape;211;p27"/>
+          <p:cNvSpPr/>
+          <p:nvPr/>
+        </p:nvSpPr>
+        <p:spPr>
+          <a:xfrm>
+            <a:off x="3270832" y="1707975"/>
+            <a:ext cx="388200" cy="163800"/>
+          </a:xfrm>
+          <a:prstGeom prst="roundRect">
+            <a:avLst>
+              <a:gd fmla="val 16667" name="adj"/>
+            </a:avLst>
+          </a:prstGeom>
+          <a:solidFill>
+            <a:srgbClr val="97E196"/>
+          </a:solidFill>
+          <a:ln cap="flat" cmpd="sng" w="9525">
+            <a:solidFill>
+              <a:schemeClr val="dk2"/>
+            </a:solidFill>
+            <a:prstDash val="solid"/>
+            <a:round/>
+            <a:headEnd len="sm" w="sm" type="none"/>
+            <a:tailEnd len="sm" w="sm" type="none"/>
+          </a:ln>
+        </p:spPr>
+        <p:txBody>
+          <a:bodyPr anchorCtr="0" anchor="ctr" bIns="91425" lIns="91425" spcFirstLastPara="1" rIns="91425" wrap="square" tIns="91425">
+            <a:noAutofit/>
+          </a:bodyPr>
+          <a:lstStyle/>
+          <a:p>
+            <a:pPr indent="0" lvl="0" marL="0" rtl="0" algn="ctr">
+              <a:spcBef>
+                <a:spcPts val="0"/>
+              </a:spcBef>
+              <a:spcAft>
+                <a:spcPts val="0"/>
+              </a:spcAft>
+              <a:buNone/>
+            </a:pPr>
+            <a:r>
+              <a:t/>
+            </a:r>
+            <a:endParaRPr/>
+          </a:p>
+        </p:txBody>
+      </p:sp>
+      <p:sp>
+        <p:nvSpPr>
+          <p:cNvPr id="212" name="Google Shape;212;p27"/>
+          <p:cNvSpPr txBox="1"/>
+          <p:nvPr/>
+        </p:nvSpPr>
+        <p:spPr>
+          <a:xfrm>
+            <a:off x="7258525" y="1789875"/>
+            <a:ext cx="853500" cy="369300"/>
+          </a:xfrm>
+          <a:prstGeom prst="rect">
+            <a:avLst/>
+          </a:prstGeom>
+          <a:noFill/>
+          <a:ln>
+            <a:noFill/>
+          </a:ln>
+        </p:spPr>
+        <p:txBody>
+          <a:bodyPr anchorCtr="0" anchor="t" bIns="91425" lIns="91425" spcFirstLastPara="1" rIns="91425" wrap="square" tIns="91425">
+            <a:spAutoFit/>
+          </a:bodyPr>
+          <a:lstStyle/>
+          <a:p>
+            <a:pPr indent="0" lvl="0" marL="0" rtl="0" algn="l">
+              <a:spcBef>
+                <a:spcPts val="0"/>
+              </a:spcBef>
+              <a:spcAft>
+                <a:spcPts val="0"/>
+              </a:spcAft>
+              <a:buNone/>
+            </a:pPr>
+            <a:r>
+              <a:rPr lang="es-419" sz="1200">
+                <a:solidFill>
+                  <a:schemeClr val="dk2"/>
+                </a:solidFill>
+              </a:rPr>
+              <a:t>EGFP</a:t>
+            </a:r>
+            <a:endParaRPr sz="1200">
+              <a:solidFill>
+                <a:schemeClr val="dk2"/>
+              </a:solidFill>
+            </a:endParaRPr>
+          </a:p>
+        </p:txBody>
+      </p:sp>
+      <p:sp>
+        <p:nvSpPr>
+          <p:cNvPr id="213" name="Google Shape;213;p27"/>
+          <p:cNvSpPr txBox="1"/>
+          <p:nvPr/>
+        </p:nvSpPr>
+        <p:spPr>
+          <a:xfrm>
+            <a:off x="3535103" y="1417450"/>
+            <a:ext cx="680400" cy="369300"/>
+          </a:xfrm>
+          <a:prstGeom prst="rect">
+            <a:avLst/>
+          </a:prstGeom>
+          <a:noFill/>
+          <a:ln>
+            <a:noFill/>
+          </a:ln>
+        </p:spPr>
+        <p:txBody>
+          <a:bodyPr anchorCtr="0" anchor="t" bIns="91425" lIns="91425" spcFirstLastPara="1" rIns="91425" wrap="square" tIns="91425">
+            <a:spAutoFit/>
+          </a:bodyPr>
+          <a:lstStyle/>
+          <a:p>
+            <a:pPr indent="0" lvl="0" marL="0" rtl="0" algn="l">
+              <a:spcBef>
+                <a:spcPts val="0"/>
+              </a:spcBef>
+              <a:spcAft>
+                <a:spcPts val="0"/>
+              </a:spcAft>
+              <a:buNone/>
+            </a:pPr>
+            <a:r>
+              <a:rPr lang="es-419" sz="1200">
+                <a:solidFill>
+                  <a:schemeClr val="dk2"/>
+                </a:solidFill>
+              </a:rPr>
+              <a:t>Primer</a:t>
+            </a:r>
+            <a:endParaRPr sz="1200">
+              <a:solidFill>
+                <a:schemeClr val="dk2"/>
+              </a:solidFill>
+            </a:endParaRPr>
+          </a:p>
+        </p:txBody>
+      </p:sp>
+      <p:sp>
+        <p:nvSpPr>
+          <p:cNvPr id="214" name="Google Shape;214;p27"/>
+          <p:cNvSpPr txBox="1"/>
+          <p:nvPr/>
+        </p:nvSpPr>
+        <p:spPr>
+          <a:xfrm>
+            <a:off x="6038977" y="1417450"/>
+            <a:ext cx="680400" cy="369300"/>
+          </a:xfrm>
+          <a:prstGeom prst="rect">
+            <a:avLst/>
+          </a:prstGeom>
+          <a:noFill/>
+          <a:ln>
+            <a:noFill/>
+          </a:ln>
+        </p:spPr>
+        <p:txBody>
+          <a:bodyPr anchorCtr="0" anchor="t" bIns="91425" lIns="91425" spcFirstLastPara="1" rIns="91425" wrap="square" tIns="91425">
+            <a:spAutoFit/>
+          </a:bodyPr>
+          <a:lstStyle/>
+          <a:p>
+            <a:pPr indent="0" lvl="0" marL="0" rtl="0" algn="l">
+              <a:spcBef>
+                <a:spcPts val="0"/>
+              </a:spcBef>
+              <a:spcAft>
+                <a:spcPts val="0"/>
+              </a:spcAft>
+              <a:buNone/>
+            </a:pPr>
+            <a:r>
+              <a:rPr lang="es-419" sz="1200">
+                <a:solidFill>
+                  <a:schemeClr val="dk2"/>
+                </a:solidFill>
+              </a:rPr>
+              <a:t>Primer</a:t>
+            </a:r>
+            <a:endParaRPr sz="1200">
+              <a:solidFill>
+                <a:schemeClr val="dk2"/>
+              </a:solidFill>
+            </a:endParaRPr>
+          </a:p>
+        </p:txBody>
+      </p:sp>
+      <p:sp>
+        <p:nvSpPr>
+          <p:cNvPr id="215" name="Google Shape;215;p27"/>
+          <p:cNvSpPr txBox="1"/>
+          <p:nvPr/>
+        </p:nvSpPr>
+        <p:spPr>
+          <a:xfrm>
+            <a:off x="1579951" y="1725530"/>
+            <a:ext cx="1561800" cy="554100"/>
+          </a:xfrm>
+          <a:prstGeom prst="rect">
+            <a:avLst/>
+          </a:prstGeom>
+          <a:noFill/>
+          <a:ln>
+            <a:noFill/>
+          </a:ln>
+        </p:spPr>
+        <p:txBody>
+          <a:bodyPr anchorCtr="0" anchor="t" bIns="91425" lIns="91425" spcFirstLastPara="1" rIns="91425" wrap="square" tIns="91425">
+            <a:spAutoFit/>
+          </a:bodyPr>
+          <a:lstStyle/>
+          <a:p>
+            <a:pPr indent="0" lvl="0" marL="0" rtl="0" algn="ctr">
+              <a:spcBef>
+                <a:spcPts val="0"/>
+              </a:spcBef>
+              <a:spcAft>
+                <a:spcPts val="0"/>
+              </a:spcAft>
+              <a:buNone/>
+            </a:pPr>
+            <a:r>
+              <a:rPr lang="es-419" sz="1200">
+                <a:solidFill>
+                  <a:schemeClr val="dk2"/>
+                </a:solidFill>
+              </a:rPr>
+              <a:t>Secuencia aleatoria </a:t>
+            </a:r>
+            <a:endParaRPr sz="1200">
+              <a:solidFill>
+                <a:schemeClr val="dk2"/>
+              </a:solidFill>
+            </a:endParaRPr>
+          </a:p>
+          <a:p>
+            <a:pPr indent="0" lvl="0" marL="0" rtl="0" algn="ctr">
+              <a:spcBef>
+                <a:spcPts val="0"/>
+              </a:spcBef>
+              <a:spcAft>
+                <a:spcPts val="0"/>
+              </a:spcAft>
+              <a:buNone/>
+            </a:pPr>
+            <a:r>
+              <a:rPr lang="es-419" sz="1200">
+                <a:solidFill>
+                  <a:schemeClr val="dk2"/>
+                </a:solidFill>
+              </a:rPr>
+              <a:t>(x20 réplicas)</a:t>
+            </a:r>
+            <a:endParaRPr sz="1200">
+              <a:solidFill>
+                <a:schemeClr val="dk2"/>
+              </a:solidFill>
+            </a:endParaRPr>
+          </a:p>
+        </p:txBody>
+      </p:sp>
+      <p:sp>
+        <p:nvSpPr>
+          <p:cNvPr id="216" name="Google Shape;216;p27"/>
+          <p:cNvSpPr txBox="1"/>
+          <p:nvPr/>
+        </p:nvSpPr>
+        <p:spPr>
+          <a:xfrm>
+            <a:off x="5120912" y="1091659"/>
+            <a:ext cx="1028700" cy="461700"/>
+          </a:xfrm>
+          <a:prstGeom prst="rect">
+            <a:avLst/>
+          </a:prstGeom>
+          <a:noFill/>
+          <a:ln>
+            <a:noFill/>
+          </a:ln>
+        </p:spPr>
+        <p:txBody>
+          <a:bodyPr anchorCtr="0" anchor="t" bIns="91425" lIns="91425" spcFirstLastPara="1" rIns="91425" wrap="square" tIns="91425">
+            <a:spAutoFit/>
+          </a:bodyPr>
+          <a:lstStyle/>
+          <a:p>
+            <a:pPr indent="0" lvl="0" marL="0" rtl="0" algn="ctr">
+              <a:spcBef>
+                <a:spcPts val="0"/>
+              </a:spcBef>
+              <a:spcAft>
+                <a:spcPts val="0"/>
+              </a:spcAft>
+              <a:buNone/>
+            </a:pPr>
+            <a:r>
+              <a:rPr lang="es-419" sz="900">
+                <a:solidFill>
+                  <a:schemeClr val="dk2"/>
+                </a:solidFill>
+              </a:rPr>
+              <a:t>posición</a:t>
+            </a:r>
+            <a:endParaRPr sz="900">
+              <a:solidFill>
+                <a:schemeClr val="dk2"/>
+              </a:solidFill>
+            </a:endParaRPr>
+          </a:p>
+          <a:p>
+            <a:pPr indent="0" lvl="0" marL="0" rtl="0" algn="ctr">
+              <a:spcBef>
+                <a:spcPts val="0"/>
+              </a:spcBef>
+              <a:spcAft>
+                <a:spcPts val="0"/>
+              </a:spcAft>
+              <a:buNone/>
+            </a:pPr>
+            <a:r>
+              <a:rPr lang="es-419" sz="900">
+                <a:solidFill>
+                  <a:schemeClr val="dk2"/>
+                </a:solidFill>
+              </a:rPr>
+              <a:t>0</a:t>
+            </a:r>
+            <a:endParaRPr sz="900">
+              <a:solidFill>
+                <a:schemeClr val="dk2"/>
+              </a:solidFill>
+            </a:endParaRPr>
+          </a:p>
+        </p:txBody>
+      </p:sp>
+      <p:sp>
+        <p:nvSpPr>
+          <p:cNvPr id="217" name="Google Shape;217;p27"/>
+          <p:cNvSpPr txBox="1"/>
+          <p:nvPr/>
+        </p:nvSpPr>
+        <p:spPr>
+          <a:xfrm>
+            <a:off x="0" y="0"/>
+            <a:ext cx="9336300" cy="692700"/>
+          </a:xfrm>
+          <a:prstGeom prst="rect">
+            <a:avLst/>
+          </a:prstGeom>
+          <a:noFill/>
+          <a:ln>
+            <a:noFill/>
+          </a:ln>
+        </p:spPr>
+        <p:txBody>
+          <a:bodyPr anchorCtr="0" anchor="t" bIns="91425" lIns="91425" spcFirstLastPara="1" rIns="91425" wrap="square" tIns="91425">
+            <a:spAutoFit/>
+          </a:bodyPr>
+          <a:lstStyle/>
+          <a:p>
+            <a:pPr indent="0" lvl="0" marL="0" rtl="0" algn="l">
+              <a:spcBef>
+                <a:spcPts val="0"/>
+              </a:spcBef>
+              <a:spcAft>
+                <a:spcPts val="0"/>
+              </a:spcAft>
+              <a:buNone/>
+            </a:pPr>
+            <a:r>
+              <a:rPr b="1" lang="es-419" sz="1100">
+                <a:solidFill>
+                  <a:schemeClr val="dk1"/>
+                </a:solidFill>
+              </a:rPr>
+              <a:t>Fig. M15. Esquema de la estrategia de predicción con Puffin.</a:t>
+            </a:r>
+            <a:r>
+              <a:rPr lang="es-419" sz="1100">
+                <a:solidFill>
+                  <a:schemeClr val="dk1"/>
+                </a:solidFill>
+              </a:rPr>
+              <a:t> Cada promotor (252 pb) se extendió a 650 pb con secuencia real conocida (</a:t>
+            </a:r>
+            <a:r>
+              <a:rPr i="1" lang="es-419" sz="1100">
+                <a:solidFill>
+                  <a:schemeClr val="dk1"/>
+                </a:solidFill>
+              </a:rPr>
+              <a:t>primers</a:t>
+            </a:r>
+            <a:r>
+              <a:rPr lang="es-419" sz="1100">
+                <a:solidFill>
+                  <a:schemeClr val="dk1"/>
+                </a:solidFill>
+              </a:rPr>
+              <a:t>/EGFP) de un lado y relleno aleatorio del otro, en la región donde se desconoce la secuencia. La predicción se promedió entre 20 variantes de relleno, tomando el </a:t>
+            </a:r>
+            <a:r>
+              <a:rPr i="1" lang="es-419" sz="1100">
+                <a:solidFill>
+                  <a:schemeClr val="dk1"/>
+                </a:solidFill>
+              </a:rPr>
+              <a:t>score</a:t>
+            </a:r>
+            <a:r>
+              <a:rPr lang="es-419" sz="1100">
+                <a:solidFill>
+                  <a:schemeClr val="dk1"/>
+                </a:solidFill>
+              </a:rPr>
+              <a:t> en la posición 0 (TSS) como estimador de actividad predicha. </a:t>
+            </a:r>
+            <a:endParaRPr/>
+          </a:p>
+        </p:txBody>
+      </p:sp>
+      <p:sp>
+        <p:nvSpPr>
+          <p:cNvPr id="218" name="Google Shape;218;p27"/>
+          <p:cNvSpPr txBox="1"/>
+          <p:nvPr/>
+        </p:nvSpPr>
+        <p:spPr>
+          <a:xfrm>
+            <a:off x="4578992" y="2453700"/>
+            <a:ext cx="680400" cy="384900"/>
+          </a:xfrm>
+          <a:prstGeom prst="rect">
+            <a:avLst/>
+          </a:prstGeom>
+          <a:noFill/>
+          <a:ln>
+            <a:noFill/>
+          </a:ln>
+        </p:spPr>
+        <p:txBody>
+          <a:bodyPr anchorCtr="0" anchor="t" bIns="91425" lIns="91425" spcFirstLastPara="1" rIns="91425" wrap="square" tIns="91425">
+            <a:spAutoFit/>
+          </a:bodyPr>
+          <a:lstStyle/>
+          <a:p>
+            <a:pPr indent="0" lvl="0" marL="0" rtl="0" algn="l">
+              <a:spcBef>
+                <a:spcPts val="0"/>
+              </a:spcBef>
+              <a:spcAft>
+                <a:spcPts val="0"/>
+              </a:spcAft>
+              <a:buNone/>
+            </a:pPr>
+            <a:r>
+              <a:rPr lang="es-419" sz="1300">
+                <a:solidFill>
+                  <a:schemeClr val="dk2"/>
+                </a:solidFill>
+              </a:rPr>
+              <a:t>650pb</a:t>
+            </a:r>
+            <a:endParaRPr sz="1300">
+              <a:solidFill>
+                <a:schemeClr val="dk2"/>
+              </a:solidFill>
+            </a:endParaRPr>
+          </a:p>
+        </p:txBody>
+      </p:sp>
+      <p:sp>
+        <p:nvSpPr>
+          <p:cNvPr id="219" name="Google Shape;219;p27"/>
+          <p:cNvSpPr/>
+          <p:nvPr/>
+        </p:nvSpPr>
+        <p:spPr>
+          <a:xfrm rot="5400000">
+            <a:off x="4761375" y="-1280925"/>
+            <a:ext cx="225300" cy="7346400"/>
+          </a:xfrm>
+          <a:prstGeom prst="rightBrace">
+            <a:avLst>
+              <a:gd fmla="val 50000" name="adj1"/>
+              <a:gd fmla="val 50000" name="adj2"/>
+            </a:avLst>
+          </a:prstGeom>
+          <a:noFill/>
+          <a:ln cap="flat" cmpd="sng" w="9525">
+            <a:solidFill>
+              <a:schemeClr val="dk2"/>
+            </a:solidFill>
+            <a:prstDash val="solid"/>
+            <a:round/>
+            <a:headEnd len="sm" w="sm" type="none"/>
+            <a:tailEnd len="sm" w="sm" type="none"/>
+          </a:ln>
+        </p:spPr>
+        <p:txBody>
+          <a:bodyPr anchorCtr="0" anchor="ctr" bIns="91425" lIns="91425" spcFirstLastPara="1" rIns="91425" wrap="square" tIns="91425">
+            <a:noAutofit/>
+          </a:bodyPr>
+          <a:lstStyle/>
+          <a:p>
+            <a:pPr indent="0" lvl="0" marL="0" rtl="0" algn="ctr">
+              <a:spcBef>
+                <a:spcPts val="0"/>
+              </a:spcBef>
+              <a:spcAft>
+                <a:spcPts val="0"/>
+              </a:spcAft>
+              <a:buNone/>
+            </a:pPr>
+            <a:r>
+              <a:t/>
             </a:r>
             <a:endParaRPr/>
           </a:p>
@@ -7403,7 +10698,7 @@
   <p:cSld>
     <p:spTree>
       <p:nvGrpSpPr>
-        <p:cNvPr id="58" name="Shape 58"/>
+        <p:cNvPr id="72" name="Shape 72"/>
         <p:cNvGrpSpPr/>
         <p:nvPr/>
       </p:nvGrpSpPr>
@@ -7417,7 +10712,7 @@
       </p:grpSpPr>
       <p:pic>
         <p:nvPicPr>
-          <p:cNvPr id="59" name="Google Shape;59;p14" title="CMV-STRONG_0002_zoverlay.jpg"/>
+          <p:cNvPr id="73" name="Google Shape;73;p14" title="CMV-STRONG_0002_zoverlay.jpg"/>
           <p:cNvPicPr preferRelativeResize="0"/>
           <p:nvPr/>
         </p:nvPicPr>
@@ -7445,7 +10740,7 @@
       </p:pic>
       <p:pic>
         <p:nvPicPr>
-          <p:cNvPr id="60" name="Google Shape;60;p14" title="CMV-wt_0001_zoverlay.jpg"/>
+          <p:cNvPr id="74" name="Google Shape;74;p14" title="CMV-wt_0001_zoverlay.jpg"/>
           <p:cNvPicPr preferRelativeResize="0"/>
           <p:nvPr/>
         </p:nvPicPr>
@@ -7473,7 +10768,7 @@
       </p:pic>
       <p:pic>
         <p:nvPicPr>
-          <p:cNvPr id="61" name="Google Shape;61;p14" title="Screenshot 2026-03-06 174954.png"/>
+          <p:cNvPr id="75" name="Google Shape;75;p14" title="Screenshot 2026-03-06 174954.png"/>
           <p:cNvPicPr preferRelativeResize="0"/>
           <p:nvPr/>
         </p:nvPicPr>
@@ -7501,7 +10796,7 @@
       </p:pic>
       <p:sp>
         <p:nvSpPr>
-          <p:cNvPr id="62" name="Google Shape;62;p14"/>
+          <p:cNvPr id="76" name="Google Shape;76;p14"/>
           <p:cNvSpPr txBox="1"/>
           <p:nvPr/>
         </p:nvSpPr>
@@ -7551,7 +10846,7 @@
       </p:sp>
       <p:sp>
         <p:nvSpPr>
-          <p:cNvPr id="63" name="Google Shape;63;p14"/>
+          <p:cNvPr id="77" name="Google Shape;77;p14"/>
           <p:cNvSpPr txBox="1"/>
           <p:nvPr/>
         </p:nvSpPr>
@@ -7601,7 +10896,7 @@
       </p:sp>
       <p:cxnSp>
         <p:nvCxnSpPr>
-          <p:cNvPr id="64" name="Google Shape;64;p14"/>
+          <p:cNvPr id="78" name="Google Shape;78;p14"/>
           <p:cNvCxnSpPr/>
           <p:nvPr/>
         </p:nvCxnSpPr>
@@ -7627,14 +10922,14 @@
       </p:cxnSp>
       <p:sp>
         <p:nvSpPr>
-          <p:cNvPr id="65" name="Google Shape;65;p14"/>
+          <p:cNvPr id="79" name="Google Shape;79;p14"/>
           <p:cNvSpPr txBox="1"/>
           <p:nvPr/>
         </p:nvSpPr>
         <p:spPr>
           <a:xfrm>
             <a:off x="223475" y="4280475"/>
-            <a:ext cx="8920500" cy="1262100"/>
+            <a:ext cx="8920500" cy="954300"/>
           </a:xfrm>
           <a:prstGeom prst="rect">
             <a:avLst/>
@@ -7740,261 +11035,6 @@
               <a:t>B- Imagen de microscopía de fluorescencia, de líneas HEK293TA2 estables con la versión original del plásmido backbone (superior) o la versión con el sitio de splicing 3´ mutado (inferior) que fue utilizado en los ensayos de esta tesis.</a:t>
             </a:r>
             <a:endParaRPr sz="1000">
-              <a:solidFill>
-                <a:schemeClr val="dk2"/>
-              </a:solidFill>
-            </a:endParaRPr>
-          </a:p>
-          <a:p>
-            <a:pPr indent="0" lvl="0" marL="0" rtl="0" algn="l">
-              <a:spcBef>
-                <a:spcPts val="0"/>
-              </a:spcBef>
-              <a:spcAft>
-                <a:spcPts val="0"/>
-              </a:spcAft>
-              <a:buNone/>
-            </a:pPr>
-            <a:r>
-              <a:rPr lang="es-419" sz="1000">
-                <a:solidFill>
-                  <a:schemeClr val="dk2"/>
-                </a:solidFill>
-              </a:rPr>
-              <a:t>C- PCR de punto final para visualizar la correcta incorporación de la librería (~300pb) en el plásmido backbone y la ausencia del original promotor CMV. (~700pb)  </a:t>
-            </a:r>
-            <a:endParaRPr sz="1000">
-              <a:solidFill>
-                <a:schemeClr val="dk2"/>
-              </a:solidFill>
-            </a:endParaRPr>
-          </a:p>
-        </p:txBody>
-      </p:sp>
-      <p:pic>
-        <p:nvPicPr>
-          <p:cNvPr id="66" name="Google Shape;66;p14" title="PCR_GA_all_prom_cloning_control.png"/>
-          <p:cNvPicPr preferRelativeResize="0"/>
-          <p:nvPr/>
-        </p:nvPicPr>
-        <p:blipFill rotWithShape="1">
-          <a:blip r:embed="rId6">
-            <a:alphaModFix/>
-          </a:blip>
-          <a:srcRect b="0" l="81723" r="0" t="15846"/>
-          <a:stretch/>
-        </p:blipFill>
-        <p:spPr>
-          <a:xfrm>
-            <a:off x="7556012" y="990988"/>
-            <a:ext cx="457324" cy="1901124"/>
-          </a:xfrm>
-          <a:prstGeom prst="rect">
-            <a:avLst/>
-          </a:prstGeom>
-          <a:noFill/>
-          <a:ln>
-            <a:noFill/>
-          </a:ln>
-        </p:spPr>
-      </p:pic>
-      <p:pic>
-        <p:nvPicPr>
-          <p:cNvPr id="67" name="Google Shape;67;p14" title="PCR_GA_all_prom_cloning_control.png"/>
-          <p:cNvPicPr preferRelativeResize="0"/>
-          <p:nvPr/>
-        </p:nvPicPr>
-        <p:blipFill rotWithShape="1">
-          <a:blip r:embed="rId6">
-            <a:alphaModFix/>
-          </a:blip>
-          <a:srcRect b="0" l="0" r="84270" t="15846"/>
-          <a:stretch/>
-        </p:blipFill>
-        <p:spPr>
-          <a:xfrm>
-            <a:off x="6790881" y="991000"/>
-            <a:ext cx="393601" cy="1901100"/>
-          </a:xfrm>
-          <a:prstGeom prst="rect">
-            <a:avLst/>
-          </a:prstGeom>
-          <a:noFill/>
-          <a:ln>
-            <a:noFill/>
-          </a:ln>
-        </p:spPr>
-      </p:pic>
-      <p:pic>
-        <p:nvPicPr>
-          <p:cNvPr id="68" name="Google Shape;68;p14" title="PCR_GA_all_prom_cloning_control.png"/>
-          <p:cNvPicPr preferRelativeResize="0"/>
-          <p:nvPr/>
-        </p:nvPicPr>
-        <p:blipFill rotWithShape="1">
-          <a:blip r:embed="rId6">
-            <a:alphaModFix/>
-          </a:blip>
-          <a:srcRect b="0" l="41399" r="44577" t="15846"/>
-          <a:stretch/>
-        </p:blipFill>
-        <p:spPr>
-          <a:xfrm>
-            <a:off x="7194796" y="990988"/>
-            <a:ext cx="350900" cy="1901124"/>
-          </a:xfrm>
-          <a:prstGeom prst="rect">
-            <a:avLst/>
-          </a:prstGeom>
-          <a:noFill/>
-          <a:ln>
-            <a:noFill/>
-          </a:ln>
-        </p:spPr>
-      </p:pic>
-      <p:sp>
-        <p:nvSpPr>
-          <p:cNvPr id="69" name="Google Shape;69;p14"/>
-          <p:cNvSpPr txBox="1"/>
-          <p:nvPr/>
-        </p:nvSpPr>
-        <p:spPr>
-          <a:xfrm>
-            <a:off x="6740695" y="750072"/>
-            <a:ext cx="555900" cy="354000"/>
-          </a:xfrm>
-          <a:prstGeom prst="rect">
-            <a:avLst/>
-          </a:prstGeom>
-          <a:noFill/>
-          <a:ln>
-            <a:noFill/>
-          </a:ln>
-        </p:spPr>
-        <p:txBody>
-          <a:bodyPr anchorCtr="0" anchor="t" bIns="91425" lIns="91425" spcFirstLastPara="1" rIns="91425" wrap="square" tIns="91425">
-            <a:spAutoFit/>
-          </a:bodyPr>
-          <a:lstStyle/>
-          <a:p>
-            <a:pPr indent="0" lvl="0" marL="0" rtl="0" algn="l">
-              <a:spcBef>
-                <a:spcPts val="0"/>
-              </a:spcBef>
-              <a:spcAft>
-                <a:spcPts val="0"/>
-              </a:spcAft>
-              <a:buNone/>
-            </a:pPr>
-            <a:r>
-              <a:rPr lang="es-419" sz="1100">
-                <a:solidFill>
-                  <a:schemeClr val="dk2"/>
-                </a:solidFill>
-              </a:rPr>
-              <a:t>CMV</a:t>
-            </a:r>
-            <a:endParaRPr sz="1100">
-              <a:solidFill>
-                <a:schemeClr val="dk2"/>
-              </a:solidFill>
-            </a:endParaRPr>
-          </a:p>
-        </p:txBody>
-      </p:sp>
-      <p:sp>
-        <p:nvSpPr>
-          <p:cNvPr id="70" name="Google Shape;70;p14"/>
-          <p:cNvSpPr txBox="1"/>
-          <p:nvPr/>
-        </p:nvSpPr>
-        <p:spPr>
-          <a:xfrm>
-            <a:off x="7182070" y="747664"/>
-            <a:ext cx="555900" cy="354000"/>
-          </a:xfrm>
-          <a:prstGeom prst="rect">
-            <a:avLst/>
-          </a:prstGeom>
-          <a:noFill/>
-          <a:ln>
-            <a:noFill/>
-          </a:ln>
-        </p:spPr>
-        <p:txBody>
-          <a:bodyPr anchorCtr="0" anchor="t" bIns="91425" lIns="91425" spcFirstLastPara="1" rIns="91425" wrap="square" tIns="91425">
-            <a:spAutoFit/>
-          </a:bodyPr>
-          <a:lstStyle/>
-          <a:p>
-            <a:pPr indent="0" lvl="0" marL="0" rtl="0" algn="l">
-              <a:spcBef>
-                <a:spcPts val="0"/>
-              </a:spcBef>
-              <a:spcAft>
-                <a:spcPts val="0"/>
-              </a:spcAft>
-              <a:buNone/>
-            </a:pPr>
-            <a:r>
-              <a:rPr lang="es-419" sz="1100">
-                <a:solidFill>
-                  <a:schemeClr val="dk2"/>
-                </a:solidFill>
-              </a:rPr>
-              <a:t>Lib</a:t>
-            </a:r>
-            <a:endParaRPr sz="1100">
-              <a:solidFill>
-                <a:schemeClr val="dk2"/>
-              </a:solidFill>
-            </a:endParaRPr>
-          </a:p>
-        </p:txBody>
-      </p:sp>
-      <p:sp>
-        <p:nvSpPr>
-          <p:cNvPr id="71" name="Google Shape;71;p14"/>
-          <p:cNvSpPr txBox="1"/>
-          <p:nvPr/>
-        </p:nvSpPr>
-        <p:spPr>
-          <a:xfrm>
-            <a:off x="7478956" y="745250"/>
-            <a:ext cx="686100" cy="354000"/>
-          </a:xfrm>
-          <a:prstGeom prst="rect">
-            <a:avLst/>
-          </a:prstGeom>
-          <a:noFill/>
-          <a:ln>
-            <a:noFill/>
-          </a:ln>
-        </p:spPr>
-        <p:txBody>
-          <a:bodyPr anchorCtr="0" anchor="t" bIns="91425" lIns="91425" spcFirstLastPara="1" rIns="91425" wrap="square" tIns="91425">
-            <a:spAutoFit/>
-          </a:bodyPr>
-          <a:lstStyle/>
-          <a:p>
-            <a:pPr indent="0" lvl="0" marL="0" rtl="0" algn="l">
-              <a:spcBef>
-                <a:spcPts val="0"/>
-              </a:spcBef>
-              <a:spcAft>
-                <a:spcPts val="0"/>
-              </a:spcAft>
-              <a:buNone/>
-            </a:pPr>
-            <a:r>
-              <a:rPr lang="es-419" sz="1100">
-                <a:solidFill>
-                  <a:schemeClr val="dk2"/>
-                </a:solidFill>
-              </a:rPr>
-              <a:t>Ladder</a:t>
-            </a:r>
-            <a:endParaRPr sz="1100">
               <a:solidFill>
                 <a:schemeClr val="dk2"/>
               </a:solidFill>
@@ -8015,7 +11055,7 @@
   <p:cSld>
     <p:spTree>
       <p:nvGrpSpPr>
-        <p:cNvPr id="75" name="Shape 75"/>
+        <p:cNvPr id="83" name="Shape 83"/>
         <p:cNvGrpSpPr/>
         <p:nvPr/>
       </p:nvGrpSpPr>
@@ -8027,26 +11067,109 @@
           <a:chExt cx="0" cy="0"/>
         </a:xfrm>
       </p:grpSpPr>
+      <p:pic>
+        <p:nvPicPr>
+          <p:cNvPr id="84" name="Google Shape;84;p15" title="PCR_GA_all_prom_cloning_control.png"/>
+          <p:cNvPicPr preferRelativeResize="0"/>
+          <p:nvPr/>
+        </p:nvPicPr>
+        <p:blipFill rotWithShape="1">
+          <a:blip r:embed="rId3">
+            <a:alphaModFix/>
+          </a:blip>
+          <a:srcRect b="0" l="81723" r="0" t="15846"/>
+          <a:stretch/>
+        </p:blipFill>
+        <p:spPr>
+          <a:xfrm>
+            <a:off x="1540237" y="670638"/>
+            <a:ext cx="457324" cy="1901124"/>
+          </a:xfrm>
+          <a:prstGeom prst="rect">
+            <a:avLst/>
+          </a:prstGeom>
+          <a:noFill/>
+          <a:ln>
+            <a:noFill/>
+          </a:ln>
+        </p:spPr>
+      </p:pic>
+      <p:pic>
+        <p:nvPicPr>
+          <p:cNvPr id="85" name="Google Shape;85;p15" title="PCR_GA_all_prom_cloning_control.png"/>
+          <p:cNvPicPr preferRelativeResize="0"/>
+          <p:nvPr/>
+        </p:nvPicPr>
+        <p:blipFill rotWithShape="1">
+          <a:blip r:embed="rId3">
+            <a:alphaModFix/>
+          </a:blip>
+          <a:srcRect b="0" l="0" r="84270" t="15846"/>
+          <a:stretch/>
+        </p:blipFill>
+        <p:spPr>
+          <a:xfrm>
+            <a:off x="775106" y="670650"/>
+            <a:ext cx="393601" cy="1901100"/>
+          </a:xfrm>
+          <a:prstGeom prst="rect">
+            <a:avLst/>
+          </a:prstGeom>
+          <a:noFill/>
+          <a:ln>
+            <a:noFill/>
+          </a:ln>
+        </p:spPr>
+      </p:pic>
+      <p:pic>
+        <p:nvPicPr>
+          <p:cNvPr id="86" name="Google Shape;86;p15" title="PCR_GA_all_prom_cloning_control.png"/>
+          <p:cNvPicPr preferRelativeResize="0"/>
+          <p:nvPr/>
+        </p:nvPicPr>
+        <p:blipFill rotWithShape="1">
+          <a:blip r:embed="rId3">
+            <a:alphaModFix/>
+          </a:blip>
+          <a:srcRect b="0" l="41399" r="44577" t="15846"/>
+          <a:stretch/>
+        </p:blipFill>
+        <p:spPr>
+          <a:xfrm>
+            <a:off x="1179021" y="670638"/>
+            <a:ext cx="350900" cy="1901124"/>
+          </a:xfrm>
+          <a:prstGeom prst="rect">
+            <a:avLst/>
+          </a:prstGeom>
+          <a:noFill/>
+          <a:ln>
+            <a:noFill/>
+          </a:ln>
+        </p:spPr>
+      </p:pic>
       <p:sp>
         <p:nvSpPr>
-          <p:cNvPr id="76" name="Google Shape;76;p15"/>
+          <p:cNvPr id="87" name="Google Shape;87;p15"/>
           <p:cNvSpPr txBox="1"/>
-          <p:nvPr>
-            <p:ph type="title"/>
-          </p:nvPr>
+          <p:nvPr/>
         </p:nvSpPr>
         <p:spPr>
           <a:xfrm>
-            <a:off x="311700" y="445025"/>
-            <a:ext cx="8520600" cy="572700"/>
-          </a:xfrm>
-          <a:prstGeom prst="rect">
-            <a:avLst/>
-          </a:prstGeom>
+            <a:off x="724920" y="429722"/>
+            <a:ext cx="555900" cy="354000"/>
+          </a:xfrm>
+          <a:prstGeom prst="rect">
+            <a:avLst/>
+          </a:prstGeom>
+          <a:noFill/>
+          <a:ln>
+            <a:noFill/>
+          </a:ln>
         </p:spPr>
         <p:txBody>
           <a:bodyPr anchorCtr="0" anchor="t" bIns="91425" lIns="91425" spcFirstLastPara="1" rIns="91425" wrap="square" tIns="91425">
-            <a:normAutofit fontScale="90000"/>
+            <a:spAutoFit/>
           </a:bodyPr>
           <a:lstStyle/>
           <a:p>
@@ -8060,33 +11183,43 @@
               <a:buNone/>
             </a:pPr>
             <a:r>
-              <a:rPr lang="es-419"/>
-              <a:t>potencia</a:t>
-            </a:r>
-            <a:endParaRPr/>
+              <a:rPr lang="es-419" sz="1100">
+                <a:solidFill>
+                  <a:schemeClr val="dk2"/>
+                </a:solidFill>
+              </a:rPr>
+              <a:t>CMV</a:t>
+            </a:r>
+            <a:endParaRPr sz="1100">
+              <a:solidFill>
+                <a:schemeClr val="dk2"/>
+              </a:solidFill>
+            </a:endParaRPr>
           </a:p>
         </p:txBody>
       </p:sp>
       <p:sp>
         <p:nvSpPr>
-          <p:cNvPr id="77" name="Google Shape;77;p15"/>
+          <p:cNvPr id="88" name="Google Shape;88;p15"/>
           <p:cNvSpPr txBox="1"/>
-          <p:nvPr>
-            <p:ph idx="1" type="body"/>
-          </p:nvPr>
+          <p:nvPr/>
         </p:nvSpPr>
         <p:spPr>
           <a:xfrm>
-            <a:off x="311700" y="1152475"/>
-            <a:ext cx="8520600" cy="3416400"/>
-          </a:xfrm>
-          <a:prstGeom prst="rect">
-            <a:avLst/>
-          </a:prstGeom>
+            <a:off x="1166295" y="427314"/>
+            <a:ext cx="555900" cy="354000"/>
+          </a:xfrm>
+          <a:prstGeom prst="rect">
+            <a:avLst/>
+          </a:prstGeom>
+          <a:noFill/>
+          <a:ln>
+            <a:noFill/>
+          </a:ln>
         </p:spPr>
         <p:txBody>
           <a:bodyPr anchorCtr="0" anchor="t" bIns="91425" lIns="91425" spcFirstLastPara="1" rIns="91425" wrap="square" tIns="91425">
-            <a:normAutofit/>
+            <a:spAutoFit/>
           </a:bodyPr>
           <a:lstStyle/>
           <a:p>
@@ -8095,14 +11228,147 @@
                 <a:spcPts val="0"/>
               </a:spcBef>
               <a:spcAft>
-                <a:spcPts val="1200"/>
+                <a:spcPts val="0"/>
               </a:spcAft>
               <a:buNone/>
             </a:pPr>
             <a:r>
-              <a:t/>
-            </a:r>
-            <a:endParaRPr/>
+              <a:rPr lang="es-419" sz="1100">
+                <a:solidFill>
+                  <a:schemeClr val="dk2"/>
+                </a:solidFill>
+              </a:rPr>
+              <a:t>Lib</a:t>
+            </a:r>
+            <a:endParaRPr sz="1100">
+              <a:solidFill>
+                <a:schemeClr val="dk2"/>
+              </a:solidFill>
+            </a:endParaRPr>
+          </a:p>
+        </p:txBody>
+      </p:sp>
+      <p:sp>
+        <p:nvSpPr>
+          <p:cNvPr id="89" name="Google Shape;89;p15"/>
+          <p:cNvSpPr txBox="1"/>
+          <p:nvPr/>
+        </p:nvSpPr>
+        <p:spPr>
+          <a:xfrm>
+            <a:off x="1463181" y="424900"/>
+            <a:ext cx="686100" cy="354000"/>
+          </a:xfrm>
+          <a:prstGeom prst="rect">
+            <a:avLst/>
+          </a:prstGeom>
+          <a:noFill/>
+          <a:ln>
+            <a:noFill/>
+          </a:ln>
+        </p:spPr>
+        <p:txBody>
+          <a:bodyPr anchorCtr="0" anchor="t" bIns="91425" lIns="91425" spcFirstLastPara="1" rIns="91425" wrap="square" tIns="91425">
+            <a:spAutoFit/>
+          </a:bodyPr>
+          <a:lstStyle/>
+          <a:p>
+            <a:pPr indent="0" lvl="0" marL="0" rtl="0" algn="l">
+              <a:spcBef>
+                <a:spcPts val="0"/>
+              </a:spcBef>
+              <a:spcAft>
+                <a:spcPts val="0"/>
+              </a:spcAft>
+              <a:buNone/>
+            </a:pPr>
+            <a:r>
+              <a:rPr lang="es-419" sz="1100">
+                <a:solidFill>
+                  <a:schemeClr val="dk2"/>
+                </a:solidFill>
+              </a:rPr>
+              <a:t>Ladder</a:t>
+            </a:r>
+            <a:endParaRPr sz="1100">
+              <a:solidFill>
+                <a:schemeClr val="dk2"/>
+              </a:solidFill>
+            </a:endParaRPr>
+          </a:p>
+        </p:txBody>
+      </p:sp>
+      <p:sp>
+        <p:nvSpPr>
+          <p:cNvPr id="90" name="Google Shape;90;p15"/>
+          <p:cNvSpPr txBox="1"/>
+          <p:nvPr/>
+        </p:nvSpPr>
+        <p:spPr>
+          <a:xfrm>
+            <a:off x="724925" y="2676825"/>
+            <a:ext cx="3000000" cy="1108200"/>
+          </a:xfrm>
+          <a:prstGeom prst="rect">
+            <a:avLst/>
+          </a:prstGeom>
+          <a:noFill/>
+          <a:ln>
+            <a:noFill/>
+          </a:ln>
+        </p:spPr>
+        <p:txBody>
+          <a:bodyPr anchorCtr="0" anchor="t" bIns="91425" lIns="91425" spcFirstLastPara="1" rIns="91425" wrap="square" tIns="91425">
+            <a:spAutoFit/>
+          </a:bodyPr>
+          <a:lstStyle/>
+          <a:p>
+            <a:pPr indent="0" lvl="0" marL="0" rtl="0" algn="l">
+              <a:spcBef>
+                <a:spcPts val="0"/>
+              </a:spcBef>
+              <a:spcAft>
+                <a:spcPts val="0"/>
+              </a:spcAft>
+              <a:buNone/>
+            </a:pPr>
+            <a:r>
+              <a:rPr b="1" lang="es-419" sz="1000">
+                <a:solidFill>
+                  <a:schemeClr val="dk2"/>
+                </a:solidFill>
+              </a:rPr>
+              <a:t>Control de incorporación de librería al plásmido</a:t>
+            </a:r>
+            <a:endParaRPr b="1" sz="1000">
+              <a:solidFill>
+                <a:schemeClr val="dk2"/>
+              </a:solidFill>
+            </a:endParaRPr>
+          </a:p>
+          <a:p>
+            <a:pPr indent="0" lvl="0" marL="0" rtl="0" algn="l">
+              <a:spcBef>
+                <a:spcPts val="0"/>
+              </a:spcBef>
+              <a:spcAft>
+                <a:spcPts val="0"/>
+              </a:spcAft>
+              <a:buNone/>
+            </a:pPr>
+            <a:r>
+              <a:rPr lang="es-419" sz="1000">
+                <a:solidFill>
+                  <a:schemeClr val="dk2"/>
+                </a:solidFill>
+              </a:rPr>
+              <a:t>PCR de punto final para visualizar la correcta incorporación de la librería (~300pb) en el plásmido backbone y la ausencia del original promotor CMV. (~700pb)  </a:t>
+            </a:r>
+            <a:endParaRPr sz="1000">
+              <a:solidFill>
+                <a:schemeClr val="dk2"/>
+              </a:solidFill>
+            </a:endParaRPr>
           </a:p>
         </p:txBody>
       </p:sp>
@@ -8119,7 +11385,111 @@
   <p:cSld>
     <p:spTree>
       <p:nvGrpSpPr>
-        <p:cNvPr id="81" name="Shape 81"/>
+        <p:cNvPr id="94" name="Shape 94"/>
+        <p:cNvGrpSpPr/>
+        <p:nvPr/>
+      </p:nvGrpSpPr>
+      <p:grpSpPr>
+        <a:xfrm>
+          <a:off x="0" y="0"/>
+          <a:ext cx="0" cy="0"/>
+          <a:chOff x="0" y="0"/>
+          <a:chExt cx="0" cy="0"/>
+        </a:xfrm>
+      </p:grpSpPr>
+      <p:sp>
+        <p:nvSpPr>
+          <p:cNvPr id="95" name="Google Shape;95;p16"/>
+          <p:cNvSpPr txBox="1"/>
+          <p:nvPr>
+            <p:ph type="title"/>
+          </p:nvPr>
+        </p:nvSpPr>
+        <p:spPr>
+          <a:xfrm>
+            <a:off x="311700" y="445025"/>
+            <a:ext cx="8520600" cy="572700"/>
+          </a:xfrm>
+          <a:prstGeom prst="rect">
+            <a:avLst/>
+          </a:prstGeom>
+        </p:spPr>
+        <p:txBody>
+          <a:bodyPr anchorCtr="0" anchor="t" bIns="91425" lIns="91425" spcFirstLastPara="1" rIns="91425" wrap="square" tIns="91425">
+            <a:normAutofit fontScale="90000"/>
+          </a:bodyPr>
+          <a:lstStyle/>
+          <a:p>
+            <a:pPr indent="0" lvl="0" marL="0" rtl="0" algn="l">
+              <a:spcBef>
+                <a:spcPts val="0"/>
+              </a:spcBef>
+              <a:spcAft>
+                <a:spcPts val="0"/>
+              </a:spcAft>
+              <a:buNone/>
+            </a:pPr>
+            <a:r>
+              <a:rPr lang="es-419"/>
+              <a:t>potencia</a:t>
+            </a:r>
+            <a:endParaRPr/>
+          </a:p>
+        </p:txBody>
+      </p:sp>
+      <p:sp>
+        <p:nvSpPr>
+          <p:cNvPr id="96" name="Google Shape;96;p16"/>
+          <p:cNvSpPr txBox="1"/>
+          <p:nvPr>
+            <p:ph idx="1" type="body"/>
+          </p:nvPr>
+        </p:nvSpPr>
+        <p:spPr>
+          <a:xfrm>
+            <a:off x="311700" y="1152475"/>
+            <a:ext cx="8520600" cy="3416400"/>
+          </a:xfrm>
+          <a:prstGeom prst="rect">
+            <a:avLst/>
+          </a:prstGeom>
+        </p:spPr>
+        <p:txBody>
+          <a:bodyPr anchorCtr="0" anchor="t" bIns="91425" lIns="91425" spcFirstLastPara="1" rIns="91425" wrap="square" tIns="91425">
+            <a:normAutofit/>
+          </a:bodyPr>
+          <a:lstStyle/>
+          <a:p>
+            <a:pPr indent="0" lvl="0" marL="0" rtl="0" algn="l">
+              <a:spcBef>
+                <a:spcPts val="0"/>
+              </a:spcBef>
+              <a:spcAft>
+                <a:spcPts val="1200"/>
+              </a:spcAft>
+              <a:buNone/>
+            </a:pPr>
+            <a:r>
+              <a:t/>
+            </a:r>
+            <a:endParaRPr/>
+          </a:p>
+        </p:txBody>
+      </p:sp>
+    </p:spTree>
+  </p:cSld>
+  <p:clrMapOvr>
+    <a:masterClrMapping/>
+  </p:clrMapOvr>
+</p:sld>
+</file>
+
+<file path=ppt/slides/slide5.xml><?xml version="1.0" encoding="utf-8"?>
+<p:sld xmlns:a="http://schemas.openxmlformats.org/drawingml/2006/main" xmlns:r="http://schemas.openxmlformats.org/officeDocument/2006/relationships" xmlns:mc="http://schemas.openxmlformats.org/markup-compatibility/2006" xmlns:mv="urn:schemas-microsoft-com:mac:vml" xmlns:p="http://schemas.openxmlformats.org/presentationml/2006/main" xmlns:c="http://schemas.openxmlformats.org/drawingml/2006/chart" xmlns:dgm="http://schemas.openxmlformats.org/drawingml/2006/diagram" xmlns:o="urn:schemas-microsoft-com:office:office" xmlns:v="urn:schemas-microsoft-com:vml" xmlns:pvml="urn:schemas-microsoft-com:office:powerpoint" xmlns:com="http://schemas.openxmlformats.org/drawingml/2006/compatibility" xmlns:p14="http://schemas.microsoft.com/office/powerpoint/2010/main" xmlns:p15="http://schemas.microsoft.com/office/powerpoint/2012/main" xmlns:ahyp="http://schemas.microsoft.com/office/drawing/2018/hyperlinkcolor">
+  <p:cSld>
+    <p:spTree>
+      <p:nvGrpSpPr>
+        <p:cNvPr id="100" name="Shape 100"/>
         <p:cNvGrpSpPr/>
         <p:nvPr/>
       </p:nvGrpSpPr>
@@ -8133,7 +11503,7 @@
       </p:grpSpPr>
       <p:pic>
         <p:nvPicPr>
-          <p:cNvPr id="82" name="Google Shape;82;p16"/>
+          <p:cNvPr id="101" name="Google Shape;101;p17"/>
           <p:cNvPicPr preferRelativeResize="0"/>
           <p:nvPr/>
         </p:nvPicPr>
@@ -8160,7 +11530,7 @@
       </p:pic>
       <p:pic>
         <p:nvPicPr>
-          <p:cNvPr id="83" name="Google Shape;83;p16"/>
+          <p:cNvPr id="102" name="Google Shape;102;p17"/>
           <p:cNvPicPr preferRelativeResize="0"/>
           <p:nvPr/>
         </p:nvPicPr>
@@ -8187,7 +11557,7 @@
       </p:pic>
       <p:sp>
         <p:nvSpPr>
-          <p:cNvPr id="84" name="Google Shape;84;p16"/>
+          <p:cNvPr id="103" name="Google Shape;103;p17"/>
           <p:cNvSpPr txBox="1"/>
           <p:nvPr/>
         </p:nvSpPr>
@@ -8289,7 +11659,7 @@
       </p:sp>
       <p:sp>
         <p:nvSpPr>
-          <p:cNvPr id="85" name="Google Shape;85;p16"/>
+          <p:cNvPr id="104" name="Google Shape;104;p17"/>
           <p:cNvSpPr txBox="1"/>
           <p:nvPr/>
         </p:nvSpPr>
@@ -8339,7 +11709,7 @@
       </p:sp>
       <p:sp>
         <p:nvSpPr>
-          <p:cNvPr id="86" name="Google Shape;86;p16"/>
+          <p:cNvPr id="105" name="Google Shape;105;p17"/>
           <p:cNvSpPr txBox="1"/>
           <p:nvPr/>
         </p:nvSpPr>
@@ -8395,12 +11765,12 @@
 </p:sld>
 </file>
 
-<file path=ppt/slides/slide5.xml><?xml version="1.0" encoding="utf-8"?>
+<file path=ppt/slides/slide6.xml><?xml version="1.0" encoding="utf-8"?>
 <p:sld xmlns:a="http://schemas.openxmlformats.org/drawingml/2006/main" xmlns:r="http://schemas.openxmlformats.org/officeDocument/2006/relationships" xmlns:mc="http://schemas.openxmlformats.org/markup-compatibility/2006" xmlns:mv="urn:schemas-microsoft-com:mac:vml" xmlns:p="http://schemas.openxmlformats.org/presentationml/2006/main" xmlns:c="http://schemas.openxmlformats.org/drawingml/2006/chart" xmlns:dgm="http://schemas.openxmlformats.org/drawingml/2006/diagram" xmlns:o="urn:schemas-microsoft-com:office:office" xmlns:v="urn:schemas-microsoft-com:vml" xmlns:pvml="urn:schemas-microsoft-com:office:powerpoint" xmlns:com="http://schemas.openxmlformats.org/drawingml/2006/compatibility" xmlns:p14="http://schemas.microsoft.com/office/powerpoint/2010/main" xmlns:p15="http://schemas.microsoft.com/office/powerpoint/2012/main" xmlns:ahyp="http://schemas.microsoft.com/office/drawing/2018/hyperlinkcolor">
   <p:cSld>
     <p:spTree>
       <p:nvGrpSpPr>
-        <p:cNvPr id="90" name="Shape 90"/>
+        <p:cNvPr id="109" name="Shape 109"/>
         <p:cNvGrpSpPr/>
         <p:nvPr/>
       </p:nvGrpSpPr>
@@ -8414,7 +11784,7 @@
       </p:grpSpPr>
       <p:sp>
         <p:nvSpPr>
-          <p:cNvPr id="91" name="Google Shape;91;p17"/>
+          <p:cNvPr id="110" name="Google Shape;110;p18"/>
           <p:cNvSpPr txBox="1"/>
           <p:nvPr/>
         </p:nvSpPr>
@@ -8499,7 +11869,7 @@
       </p:sp>
       <p:pic>
         <p:nvPicPr>
-          <p:cNvPr id="92" name="Google Shape;92;p17"/>
+          <p:cNvPr id="111" name="Google Shape;111;p18"/>
           <p:cNvPicPr preferRelativeResize="0"/>
           <p:nvPr/>
         </p:nvPicPr>
@@ -8525,133 +11895,6 @@
           </a:ln>
         </p:spPr>
       </p:pic>
-    </p:spTree>
-  </p:cSld>
-  <p:clrMapOvr>
-    <a:masterClrMapping/>
-  </p:clrMapOvr>
-</p:sld>
-</file>
-
-<file path=ppt/slides/slide6.xml><?xml version="1.0" encoding="utf-8"?>
-<p:sld xmlns:a="http://schemas.openxmlformats.org/drawingml/2006/main" xmlns:r="http://schemas.openxmlformats.org/officeDocument/2006/relationships" xmlns:mc="http://schemas.openxmlformats.org/markup-compatibility/2006" xmlns:mv="urn:schemas-microsoft-com:mac:vml" xmlns:p="http://schemas.openxmlformats.org/presentationml/2006/main" xmlns:c="http://schemas.openxmlformats.org/drawingml/2006/chart" xmlns:dgm="http://schemas.openxmlformats.org/drawingml/2006/diagram" xmlns:o="urn:schemas-microsoft-com:office:office" xmlns:v="urn:schemas-microsoft-com:vml" xmlns:pvml="urn:schemas-microsoft-com:office:powerpoint" xmlns:com="http://schemas.openxmlformats.org/drawingml/2006/compatibility" xmlns:p14="http://schemas.microsoft.com/office/powerpoint/2010/main" xmlns:p15="http://schemas.microsoft.com/office/powerpoint/2012/main" xmlns:ahyp="http://schemas.microsoft.com/office/drawing/2018/hyperlinkcolor">
-  <p:cSld>
-    <p:spTree>
-      <p:nvGrpSpPr>
-        <p:cNvPr id="96" name="Shape 96"/>
-        <p:cNvGrpSpPr/>
-        <p:nvPr/>
-      </p:nvGrpSpPr>
-      <p:grpSpPr>
-        <a:xfrm>
-          <a:off x="0" y="0"/>
-          <a:ext cx="0" cy="0"/>
-          <a:chOff x="0" y="0"/>
-          <a:chExt cx="0" cy="0"/>
-        </a:xfrm>
-      </p:grpSpPr>
-      <p:pic>
-        <p:nvPicPr>
-          <p:cNvPr id="97" name="Google Shape;97;p18" title="PCR_loxP_gates_ctl.png"/>
-          <p:cNvPicPr preferRelativeResize="0"/>
-          <p:nvPr/>
-        </p:nvPicPr>
-        <p:blipFill>
-          <a:blip r:embed="rId4">
-            <a:alphaModFix/>
-          </a:blip>
-          <a:stretch>
-            <a:fillRect/>
-          </a:stretch>
-        </p:blipFill>
-        <p:spPr>
-          <a:xfrm>
-            <a:off x="321075" y="323825"/>
-            <a:ext cx="8001000" cy="2609850"/>
-          </a:xfrm>
-          <a:prstGeom prst="rect">
-            <a:avLst/>
-          </a:prstGeom>
-          <a:noFill/>
-          <a:ln>
-            <a:noFill/>
-          </a:ln>
-        </p:spPr>
-      </p:pic>
-      <p:sp>
-        <p:nvSpPr>
-          <p:cNvPr id="98" name="Google Shape;98;p18"/>
-          <p:cNvSpPr txBox="1"/>
-          <p:nvPr/>
-        </p:nvSpPr>
-        <p:spPr>
-          <a:xfrm>
-            <a:off x="156050" y="3394325"/>
-            <a:ext cx="8166000" cy="492600"/>
-          </a:xfrm>
-          <a:prstGeom prst="rect">
-            <a:avLst/>
-          </a:prstGeom>
-          <a:noFill/>
-          <a:ln>
-            <a:noFill/>
-          </a:ln>
-        </p:spPr>
-        <p:txBody>
-          <a:bodyPr anchorCtr="0" anchor="t" bIns="91425" lIns="91425" spcFirstLastPara="1" rIns="91425" wrap="square" tIns="91425">
-            <a:spAutoFit/>
-          </a:bodyPr>
-          <a:lstStyle/>
-          <a:p>
-            <a:pPr indent="0" lvl="0" marL="0" rtl="0" algn="l">
-              <a:spcBef>
-                <a:spcPts val="0"/>
-              </a:spcBef>
-              <a:spcAft>
-                <a:spcPts val="0"/>
-              </a:spcAft>
-              <a:buNone/>
-            </a:pPr>
-            <a:r>
-              <a:rPr b="1" lang="es-419" sz="1000">
-                <a:solidFill>
-                  <a:schemeClr val="dk2"/>
-                </a:solidFill>
-              </a:rPr>
-              <a:t>Control de ADNg sin el vector integrado en cada fracción celular.</a:t>
-            </a:r>
-            <a:r>
-              <a:rPr lang="es-419" sz="1000">
-                <a:solidFill>
-                  <a:schemeClr val="dk2"/>
-                </a:solidFill>
-              </a:rPr>
-              <a:t> PCR punto final sobre el ADNg de cada fracción de células (Gate 1 a 6) y un control negativo de celulas HEK293T-A2 no </a:t>
-            </a:r>
-            <a:r>
-              <a:rPr lang="es-419" sz="1000">
-                <a:solidFill>
-                  <a:schemeClr val="dk2"/>
-                </a:solidFill>
-              </a:rPr>
-              <a:t>transfectadas</a:t>
-            </a:r>
-            <a:r>
-              <a:rPr lang="es-419" sz="1000">
-                <a:solidFill>
-                  <a:schemeClr val="dk2"/>
-                </a:solidFill>
-              </a:rPr>
-              <a:t>, utilizando primers que aparean en los sitios Lox.  </a:t>
-            </a:r>
-            <a:endParaRPr sz="1000">
-              <a:solidFill>
-                <a:schemeClr val="dk2"/>
-              </a:solidFill>
-            </a:endParaRPr>
-          </a:p>
-        </p:txBody>
-      </p:sp>
     </p:spTree>
   </p:cSld>
   <p:clrMapOvr>
@@ -8665,7 +11908,7 @@
   <p:cSld>
     <p:spTree>
       <p:nvGrpSpPr>
-        <p:cNvPr id="102" name="Shape 102"/>
+        <p:cNvPr id="115" name="Shape 115"/>
         <p:cNvGrpSpPr/>
         <p:nvPr/>
       </p:nvGrpSpPr>
@@ -8679,24 +11922,26 @@
       </p:grpSpPr>
       <p:sp>
         <p:nvSpPr>
-          <p:cNvPr id="103" name="Google Shape;103;p19"/>
+          <p:cNvPr id="116" name="Google Shape;116;p19"/>
           <p:cNvSpPr txBox="1"/>
-          <p:nvPr>
-            <p:ph type="title"/>
-          </p:nvPr>
+          <p:nvPr/>
         </p:nvSpPr>
         <p:spPr>
           <a:xfrm>
-            <a:off x="311700" y="445025"/>
-            <a:ext cx="8520600" cy="572700"/>
-          </a:xfrm>
-          <a:prstGeom prst="rect">
-            <a:avLst/>
-          </a:prstGeom>
+            <a:off x="156050" y="3394325"/>
+            <a:ext cx="8166000" cy="492600"/>
+          </a:xfrm>
+          <a:prstGeom prst="rect">
+            <a:avLst/>
+          </a:prstGeom>
+          <a:noFill/>
+          <a:ln>
+            <a:noFill/>
+          </a:ln>
         </p:spPr>
         <p:txBody>
           <a:bodyPr anchorCtr="0" anchor="t" bIns="91425" lIns="91425" spcFirstLastPara="1" rIns="91425" wrap="square" tIns="91425">
-            <a:normAutofit fontScale="90000"/>
+            <a:spAutoFit/>
           </a:bodyPr>
           <a:lstStyle/>
           <a:p>
@@ -8710,16 +11955,48 @@
               <a:buNone/>
             </a:pPr>
             <a:r>
-              <a:rPr lang="es-419"/>
-              <a:t>processing pipeline</a:t>
-            </a:r>
-            <a:endParaRPr/>
+              <a:rPr b="1" lang="es-419" sz="1000">
+                <a:solidFill>
+                  <a:schemeClr val="dk2"/>
+                </a:solidFill>
+              </a:rPr>
+              <a:t>Control de ADNg sin el vector integrado en cada fracción celular.</a:t>
+            </a:r>
+            <a:r>
+              <a:rPr lang="es-419" sz="1000">
+                <a:solidFill>
+                  <a:schemeClr val="dk2"/>
+                </a:solidFill>
+              </a:rPr>
+              <a:t> PCR punto final sobre el ADNg de cada fracción de células (Fracciones 1 a 6) y un control negativo de celulas HEK293T-A2 no </a:t>
+            </a:r>
+            <a:r>
+              <a:rPr lang="es-419" sz="1000">
+                <a:solidFill>
+                  <a:schemeClr val="dk2"/>
+                </a:solidFill>
+              </a:rPr>
+              <a:t>transfectadas</a:t>
+            </a:r>
+            <a:r>
+              <a:rPr lang="es-419" sz="1000">
+                <a:solidFill>
+                  <a:schemeClr val="dk2"/>
+                </a:solidFill>
+              </a:rPr>
+              <a:t>, utilizando primers que aparean en los sitios Lox.  </a:t>
+            </a:r>
+            <a:endParaRPr sz="1000">
+              <a:solidFill>
+                <a:schemeClr val="dk2"/>
+              </a:solidFill>
+            </a:endParaRPr>
           </a:p>
         </p:txBody>
       </p:sp>
       <p:pic>
         <p:nvPicPr>
-          <p:cNvPr id="104" name="Google Shape;104;p19" title="pipeline_bioinformatico_inicio.png"/>
+          <p:cNvPr id="117" name="Google Shape;117;p19" title="Texto.png"/>
           <p:cNvPicPr preferRelativeResize="0"/>
           <p:nvPr/>
         </p:nvPicPr>
@@ -8733,8 +12010,8 @@
         </p:blipFill>
         <p:spPr>
           <a:xfrm>
-            <a:off x="152400" y="1170125"/>
-            <a:ext cx="4903107" cy="3820976"/>
+            <a:off x="156050" y="601175"/>
+            <a:ext cx="8001000" cy="2609850"/>
           </a:xfrm>
           <a:prstGeom prst="rect">
             <a:avLst/>
@@ -8745,84 +12022,6 @@
           </a:ln>
         </p:spPr>
       </p:pic>
-      <p:pic>
-        <p:nvPicPr>
-          <p:cNvPr id="105" name="Google Shape;105;p19" title="pipeline_bioinformatico.png"/>
-          <p:cNvPicPr preferRelativeResize="0"/>
-          <p:nvPr/>
-        </p:nvPicPr>
-        <p:blipFill>
-          <a:blip r:embed="rId4">
-            <a:alphaModFix/>
-          </a:blip>
-          <a:stretch>
-            <a:fillRect/>
-          </a:stretch>
-        </p:blipFill>
-        <p:spPr>
-          <a:xfrm>
-            <a:off x="6542196" y="556250"/>
-            <a:ext cx="1515776" cy="2228500"/>
-          </a:xfrm>
-          <a:prstGeom prst="rect">
-            <a:avLst/>
-          </a:prstGeom>
-          <a:noFill/>
-          <a:ln>
-            <a:noFill/>
-          </a:ln>
-        </p:spPr>
-      </p:pic>
-      <p:sp>
-        <p:nvSpPr>
-          <p:cNvPr id="106" name="Google Shape;106;p19"/>
-          <p:cNvSpPr txBox="1"/>
-          <p:nvPr/>
-        </p:nvSpPr>
-        <p:spPr>
-          <a:xfrm>
-            <a:off x="6326575" y="96700"/>
-            <a:ext cx="2993100" cy="738900"/>
-          </a:xfrm>
-          <a:prstGeom prst="rect">
-            <a:avLst/>
-          </a:prstGeom>
-          <a:noFill/>
-          <a:ln>
-            <a:noFill/>
-          </a:ln>
-        </p:spPr>
-        <p:txBody>
-          <a:bodyPr anchorCtr="0" anchor="t" bIns="91425" lIns="91425" spcFirstLastPara="1" rIns="91425" wrap="square" tIns="91425">
-            <a:spAutoFit/>
-          </a:bodyPr>
-          <a:lstStyle/>
-          <a:p>
-            <a:pPr indent="0" lvl="0" marL="0" rtl="0" algn="l">
-              <a:spcBef>
-                <a:spcPts val="0"/>
-              </a:spcBef>
-              <a:spcAft>
-                <a:spcPts val="0"/>
-              </a:spcAft>
-              <a:buNone/>
-            </a:pPr>
-            <a:r>
-              <a:rPr lang="es-419" sz="1800">
-                <a:solidFill>
-                  <a:schemeClr val="dk2"/>
-                </a:solidFill>
-              </a:rPr>
-              <a:t>plan B: un pipeline con todo</a:t>
-            </a:r>
-            <a:endParaRPr sz="1800">
-              <a:solidFill>
-                <a:schemeClr val="dk2"/>
-              </a:solidFill>
-            </a:endParaRPr>
-          </a:p>
-        </p:txBody>
-      </p:sp>
     </p:spTree>
   </p:cSld>
   <p:clrMapOvr>
@@ -8836,7 +12035,7 @@
   <p:cSld>
     <p:spTree>
       <p:nvGrpSpPr>
-        <p:cNvPr id="110" name="Shape 110"/>
+        <p:cNvPr id="121" name="Shape 121"/>
         <p:cNvGrpSpPr/>
         <p:nvPr/>
       </p:nvGrpSpPr>
@@ -8848,9 +12047,77 @@
           <a:chExt cx="0" cy="0"/>
         </a:xfrm>
       </p:grpSpPr>
+      <p:sp>
+        <p:nvSpPr>
+          <p:cNvPr id="122" name="Google Shape;122;p20"/>
+          <p:cNvSpPr txBox="1"/>
+          <p:nvPr>
+            <p:ph type="title"/>
+          </p:nvPr>
+        </p:nvSpPr>
+        <p:spPr>
+          <a:xfrm>
+            <a:off x="311700" y="445025"/>
+            <a:ext cx="8520600" cy="572700"/>
+          </a:xfrm>
+          <a:prstGeom prst="rect">
+            <a:avLst/>
+          </a:prstGeom>
+        </p:spPr>
+        <p:txBody>
+          <a:bodyPr anchorCtr="0" anchor="t" bIns="91425" lIns="91425" spcFirstLastPara="1" rIns="91425" wrap="square" tIns="91425">
+            <a:normAutofit fontScale="90000"/>
+          </a:bodyPr>
+          <a:lstStyle/>
+          <a:p>
+            <a:pPr indent="0" lvl="0" marL="0" rtl="0" algn="l">
+              <a:spcBef>
+                <a:spcPts val="0"/>
+              </a:spcBef>
+              <a:spcAft>
+                <a:spcPts val="0"/>
+              </a:spcAft>
+              <a:buNone/>
+            </a:pPr>
+            <a:r>
+              <a:rPr lang="es-419"/>
+              <a:t>processing pipeline</a:t>
+            </a:r>
+            <a:endParaRPr/>
+          </a:p>
+        </p:txBody>
+      </p:sp>
       <p:pic>
         <p:nvPicPr>
-          <p:cNvPr id="111" name="Google Shape;111;p20" title="mean_var_bimodal_page-0001.jpg"/>
+          <p:cNvPr id="123" name="Google Shape;123;p20" title="pipeline_bioinformatico_inicio.png"/>
+          <p:cNvPicPr preferRelativeResize="0"/>
+          <p:nvPr/>
+        </p:nvPicPr>
+        <p:blipFill>
+          <a:blip r:embed="rId3">
+            <a:alphaModFix/>
+          </a:blip>
+          <a:stretch>
+            <a:fillRect/>
+          </a:stretch>
+        </p:blipFill>
+        <p:spPr>
+          <a:xfrm>
+            <a:off x="152400" y="1170125"/>
+            <a:ext cx="4903107" cy="3820976"/>
+          </a:xfrm>
+          <a:prstGeom prst="rect">
+            <a:avLst/>
+          </a:prstGeom>
+          <a:noFill/>
+          <a:ln>
+            <a:noFill/>
+          </a:ln>
+        </p:spPr>
+      </p:pic>
+      <p:pic>
+        <p:nvPicPr>
+          <p:cNvPr id="124" name="Google Shape;124;p20" title="pipeline_bioinformatico.png"/>
           <p:cNvPicPr preferRelativeResize="0"/>
           <p:nvPr/>
         </p:nvPicPr>
@@ -8864,8 +12131,8 @@
         </p:blipFill>
         <p:spPr>
           <a:xfrm>
-            <a:off x="4113175" y="389125"/>
-            <a:ext cx="4522798" cy="3392099"/>
+            <a:off x="6542196" y="556250"/>
+            <a:ext cx="1515776" cy="2228500"/>
           </a:xfrm>
           <a:prstGeom prst="rect">
             <a:avLst/>
@@ -8876,44 +12143,16 @@
           </a:ln>
         </p:spPr>
       </p:pic>
-      <p:pic>
-        <p:nvPicPr>
-          <p:cNvPr id="112" name="Google Shape;112;p20" title="sample_effort_page-0001.jpg"/>
-          <p:cNvPicPr preferRelativeResize="0"/>
-          <p:nvPr/>
-        </p:nvPicPr>
-        <p:blipFill>
-          <a:blip r:embed="rId5">
-            <a:alphaModFix/>
-          </a:blip>
-          <a:stretch>
-            <a:fillRect/>
-          </a:stretch>
-        </p:blipFill>
-        <p:spPr>
-          <a:xfrm>
-            <a:off x="701575" y="502452"/>
-            <a:ext cx="3411599" cy="3435650"/>
-          </a:xfrm>
-          <a:prstGeom prst="rect">
-            <a:avLst/>
-          </a:prstGeom>
-          <a:noFill/>
-          <a:ln>
-            <a:noFill/>
-          </a:ln>
-        </p:spPr>
-      </p:pic>
       <p:sp>
         <p:nvSpPr>
-          <p:cNvPr id="113" name="Google Shape;113;p20"/>
+          <p:cNvPr id="125" name="Google Shape;125;p20"/>
           <p:cNvSpPr txBox="1"/>
           <p:nvPr/>
         </p:nvSpPr>
         <p:spPr>
           <a:xfrm>
-            <a:off x="237300" y="3941927"/>
-            <a:ext cx="8906700" cy="1635300"/>
+            <a:off x="6326575" y="96700"/>
+            <a:ext cx="2993100" cy="738900"/>
           </a:xfrm>
           <a:prstGeom prst="rect">
             <a:avLst/>
@@ -8930,11 +12169,8 @@
           <a:lstStyle/>
           <a:p>
             <a:pPr indent="0" lvl="0" marL="0" rtl="0" algn="l">
-              <a:lnSpc>
-                <a:spcPct val="115000"/>
-              </a:lnSpc>
-              <a:spcBef>
-                <a:spcPts val="1200"/>
+              <a:spcBef>
+                <a:spcPts val="0"/>
               </a:spcBef>
               <a:spcAft>
                 <a:spcPts val="0"/>
@@ -8942,114 +12178,12 @@
               <a:buNone/>
             </a:pPr>
             <a:r>
-              <a:rPr b="1" lang="es-419" sz="1100">
-                <a:solidFill>
-                  <a:schemeClr val="dk1"/>
+              <a:rPr lang="es-419" sz="1800">
+                <a:solidFill>
+                  <a:schemeClr val="dk2"/>
                 </a:solidFill>
               </a:rPr>
-              <a:t>Ajuste por sesgo de muestreo diferencial y criterios de exclusión de promotores bimodales. </a:t>
-            </a:r>
-            <a:endParaRPr b="1" sz="1100">
-              <a:solidFill>
-                <a:schemeClr val="dk1"/>
-              </a:solidFill>
-            </a:endParaRPr>
-          </a:p>
-          <a:p>
-            <a:pPr indent="0" lvl="0" marL="0" rtl="0" algn="l">
-              <a:lnSpc>
-                <a:spcPct val="115000"/>
-              </a:lnSpc>
-              <a:spcBef>
-                <a:spcPts val="1200"/>
-              </a:spcBef>
-              <a:spcAft>
-                <a:spcPts val="0"/>
-              </a:spcAft>
-              <a:buNone/>
-            </a:pPr>
-            <a:r>
-              <a:rPr b="1" lang="es-419" sz="1100">
-                <a:solidFill>
-                  <a:schemeClr val="dk1"/>
-                </a:solidFill>
-              </a:rPr>
-              <a:t>A. </a:t>
-            </a:r>
-            <a:r>
-              <a:rPr lang="es-419" sz="1100">
-                <a:solidFill>
-                  <a:schemeClr val="dk1"/>
-                </a:solidFill>
-              </a:rPr>
-              <a:t>Gráfico de barras que muestra los factores de corrección dados por el esfuerzo de muestreo diferencial para cada </a:t>
-            </a:r>
-            <a:r>
-              <a:rPr i="1" lang="es-419" sz="1100">
-                <a:solidFill>
-                  <a:schemeClr val="dk1"/>
-                </a:solidFill>
-              </a:rPr>
-              <a:t>bin</a:t>
-            </a:r>
-            <a:r>
-              <a:rPr lang="es-419" sz="1100">
-                <a:solidFill>
-                  <a:schemeClr val="dk1"/>
-                </a:solidFill>
-              </a:rPr>
-              <a:t> de expresión de </a:t>
-            </a:r>
-            <a:r>
-              <a:rPr i="1" lang="es-419" sz="1100">
-                <a:solidFill>
-                  <a:schemeClr val="dk1"/>
-                </a:solidFill>
-              </a:rPr>
-              <a:t>EGFP</a:t>
-            </a:r>
-            <a:r>
-              <a:rPr lang="es-419" sz="1100">
-                <a:solidFill>
-                  <a:schemeClr val="dk1"/>
-                </a:solidFill>
-              </a:rPr>
-              <a:t>, los cuales son proporcionales a la abundancia celular relativa dentro de cada población. Este factor se utilizó para compensar las variaciones en el número de células entre los diferentes niveles de expresión.</a:t>
-            </a:r>
-            <a:endParaRPr sz="1100">
-              <a:solidFill>
-                <a:schemeClr val="dk1"/>
-              </a:solidFill>
-            </a:endParaRPr>
-          </a:p>
-          <a:p>
-            <a:pPr indent="0" lvl="0" marL="0" rtl="0" algn="l">
-              <a:lnSpc>
-                <a:spcPct val="115000"/>
-              </a:lnSpc>
-              <a:spcBef>
-                <a:spcPts val="1200"/>
-              </a:spcBef>
-              <a:spcAft>
-                <a:spcPts val="1200"/>
-              </a:spcAft>
-              <a:buNone/>
-            </a:pPr>
-            <a:r>
-              <a:rPr b="1" lang="es-419" sz="1100">
-                <a:solidFill>
-                  <a:schemeClr val="dk1"/>
-                </a:solidFill>
-              </a:rPr>
-              <a:t>B- </a:t>
-            </a:r>
-            <a:r>
-              <a:rPr lang="es-419" sz="1100">
-                <a:solidFill>
-                  <a:schemeClr val="dk1"/>
-                </a:solidFill>
-              </a:rPr>
-              <a:t>Gráfico de dispersión que representa la relación entre la media y la varianza derivadas del ensayo de cuantificación masiva en paralelo para cada promotor. Los puntos en cian representan promotores altamente bimodales, los cuales fueron excluidos del análisis.</a:t>
+              <a:t>plan B: un pipeline con todo</a:t>
             </a:r>
             <a:endParaRPr sz="1800">
               <a:solidFill>
@@ -9072,7 +12206,7 @@
   <p:cSld>
     <p:spTree>
       <p:nvGrpSpPr>
-        <p:cNvPr id="117" name="Shape 117"/>
+        <p:cNvPr id="129" name="Shape 129"/>
         <p:cNvGrpSpPr/>
         <p:nvPr/>
       </p:nvGrpSpPr>
@@ -9084,1182 +12218,9 @@
           <a:chExt cx="0" cy="0"/>
         </a:xfrm>
       </p:grpSpPr>
-      <p:cxnSp>
-        <p:nvCxnSpPr>
-          <p:cNvPr id="118" name="Google Shape;118;p21"/>
-          <p:cNvCxnSpPr/>
-          <p:nvPr/>
-        </p:nvCxnSpPr>
-        <p:spPr>
-          <a:xfrm>
-            <a:off x="1576363" y="667625"/>
-            <a:ext cx="3766200" cy="0"/>
-          </a:xfrm>
-          <a:prstGeom prst="straightConnector1">
-            <a:avLst/>
-          </a:prstGeom>
-          <a:noFill/>
-          <a:ln cap="flat" cmpd="sng" w="9525">
-            <a:solidFill>
-              <a:schemeClr val="dk2"/>
-            </a:solidFill>
-            <a:prstDash val="solid"/>
-            <a:round/>
-            <a:headEnd len="med" w="med" type="none"/>
-            <a:tailEnd len="med" w="med" type="none"/>
-          </a:ln>
-        </p:spPr>
-      </p:cxnSp>
-      <p:sp>
-        <p:nvSpPr>
-          <p:cNvPr id="119" name="Google Shape;119;p21"/>
-          <p:cNvSpPr/>
-          <p:nvPr/>
-        </p:nvSpPr>
-        <p:spPr>
-          <a:xfrm>
-            <a:off x="1971263" y="561725"/>
-            <a:ext cx="2952000" cy="163800"/>
-          </a:xfrm>
-          <a:prstGeom prst="rect">
-            <a:avLst/>
-          </a:prstGeom>
-          <a:solidFill>
-            <a:srgbClr val="A8D7CF"/>
-          </a:solidFill>
-          <a:ln cap="flat" cmpd="sng" w="9525">
-            <a:solidFill>
-              <a:schemeClr val="dk2"/>
-            </a:solidFill>
-            <a:prstDash val="solid"/>
-            <a:round/>
-            <a:headEnd len="sm" w="sm" type="none"/>
-            <a:tailEnd len="sm" w="sm" type="none"/>
-          </a:ln>
-        </p:spPr>
-        <p:txBody>
-          <a:bodyPr anchorCtr="0" anchor="ctr" bIns="91425" lIns="91425" spcFirstLastPara="1" rIns="91425" wrap="square" tIns="91425">
-            <a:noAutofit/>
-          </a:bodyPr>
-          <a:lstStyle/>
-          <a:p>
-            <a:pPr indent="0" lvl="0" marL="0" rtl="0" algn="ctr">
-              <a:spcBef>
-                <a:spcPts val="0"/>
-              </a:spcBef>
-              <a:spcAft>
-                <a:spcPts val="0"/>
-              </a:spcAft>
-              <a:buNone/>
-            </a:pPr>
-            <a:r>
-              <a:t/>
-            </a:r>
-            <a:endParaRPr/>
-          </a:p>
-        </p:txBody>
-      </p:sp>
-      <p:cxnSp>
-        <p:nvCxnSpPr>
-          <p:cNvPr id="120" name="Google Shape;120;p21"/>
-          <p:cNvCxnSpPr/>
-          <p:nvPr/>
-        </p:nvCxnSpPr>
-        <p:spPr>
-          <a:xfrm>
-            <a:off x="4398549" y="388350"/>
-            <a:ext cx="0" cy="183000"/>
-          </a:xfrm>
-          <a:prstGeom prst="straightConnector1">
-            <a:avLst/>
-          </a:prstGeom>
-          <a:noFill/>
-          <a:ln cap="flat" cmpd="sng" w="9525">
-            <a:solidFill>
-              <a:schemeClr val="dk2"/>
-            </a:solidFill>
-            <a:prstDash val="solid"/>
-            <a:round/>
-            <a:headEnd len="med" w="med" type="none"/>
-            <a:tailEnd len="med" w="med" type="none"/>
-          </a:ln>
-        </p:spPr>
-      </p:cxnSp>
-      <p:cxnSp>
-        <p:nvCxnSpPr>
-          <p:cNvPr id="121" name="Google Shape;121;p21"/>
-          <p:cNvCxnSpPr/>
-          <p:nvPr/>
-        </p:nvCxnSpPr>
-        <p:spPr>
-          <a:xfrm>
-            <a:off x="4398527" y="388343"/>
-            <a:ext cx="154200" cy="0"/>
-          </a:xfrm>
-          <a:prstGeom prst="straightConnector1">
-            <a:avLst/>
-          </a:prstGeom>
-          <a:noFill/>
-          <a:ln cap="flat" cmpd="sng" w="9525">
-            <a:solidFill>
-              <a:schemeClr val="dk2"/>
-            </a:solidFill>
-            <a:prstDash val="solid"/>
-            <a:round/>
-            <a:headEnd len="med" w="med" type="none"/>
-            <a:tailEnd len="med" w="med" type="triangle"/>
-          </a:ln>
-        </p:spPr>
-      </p:cxnSp>
-      <p:cxnSp>
-        <p:nvCxnSpPr>
-          <p:cNvPr id="122" name="Google Shape;122;p21"/>
-          <p:cNvCxnSpPr/>
-          <p:nvPr/>
-        </p:nvCxnSpPr>
-        <p:spPr>
-          <a:xfrm>
-            <a:off x="4398549" y="542450"/>
-            <a:ext cx="0" cy="192600"/>
-          </a:xfrm>
-          <a:prstGeom prst="straightConnector1">
-            <a:avLst/>
-          </a:prstGeom>
-          <a:noFill/>
-          <a:ln cap="flat" cmpd="sng" w="9525">
-            <a:solidFill>
-              <a:schemeClr val="dk2"/>
-            </a:solidFill>
-            <a:prstDash val="dash"/>
-            <a:round/>
-            <a:headEnd len="med" w="med" type="none"/>
-            <a:tailEnd len="med" w="med" type="none"/>
-          </a:ln>
-        </p:spPr>
-      </p:cxnSp>
-      <p:sp>
-        <p:nvSpPr>
-          <p:cNvPr id="123" name="Google Shape;123;p21"/>
-          <p:cNvSpPr txBox="1"/>
-          <p:nvPr/>
-        </p:nvSpPr>
-        <p:spPr>
-          <a:xfrm>
-            <a:off x="4427420" y="638716"/>
-            <a:ext cx="529800" cy="323100"/>
-          </a:xfrm>
-          <a:prstGeom prst="rect">
-            <a:avLst/>
-          </a:prstGeom>
-          <a:noFill/>
-          <a:ln>
-            <a:noFill/>
-          </a:ln>
-        </p:spPr>
-        <p:txBody>
-          <a:bodyPr anchorCtr="0" anchor="t" bIns="91425" lIns="91425" spcFirstLastPara="1" rIns="91425" wrap="square" tIns="91425">
-            <a:spAutoFit/>
-          </a:bodyPr>
-          <a:lstStyle/>
-          <a:p>
-            <a:pPr indent="0" lvl="0" marL="0" rtl="0" algn="l">
-              <a:spcBef>
-                <a:spcPts val="0"/>
-              </a:spcBef>
-              <a:spcAft>
-                <a:spcPts val="0"/>
-              </a:spcAft>
-              <a:buNone/>
-            </a:pPr>
-            <a:r>
-              <a:rPr lang="es-419" sz="900">
-                <a:solidFill>
-                  <a:schemeClr val="dk2"/>
-                </a:solidFill>
-              </a:rPr>
-              <a:t>16pb</a:t>
-            </a:r>
-            <a:endParaRPr sz="900">
-              <a:solidFill>
-                <a:schemeClr val="dk2"/>
-              </a:solidFill>
-            </a:endParaRPr>
-          </a:p>
-        </p:txBody>
-      </p:sp>
-      <p:sp>
-        <p:nvSpPr>
-          <p:cNvPr id="124" name="Google Shape;124;p21"/>
-          <p:cNvSpPr txBox="1"/>
-          <p:nvPr/>
-        </p:nvSpPr>
-        <p:spPr>
-          <a:xfrm>
-            <a:off x="3250600" y="638828"/>
-            <a:ext cx="529800" cy="323100"/>
-          </a:xfrm>
-          <a:prstGeom prst="rect">
-            <a:avLst/>
-          </a:prstGeom>
-          <a:noFill/>
-          <a:ln>
-            <a:noFill/>
-          </a:ln>
-        </p:spPr>
-        <p:txBody>
-          <a:bodyPr anchorCtr="0" anchor="t" bIns="91425" lIns="91425" spcFirstLastPara="1" rIns="91425" wrap="square" tIns="91425">
-            <a:spAutoFit/>
-          </a:bodyPr>
-          <a:lstStyle/>
-          <a:p>
-            <a:pPr indent="0" lvl="0" marL="0" rtl="0" algn="l">
-              <a:spcBef>
-                <a:spcPts val="0"/>
-              </a:spcBef>
-              <a:spcAft>
-                <a:spcPts val="0"/>
-              </a:spcAft>
-              <a:buNone/>
-            </a:pPr>
-            <a:r>
-              <a:rPr lang="es-419" sz="900">
-                <a:solidFill>
-                  <a:schemeClr val="dk2"/>
-                </a:solidFill>
-              </a:rPr>
-              <a:t>235</a:t>
-            </a:r>
-            <a:r>
-              <a:rPr lang="es-419" sz="900">
-                <a:solidFill>
-                  <a:schemeClr val="dk2"/>
-                </a:solidFill>
-              </a:rPr>
-              <a:t>pb</a:t>
-            </a:r>
-            <a:endParaRPr sz="900">
-              <a:solidFill>
-                <a:schemeClr val="dk2"/>
-              </a:solidFill>
-            </a:endParaRPr>
-          </a:p>
-        </p:txBody>
-      </p:sp>
-      <p:sp>
-        <p:nvSpPr>
-          <p:cNvPr id="125" name="Google Shape;125;p21"/>
-          <p:cNvSpPr txBox="1"/>
-          <p:nvPr/>
-        </p:nvSpPr>
-        <p:spPr>
-          <a:xfrm>
-            <a:off x="1624513" y="725475"/>
-            <a:ext cx="722400" cy="461700"/>
-          </a:xfrm>
-          <a:prstGeom prst="rect">
-            <a:avLst/>
-          </a:prstGeom>
-          <a:noFill/>
-          <a:ln>
-            <a:noFill/>
-          </a:ln>
-        </p:spPr>
-        <p:txBody>
-          <a:bodyPr anchorCtr="0" anchor="t" bIns="91425" lIns="91425" spcFirstLastPara="1" rIns="91425" wrap="square" tIns="91425">
-            <a:spAutoFit/>
-          </a:bodyPr>
-          <a:lstStyle/>
-          <a:p>
-            <a:pPr indent="0" lvl="0" marL="0" rtl="0" algn="l">
-              <a:spcBef>
-                <a:spcPts val="0"/>
-              </a:spcBef>
-              <a:spcAft>
-                <a:spcPts val="0"/>
-              </a:spcAft>
-              <a:buNone/>
-            </a:pPr>
-            <a:r>
-              <a:t/>
-            </a:r>
-            <a:endParaRPr sz="1800">
-              <a:solidFill>
-                <a:schemeClr val="dk2"/>
-              </a:solidFill>
-            </a:endParaRPr>
-          </a:p>
-        </p:txBody>
-      </p:sp>
-      <p:sp>
-        <p:nvSpPr>
-          <p:cNvPr id="126" name="Google Shape;126;p21"/>
-          <p:cNvSpPr txBox="1"/>
-          <p:nvPr/>
-        </p:nvSpPr>
-        <p:spPr>
-          <a:xfrm>
-            <a:off x="1537822" y="600199"/>
-            <a:ext cx="529800" cy="323100"/>
-          </a:xfrm>
-          <a:prstGeom prst="rect">
-            <a:avLst/>
-          </a:prstGeom>
-          <a:noFill/>
-          <a:ln>
-            <a:noFill/>
-          </a:ln>
-        </p:spPr>
-        <p:txBody>
-          <a:bodyPr anchorCtr="0" anchor="t" bIns="91425" lIns="91425" spcFirstLastPara="1" rIns="91425" wrap="square" tIns="91425">
-            <a:spAutoFit/>
-          </a:bodyPr>
-          <a:lstStyle/>
-          <a:p>
-            <a:pPr indent="0" lvl="0" marL="0" rtl="0" algn="l">
-              <a:spcBef>
-                <a:spcPts val="0"/>
-              </a:spcBef>
-              <a:spcAft>
-                <a:spcPts val="0"/>
-              </a:spcAft>
-              <a:buNone/>
-            </a:pPr>
-            <a:r>
-              <a:rPr lang="es-419" sz="900">
-                <a:solidFill>
-                  <a:schemeClr val="dk2"/>
-                </a:solidFill>
-              </a:rPr>
-              <a:t>24pb</a:t>
-            </a:r>
-            <a:endParaRPr sz="900">
-              <a:solidFill>
-                <a:schemeClr val="dk2"/>
-              </a:solidFill>
-            </a:endParaRPr>
-          </a:p>
-        </p:txBody>
-      </p:sp>
-      <p:sp>
-        <p:nvSpPr>
-          <p:cNvPr id="127" name="Google Shape;127;p21"/>
-          <p:cNvSpPr txBox="1"/>
-          <p:nvPr/>
-        </p:nvSpPr>
-        <p:spPr>
-          <a:xfrm>
-            <a:off x="4915218" y="609831"/>
-            <a:ext cx="529800" cy="323100"/>
-          </a:xfrm>
-          <a:prstGeom prst="rect">
-            <a:avLst/>
-          </a:prstGeom>
-          <a:noFill/>
-          <a:ln>
-            <a:noFill/>
-          </a:ln>
-        </p:spPr>
-        <p:txBody>
-          <a:bodyPr anchorCtr="0" anchor="t" bIns="91425" lIns="91425" spcFirstLastPara="1" rIns="91425" wrap="square" tIns="91425">
-            <a:spAutoFit/>
-          </a:bodyPr>
-          <a:lstStyle/>
-          <a:p>
-            <a:pPr indent="0" lvl="0" marL="0" rtl="0" algn="l">
-              <a:spcBef>
-                <a:spcPts val="0"/>
-              </a:spcBef>
-              <a:spcAft>
-                <a:spcPts val="0"/>
-              </a:spcAft>
-              <a:buNone/>
-            </a:pPr>
-            <a:r>
-              <a:rPr lang="es-419" sz="900">
-                <a:solidFill>
-                  <a:schemeClr val="dk2"/>
-                </a:solidFill>
-              </a:rPr>
-              <a:t>24pb</a:t>
-            </a:r>
-            <a:endParaRPr sz="900">
-              <a:solidFill>
-                <a:schemeClr val="dk2"/>
-              </a:solidFill>
-            </a:endParaRPr>
-          </a:p>
-        </p:txBody>
-      </p:sp>
-      <p:cxnSp>
-        <p:nvCxnSpPr>
-          <p:cNvPr id="128" name="Google Shape;128;p21"/>
-          <p:cNvCxnSpPr/>
-          <p:nvPr/>
-        </p:nvCxnSpPr>
-        <p:spPr>
-          <a:xfrm>
-            <a:off x="1605270" y="1455742"/>
-            <a:ext cx="3766200" cy="0"/>
-          </a:xfrm>
-          <a:prstGeom prst="straightConnector1">
-            <a:avLst/>
-          </a:prstGeom>
-          <a:noFill/>
-          <a:ln cap="flat" cmpd="sng" w="9525">
-            <a:solidFill>
-              <a:schemeClr val="dk2"/>
-            </a:solidFill>
-            <a:prstDash val="solid"/>
-            <a:round/>
-            <a:headEnd len="med" w="med" type="none"/>
-            <a:tailEnd len="med" w="med" type="none"/>
-          </a:ln>
-        </p:spPr>
-      </p:cxnSp>
-      <p:sp>
-        <p:nvSpPr>
-          <p:cNvPr id="129" name="Google Shape;129;p21"/>
-          <p:cNvSpPr/>
-          <p:nvPr/>
-        </p:nvSpPr>
-        <p:spPr>
-          <a:xfrm>
-            <a:off x="2000170" y="1349842"/>
-            <a:ext cx="2952000" cy="163800"/>
-          </a:xfrm>
-          <a:prstGeom prst="rect">
-            <a:avLst/>
-          </a:prstGeom>
-          <a:solidFill>
-            <a:srgbClr val="A8D7CF"/>
-          </a:solidFill>
-          <a:ln cap="flat" cmpd="sng" w="9525">
-            <a:solidFill>
-              <a:schemeClr val="dk2"/>
-            </a:solidFill>
-            <a:prstDash val="solid"/>
-            <a:round/>
-            <a:headEnd len="sm" w="sm" type="none"/>
-            <a:tailEnd len="sm" w="sm" type="none"/>
-          </a:ln>
-        </p:spPr>
-        <p:txBody>
-          <a:bodyPr anchorCtr="0" anchor="ctr" bIns="91425" lIns="91425" spcFirstLastPara="1" rIns="91425" wrap="square" tIns="91425">
-            <a:noAutofit/>
-          </a:bodyPr>
-          <a:lstStyle/>
-          <a:p>
-            <a:pPr indent="0" lvl="0" marL="0" rtl="0" algn="ctr">
-              <a:spcBef>
-                <a:spcPts val="0"/>
-              </a:spcBef>
-              <a:spcAft>
-                <a:spcPts val="0"/>
-              </a:spcAft>
-              <a:buNone/>
-            </a:pPr>
-            <a:r>
-              <a:t/>
-            </a:r>
-            <a:endParaRPr/>
-          </a:p>
-        </p:txBody>
-      </p:sp>
-      <p:cxnSp>
-        <p:nvCxnSpPr>
-          <p:cNvPr id="130" name="Google Shape;130;p21"/>
-          <p:cNvCxnSpPr/>
-          <p:nvPr/>
-        </p:nvCxnSpPr>
-        <p:spPr>
-          <a:xfrm>
-            <a:off x="4427457" y="1176467"/>
-            <a:ext cx="0" cy="183000"/>
-          </a:xfrm>
-          <a:prstGeom prst="straightConnector1">
-            <a:avLst/>
-          </a:prstGeom>
-          <a:noFill/>
-          <a:ln cap="flat" cmpd="sng" w="9525">
-            <a:solidFill>
-              <a:schemeClr val="dk2"/>
-            </a:solidFill>
-            <a:prstDash val="solid"/>
-            <a:round/>
-            <a:headEnd len="med" w="med" type="none"/>
-            <a:tailEnd len="med" w="med" type="none"/>
-          </a:ln>
-        </p:spPr>
-      </p:cxnSp>
-      <p:cxnSp>
-        <p:nvCxnSpPr>
-          <p:cNvPr id="131" name="Google Shape;131;p21"/>
-          <p:cNvCxnSpPr/>
-          <p:nvPr/>
-        </p:nvCxnSpPr>
-        <p:spPr>
-          <a:xfrm>
-            <a:off x="4427435" y="1176460"/>
-            <a:ext cx="154200" cy="0"/>
-          </a:xfrm>
-          <a:prstGeom prst="straightConnector1">
-            <a:avLst/>
-          </a:prstGeom>
-          <a:noFill/>
-          <a:ln cap="flat" cmpd="sng" w="9525">
-            <a:solidFill>
-              <a:schemeClr val="dk2"/>
-            </a:solidFill>
-            <a:prstDash val="solid"/>
-            <a:round/>
-            <a:headEnd len="med" w="med" type="none"/>
-            <a:tailEnd len="med" w="med" type="triangle"/>
-          </a:ln>
-        </p:spPr>
-      </p:cxnSp>
-      <p:cxnSp>
-        <p:nvCxnSpPr>
-          <p:cNvPr id="132" name="Google Shape;132;p21"/>
-          <p:cNvCxnSpPr/>
-          <p:nvPr/>
-        </p:nvCxnSpPr>
-        <p:spPr>
-          <a:xfrm>
-            <a:off x="4427457" y="1330567"/>
-            <a:ext cx="0" cy="192600"/>
-          </a:xfrm>
-          <a:prstGeom prst="straightConnector1">
-            <a:avLst/>
-          </a:prstGeom>
-          <a:noFill/>
-          <a:ln cap="flat" cmpd="sng" w="9525">
-            <a:solidFill>
-              <a:schemeClr val="dk2"/>
-            </a:solidFill>
-            <a:prstDash val="dash"/>
-            <a:round/>
-            <a:headEnd len="med" w="med" type="none"/>
-            <a:tailEnd len="med" w="med" type="none"/>
-          </a:ln>
-        </p:spPr>
-      </p:cxnSp>
-      <p:sp>
-        <p:nvSpPr>
-          <p:cNvPr id="133" name="Google Shape;133;p21"/>
-          <p:cNvSpPr txBox="1"/>
-          <p:nvPr/>
-        </p:nvSpPr>
-        <p:spPr>
-          <a:xfrm>
-            <a:off x="4128839" y="1426833"/>
-            <a:ext cx="529800" cy="323100"/>
-          </a:xfrm>
-          <a:prstGeom prst="rect">
-            <a:avLst/>
-          </a:prstGeom>
-          <a:noFill/>
-          <a:ln>
-            <a:noFill/>
-          </a:ln>
-        </p:spPr>
-        <p:txBody>
-          <a:bodyPr anchorCtr="0" anchor="t" bIns="91425" lIns="91425" spcFirstLastPara="1" rIns="91425" wrap="square" tIns="91425">
-            <a:spAutoFit/>
-          </a:bodyPr>
-          <a:lstStyle/>
-          <a:p>
-            <a:pPr indent="0" lvl="0" marL="0" rtl="0" algn="l">
-              <a:spcBef>
-                <a:spcPts val="0"/>
-              </a:spcBef>
-              <a:spcAft>
-                <a:spcPts val="0"/>
-              </a:spcAft>
-              <a:buNone/>
-            </a:pPr>
-            <a:r>
-              <a:rPr lang="es-419" sz="900">
-                <a:solidFill>
-                  <a:schemeClr val="dk2"/>
-                </a:solidFill>
-              </a:rPr>
-              <a:t>100pb</a:t>
-            </a:r>
-            <a:endParaRPr sz="900">
-              <a:solidFill>
-                <a:schemeClr val="dk2"/>
-              </a:solidFill>
-            </a:endParaRPr>
-          </a:p>
-        </p:txBody>
-      </p:sp>
-      <p:sp>
-        <p:nvSpPr>
-          <p:cNvPr id="134" name="Google Shape;134;p21"/>
-          <p:cNvSpPr txBox="1"/>
-          <p:nvPr/>
-        </p:nvSpPr>
-        <p:spPr>
-          <a:xfrm>
-            <a:off x="2557106" y="1426945"/>
-            <a:ext cx="529800" cy="323100"/>
-          </a:xfrm>
-          <a:prstGeom prst="rect">
-            <a:avLst/>
-          </a:prstGeom>
-          <a:noFill/>
-          <a:ln>
-            <a:noFill/>
-          </a:ln>
-        </p:spPr>
-        <p:txBody>
-          <a:bodyPr anchorCtr="0" anchor="t" bIns="91425" lIns="91425" spcFirstLastPara="1" rIns="91425" wrap="square" tIns="91425">
-            <a:spAutoFit/>
-          </a:bodyPr>
-          <a:lstStyle/>
-          <a:p>
-            <a:pPr indent="0" lvl="0" marL="0" rtl="0" algn="l">
-              <a:spcBef>
-                <a:spcPts val="0"/>
-              </a:spcBef>
-              <a:spcAft>
-                <a:spcPts val="0"/>
-              </a:spcAft>
-              <a:buNone/>
-            </a:pPr>
-            <a:r>
-              <a:rPr lang="es-419" sz="900">
-                <a:solidFill>
-                  <a:schemeClr val="dk2"/>
-                </a:solidFill>
-              </a:rPr>
-              <a:t>152</a:t>
-            </a:r>
-            <a:r>
-              <a:rPr lang="es-419" sz="900">
-                <a:solidFill>
-                  <a:schemeClr val="dk2"/>
-                </a:solidFill>
-              </a:rPr>
-              <a:t>pb</a:t>
-            </a:r>
-            <a:endParaRPr sz="900">
-              <a:solidFill>
-                <a:schemeClr val="dk2"/>
-              </a:solidFill>
-            </a:endParaRPr>
-          </a:p>
-        </p:txBody>
-      </p:sp>
-      <p:sp>
-        <p:nvSpPr>
-          <p:cNvPr id="135" name="Google Shape;135;p21"/>
-          <p:cNvSpPr txBox="1"/>
-          <p:nvPr/>
-        </p:nvSpPr>
-        <p:spPr>
-          <a:xfrm>
-            <a:off x="1653420" y="1513592"/>
-            <a:ext cx="722400" cy="461700"/>
-          </a:xfrm>
-          <a:prstGeom prst="rect">
-            <a:avLst/>
-          </a:prstGeom>
-          <a:noFill/>
-          <a:ln>
-            <a:noFill/>
-          </a:ln>
-        </p:spPr>
-        <p:txBody>
-          <a:bodyPr anchorCtr="0" anchor="t" bIns="91425" lIns="91425" spcFirstLastPara="1" rIns="91425" wrap="square" tIns="91425">
-            <a:spAutoFit/>
-          </a:bodyPr>
-          <a:lstStyle/>
-          <a:p>
-            <a:pPr indent="0" lvl="0" marL="0" rtl="0" algn="l">
-              <a:spcBef>
-                <a:spcPts val="0"/>
-              </a:spcBef>
-              <a:spcAft>
-                <a:spcPts val="0"/>
-              </a:spcAft>
-              <a:buNone/>
-            </a:pPr>
-            <a:r>
-              <a:t/>
-            </a:r>
-            <a:endParaRPr sz="1800">
-              <a:solidFill>
-                <a:schemeClr val="dk2"/>
-              </a:solidFill>
-            </a:endParaRPr>
-          </a:p>
-        </p:txBody>
-      </p:sp>
-      <p:sp>
-        <p:nvSpPr>
-          <p:cNvPr id="136" name="Google Shape;136;p21"/>
-          <p:cNvSpPr txBox="1"/>
-          <p:nvPr/>
-        </p:nvSpPr>
-        <p:spPr>
-          <a:xfrm>
-            <a:off x="1566730" y="1388317"/>
-            <a:ext cx="529800" cy="323100"/>
-          </a:xfrm>
-          <a:prstGeom prst="rect">
-            <a:avLst/>
-          </a:prstGeom>
-          <a:noFill/>
-          <a:ln>
-            <a:noFill/>
-          </a:ln>
-        </p:spPr>
-        <p:txBody>
-          <a:bodyPr anchorCtr="0" anchor="t" bIns="91425" lIns="91425" spcFirstLastPara="1" rIns="91425" wrap="square" tIns="91425">
-            <a:spAutoFit/>
-          </a:bodyPr>
-          <a:lstStyle/>
-          <a:p>
-            <a:pPr indent="0" lvl="0" marL="0" rtl="0" algn="l">
-              <a:spcBef>
-                <a:spcPts val="0"/>
-              </a:spcBef>
-              <a:spcAft>
-                <a:spcPts val="0"/>
-              </a:spcAft>
-              <a:buNone/>
-            </a:pPr>
-            <a:r>
-              <a:rPr lang="es-419" sz="900">
-                <a:solidFill>
-                  <a:schemeClr val="dk2"/>
-                </a:solidFill>
-              </a:rPr>
-              <a:t>24pb</a:t>
-            </a:r>
-            <a:endParaRPr sz="900">
-              <a:solidFill>
-                <a:schemeClr val="dk2"/>
-              </a:solidFill>
-            </a:endParaRPr>
-          </a:p>
-        </p:txBody>
-      </p:sp>
-      <p:sp>
-        <p:nvSpPr>
-          <p:cNvPr id="137" name="Google Shape;137;p21"/>
-          <p:cNvSpPr txBox="1"/>
-          <p:nvPr/>
-        </p:nvSpPr>
-        <p:spPr>
-          <a:xfrm>
-            <a:off x="4944126" y="1397949"/>
-            <a:ext cx="529800" cy="323100"/>
-          </a:xfrm>
-          <a:prstGeom prst="rect">
-            <a:avLst/>
-          </a:prstGeom>
-          <a:noFill/>
-          <a:ln>
-            <a:noFill/>
-          </a:ln>
-        </p:spPr>
-        <p:txBody>
-          <a:bodyPr anchorCtr="0" anchor="t" bIns="91425" lIns="91425" spcFirstLastPara="1" rIns="91425" wrap="square" tIns="91425">
-            <a:spAutoFit/>
-          </a:bodyPr>
-          <a:lstStyle/>
-          <a:p>
-            <a:pPr indent="0" lvl="0" marL="0" rtl="0" algn="l">
-              <a:spcBef>
-                <a:spcPts val="0"/>
-              </a:spcBef>
-              <a:spcAft>
-                <a:spcPts val="0"/>
-              </a:spcAft>
-              <a:buNone/>
-            </a:pPr>
-            <a:r>
-              <a:rPr lang="es-419" sz="900">
-                <a:solidFill>
-                  <a:schemeClr val="dk2"/>
-                </a:solidFill>
-              </a:rPr>
-              <a:t>24pb</a:t>
-            </a:r>
-            <a:endParaRPr sz="900">
-              <a:solidFill>
-                <a:schemeClr val="dk2"/>
-              </a:solidFill>
-            </a:endParaRPr>
-          </a:p>
-        </p:txBody>
-      </p:sp>
-      <p:sp>
-        <p:nvSpPr>
-          <p:cNvPr id="138" name="Google Shape;138;p21"/>
-          <p:cNvSpPr/>
-          <p:nvPr/>
-        </p:nvSpPr>
-        <p:spPr>
-          <a:xfrm>
-            <a:off x="3656863" y="1351557"/>
-            <a:ext cx="1300500" cy="163800"/>
-          </a:xfrm>
-          <a:prstGeom prst="rect">
-            <a:avLst/>
-          </a:prstGeom>
-          <a:solidFill>
-            <a:srgbClr val="358AA9"/>
-          </a:solidFill>
-          <a:ln cap="flat" cmpd="sng" w="9525">
-            <a:solidFill>
-              <a:schemeClr val="dk2"/>
-            </a:solidFill>
-            <a:prstDash val="solid"/>
-            <a:round/>
-            <a:headEnd len="sm" w="sm" type="none"/>
-            <a:tailEnd len="sm" w="sm" type="none"/>
-          </a:ln>
-        </p:spPr>
-        <p:txBody>
-          <a:bodyPr anchorCtr="0" anchor="ctr" bIns="91425" lIns="91425" spcFirstLastPara="1" rIns="91425" wrap="square" tIns="91425">
-            <a:noAutofit/>
-          </a:bodyPr>
-          <a:lstStyle/>
-          <a:p>
-            <a:pPr indent="0" lvl="0" marL="0" rtl="0" algn="ctr">
-              <a:spcBef>
-                <a:spcPts val="0"/>
-              </a:spcBef>
-              <a:spcAft>
-                <a:spcPts val="0"/>
-              </a:spcAft>
-              <a:buNone/>
-            </a:pPr>
-            <a:r>
-              <a:t/>
-            </a:r>
-            <a:endParaRPr>
-              <a:highlight>
-                <a:srgbClr val="666666"/>
-              </a:highlight>
-            </a:endParaRPr>
-          </a:p>
-        </p:txBody>
-      </p:sp>
-      <p:sp>
-        <p:nvSpPr>
-          <p:cNvPr id="139" name="Google Shape;139;p21"/>
-          <p:cNvSpPr txBox="1"/>
-          <p:nvPr/>
-        </p:nvSpPr>
-        <p:spPr>
-          <a:xfrm>
-            <a:off x="5517591" y="509102"/>
-            <a:ext cx="1918200" cy="369300"/>
-          </a:xfrm>
-          <a:prstGeom prst="rect">
-            <a:avLst/>
-          </a:prstGeom>
-          <a:noFill/>
-          <a:ln>
-            <a:noFill/>
-          </a:ln>
-        </p:spPr>
-        <p:txBody>
-          <a:bodyPr anchorCtr="0" anchor="t" bIns="91425" lIns="91425" spcFirstLastPara="1" rIns="91425" wrap="square" tIns="91425">
-            <a:spAutoFit/>
-          </a:bodyPr>
-          <a:lstStyle/>
-          <a:p>
-            <a:pPr indent="0" lvl="0" marL="0" rtl="0" algn="l">
-              <a:spcBef>
-                <a:spcPts val="0"/>
-              </a:spcBef>
-              <a:spcAft>
-                <a:spcPts val="0"/>
-              </a:spcAft>
-              <a:buNone/>
-            </a:pPr>
-            <a:r>
-              <a:rPr lang="es-419" sz="1200">
-                <a:solidFill>
-                  <a:schemeClr val="dk2"/>
-                </a:solidFill>
-              </a:rPr>
-              <a:t>Promotor EPD (n=20851)</a:t>
-            </a:r>
-            <a:endParaRPr sz="1200">
-              <a:solidFill>
-                <a:schemeClr val="dk2"/>
-              </a:solidFill>
-            </a:endParaRPr>
-          </a:p>
-        </p:txBody>
-      </p:sp>
-      <p:sp>
-        <p:nvSpPr>
-          <p:cNvPr id="140" name="Google Shape;140;p21"/>
-          <p:cNvSpPr txBox="1"/>
-          <p:nvPr/>
-        </p:nvSpPr>
-        <p:spPr>
-          <a:xfrm>
-            <a:off x="5517591" y="1259827"/>
-            <a:ext cx="1918200" cy="369300"/>
-          </a:xfrm>
-          <a:prstGeom prst="rect">
-            <a:avLst/>
-          </a:prstGeom>
-          <a:noFill/>
-          <a:ln>
-            <a:noFill/>
-          </a:ln>
-        </p:spPr>
-        <p:txBody>
-          <a:bodyPr anchorCtr="0" anchor="t" bIns="91425" lIns="91425" spcFirstLastPara="1" rIns="91425" wrap="square" tIns="91425">
-            <a:spAutoFit/>
-          </a:bodyPr>
-          <a:lstStyle/>
-          <a:p>
-            <a:pPr indent="0" lvl="0" marL="0" rtl="0" algn="l">
-              <a:spcBef>
-                <a:spcPts val="0"/>
-              </a:spcBef>
-              <a:spcAft>
-                <a:spcPts val="0"/>
-              </a:spcAft>
-              <a:buNone/>
-            </a:pPr>
-            <a:r>
-              <a:rPr lang="es-419" sz="1200">
-                <a:solidFill>
-                  <a:schemeClr val="dk2"/>
-                </a:solidFill>
-              </a:rPr>
-              <a:t>Enhancer</a:t>
-            </a:r>
-            <a:r>
-              <a:rPr lang="es-419" sz="1200">
-                <a:solidFill>
-                  <a:schemeClr val="dk2"/>
-                </a:solidFill>
-              </a:rPr>
-              <a:t> (n=3000)</a:t>
-            </a:r>
-            <a:endParaRPr sz="1200">
-              <a:solidFill>
-                <a:schemeClr val="dk2"/>
-              </a:solidFill>
-            </a:endParaRPr>
-          </a:p>
-        </p:txBody>
-      </p:sp>
-      <p:sp>
-        <p:nvSpPr>
-          <p:cNvPr id="141" name="Google Shape;141;p21"/>
-          <p:cNvSpPr txBox="1"/>
-          <p:nvPr/>
-        </p:nvSpPr>
-        <p:spPr>
-          <a:xfrm>
-            <a:off x="2467326" y="1608888"/>
-            <a:ext cx="1261800" cy="338700"/>
-          </a:xfrm>
-          <a:prstGeom prst="rect">
-            <a:avLst/>
-          </a:prstGeom>
-          <a:noFill/>
-          <a:ln>
-            <a:noFill/>
-          </a:ln>
-        </p:spPr>
-        <p:txBody>
-          <a:bodyPr anchorCtr="0" anchor="t" bIns="91425" lIns="91425" spcFirstLastPara="1" rIns="91425" wrap="square" tIns="91425">
-            <a:spAutoFit/>
-          </a:bodyPr>
-          <a:lstStyle/>
-          <a:p>
-            <a:pPr indent="0" lvl="0" marL="0" rtl="0" algn="l">
-              <a:spcBef>
-                <a:spcPts val="0"/>
-              </a:spcBef>
-              <a:spcAft>
-                <a:spcPts val="0"/>
-              </a:spcAft>
-              <a:buNone/>
-            </a:pPr>
-            <a:r>
-              <a:rPr lang="es-419" sz="1000">
-                <a:solidFill>
-                  <a:schemeClr val="dk2"/>
-                </a:solidFill>
-              </a:rPr>
-              <a:t>Enhancer</a:t>
-            </a:r>
-            <a:endParaRPr sz="1000">
-              <a:solidFill>
-                <a:schemeClr val="dk2"/>
-              </a:solidFill>
-            </a:endParaRPr>
-          </a:p>
-        </p:txBody>
-      </p:sp>
-      <p:sp>
-        <p:nvSpPr>
-          <p:cNvPr id="142" name="Google Shape;142;p21"/>
-          <p:cNvSpPr txBox="1"/>
-          <p:nvPr/>
-        </p:nvSpPr>
-        <p:spPr>
-          <a:xfrm>
-            <a:off x="3873626" y="1609864"/>
-            <a:ext cx="1261800" cy="338700"/>
-          </a:xfrm>
-          <a:prstGeom prst="rect">
-            <a:avLst/>
-          </a:prstGeom>
-          <a:noFill/>
-          <a:ln>
-            <a:noFill/>
-          </a:ln>
-        </p:spPr>
-        <p:txBody>
-          <a:bodyPr anchorCtr="0" anchor="t" bIns="91425" lIns="91425" spcFirstLastPara="1" rIns="91425" wrap="square" tIns="91425">
-            <a:spAutoFit/>
-          </a:bodyPr>
-          <a:lstStyle/>
-          <a:p>
-            <a:pPr indent="0" lvl="0" marL="0" rtl="0" algn="l">
-              <a:spcBef>
-                <a:spcPts val="0"/>
-              </a:spcBef>
-              <a:spcAft>
-                <a:spcPts val="0"/>
-              </a:spcAft>
-              <a:buNone/>
-            </a:pPr>
-            <a:r>
-              <a:rPr lang="es-419" sz="1000">
-                <a:solidFill>
-                  <a:schemeClr val="dk2"/>
-                </a:solidFill>
-              </a:rPr>
-              <a:t>FN1 promoter</a:t>
-            </a:r>
-            <a:endParaRPr sz="1000">
-              <a:solidFill>
-                <a:schemeClr val="dk2"/>
-              </a:solidFill>
-            </a:endParaRPr>
-          </a:p>
-        </p:txBody>
-      </p:sp>
-      <p:sp>
-        <p:nvSpPr>
-          <p:cNvPr id="143" name="Google Shape;143;p21"/>
-          <p:cNvSpPr txBox="1"/>
-          <p:nvPr/>
-        </p:nvSpPr>
-        <p:spPr>
-          <a:xfrm>
-            <a:off x="1406475" y="1607700"/>
-            <a:ext cx="861900" cy="338700"/>
-          </a:xfrm>
-          <a:prstGeom prst="rect">
-            <a:avLst/>
-          </a:prstGeom>
-          <a:noFill/>
-          <a:ln>
-            <a:noFill/>
-          </a:ln>
-        </p:spPr>
-        <p:txBody>
-          <a:bodyPr anchorCtr="0" anchor="t" bIns="91425" lIns="91425" spcFirstLastPara="1" rIns="91425" wrap="square" tIns="91425">
-            <a:spAutoFit/>
-          </a:bodyPr>
-          <a:lstStyle/>
-          <a:p>
-            <a:pPr indent="0" lvl="0" marL="0" rtl="0" algn="l">
-              <a:spcBef>
-                <a:spcPts val="0"/>
-              </a:spcBef>
-              <a:spcAft>
-                <a:spcPts val="0"/>
-              </a:spcAft>
-              <a:buNone/>
-            </a:pPr>
-            <a:r>
-              <a:rPr lang="es-419" sz="1000">
-                <a:solidFill>
-                  <a:schemeClr val="dk2"/>
-                </a:solidFill>
-              </a:rPr>
-              <a:t>Adaptador</a:t>
-            </a:r>
-            <a:endParaRPr sz="1000">
-              <a:solidFill>
-                <a:schemeClr val="dk2"/>
-              </a:solidFill>
-            </a:endParaRPr>
-          </a:p>
-        </p:txBody>
-      </p:sp>
-      <p:sp>
-        <p:nvSpPr>
-          <p:cNvPr id="144" name="Google Shape;144;p21"/>
-          <p:cNvSpPr txBox="1"/>
-          <p:nvPr/>
-        </p:nvSpPr>
-        <p:spPr>
-          <a:xfrm>
-            <a:off x="4893660" y="1609875"/>
-            <a:ext cx="861900" cy="338700"/>
-          </a:xfrm>
-          <a:prstGeom prst="rect">
-            <a:avLst/>
-          </a:prstGeom>
-          <a:noFill/>
-          <a:ln>
-            <a:noFill/>
-          </a:ln>
-        </p:spPr>
-        <p:txBody>
-          <a:bodyPr anchorCtr="0" anchor="t" bIns="91425" lIns="91425" spcFirstLastPara="1" rIns="91425" wrap="square" tIns="91425">
-            <a:spAutoFit/>
-          </a:bodyPr>
-          <a:lstStyle/>
-          <a:p>
-            <a:pPr indent="0" lvl="0" marL="0" rtl="0" algn="l">
-              <a:spcBef>
-                <a:spcPts val="0"/>
-              </a:spcBef>
-              <a:spcAft>
-                <a:spcPts val="0"/>
-              </a:spcAft>
-              <a:buNone/>
-            </a:pPr>
-            <a:r>
-              <a:rPr lang="es-419" sz="1000">
-                <a:solidFill>
-                  <a:schemeClr val="dk2"/>
-                </a:solidFill>
-              </a:rPr>
-              <a:t>Adaptador</a:t>
-            </a:r>
-            <a:endParaRPr sz="1000">
-              <a:solidFill>
-                <a:schemeClr val="dk2"/>
-              </a:solidFill>
-            </a:endParaRPr>
-          </a:p>
-        </p:txBody>
-      </p:sp>
       <p:pic>
         <p:nvPicPr>
-          <p:cNvPr id="145" name="Google Shape;145;p21" title="tss_relpos_zoom.jpg"/>
+          <p:cNvPr id="130" name="Google Shape;130;p21" title="mean_var_bimodal_page-0001.jpg"/>
           <p:cNvPicPr preferRelativeResize="0"/>
           <p:nvPr/>
         </p:nvPicPr>
@@ -10273,8 +12234,8 @@
         </p:blipFill>
         <p:spPr>
           <a:xfrm>
-            <a:off x="4793085" y="2026427"/>
-            <a:ext cx="4126915" cy="3095186"/>
+            <a:off x="4113175" y="389125"/>
+            <a:ext cx="4522798" cy="3392099"/>
           </a:xfrm>
           <a:prstGeom prst="rect">
             <a:avLst/>
@@ -10285,163 +12246,9 @@
           </a:ln>
         </p:spPr>
       </p:pic>
-      <p:sp>
-        <p:nvSpPr>
-          <p:cNvPr id="146" name="Google Shape;146;p21"/>
-          <p:cNvSpPr txBox="1"/>
-          <p:nvPr/>
-        </p:nvSpPr>
-        <p:spPr>
-          <a:xfrm>
-            <a:off x="7918675" y="218875"/>
-            <a:ext cx="3477600" cy="2185800"/>
-          </a:xfrm>
-          <a:prstGeom prst="rect">
-            <a:avLst/>
-          </a:prstGeom>
-          <a:noFill/>
-          <a:ln>
-            <a:noFill/>
-          </a:ln>
-        </p:spPr>
-        <p:txBody>
-          <a:bodyPr anchorCtr="0" anchor="t" bIns="91425" lIns="91425" spcFirstLastPara="1" rIns="91425" wrap="square" tIns="91425">
-            <a:spAutoFit/>
-          </a:bodyPr>
-          <a:lstStyle/>
-          <a:p>
-            <a:pPr indent="0" lvl="0" marL="0" rtl="0" algn="l">
-              <a:spcBef>
-                <a:spcPts val="0"/>
-              </a:spcBef>
-              <a:spcAft>
-                <a:spcPts val="0"/>
-              </a:spcAft>
-              <a:buNone/>
-            </a:pPr>
-            <a:r>
-              <a:rPr b="1" lang="es-419" sz="1000">
-                <a:solidFill>
-                  <a:schemeClr val="dk2"/>
-                </a:solidFill>
-              </a:rPr>
-              <a:t>Diseño experimental de la library y corroboración de los sitios de inicio de la transcripción (TSS).</a:t>
-            </a:r>
-            <a:endParaRPr b="1" sz="1000">
-              <a:solidFill>
-                <a:schemeClr val="dk2"/>
-              </a:solidFill>
-            </a:endParaRPr>
-          </a:p>
-          <a:p>
-            <a:pPr indent="0" lvl="0" marL="0" rtl="0" algn="l">
-              <a:spcBef>
-                <a:spcPts val="0"/>
-              </a:spcBef>
-              <a:spcAft>
-                <a:spcPts val="0"/>
-              </a:spcAft>
-              <a:buNone/>
-            </a:pPr>
-            <a:r>
-              <a:rPr lang="es-419" sz="1000">
-                <a:solidFill>
-                  <a:schemeClr val="dk2"/>
-                </a:solidFill>
-              </a:rPr>
-              <a:t>A- Esquema representativo de la estructura de las secuencias promotoras y enhancers presentes en la </a:t>
-            </a:r>
-            <a:r>
-              <a:rPr lang="es-419" sz="1000">
-                <a:solidFill>
-                  <a:schemeClr val="dk2"/>
-                </a:solidFill>
-              </a:rPr>
-              <a:t>librería</a:t>
-            </a:r>
-            <a:r>
-              <a:rPr lang="es-419" sz="1000">
-                <a:solidFill>
-                  <a:schemeClr val="dk2"/>
-                </a:solidFill>
-              </a:rPr>
-              <a:t>. Con flecha se indica el TSS anotado, y se incluyen las 24pb de los adaptadores ligados a cada extremo de la secuencia. </a:t>
-            </a:r>
-            <a:endParaRPr sz="1000">
-              <a:solidFill>
-                <a:schemeClr val="dk2"/>
-              </a:solidFill>
-            </a:endParaRPr>
-          </a:p>
-          <a:p>
-            <a:pPr indent="0" lvl="0" marL="0" rtl="0" algn="l">
-              <a:spcBef>
-                <a:spcPts val="0"/>
-              </a:spcBef>
-              <a:spcAft>
-                <a:spcPts val="0"/>
-              </a:spcAft>
-              <a:buNone/>
-            </a:pPr>
-            <a:r>
-              <a:rPr lang="es-419" sz="1000">
-                <a:solidFill>
-                  <a:schemeClr val="dk2"/>
-                </a:solidFill>
-              </a:rPr>
-              <a:t>B- Cantidades que cada tipo de secuencias presentes en la </a:t>
-            </a:r>
-            <a:r>
-              <a:rPr lang="es-419" sz="1000">
-                <a:solidFill>
-                  <a:schemeClr val="dk2"/>
-                </a:solidFill>
-              </a:rPr>
-              <a:t>librería</a:t>
-            </a:r>
-            <a:r>
-              <a:rPr lang="es-419" sz="1000">
-                <a:solidFill>
-                  <a:schemeClr val="dk2"/>
-                </a:solidFill>
-              </a:rPr>
-              <a:t>. </a:t>
-            </a:r>
-            <a:endParaRPr sz="1000">
-              <a:solidFill>
-                <a:schemeClr val="dk2"/>
-              </a:solidFill>
-            </a:endParaRPr>
-          </a:p>
-          <a:p>
-            <a:pPr indent="0" lvl="0" marL="0" rtl="0" algn="l">
-              <a:spcBef>
-                <a:spcPts val="0"/>
-              </a:spcBef>
-              <a:spcAft>
-                <a:spcPts val="0"/>
-              </a:spcAft>
-              <a:buNone/>
-            </a:pPr>
-            <a:r>
-              <a:rPr lang="es-419" sz="1000">
-                <a:solidFill>
-                  <a:schemeClr val="dk2"/>
-                </a:solidFill>
-              </a:rPr>
-              <a:t>C- Mapa de calor indicando, para cada promotor, la frecuencia relativa con que se utiliza como TSS cada base, con su posición relativa al TSS anotado, en muestras de CAGE de cultivos primarios humanos.. </a:t>
-            </a:r>
-            <a:endParaRPr sz="1000">
-              <a:solidFill>
-                <a:schemeClr val="dk2"/>
-              </a:solidFill>
-            </a:endParaRPr>
-          </a:p>
-        </p:txBody>
-      </p:sp>
       <p:pic>
         <p:nvPicPr>
-          <p:cNvPr id="147" name="Google Shape;147;p21"/>
+          <p:cNvPr id="131" name="Google Shape;131;p21" title="sample_effort_page-0001.jpg"/>
           <p:cNvPicPr preferRelativeResize="0"/>
           <p:nvPr/>
         </p:nvPicPr>
@@ -10455,8 +12262,8 @@
         </p:blipFill>
         <p:spPr>
           <a:xfrm>
-            <a:off x="152400" y="2127692"/>
-            <a:ext cx="3801279" cy="2863409"/>
+            <a:off x="701575" y="502452"/>
+            <a:ext cx="3411599" cy="3435650"/>
           </a:xfrm>
           <a:prstGeom prst="rect">
             <a:avLst/>
@@ -10467,6 +12274,161 @@
           </a:ln>
         </p:spPr>
       </p:pic>
+      <p:sp>
+        <p:nvSpPr>
+          <p:cNvPr id="132" name="Google Shape;132;p21"/>
+          <p:cNvSpPr txBox="1"/>
+          <p:nvPr/>
+        </p:nvSpPr>
+        <p:spPr>
+          <a:xfrm>
+            <a:off x="237300" y="3941927"/>
+            <a:ext cx="8906700" cy="1635300"/>
+          </a:xfrm>
+          <a:prstGeom prst="rect">
+            <a:avLst/>
+          </a:prstGeom>
+          <a:noFill/>
+          <a:ln>
+            <a:noFill/>
+          </a:ln>
+        </p:spPr>
+        <p:txBody>
+          <a:bodyPr anchorCtr="0" anchor="t" bIns="91425" lIns="91425" spcFirstLastPara="1" rIns="91425" wrap="square" tIns="91425">
+            <a:spAutoFit/>
+          </a:bodyPr>
+          <a:lstStyle/>
+          <a:p>
+            <a:pPr indent="0" lvl="0" marL="0" rtl="0" algn="l">
+              <a:lnSpc>
+                <a:spcPct val="115000"/>
+              </a:lnSpc>
+              <a:spcBef>
+                <a:spcPts val="1200"/>
+              </a:spcBef>
+              <a:spcAft>
+                <a:spcPts val="0"/>
+              </a:spcAft>
+              <a:buNone/>
+            </a:pPr>
+            <a:r>
+              <a:rPr b="1" lang="es-419" sz="1100">
+                <a:solidFill>
+                  <a:schemeClr val="dk1"/>
+                </a:solidFill>
+              </a:rPr>
+              <a:t>Ajuste por sesgo de muestreo diferencial y criterios de exclusión de promotores bimodales. </a:t>
+            </a:r>
+            <a:endParaRPr b="1" sz="1100">
+              <a:solidFill>
+                <a:schemeClr val="dk1"/>
+              </a:solidFill>
+            </a:endParaRPr>
+          </a:p>
+          <a:p>
+            <a:pPr indent="0" lvl="0" marL="0" rtl="0" algn="l">
+              <a:lnSpc>
+                <a:spcPct val="115000"/>
+              </a:lnSpc>
+              <a:spcBef>
+                <a:spcPts val="1200"/>
+              </a:spcBef>
+              <a:spcAft>
+                <a:spcPts val="0"/>
+              </a:spcAft>
+              <a:buNone/>
+            </a:pPr>
+            <a:r>
+              <a:rPr b="1" lang="es-419" sz="1100">
+                <a:solidFill>
+                  <a:schemeClr val="dk1"/>
+                </a:solidFill>
+              </a:rPr>
+              <a:t>A. </a:t>
+            </a:r>
+            <a:r>
+              <a:rPr lang="es-419" sz="1100">
+                <a:solidFill>
+                  <a:schemeClr val="dk1"/>
+                </a:solidFill>
+              </a:rPr>
+              <a:t>Gráfico de barras que muestra los factores de corrección dados por el esfuerzo de muestreo diferencial para cada </a:t>
+            </a:r>
+            <a:r>
+              <a:rPr i="1" lang="es-419" sz="1100">
+                <a:solidFill>
+                  <a:schemeClr val="dk1"/>
+                </a:solidFill>
+              </a:rPr>
+              <a:t>bin</a:t>
+            </a:r>
+            <a:r>
+              <a:rPr lang="es-419" sz="1100">
+                <a:solidFill>
+                  <a:schemeClr val="dk1"/>
+                </a:solidFill>
+              </a:rPr>
+              <a:t> de expresión de </a:t>
+            </a:r>
+            <a:r>
+              <a:rPr i="1" lang="es-419" sz="1100">
+                <a:solidFill>
+                  <a:schemeClr val="dk1"/>
+                </a:solidFill>
+              </a:rPr>
+              <a:t>EGFP</a:t>
+            </a:r>
+            <a:r>
+              <a:rPr lang="es-419" sz="1100">
+                <a:solidFill>
+                  <a:schemeClr val="dk1"/>
+                </a:solidFill>
+              </a:rPr>
+              <a:t>, los cuales son proporcionales a la abundancia celular relativa dentro de cada población. Este factor se utilizó para compensar las variaciones en el número de células entre los diferentes niveles de expresión.</a:t>
+            </a:r>
+            <a:endParaRPr sz="1100">
+              <a:solidFill>
+                <a:schemeClr val="dk1"/>
+              </a:solidFill>
+            </a:endParaRPr>
+          </a:p>
+          <a:p>
+            <a:pPr indent="0" lvl="0" marL="0" rtl="0" algn="l">
+              <a:lnSpc>
+                <a:spcPct val="115000"/>
+              </a:lnSpc>
+              <a:spcBef>
+                <a:spcPts val="1200"/>
+              </a:spcBef>
+              <a:spcAft>
+                <a:spcPts val="1200"/>
+              </a:spcAft>
+              <a:buNone/>
+            </a:pPr>
+            <a:r>
+              <a:rPr b="1" lang="es-419" sz="1100">
+                <a:solidFill>
+                  <a:schemeClr val="dk1"/>
+                </a:solidFill>
+              </a:rPr>
+              <a:t>B- </a:t>
+            </a:r>
+            <a:r>
+              <a:rPr lang="es-419" sz="1100">
+                <a:solidFill>
+                  <a:schemeClr val="dk1"/>
+                </a:solidFill>
+              </a:rPr>
+              <a:t>Gráfico de dispersión que representa la relación entre la media y la varianza derivadas del ensayo de cuantificación masiva en paralelo para cada promotor. Los puntos en cian representan promotores altamente bimodales, los cuales fueron excluidos del análisis.</a:t>
+            </a:r>
+            <a:endParaRPr sz="1800">
+              <a:solidFill>
+                <a:schemeClr val="dk2"/>
+              </a:solidFill>
+            </a:endParaRPr>
+          </a:p>
+        </p:txBody>
+      </p:sp>
     </p:spTree>
   </p:cSld>
   <p:clrMapOvr>
@@ -10476,6 +12438,285 @@
 </file>
 
 <file path=ppt/theme/theme1.xml><?xml version="1.0" encoding="utf-8"?>
+<a:theme xmlns:a="http://schemas.openxmlformats.org/drawingml/2006/main" xmlns:r="http://schemas.openxmlformats.org/officeDocument/2006/relationships">
+  <a:themeElements>
+    <a:clrScheme name="Default">
+      <a:dk1>
+        <a:srgbClr val="000000"/>
+      </a:dk1>
+      <a:lt1>
+        <a:srgbClr val="FFFFFF"/>
+      </a:lt1>
+      <a:dk2>
+        <a:srgbClr val="158158"/>
+      </a:dk2>
+      <a:lt2>
+        <a:srgbClr val="F3F3F3"/>
+      </a:lt2>
+      <a:accent1>
+        <a:srgbClr val="058DC7"/>
+      </a:accent1>
+      <a:accent2>
+        <a:srgbClr val="50B432"/>
+      </a:accent2>
+      <a:accent3>
+        <a:srgbClr val="ED561B"/>
+      </a:accent3>
+      <a:accent4>
+        <a:srgbClr val="EDEF00"/>
+      </a:accent4>
+      <a:accent5>
+        <a:srgbClr val="24CBE5"/>
+      </a:accent5>
+      <a:accent6>
+        <a:srgbClr val="64E572"/>
+      </a:accent6>
+      <a:hlink>
+        <a:srgbClr val="2200CC"/>
+      </a:hlink>
+      <a:folHlink>
+        <a:srgbClr val="551A8B"/>
+      </a:folHlink>
+    </a:clrScheme>
+    <a:fontScheme name="Office">
+      <a:majorFont>
+        <a:latin typeface="Arial"/>
+        <a:ea typeface=""/>
+        <a:cs typeface=""/>
+        <a:font script="Jpan" typeface="ＭＳ Ｐゴシック"/>
+        <a:font script="Hang" typeface="맑은 고딕"/>
+        <a:font script="Hans" typeface="宋体"/>
+        <a:font script="Hant" typeface="新細明體"/>
+        <a:font script="Arab" typeface="Times New Roman"/>
+        <a:font script="Hebr" typeface="Times New Roman"/>
+        <a:font script="Thai" typeface="Angsana New"/>
+        <a:font script="Ethi" typeface="Nyala"/>
+        <a:font script="Beng" typeface="Vrinda"/>
+        <a:font script="Gujr" typeface="Shruti"/>
+        <a:font script="Khmr" typeface="MoolBoran"/>
+        <a:font script="Knda" typeface="Tunga"/>
+        <a:font script="Guru" typeface="Raavi"/>
+        <a:font script="Cans" typeface="Euphemia"/>
+        <a:font script="Cher" typeface="Plantagenet Cherokee"/>
+        <a:font script="Yiii" typeface="Microsoft Yi Baiti"/>
+        <a:font script="Tibt" typeface="Microsoft Himalaya"/>
+        <a:font script="Thaa" typeface="MV Boli"/>
+        <a:font script="Deva" typeface="Mangal"/>
+        <a:font script="Telu" typeface="Gautami"/>
+        <a:font script="Taml" typeface="Latha"/>
+        <a:font script="Syrc" typeface="Estrangelo Edessa"/>
+        <a:font script="Orya" typeface="Kalinga"/>
+        <a:font script="Mlym" typeface="Kartika"/>
+        <a:font script="Laoo" typeface="DokChampa"/>
+        <a:font script="Sinh" typeface="Iskoola Pota"/>
+        <a:font script="Mong" typeface="Mongolian Baiti"/>
+        <a:font script="Viet" typeface="Times New Roman"/>
+        <a:font script="Uigh" typeface="Microsoft Uighur"/>
+        <a:font script="Geor" typeface="Sylfaen"/>
+      </a:majorFont>
+      <a:minorFont>
+        <a:latin typeface="Arial"/>
+        <a:ea typeface=""/>
+        <a:cs typeface=""/>
+        <a:font script="Jpan" typeface="ＭＳ Ｐゴシック"/>
+        <a:font script="Hang" typeface="맑은 고딕"/>
+        <a:font script="Hans" typeface="宋体"/>
+        <a:font script="Hant" typeface="新細明體"/>
+        <a:font script="Arab" typeface="Arial"/>
+        <a:font script="Hebr" typeface="Arial"/>
+        <a:font script="Thai" typeface="Cordia New"/>
+        <a:font script="Ethi" typeface="Nyala"/>
+        <a:font script="Beng" typeface="Vrinda"/>
+        <a:font script="Gujr" typeface="Shruti"/>
+        <a:font script="Khmr" typeface="DaunPenh"/>
+        <a:font script="Knda" typeface="Tunga"/>
+        <a:font script="Guru" typeface="Raavi"/>
+        <a:font script="Cans" typeface="Euphemia"/>
+        <a:font script="Cher" typeface="Plantagenet Cherokee"/>
+        <a:font script="Yiii" typeface="Microsoft Yi Baiti"/>
+        <a:font script="Tibt" typeface="Microsoft Himalaya"/>
+        <a:font script="Thaa" typeface="MV Boli"/>
+        <a:font script="Deva" typeface="Mangal"/>
+        <a:font script="Telu" typeface="Gautami"/>
+        <a:font script="Taml" typeface="Latha"/>
+        <a:font script="Syrc" typeface="Estrangelo Edessa"/>
+        <a:font script="Orya" typeface="Kalinga"/>
+        <a:font script="Mlym" typeface="Kartika"/>
+        <a:font script="Laoo" typeface="DokChampa"/>
+        <a:font script="Sinh" typeface="Iskoola Pota"/>
+        <a:font script="Mong" typeface="Mongolian Baiti"/>
+        <a:font script="Viet" typeface="Arial"/>
+        <a:font script="Uigh" typeface="Microsoft Uighur"/>
+        <a:font script="Geor" typeface="Sylfaen"/>
+      </a:minorFont>
+    </a:fontScheme>
+    <a:fmtScheme name="Office">
+      <a:fillStyleLst>
+        <a:solidFill>
+          <a:schemeClr val="phClr"/>
+        </a:solidFill>
+        <a:gradFill rotWithShape="1">
+          <a:gsLst>
+            <a:gs pos="0">
+              <a:schemeClr val="phClr">
+                <a:tint val="50000"/>
+                <a:satMod val="300000"/>
+              </a:schemeClr>
+            </a:gs>
+            <a:gs pos="35000">
+              <a:schemeClr val="phClr">
+                <a:tint val="37000"/>
+                <a:satMod val="300000"/>
+              </a:schemeClr>
+            </a:gs>
+            <a:gs pos="100000">
+              <a:schemeClr val="phClr">
+                <a:tint val="15000"/>
+                <a:satMod val="350000"/>
+              </a:schemeClr>
+            </a:gs>
+          </a:gsLst>
+          <a:lin ang="16200000" scaled="1"/>
+        </a:gradFill>
+        <a:gradFill rotWithShape="1">
+          <a:gsLst>
+            <a:gs pos="0">
+              <a:schemeClr val="phClr">
+                <a:tint val="100000"/>
+                <a:shade val="100000"/>
+                <a:satMod val="130000"/>
+              </a:schemeClr>
+            </a:gs>
+            <a:gs pos="100000">
+              <a:schemeClr val="phClr">
+                <a:tint val="50000"/>
+                <a:shade val="100000"/>
+                <a:satMod val="350000"/>
+              </a:schemeClr>
+            </a:gs>
+          </a:gsLst>
+          <a:lin ang="16200000" scaled="0"/>
+        </a:gradFill>
+      </a:fillStyleLst>
+      <a:lnStyleLst>
+        <a:ln w="9525" cap="flat" cmpd="sng" algn="ctr">
+          <a:solidFill>
+            <a:schemeClr val="phClr">
+              <a:shade val="95000"/>
+              <a:satMod val="105000"/>
+            </a:schemeClr>
+          </a:solidFill>
+          <a:prstDash val="solid"/>
+        </a:ln>
+        <a:ln w="25400" cap="flat" cmpd="sng" algn="ctr">
+          <a:solidFill>
+            <a:schemeClr val="phClr"/>
+          </a:solidFill>
+          <a:prstDash val="solid"/>
+        </a:ln>
+        <a:ln w="38100" cap="flat" cmpd="sng" algn="ctr">
+          <a:solidFill>
+            <a:schemeClr val="phClr"/>
+          </a:solidFill>
+          <a:prstDash val="solid"/>
+        </a:ln>
+      </a:lnStyleLst>
+      <a:effectStyleLst>
+        <a:effectStyle>
+          <a:effectLst>
+            <a:outerShdw blurRad="40000" dist="20000" dir="5400000" rotWithShape="0">
+              <a:srgbClr val="000000">
+                <a:alpha val="38000"/>
+              </a:srgbClr>
+            </a:outerShdw>
+          </a:effectLst>
+        </a:effectStyle>
+        <a:effectStyle>
+          <a:effectLst>
+            <a:outerShdw blurRad="40000" dist="23000" dir="5400000" rotWithShape="0">
+              <a:srgbClr val="000000">
+                <a:alpha val="35000"/>
+              </a:srgbClr>
+            </a:outerShdw>
+          </a:effectLst>
+        </a:effectStyle>
+        <a:effectStyle>
+          <a:effectLst>
+            <a:outerShdw blurRad="40000" dist="23000" dir="5400000" rotWithShape="0">
+              <a:srgbClr val="000000">
+                <a:alpha val="35000"/>
+              </a:srgbClr>
+            </a:outerShdw>
+          </a:effectLst>
+          <a:scene3d>
+            <a:camera prst="orthographicFront">
+              <a:rot lat="0" lon="0" rev="0"/>
+            </a:camera>
+            <a:lightRig rig="threePt" dir="t">
+              <a:rot lat="0" lon="0" rev="1200000"/>
+            </a:lightRig>
+          </a:scene3d>
+          <a:sp3d>
+            <a:bevelT w="63500" h="25400"/>
+          </a:sp3d>
+        </a:effectStyle>
+      </a:effectStyleLst>
+      <a:bgFillStyleLst>
+        <a:solidFill>
+          <a:schemeClr val="phClr"/>
+        </a:solidFill>
+        <a:gradFill rotWithShape="1">
+          <a:gsLst>
+            <a:gs pos="0">
+              <a:schemeClr val="phClr">
+                <a:tint val="40000"/>
+                <a:satMod val="350000"/>
+              </a:schemeClr>
+            </a:gs>
+            <a:gs pos="40000">
+              <a:schemeClr val="phClr">
+                <a:tint val="45000"/>
+                <a:shade val="99000"/>
+                <a:satMod val="350000"/>
+              </a:schemeClr>
+            </a:gs>
+            <a:gs pos="100000">
+              <a:schemeClr val="phClr">
+                <a:shade val="20000"/>
+                <a:satMod val="255000"/>
+              </a:schemeClr>
+            </a:gs>
+          </a:gsLst>
+          <a:path path="circle">
+            <a:fillToRect l="50000" t="-80000" r="50000" b="180000"/>
+          </a:path>
+        </a:gradFill>
+        <a:gradFill rotWithShape="1">
+          <a:gsLst>
+            <a:gs pos="0">
+              <a:schemeClr val="phClr">
+                <a:tint val="80000"/>
+                <a:satMod val="300000"/>
+              </a:schemeClr>
+            </a:gs>
+            <a:gs pos="100000">
+              <a:schemeClr val="phClr">
+                <a:shade val="30000"/>
+                <a:satMod val="200000"/>
+              </a:schemeClr>
+            </a:gs>
+          </a:gsLst>
+          <a:path path="circle">
+            <a:fillToRect l="50000" t="50000" r="50000" b="50000"/>
+          </a:path>
+        </a:gradFill>
+      </a:bgFillStyleLst>
+    </a:fmtScheme>
+  </a:themeElements>
+</a:theme>
+</file>
+
+<file path=ppt/theme/theme2.xml><?xml version="1.0" encoding="utf-8"?>
 <a:theme xmlns:a="http://schemas.openxmlformats.org/drawingml/2006/main" xmlns:r="http://schemas.openxmlformats.org/officeDocument/2006/relationships" name="Simple Light">
   <a:themeElements>
     <a:clrScheme name="Simple Light">
@@ -10752,283 +12993,4 @@
     </a:fmtScheme>
   </a:themeElements>
 </a:theme>
-</file>
-
-<file path=ppt/theme/theme2.xml><?xml version="1.0" encoding="utf-8"?>
-<a:theme xmlns:a="http://schemas.openxmlformats.org/drawingml/2006/main" xmlns:r="http://schemas.openxmlformats.org/officeDocument/2006/relationships">
-  <a:themeElements>
-    <a:clrScheme name="Default">
-      <a:dk1>
-        <a:srgbClr val="000000"/>
-      </a:dk1>
-      <a:lt1>
-        <a:srgbClr val="FFFFFF"/>
-      </a:lt1>
-      <a:dk2>
-        <a:srgbClr val="158158"/>
-      </a:dk2>
-      <a:lt2>
-        <a:srgbClr val="F3F3F3"/>
-      </a:lt2>
-      <a:accent1>
-        <a:srgbClr val="058DC7"/>
-      </a:accent1>
-      <a:accent2>
-        <a:srgbClr val="50B432"/>
-      </a:accent2>
-      <a:accent3>
-        <a:srgbClr val="ED561B"/>
-      </a:accent3>
-      <a:accent4>
-        <a:srgbClr val="EDEF00"/>
-      </a:accent4>
-      <a:accent5>
-        <a:srgbClr val="24CBE5"/>
-      </a:accent5>
-      <a:accent6>
-        <a:srgbClr val="64E572"/>
-      </a:accent6>
-      <a:hlink>
-        <a:srgbClr val="2200CC"/>
-      </a:hlink>
-      <a:folHlink>
-        <a:srgbClr val="551A8B"/>
-      </a:folHlink>
-    </a:clrScheme>
-    <a:fontScheme name="Office">
-      <a:majorFont>
-        <a:latin typeface="Arial"/>
-        <a:ea typeface=""/>
-        <a:cs typeface=""/>
-        <a:font script="Jpan" typeface="ＭＳ Ｐゴシック"/>
-        <a:font script="Hang" typeface="맑은 고딕"/>
-        <a:font script="Hans" typeface="宋体"/>
-        <a:font script="Hant" typeface="新細明體"/>
-        <a:font script="Arab" typeface="Times New Roman"/>
-        <a:font script="Hebr" typeface="Times New Roman"/>
-        <a:font script="Thai" typeface="Angsana New"/>
-        <a:font script="Ethi" typeface="Nyala"/>
-        <a:font script="Beng" typeface="Vrinda"/>
-        <a:font script="Gujr" typeface="Shruti"/>
-        <a:font script="Khmr" typeface="MoolBoran"/>
-        <a:font script="Knda" typeface="Tunga"/>
-        <a:font script="Guru" typeface="Raavi"/>
-        <a:font script="Cans" typeface="Euphemia"/>
-        <a:font script="Cher" typeface="Plantagenet Cherokee"/>
-        <a:font script="Yiii" typeface="Microsoft Yi Baiti"/>
-        <a:font script="Tibt" typeface="Microsoft Himalaya"/>
-        <a:font script="Thaa" typeface="MV Boli"/>
-        <a:font script="Deva" typeface="Mangal"/>
-        <a:font script="Telu" typeface="Gautami"/>
-        <a:font script="Taml" typeface="Latha"/>
-        <a:font script="Syrc" typeface="Estrangelo Edessa"/>
-        <a:font script="Orya" typeface="Kalinga"/>
-        <a:font script="Mlym" typeface="Kartika"/>
-        <a:font script="Laoo" typeface="DokChampa"/>
-        <a:font script="Sinh" typeface="Iskoola Pota"/>
-        <a:font script="Mong" typeface="Mongolian Baiti"/>
-        <a:font script="Viet" typeface="Times New Roman"/>
-        <a:font script="Uigh" typeface="Microsoft Uighur"/>
-        <a:font script="Geor" typeface="Sylfaen"/>
-      </a:majorFont>
-      <a:minorFont>
-        <a:latin typeface="Arial"/>
-        <a:ea typeface=""/>
-        <a:cs typeface=""/>
-        <a:font script="Jpan" typeface="ＭＳ Ｐゴシック"/>
-        <a:font script="Hang" typeface="맑은 고딕"/>
-        <a:font script="Hans" typeface="宋体"/>
-        <a:font script="Hant" typeface="新細明體"/>
-        <a:font script="Arab" typeface="Arial"/>
-        <a:font script="Hebr" typeface="Arial"/>
-        <a:font script="Thai" typeface="Cordia New"/>
-        <a:font script="Ethi" typeface="Nyala"/>
-        <a:font script="Beng" typeface="Vrinda"/>
-        <a:font script="Gujr" typeface="Shruti"/>
-        <a:font script="Khmr" typeface="DaunPenh"/>
-        <a:font script="Knda" typeface="Tunga"/>
-        <a:font script="Guru" typeface="Raavi"/>
-        <a:font script="Cans" typeface="Euphemia"/>
-        <a:font script="Cher" typeface="Plantagenet Cherokee"/>
-        <a:font script="Yiii" typeface="Microsoft Yi Baiti"/>
-        <a:font script="Tibt" typeface="Microsoft Himalaya"/>
-        <a:font script="Thaa" typeface="MV Boli"/>
-        <a:font script="Deva" typeface="Mangal"/>
-        <a:font script="Telu" typeface="Gautami"/>
-        <a:font script="Taml" typeface="Latha"/>
-        <a:font script="Syrc" typeface="Estrangelo Edessa"/>
-        <a:font script="Orya" typeface="Kalinga"/>
-        <a:font script="Mlym" typeface="Kartika"/>
-        <a:font script="Laoo" typeface="DokChampa"/>
-        <a:font script="Sinh" typeface="Iskoola Pota"/>
-        <a:font script="Mong" typeface="Mongolian Baiti"/>
-        <a:font script="Viet" typeface="Arial"/>
-        <a:font script="Uigh" typeface="Microsoft Uighur"/>
-        <a:font script="Geor" typeface="Sylfaen"/>
-      </a:minorFont>
-    </a:fontScheme>
-    <a:fmtScheme name="Office">
-      <a:fillStyleLst>
-        <a:solidFill>
-          <a:schemeClr val="phClr"/>
-        </a:solidFill>
-        <a:gradFill rotWithShape="1">
-          <a:gsLst>
-            <a:gs pos="0">
-              <a:schemeClr val="phClr">
-                <a:tint val="50000"/>
-                <a:satMod val="300000"/>
-              </a:schemeClr>
-            </a:gs>
-            <a:gs pos="35000">
-              <a:schemeClr val="phClr">
-                <a:tint val="37000"/>
-                <a:satMod val="300000"/>
-              </a:schemeClr>
-            </a:gs>
-            <a:gs pos="100000">
-              <a:schemeClr val="phClr">
-                <a:tint val="15000"/>
-                <a:satMod val="350000"/>
-              </a:schemeClr>
-            </a:gs>
-          </a:gsLst>
-          <a:lin ang="16200000" scaled="1"/>
-        </a:gradFill>
-        <a:gradFill rotWithShape="1">
-          <a:gsLst>
-            <a:gs pos="0">
-              <a:schemeClr val="phClr">
-                <a:tint val="100000"/>
-                <a:shade val="100000"/>
-                <a:satMod val="130000"/>
-              </a:schemeClr>
-            </a:gs>
-            <a:gs pos="100000">
-              <a:schemeClr val="phClr">
-                <a:tint val="50000"/>
-                <a:shade val="100000"/>
-                <a:satMod val="350000"/>
-              </a:schemeClr>
-            </a:gs>
-          </a:gsLst>
-          <a:lin ang="16200000" scaled="0"/>
-        </a:gradFill>
-      </a:fillStyleLst>
-      <a:lnStyleLst>
-        <a:ln w="9525" cap="flat" cmpd="sng" algn="ctr">
-          <a:solidFill>
-            <a:schemeClr val="phClr">
-              <a:shade val="95000"/>
-              <a:satMod val="105000"/>
-            </a:schemeClr>
-          </a:solidFill>
-          <a:prstDash val="solid"/>
-        </a:ln>
-        <a:ln w="25400" cap="flat" cmpd="sng" algn="ctr">
-          <a:solidFill>
-            <a:schemeClr val="phClr"/>
-          </a:solidFill>
-          <a:prstDash val="solid"/>
-        </a:ln>
-        <a:ln w="38100" cap="flat" cmpd="sng" algn="ctr">
-          <a:solidFill>
-            <a:schemeClr val="phClr"/>
-          </a:solidFill>
-          <a:prstDash val="solid"/>
-        </a:ln>
-      </a:lnStyleLst>
-      <a:effectStyleLst>
-        <a:effectStyle>
-          <a:effectLst>
-            <a:outerShdw blurRad="40000" dist="20000" dir="5400000" rotWithShape="0">
-              <a:srgbClr val="000000">
-                <a:alpha val="38000"/>
-              </a:srgbClr>
-            </a:outerShdw>
-          </a:effectLst>
-        </a:effectStyle>
-        <a:effectStyle>
-          <a:effectLst>
-            <a:outerShdw blurRad="40000" dist="23000" dir="5400000" rotWithShape="0">
-              <a:srgbClr val="000000">
-                <a:alpha val="35000"/>
-              </a:srgbClr>
-            </a:outerShdw>
-          </a:effectLst>
-        </a:effectStyle>
-        <a:effectStyle>
-          <a:effectLst>
-            <a:outerShdw blurRad="40000" dist="23000" dir="5400000" rotWithShape="0">
-              <a:srgbClr val="000000">
-                <a:alpha val="35000"/>
-              </a:srgbClr>
-            </a:outerShdw>
-          </a:effectLst>
-          <a:scene3d>
-            <a:camera prst="orthographicFront">
-              <a:rot lat="0" lon="0" rev="0"/>
-            </a:camera>
-            <a:lightRig rig="threePt" dir="t">
-              <a:rot lat="0" lon="0" rev="1200000"/>
-            </a:lightRig>
-          </a:scene3d>
-          <a:sp3d>
-            <a:bevelT w="63500" h="25400"/>
-          </a:sp3d>
-        </a:effectStyle>
-      </a:effectStyleLst>
-      <a:bgFillStyleLst>
-        <a:solidFill>
-          <a:schemeClr val="phClr"/>
-        </a:solidFill>
-        <a:gradFill rotWithShape="1">
-          <a:gsLst>
-            <a:gs pos="0">
-              <a:schemeClr val="phClr">
-                <a:tint val="40000"/>
-                <a:satMod val="350000"/>
-              </a:schemeClr>
-            </a:gs>
-            <a:gs pos="40000">
-              <a:schemeClr val="phClr">
-                <a:tint val="45000"/>
-                <a:shade val="99000"/>
-                <a:satMod val="350000"/>
-              </a:schemeClr>
-            </a:gs>
-            <a:gs pos="100000">
-              <a:schemeClr val="phClr">
-                <a:shade val="20000"/>
-                <a:satMod val="255000"/>
-              </a:schemeClr>
-            </a:gs>
-          </a:gsLst>
-          <a:path path="circle">
-            <a:fillToRect l="50000" t="-80000" r="50000" b="180000"/>
-          </a:path>
-        </a:gradFill>
-        <a:gradFill rotWithShape="1">
-          <a:gsLst>
-            <a:gs pos="0">
-              <a:schemeClr val="phClr">
-                <a:tint val="80000"/>
-                <a:satMod val="300000"/>
-              </a:schemeClr>
-            </a:gs>
-            <a:gs pos="100000">
-              <a:schemeClr val="phClr">
-                <a:shade val="30000"/>
-                <a:satMod val="200000"/>
-              </a:schemeClr>
-            </a:gs>
-          </a:gsLst>
-          <a:path path="circle">
-            <a:fillToRect l="50000" t="50000" r="50000" b="50000"/>
-          </a:path>
-        </a:gradFill>
-      </a:bgFillStyleLst>
-    </a:fmtScheme>
-  </a:themeElements>
-</a:theme>
 </file>
--- a/docs/Fig MyM.pptx
+++ b/docs/Fig MyM.pptx
@@ -9633,26 +9633,56 @@
           <a:chExt cx="0" cy="0"/>
         </a:xfrm>
       </p:grpSpPr>
+      <p:pic>
+        <p:nvPicPr>
+          <p:cNvPr id="190" name="Google Shape;190;p25" title="shape_especificidad_tisular.jpg"/>
+          <p:cNvPicPr preferRelativeResize="0"/>
+          <p:nvPr/>
+        </p:nvPicPr>
+        <p:blipFill>
+          <a:blip r:embed="rId3">
+            <a:alphaModFix/>
+          </a:blip>
+          <a:stretch>
+            <a:fillRect/>
+          </a:stretch>
+        </p:blipFill>
+        <p:spPr>
+          <a:xfrm>
+            <a:off x="271600" y="113528"/>
+            <a:ext cx="8739174" cy="3746597"/>
+          </a:xfrm>
+          <a:prstGeom prst="rect">
+            <a:avLst/>
+          </a:prstGeom>
+          <a:noFill/>
+          <a:ln>
+            <a:noFill/>
+          </a:ln>
+        </p:spPr>
+      </p:pic>
       <p:sp>
         <p:nvSpPr>
-          <p:cNvPr id="190" name="Google Shape;190;p25"/>
+          <p:cNvPr id="191" name="Google Shape;191;p25"/>
           <p:cNvSpPr txBox="1"/>
-          <p:nvPr>
-            <p:ph type="title"/>
-          </p:nvPr>
+          <p:nvPr/>
         </p:nvSpPr>
         <p:spPr>
           <a:xfrm>
-            <a:off x="311700" y="445025"/>
-            <a:ext cx="8520600" cy="572700"/>
+            <a:off x="463225" y="4345400"/>
+            <a:ext cx="5775300" cy="1293000"/>
           </a:xfrm>
           <a:prstGeom prst="rect">
             <a:avLst/>
           </a:prstGeom>
+          <a:noFill/>
+          <a:ln>
+            <a:noFill/>
+          </a:ln>
         </p:spPr>
         <p:txBody>
           <a:bodyPr anchorCtr="0" anchor="t" bIns="91425" lIns="91425" spcFirstLastPara="1" rIns="91425" wrap="square" tIns="91425">
-            <a:normAutofit fontScale="90000"/>
+            <a:spAutoFit/>
           </a:bodyPr>
           <a:lstStyle/>
           <a:p>
@@ -9666,49 +9696,34 @@
               <a:buNone/>
             </a:pPr>
             <a:r>
-              <a:rPr lang="es-419"/>
-              <a:t>shape y tissue specific</a:t>
-            </a:r>
-            <a:endParaRPr/>
-          </a:p>
-        </p:txBody>
-      </p:sp>
-      <p:sp>
-        <p:nvSpPr>
-          <p:cNvPr id="191" name="Google Shape;191;p25"/>
-          <p:cNvSpPr txBox="1"/>
-          <p:nvPr>
-            <p:ph idx="1" type="body"/>
-          </p:nvPr>
-        </p:nvSpPr>
-        <p:spPr>
-          <a:xfrm>
-            <a:off x="311700" y="1152475"/>
-            <a:ext cx="8520600" cy="3416400"/>
-          </a:xfrm>
-          <a:prstGeom prst="rect">
-            <a:avLst/>
-          </a:prstGeom>
-        </p:spPr>
-        <p:txBody>
-          <a:bodyPr anchorCtr="0" anchor="t" bIns="91425" lIns="91425" spcFirstLastPara="1" rIns="91425" wrap="square" tIns="91425">
-            <a:normAutofit/>
-          </a:bodyPr>
-          <a:lstStyle/>
-          <a:p>
-            <a:pPr indent="0" lvl="0" marL="0" rtl="0" algn="l">
-              <a:spcBef>
-                <a:spcPts val="0"/>
-              </a:spcBef>
-              <a:spcAft>
-                <a:spcPts val="1200"/>
-              </a:spcAft>
-              <a:buNone/>
-            </a:pPr>
-            <a:r>
-              <a:t/>
-            </a:r>
-            <a:endParaRPr/>
+              <a:rPr lang="es-419" sz="1800">
+                <a:solidFill>
+                  <a:schemeClr val="dk2"/>
+                </a:solidFill>
+              </a:rPr>
+              <a:t>eventualmente podria agregar un diagrama para mostrar mas claro que es shape. o un heatmap de los ontology con algunos promotores </a:t>
+            </a:r>
+            <a:r>
+              <a:rPr lang="es-419" sz="1800">
+                <a:solidFill>
+                  <a:schemeClr val="dk2"/>
+                </a:solidFill>
+              </a:rPr>
+              <a:t>para</a:t>
+            </a:r>
+            <a:r>
+              <a:rPr lang="es-419" sz="1800">
+                <a:solidFill>
+                  <a:schemeClr val="dk2"/>
+                </a:solidFill>
+              </a:rPr>
+              <a:t> mostrar tissue specificity</a:t>
+            </a:r>
+            <a:endParaRPr sz="1800">
+              <a:solidFill>
+                <a:schemeClr val="dk2"/>
+              </a:solidFill>
+            </a:endParaRPr>
           </a:p>
         </p:txBody>
       </p:sp>
@@ -12438,6 +12453,285 @@
 </file>
 
 <file path=ppt/theme/theme1.xml><?xml version="1.0" encoding="utf-8"?>
+<a:theme xmlns:a="http://schemas.openxmlformats.org/drawingml/2006/main" xmlns:r="http://schemas.openxmlformats.org/officeDocument/2006/relationships" name="Simple Light">
+  <a:themeElements>
+    <a:clrScheme name="Simple Light">
+      <a:dk1>
+        <a:srgbClr val="000000"/>
+      </a:dk1>
+      <a:lt1>
+        <a:srgbClr val="FFFFFF"/>
+      </a:lt1>
+      <a:dk2>
+        <a:srgbClr val="595959"/>
+      </a:dk2>
+      <a:lt2>
+        <a:srgbClr val="EEEEEE"/>
+      </a:lt2>
+      <a:accent1>
+        <a:srgbClr val="4285F4"/>
+      </a:accent1>
+      <a:accent2>
+        <a:srgbClr val="212121"/>
+      </a:accent2>
+      <a:accent3>
+        <a:srgbClr val="78909C"/>
+      </a:accent3>
+      <a:accent4>
+        <a:srgbClr val="FFAB40"/>
+      </a:accent4>
+      <a:accent5>
+        <a:srgbClr val="0097A7"/>
+      </a:accent5>
+      <a:accent6>
+        <a:srgbClr val="EEFF41"/>
+      </a:accent6>
+      <a:hlink>
+        <a:srgbClr val="0097A7"/>
+      </a:hlink>
+      <a:folHlink>
+        <a:srgbClr val="0097A7"/>
+      </a:folHlink>
+    </a:clrScheme>
+    <a:fontScheme name="Office">
+      <a:majorFont>
+        <a:latin typeface="Arial"/>
+        <a:ea typeface=""/>
+        <a:cs typeface=""/>
+        <a:font script="Jpan" typeface="ＭＳ Ｐゴシック"/>
+        <a:font script="Hang" typeface="맑은 고딕"/>
+        <a:font script="Hans" typeface="宋体"/>
+        <a:font script="Hant" typeface="新細明體"/>
+        <a:font script="Arab" typeface="Times New Roman"/>
+        <a:font script="Hebr" typeface="Times New Roman"/>
+        <a:font script="Thai" typeface="Angsana New"/>
+        <a:font script="Ethi" typeface="Nyala"/>
+        <a:font script="Beng" typeface="Vrinda"/>
+        <a:font script="Gujr" typeface="Shruti"/>
+        <a:font script="Khmr" typeface="MoolBoran"/>
+        <a:font script="Knda" typeface="Tunga"/>
+        <a:font script="Guru" typeface="Raavi"/>
+        <a:font script="Cans" typeface="Euphemia"/>
+        <a:font script="Cher" typeface="Plantagenet Cherokee"/>
+        <a:font script="Yiii" typeface="Microsoft Yi Baiti"/>
+        <a:font script="Tibt" typeface="Microsoft Himalaya"/>
+        <a:font script="Thaa" typeface="MV Boli"/>
+        <a:font script="Deva" typeface="Mangal"/>
+        <a:font script="Telu" typeface="Gautami"/>
+        <a:font script="Taml" typeface="Latha"/>
+        <a:font script="Syrc" typeface="Estrangelo Edessa"/>
+        <a:font script="Orya" typeface="Kalinga"/>
+        <a:font script="Mlym" typeface="Kartika"/>
+        <a:font script="Laoo" typeface="DokChampa"/>
+        <a:font script="Sinh" typeface="Iskoola Pota"/>
+        <a:font script="Mong" typeface="Mongolian Baiti"/>
+        <a:font script="Viet" typeface="Times New Roman"/>
+        <a:font script="Uigh" typeface="Microsoft Uighur"/>
+        <a:font script="Geor" typeface="Sylfaen"/>
+      </a:majorFont>
+      <a:minorFont>
+        <a:latin typeface="Arial"/>
+        <a:ea typeface=""/>
+        <a:cs typeface=""/>
+        <a:font script="Jpan" typeface="ＭＳ Ｐゴシック"/>
+        <a:font script="Hang" typeface="맑은 고딕"/>
+        <a:font script="Hans" typeface="宋体"/>
+        <a:font script="Hant" typeface="新細明體"/>
+        <a:font script="Arab" typeface="Arial"/>
+        <a:font script="Hebr" typeface="Arial"/>
+        <a:font script="Thai" typeface="Cordia New"/>
+        <a:font script="Ethi" typeface="Nyala"/>
+        <a:font script="Beng" typeface="Vrinda"/>
+        <a:font script="Gujr" typeface="Shruti"/>
+        <a:font script="Khmr" typeface="DaunPenh"/>
+        <a:font script="Knda" typeface="Tunga"/>
+        <a:font script="Guru" typeface="Raavi"/>
+        <a:font script="Cans" typeface="Euphemia"/>
+        <a:font script="Cher" typeface="Plantagenet Cherokee"/>
+        <a:font script="Yiii" typeface="Microsoft Yi Baiti"/>
+        <a:font script="Tibt" typeface="Microsoft Himalaya"/>
+        <a:font script="Thaa" typeface="MV Boli"/>
+        <a:font script="Deva" typeface="Mangal"/>
+        <a:font script="Telu" typeface="Gautami"/>
+        <a:font script="Taml" typeface="Latha"/>
+        <a:font script="Syrc" typeface="Estrangelo Edessa"/>
+        <a:font script="Orya" typeface="Kalinga"/>
+        <a:font script="Mlym" typeface="Kartika"/>
+        <a:font script="Laoo" typeface="DokChampa"/>
+        <a:font script="Sinh" typeface="Iskoola Pota"/>
+        <a:font script="Mong" typeface="Mongolian Baiti"/>
+        <a:font script="Viet" typeface="Arial"/>
+        <a:font script="Uigh" typeface="Microsoft Uighur"/>
+        <a:font script="Geor" typeface="Sylfaen"/>
+      </a:minorFont>
+    </a:fontScheme>
+    <a:fmtScheme name="Office">
+      <a:fillStyleLst>
+        <a:solidFill>
+          <a:schemeClr val="phClr"/>
+        </a:solidFill>
+        <a:gradFill rotWithShape="1">
+          <a:gsLst>
+            <a:gs pos="0">
+              <a:schemeClr val="phClr">
+                <a:tint val="50000"/>
+                <a:satMod val="300000"/>
+              </a:schemeClr>
+            </a:gs>
+            <a:gs pos="35000">
+              <a:schemeClr val="phClr">
+                <a:tint val="37000"/>
+                <a:satMod val="300000"/>
+              </a:schemeClr>
+            </a:gs>
+            <a:gs pos="100000">
+              <a:schemeClr val="phClr">
+                <a:tint val="15000"/>
+                <a:satMod val="350000"/>
+              </a:schemeClr>
+            </a:gs>
+          </a:gsLst>
+          <a:lin ang="16200000" scaled="1"/>
+        </a:gradFill>
+        <a:gradFill rotWithShape="1">
+          <a:gsLst>
+            <a:gs pos="0">
+              <a:schemeClr val="phClr">
+                <a:tint val="100000"/>
+                <a:shade val="100000"/>
+                <a:satMod val="130000"/>
+              </a:schemeClr>
+            </a:gs>
+            <a:gs pos="100000">
+              <a:schemeClr val="phClr">
+                <a:tint val="50000"/>
+                <a:shade val="100000"/>
+                <a:satMod val="350000"/>
+              </a:schemeClr>
+            </a:gs>
+          </a:gsLst>
+          <a:lin ang="16200000" scaled="0"/>
+        </a:gradFill>
+      </a:fillStyleLst>
+      <a:lnStyleLst>
+        <a:ln w="9525" cap="flat" cmpd="sng" algn="ctr">
+          <a:solidFill>
+            <a:schemeClr val="phClr">
+              <a:shade val="95000"/>
+              <a:satMod val="105000"/>
+            </a:schemeClr>
+          </a:solidFill>
+          <a:prstDash val="solid"/>
+        </a:ln>
+        <a:ln w="25400" cap="flat" cmpd="sng" algn="ctr">
+          <a:solidFill>
+            <a:schemeClr val="phClr"/>
+          </a:solidFill>
+          <a:prstDash val="solid"/>
+        </a:ln>
+        <a:ln w="38100" cap="flat" cmpd="sng" algn="ctr">
+          <a:solidFill>
+            <a:schemeClr val="phClr"/>
+          </a:solidFill>
+          <a:prstDash val="solid"/>
+        </a:ln>
+      </a:lnStyleLst>
+      <a:effectStyleLst>
+        <a:effectStyle>
+          <a:effectLst>
+            <a:outerShdw blurRad="40000" dist="20000" dir="5400000" rotWithShape="0">
+              <a:srgbClr val="000000">
+                <a:alpha val="38000"/>
+              </a:srgbClr>
+            </a:outerShdw>
+          </a:effectLst>
+        </a:effectStyle>
+        <a:effectStyle>
+          <a:effectLst>
+            <a:outerShdw blurRad="40000" dist="23000" dir="5400000" rotWithShape="0">
+              <a:srgbClr val="000000">
+                <a:alpha val="35000"/>
+              </a:srgbClr>
+            </a:outerShdw>
+          </a:effectLst>
+        </a:effectStyle>
+        <a:effectStyle>
+          <a:effectLst>
+            <a:outerShdw blurRad="40000" dist="23000" dir="5400000" rotWithShape="0">
+              <a:srgbClr val="000000">
+                <a:alpha val="35000"/>
+              </a:srgbClr>
+            </a:outerShdw>
+          </a:effectLst>
+          <a:scene3d>
+            <a:camera prst="orthographicFront">
+              <a:rot lat="0" lon="0" rev="0"/>
+            </a:camera>
+            <a:lightRig rig="threePt" dir="t">
+              <a:rot lat="0" lon="0" rev="1200000"/>
+            </a:lightRig>
+          </a:scene3d>
+          <a:sp3d>
+            <a:bevelT w="63500" h="25400"/>
+          </a:sp3d>
+        </a:effectStyle>
+      </a:effectStyleLst>
+      <a:bgFillStyleLst>
+        <a:solidFill>
+          <a:schemeClr val="phClr"/>
+        </a:solidFill>
+        <a:gradFill rotWithShape="1">
+          <a:gsLst>
+            <a:gs pos="0">
+              <a:schemeClr val="phClr">
+                <a:tint val="40000"/>
+                <a:satMod val="350000"/>
+              </a:schemeClr>
+            </a:gs>
+            <a:gs pos="40000">
+              <a:schemeClr val="phClr">
+                <a:tint val="45000"/>
+                <a:shade val="99000"/>
+                <a:satMod val="350000"/>
+              </a:schemeClr>
+            </a:gs>
+            <a:gs pos="100000">
+              <a:schemeClr val="phClr">
+                <a:shade val="20000"/>
+                <a:satMod val="255000"/>
+              </a:schemeClr>
+            </a:gs>
+          </a:gsLst>
+          <a:path path="circle">
+            <a:fillToRect l="50000" t="-80000" r="50000" b="180000"/>
+          </a:path>
+        </a:gradFill>
+        <a:gradFill rotWithShape="1">
+          <a:gsLst>
+            <a:gs pos="0">
+              <a:schemeClr val="phClr">
+                <a:tint val="80000"/>
+                <a:satMod val="300000"/>
+              </a:schemeClr>
+            </a:gs>
+            <a:gs pos="100000">
+              <a:schemeClr val="phClr">
+                <a:shade val="30000"/>
+                <a:satMod val="200000"/>
+              </a:schemeClr>
+            </a:gs>
+          </a:gsLst>
+          <a:path path="circle">
+            <a:fillToRect l="50000" t="50000" r="50000" b="50000"/>
+          </a:path>
+        </a:gradFill>
+      </a:bgFillStyleLst>
+    </a:fmtScheme>
+  </a:themeElements>
+</a:theme>
+</file>
+
+<file path=ppt/theme/theme2.xml><?xml version="1.0" encoding="utf-8"?>
 <a:theme xmlns:a="http://schemas.openxmlformats.org/drawingml/2006/main" xmlns:r="http://schemas.openxmlformats.org/officeDocument/2006/relationships">
   <a:themeElements>
     <a:clrScheme name="Default">
@@ -12714,283 +13008,4 @@
     </a:fmtScheme>
   </a:themeElements>
 </a:theme>
-</file>
-
-<file path=ppt/theme/theme2.xml><?xml version="1.0" encoding="utf-8"?>
-<a:theme xmlns:a="http://schemas.openxmlformats.org/drawingml/2006/main" xmlns:r="http://schemas.openxmlformats.org/officeDocument/2006/relationships" name="Simple Light">
-  <a:themeElements>
-    <a:clrScheme name="Simple Light">
-      <a:dk1>
-        <a:srgbClr val="000000"/>
-      </a:dk1>
-      <a:lt1>
-        <a:srgbClr val="FFFFFF"/>
-      </a:lt1>
-      <a:dk2>
-        <a:srgbClr val="595959"/>
-      </a:dk2>
-      <a:lt2>
-        <a:srgbClr val="EEEEEE"/>
-      </a:lt2>
-      <a:accent1>
-        <a:srgbClr val="4285F4"/>
-      </a:accent1>
-      <a:accent2>
-        <a:srgbClr val="212121"/>
-      </a:accent2>
-      <a:accent3>
-        <a:srgbClr val="78909C"/>
-      </a:accent3>
-      <a:accent4>
-        <a:srgbClr val="FFAB40"/>
-      </a:accent4>
-      <a:accent5>
-        <a:srgbClr val="0097A7"/>
-      </a:accent5>
-      <a:accent6>
-        <a:srgbClr val="EEFF41"/>
-      </a:accent6>
-      <a:hlink>
-        <a:srgbClr val="0097A7"/>
-      </a:hlink>
-      <a:folHlink>
-        <a:srgbClr val="0097A7"/>
-      </a:folHlink>
-    </a:clrScheme>
-    <a:fontScheme name="Office">
-      <a:majorFont>
-        <a:latin typeface="Arial"/>
-        <a:ea typeface=""/>
-        <a:cs typeface=""/>
-        <a:font script="Jpan" typeface="ＭＳ Ｐゴシック"/>
-        <a:font script="Hang" typeface="맑은 고딕"/>
-        <a:font script="Hans" typeface="宋体"/>
-        <a:font script="Hant" typeface="新細明體"/>
-        <a:font script="Arab" typeface="Times New Roman"/>
-        <a:font script="Hebr" typeface="Times New Roman"/>
-        <a:font script="Thai" typeface="Angsana New"/>
-        <a:font script="Ethi" typeface="Nyala"/>
-        <a:font script="Beng" typeface="Vrinda"/>
-        <a:font script="Gujr" typeface="Shruti"/>
-        <a:font script="Khmr" typeface="MoolBoran"/>
-        <a:font script="Knda" typeface="Tunga"/>
-        <a:font script="Guru" typeface="Raavi"/>
-        <a:font script="Cans" typeface="Euphemia"/>
-        <a:font script="Cher" typeface="Plantagenet Cherokee"/>
-        <a:font script="Yiii" typeface="Microsoft Yi Baiti"/>
-        <a:font script="Tibt" typeface="Microsoft Himalaya"/>
-        <a:font script="Thaa" typeface="MV Boli"/>
-        <a:font script="Deva" typeface="Mangal"/>
-        <a:font script="Telu" typeface="Gautami"/>
-        <a:font script="Taml" typeface="Latha"/>
-        <a:font script="Syrc" typeface="Estrangelo Edessa"/>
-        <a:font script="Orya" typeface="Kalinga"/>
-        <a:font script="Mlym" typeface="Kartika"/>
-        <a:font script="Laoo" typeface="DokChampa"/>
-        <a:font script="Sinh" typeface="Iskoola Pota"/>
-        <a:font script="Mong" typeface="Mongolian Baiti"/>
-        <a:font script="Viet" typeface="Times New Roman"/>
-        <a:font script="Uigh" typeface="Microsoft Uighur"/>
-        <a:font script="Geor" typeface="Sylfaen"/>
-      </a:majorFont>
-      <a:minorFont>
-        <a:latin typeface="Arial"/>
-        <a:ea typeface=""/>
-        <a:cs typeface=""/>
-        <a:font script="Jpan" typeface="ＭＳ Ｐゴシック"/>
-        <a:font script="Hang" typeface="맑은 고딕"/>
-        <a:font script="Hans" typeface="宋体"/>
-        <a:font script="Hant" typeface="新細明體"/>
-        <a:font script="Arab" typeface="Arial"/>
-        <a:font script="Hebr" typeface="Arial"/>
-        <a:font script="Thai" typeface="Cordia New"/>
-        <a:font script="Ethi" typeface="Nyala"/>
-        <a:font script="Beng" typeface="Vrinda"/>
-        <a:font script="Gujr" typeface="Shruti"/>
-        <a:font script="Khmr" typeface="DaunPenh"/>
-        <a:font script="Knda" typeface="Tunga"/>
-        <a:font script="Guru" typeface="Raavi"/>
-        <a:font script="Cans" typeface="Euphemia"/>
-        <a:font script="Cher" typeface="Plantagenet Cherokee"/>
-        <a:font script="Yiii" typeface="Microsoft Yi Baiti"/>
-        <a:font script="Tibt" typeface="Microsoft Himalaya"/>
-        <a:font script="Thaa" typeface="MV Boli"/>
-        <a:font script="Deva" typeface="Mangal"/>
-        <a:font script="Telu" typeface="Gautami"/>
-        <a:font script="Taml" typeface="Latha"/>
-        <a:font script="Syrc" typeface="Estrangelo Edessa"/>
-        <a:font script="Orya" typeface="Kalinga"/>
-        <a:font script="Mlym" typeface="Kartika"/>
-        <a:font script="Laoo" typeface="DokChampa"/>
-        <a:font script="Sinh" typeface="Iskoola Pota"/>
-        <a:font script="Mong" typeface="Mongolian Baiti"/>
-        <a:font script="Viet" typeface="Arial"/>
-        <a:font script="Uigh" typeface="Microsoft Uighur"/>
-        <a:font script="Geor" typeface="Sylfaen"/>
-      </a:minorFont>
-    </a:fontScheme>
-    <a:fmtScheme name="Office">
-      <a:fillStyleLst>
-        <a:solidFill>
-          <a:schemeClr val="phClr"/>
-        </a:solidFill>
-        <a:gradFill rotWithShape="1">
-          <a:gsLst>
-            <a:gs pos="0">
-              <a:schemeClr val="phClr">
-                <a:tint val="50000"/>
-                <a:satMod val="300000"/>
-              </a:schemeClr>
-            </a:gs>
-            <a:gs pos="35000">
-              <a:schemeClr val="phClr">
-                <a:tint val="37000"/>
-                <a:satMod val="300000"/>
-              </a:schemeClr>
-            </a:gs>
-            <a:gs pos="100000">
-              <a:schemeClr val="phClr">
-                <a:tint val="15000"/>
-                <a:satMod val="350000"/>
-              </a:schemeClr>
-            </a:gs>
-          </a:gsLst>
-          <a:lin ang="16200000" scaled="1"/>
-        </a:gradFill>
-        <a:gradFill rotWithShape="1">
-          <a:gsLst>
-            <a:gs pos="0">
-              <a:schemeClr val="phClr">
-                <a:tint val="100000"/>
-                <a:shade val="100000"/>
-                <a:satMod val="130000"/>
-              </a:schemeClr>
-            </a:gs>
-            <a:gs pos="100000">
-              <a:schemeClr val="phClr">
-                <a:tint val="50000"/>
-                <a:shade val="100000"/>
-                <a:satMod val="350000"/>
-              </a:schemeClr>
-            </a:gs>
-          </a:gsLst>
-          <a:lin ang="16200000" scaled="0"/>
-        </a:gradFill>
-      </a:fillStyleLst>
-      <a:lnStyleLst>
-        <a:ln w="9525" cap="flat" cmpd="sng" algn="ctr">
-          <a:solidFill>
-            <a:schemeClr val="phClr">
-              <a:shade val="95000"/>
-              <a:satMod val="105000"/>
-            </a:schemeClr>
-          </a:solidFill>
-          <a:prstDash val="solid"/>
-        </a:ln>
-        <a:ln w="25400" cap="flat" cmpd="sng" algn="ctr">
-          <a:solidFill>
-            <a:schemeClr val="phClr"/>
-          </a:solidFill>
-          <a:prstDash val="solid"/>
-        </a:ln>
-        <a:ln w="38100" cap="flat" cmpd="sng" algn="ctr">
-          <a:solidFill>
-            <a:schemeClr val="phClr"/>
-          </a:solidFill>
-          <a:prstDash val="solid"/>
-        </a:ln>
-      </a:lnStyleLst>
-      <a:effectStyleLst>
-        <a:effectStyle>
-          <a:effectLst>
-            <a:outerShdw blurRad="40000" dist="20000" dir="5400000" rotWithShape="0">
-              <a:srgbClr val="000000">
-                <a:alpha val="38000"/>
-              </a:srgbClr>
-            </a:outerShdw>
-          </a:effectLst>
-        </a:effectStyle>
-        <a:effectStyle>
-          <a:effectLst>
-            <a:outerShdw blurRad="40000" dist="23000" dir="5400000" rotWithShape="0">
-              <a:srgbClr val="000000">
-                <a:alpha val="35000"/>
-              </a:srgbClr>
-            </a:outerShdw>
-          </a:effectLst>
-        </a:effectStyle>
-        <a:effectStyle>
-          <a:effectLst>
-            <a:outerShdw blurRad="40000" dist="23000" dir="5400000" rotWithShape="0">
-              <a:srgbClr val="000000">
-                <a:alpha val="35000"/>
-              </a:srgbClr>
-            </a:outerShdw>
-          </a:effectLst>
-          <a:scene3d>
-            <a:camera prst="orthographicFront">
-              <a:rot lat="0" lon="0" rev="0"/>
-            </a:camera>
-            <a:lightRig rig="threePt" dir="t">
-              <a:rot lat="0" lon="0" rev="1200000"/>
-            </a:lightRig>
-          </a:scene3d>
-          <a:sp3d>
-            <a:bevelT w="63500" h="25400"/>
-          </a:sp3d>
-        </a:effectStyle>
-      </a:effectStyleLst>
-      <a:bgFillStyleLst>
-        <a:solidFill>
-          <a:schemeClr val="phClr"/>
-        </a:solidFill>
-        <a:gradFill rotWithShape="1">
-          <a:gsLst>
-            <a:gs pos="0">
-              <a:schemeClr val="phClr">
-                <a:tint val="40000"/>
-                <a:satMod val="350000"/>
-              </a:schemeClr>
-            </a:gs>
-            <a:gs pos="40000">
-              <a:schemeClr val="phClr">
-                <a:tint val="45000"/>
-                <a:shade val="99000"/>
-                <a:satMod val="350000"/>
-              </a:schemeClr>
-            </a:gs>
-            <a:gs pos="100000">
-              <a:schemeClr val="phClr">
-                <a:shade val="20000"/>
-                <a:satMod val="255000"/>
-              </a:schemeClr>
-            </a:gs>
-          </a:gsLst>
-          <a:path path="circle">
-            <a:fillToRect l="50000" t="-80000" r="50000" b="180000"/>
-          </a:path>
-        </a:gradFill>
-        <a:gradFill rotWithShape="1">
-          <a:gsLst>
-            <a:gs pos="0">
-              <a:schemeClr val="phClr">
-                <a:tint val="80000"/>
-                <a:satMod val="300000"/>
-              </a:schemeClr>
-            </a:gs>
-            <a:gs pos="100000">
-              <a:schemeClr val="phClr">
-                <a:shade val="30000"/>
-                <a:satMod val="200000"/>
-              </a:schemeClr>
-            </a:gs>
-          </a:gsLst>
-          <a:path path="circle">
-            <a:fillToRect l="50000" t="50000" r="50000" b="50000"/>
-          </a:path>
-        </a:gradFill>
-      </a:bgFillStyleLst>
-    </a:fmtScheme>
-  </a:themeElements>
-</a:theme>
 </file>
--- a/docs/Fig MyM.pptx
+++ b/docs/Fig MyM.pptx
@@ -12453,6 +12453,285 @@
 </file>
 
 <file path=ppt/theme/theme1.xml><?xml version="1.0" encoding="utf-8"?>
+<a:theme xmlns:a="http://schemas.openxmlformats.org/drawingml/2006/main" xmlns:r="http://schemas.openxmlformats.org/officeDocument/2006/relationships">
+  <a:themeElements>
+    <a:clrScheme name="Default">
+      <a:dk1>
+        <a:srgbClr val="000000"/>
+      </a:dk1>
+      <a:lt1>
+        <a:srgbClr val="FFFFFF"/>
+      </a:lt1>
+      <a:dk2>
+        <a:srgbClr val="158158"/>
+      </a:dk2>
+      <a:lt2>
+        <a:srgbClr val="F3F3F3"/>
+      </a:lt2>
+      <a:accent1>
+        <a:srgbClr val="058DC7"/>
+      </a:accent1>
+      <a:accent2>
+        <a:srgbClr val="50B432"/>
+      </a:accent2>
+      <a:accent3>
+        <a:srgbClr val="ED561B"/>
+      </a:accent3>
+      <a:accent4>
+        <a:srgbClr val="EDEF00"/>
+      </a:accent4>
+      <a:accent5>
+        <a:srgbClr val="24CBE5"/>
+      </a:accent5>
+      <a:accent6>
+        <a:srgbClr val="64E572"/>
+      </a:accent6>
+      <a:hlink>
+        <a:srgbClr val="2200CC"/>
+      </a:hlink>
+      <a:folHlink>
+        <a:srgbClr val="551A8B"/>
+      </a:folHlink>
+    </a:clrScheme>
+    <a:fontScheme name="Office">
+      <a:majorFont>
+        <a:latin typeface="Arial"/>
+        <a:ea typeface=""/>
+        <a:cs typeface=""/>
+        <a:font script="Jpan" typeface="ＭＳ Ｐゴシック"/>
+        <a:font script="Hang" typeface="맑은 고딕"/>
+        <a:font script="Hans" typeface="宋体"/>
+        <a:font script="Hant" typeface="新細明體"/>
+        <a:font script="Arab" typeface="Times New Roman"/>
+        <a:font script="Hebr" typeface="Times New Roman"/>
+        <a:font script="Thai" typeface="Angsana New"/>
+        <a:font script="Ethi" typeface="Nyala"/>
+        <a:font script="Beng" typeface="Vrinda"/>
+        <a:font script="Gujr" typeface="Shruti"/>
+        <a:font script="Khmr" typeface="MoolBoran"/>
+        <a:font script="Knda" typeface="Tunga"/>
+        <a:font script="Guru" typeface="Raavi"/>
+        <a:font script="Cans" typeface="Euphemia"/>
+        <a:font script="Cher" typeface="Plantagenet Cherokee"/>
+        <a:font script="Yiii" typeface="Microsoft Yi Baiti"/>
+        <a:font script="Tibt" typeface="Microsoft Himalaya"/>
+        <a:font script="Thaa" typeface="MV Boli"/>
+        <a:font script="Deva" typeface="Mangal"/>
+        <a:font script="Telu" typeface="Gautami"/>
+        <a:font script="Taml" typeface="Latha"/>
+        <a:font script="Syrc" typeface="Estrangelo Edessa"/>
+        <a:font script="Orya" typeface="Kalinga"/>
+        <a:font script="Mlym" typeface="Kartika"/>
+        <a:font script="Laoo" typeface="DokChampa"/>
+        <a:font script="Sinh" typeface="Iskoola Pota"/>
+        <a:font script="Mong" typeface="Mongolian Baiti"/>
+        <a:font script="Viet" typeface="Times New Roman"/>
+        <a:font script="Uigh" typeface="Microsoft Uighur"/>
+        <a:font script="Geor" typeface="Sylfaen"/>
+      </a:majorFont>
+      <a:minorFont>
+        <a:latin typeface="Arial"/>
+        <a:ea typeface=""/>
+        <a:cs typeface=""/>
+        <a:font script="Jpan" typeface="ＭＳ Ｐゴシック"/>
+        <a:font script="Hang" typeface="맑은 고딕"/>
+        <a:font script="Hans" typeface="宋体"/>
+        <a:font script="Hant" typeface="新細明體"/>
+        <a:font script="Arab" typeface="Arial"/>
+        <a:font script="Hebr" typeface="Arial"/>
+        <a:font script="Thai" typeface="Cordia New"/>
+        <a:font script="Ethi" typeface="Nyala"/>
+        <a:font script="Beng" typeface="Vrinda"/>
+        <a:font script="Gujr" typeface="Shruti"/>
+        <a:font script="Khmr" typeface="DaunPenh"/>
+        <a:font script="Knda" typeface="Tunga"/>
+        <a:font script="Guru" typeface="Raavi"/>
+        <a:font script="Cans" typeface="Euphemia"/>
+        <a:font script="Cher" typeface="Plantagenet Cherokee"/>
+        <a:font script="Yiii" typeface="Microsoft Yi Baiti"/>
+        <a:font script="Tibt" typeface="Microsoft Himalaya"/>
+        <a:font script="Thaa" typeface="MV Boli"/>
+        <a:font script="Deva" typeface="Mangal"/>
+        <a:font script="Telu" typeface="Gautami"/>
+        <a:font script="Taml" typeface="Latha"/>
+        <a:font script="Syrc" typeface="Estrangelo Edessa"/>
+        <a:font script="Orya" typeface="Kalinga"/>
+        <a:font script="Mlym" typeface="Kartika"/>
+        <a:font script="Laoo" typeface="DokChampa"/>
+        <a:font script="Sinh" typeface="Iskoola Pota"/>
+        <a:font script="Mong" typeface="Mongolian Baiti"/>
+        <a:font script="Viet" typeface="Arial"/>
+        <a:font script="Uigh" typeface="Microsoft Uighur"/>
+        <a:font script="Geor" typeface="Sylfaen"/>
+      </a:minorFont>
+    </a:fontScheme>
+    <a:fmtScheme name="Office">
+      <a:fillStyleLst>
+        <a:solidFill>
+          <a:schemeClr val="phClr"/>
+        </a:solidFill>
+        <a:gradFill rotWithShape="1">
+          <a:gsLst>
+            <a:gs pos="0">
+              <a:schemeClr val="phClr">
+                <a:tint val="50000"/>
+                <a:satMod val="300000"/>
+              </a:schemeClr>
+            </a:gs>
+            <a:gs pos="35000">
+              <a:schemeClr val="phClr">
+                <a:tint val="37000"/>
+                <a:satMod val="300000"/>
+              </a:schemeClr>
+            </a:gs>
+            <a:gs pos="100000">
+              <a:schemeClr val="phClr">
+                <a:tint val="15000"/>
+                <a:satMod val="350000"/>
+              </a:schemeClr>
+            </a:gs>
+          </a:gsLst>
+          <a:lin ang="16200000" scaled="1"/>
+        </a:gradFill>
+        <a:gradFill rotWithShape="1">
+          <a:gsLst>
+            <a:gs pos="0">
+              <a:schemeClr val="phClr">
+                <a:tint val="100000"/>
+                <a:shade val="100000"/>
+                <a:satMod val="130000"/>
+              </a:schemeClr>
+            </a:gs>
+            <a:gs pos="100000">
+              <a:schemeClr val="phClr">
+                <a:tint val="50000"/>
+                <a:shade val="100000"/>
+                <a:satMod val="350000"/>
+              </a:schemeClr>
+            </a:gs>
+          </a:gsLst>
+          <a:lin ang="16200000" scaled="0"/>
+        </a:gradFill>
+      </a:fillStyleLst>
+      <a:lnStyleLst>
+        <a:ln w="9525" cap="flat" cmpd="sng" algn="ctr">
+          <a:solidFill>
+            <a:schemeClr val="phClr">
+              <a:shade val="95000"/>
+              <a:satMod val="105000"/>
+            </a:schemeClr>
+          </a:solidFill>
+          <a:prstDash val="solid"/>
+        </a:ln>
+        <a:ln w="25400" cap="flat" cmpd="sng" algn="ctr">
+          <a:solidFill>
+            <a:schemeClr val="phClr"/>
+          </a:solidFill>
+          <a:prstDash val="solid"/>
+        </a:ln>
+        <a:ln w="38100" cap="flat" cmpd="sng" algn="ctr">
+          <a:solidFill>
+            <a:schemeClr val="phClr"/>
+          </a:solidFill>
+          <a:prstDash val="solid"/>
+        </a:ln>
+      </a:lnStyleLst>
+      <a:effectStyleLst>
+        <a:effectStyle>
+          <a:effectLst>
+            <a:outerShdw blurRad="40000" dist="20000" dir="5400000" rotWithShape="0">
+              <a:srgbClr val="000000">
+                <a:alpha val="38000"/>
+              </a:srgbClr>
+            </a:outerShdw>
+          </a:effectLst>
+        </a:effectStyle>
+        <a:effectStyle>
+          <a:effectLst>
+            <a:outerShdw blurRad="40000" dist="23000" dir="5400000" rotWithShape="0">
+              <a:srgbClr val="000000">
+                <a:alpha val="35000"/>
+              </a:srgbClr>
+            </a:outerShdw>
+          </a:effectLst>
+        </a:effectStyle>
+        <a:effectStyle>
+          <a:effectLst>
+            <a:outerShdw blurRad="40000" dist="23000" dir="5400000" rotWithShape="0">
+              <a:srgbClr val="000000">
+                <a:alpha val="35000"/>
+              </a:srgbClr>
+            </a:outerShdw>
+          </a:effectLst>
+          <a:scene3d>
+            <a:camera prst="orthographicFront">
+              <a:rot lat="0" lon="0" rev="0"/>
+            </a:camera>
+            <a:lightRig rig="threePt" dir="t">
+              <a:rot lat="0" lon="0" rev="1200000"/>
+            </a:lightRig>
+          </a:scene3d>
+          <a:sp3d>
+            <a:bevelT w="63500" h="25400"/>
+          </a:sp3d>
+        </a:effectStyle>
+      </a:effectStyleLst>
+      <a:bgFillStyleLst>
+        <a:solidFill>
+          <a:schemeClr val="phClr"/>
+        </a:solidFill>
+        <a:gradFill rotWithShape="1">
+          <a:gsLst>
+            <a:gs pos="0">
+              <a:schemeClr val="phClr">
+                <a:tint val="40000"/>
+                <a:satMod val="350000"/>
+              </a:schemeClr>
+            </a:gs>
+            <a:gs pos="40000">
+              <a:schemeClr val="phClr">
+                <a:tint val="45000"/>
+                <a:shade val="99000"/>
+                <a:satMod val="350000"/>
+              </a:schemeClr>
+            </a:gs>
+            <a:gs pos="100000">
+              <a:schemeClr val="phClr">
+                <a:shade val="20000"/>
+                <a:satMod val="255000"/>
+              </a:schemeClr>
+            </a:gs>
+          </a:gsLst>
+          <a:path path="circle">
+            <a:fillToRect l="50000" t="-80000" r="50000" b="180000"/>
+          </a:path>
+        </a:gradFill>
+        <a:gradFill rotWithShape="1">
+          <a:gsLst>
+            <a:gs pos="0">
+              <a:schemeClr val="phClr">
+                <a:tint val="80000"/>
+                <a:satMod val="300000"/>
+              </a:schemeClr>
+            </a:gs>
+            <a:gs pos="100000">
+              <a:schemeClr val="phClr">
+                <a:shade val="30000"/>
+                <a:satMod val="200000"/>
+              </a:schemeClr>
+            </a:gs>
+          </a:gsLst>
+          <a:path path="circle">
+            <a:fillToRect l="50000" t="50000" r="50000" b="50000"/>
+          </a:path>
+        </a:gradFill>
+      </a:bgFillStyleLst>
+    </a:fmtScheme>
+  </a:themeElements>
+</a:theme>
+</file>
+
+<file path=ppt/theme/theme2.xml><?xml version="1.0" encoding="utf-8"?>
 <a:theme xmlns:a="http://schemas.openxmlformats.org/drawingml/2006/main" xmlns:r="http://schemas.openxmlformats.org/officeDocument/2006/relationships" name="Simple Light">
   <a:themeElements>
     <a:clrScheme name="Simple Light">
@@ -12729,283 +13008,4 @@
     </a:fmtScheme>
   </a:themeElements>
 </a:theme>
-</file>
-
-<file path=ppt/theme/theme2.xml><?xml version="1.0" encoding="utf-8"?>
-<a:theme xmlns:a="http://schemas.openxmlformats.org/drawingml/2006/main" xmlns:r="http://schemas.openxmlformats.org/officeDocument/2006/relationships">
-  <a:themeElements>
-    <a:clrScheme name="Default">
-      <a:dk1>
-        <a:srgbClr val="000000"/>
-      </a:dk1>
-      <a:lt1>
-        <a:srgbClr val="FFFFFF"/>
-      </a:lt1>
-      <a:dk2>
-        <a:srgbClr val="158158"/>
-      </a:dk2>
-      <a:lt2>
-        <a:srgbClr val="F3F3F3"/>
-      </a:lt2>
-      <a:accent1>
-        <a:srgbClr val="058DC7"/>
-      </a:accent1>
-      <a:accent2>
-        <a:srgbClr val="50B432"/>
-      </a:accent2>
-      <a:accent3>
-        <a:srgbClr val="ED561B"/>
-      </a:accent3>
-      <a:accent4>
-        <a:srgbClr val="EDEF00"/>
-      </a:accent4>
-      <a:accent5>
-        <a:srgbClr val="24CBE5"/>
-      </a:accent5>
-      <a:accent6>
-        <a:srgbClr val="64E572"/>
-      </a:accent6>
-      <a:hlink>
-        <a:srgbClr val="2200CC"/>
-      </a:hlink>
-      <a:folHlink>
-        <a:srgbClr val="551A8B"/>
-      </a:folHlink>
-    </a:clrScheme>
-    <a:fontScheme name="Office">
-      <a:majorFont>
-        <a:latin typeface="Arial"/>
-        <a:ea typeface=""/>
-        <a:cs typeface=""/>
-        <a:font script="Jpan" typeface="ＭＳ Ｐゴシック"/>
-        <a:font script="Hang" typeface="맑은 고딕"/>
-        <a:font script="Hans" typeface="宋体"/>
-        <a:font script="Hant" typeface="新細明體"/>
-        <a:font script="Arab" typeface="Times New Roman"/>
-        <a:font script="Hebr" typeface="Times New Roman"/>
-        <a:font script="Thai" typeface="Angsana New"/>
-        <a:font script="Ethi" typeface="Nyala"/>
-        <a:font script="Beng" typeface="Vrinda"/>
-        <a:font script="Gujr" typeface="Shruti"/>
-        <a:font script="Khmr" typeface="MoolBoran"/>
-        <a:font script="Knda" typeface="Tunga"/>
-        <a:font script="Guru" typeface="Raavi"/>
-        <a:font script="Cans" typeface="Euphemia"/>
-        <a:font script="Cher" typeface="Plantagenet Cherokee"/>
-        <a:font script="Yiii" typeface="Microsoft Yi Baiti"/>
-        <a:font script="Tibt" typeface="Microsoft Himalaya"/>
-        <a:font script="Thaa" typeface="MV Boli"/>
-        <a:font script="Deva" typeface="Mangal"/>
-        <a:font script="Telu" typeface="Gautami"/>
-        <a:font script="Taml" typeface="Latha"/>
-        <a:font script="Syrc" typeface="Estrangelo Edessa"/>
-        <a:font script="Orya" typeface="Kalinga"/>
-        <a:font script="Mlym" typeface="Kartika"/>
-        <a:font script="Laoo" typeface="DokChampa"/>
-        <a:font script="Sinh" typeface="Iskoola Pota"/>
-        <a:font script="Mong" typeface="Mongolian Baiti"/>
-        <a:font script="Viet" typeface="Times New Roman"/>
-        <a:font script="Uigh" typeface="Microsoft Uighur"/>
-        <a:font script="Geor" typeface="Sylfaen"/>
-      </a:majorFont>
-      <a:minorFont>
-        <a:latin typeface="Arial"/>
-        <a:ea typeface=""/>
-        <a:cs typeface=""/>
-        <a:font script="Jpan" typeface="ＭＳ Ｐゴシック"/>
-        <a:font script="Hang" typeface="맑은 고딕"/>
-        <a:font script="Hans" typeface="宋体"/>
-        <a:font script="Hant" typeface="新細明體"/>
-        <a:font script="Arab" typeface="Arial"/>
-        <a:font script="Hebr" typeface="Arial"/>
-        <a:font script="Thai" typeface="Cordia New"/>
-        <a:font script="Ethi" typeface="Nyala"/>
-        <a:font script="Beng" typeface="Vrinda"/>
-        <a:font script="Gujr" typeface="Shruti"/>
-        <a:font script="Khmr" typeface="DaunPenh"/>
-        <a:font script="Knda" typeface="Tunga"/>
-        <a:font script="Guru" typeface="Raavi"/>
-        <a:font script="Cans" typeface="Euphemia"/>
-        <a:font script="Cher" typeface="Plantagenet Cherokee"/>
-        <a:font script="Yiii" typeface="Microsoft Yi Baiti"/>
-        <a:font script="Tibt" typeface="Microsoft Himalaya"/>
-        <a:font script="Thaa" typeface="MV Boli"/>
-        <a:font script="Deva" typeface="Mangal"/>
-        <a:font script="Telu" typeface="Gautami"/>
-        <a:font script="Taml" typeface="Latha"/>
-        <a:font script="Syrc" typeface="Estrangelo Edessa"/>
-        <a:font script="Orya" typeface="Kalinga"/>
-        <a:font script="Mlym" typeface="Kartika"/>
-        <a:font script="Laoo" typeface="DokChampa"/>
-        <a:font script="Sinh" typeface="Iskoola Pota"/>
-        <a:font script="Mong" typeface="Mongolian Baiti"/>
-        <a:font script="Viet" typeface="Arial"/>
-        <a:font script="Uigh" typeface="Microsoft Uighur"/>
-        <a:font script="Geor" typeface="Sylfaen"/>
-      </a:minorFont>
-    </a:fontScheme>
-    <a:fmtScheme name="Office">
-      <a:fillStyleLst>
-        <a:solidFill>
-          <a:schemeClr val="phClr"/>
-        </a:solidFill>
-        <a:gradFill rotWithShape="1">
-          <a:gsLst>
-            <a:gs pos="0">
-              <a:schemeClr val="phClr">
-                <a:tint val="50000"/>
-                <a:satMod val="300000"/>
-              </a:schemeClr>
-            </a:gs>
-            <a:gs pos="35000">
-              <a:schemeClr val="phClr">
-                <a:tint val="37000"/>
-                <a:satMod val="300000"/>
-              </a:schemeClr>
-            </a:gs>
-            <a:gs pos="100000">
-              <a:schemeClr val="phClr">
-                <a:tint val="15000"/>
-                <a:satMod val="350000"/>
-              </a:schemeClr>
-            </a:gs>
-          </a:gsLst>
-          <a:lin ang="16200000" scaled="1"/>
-        </a:gradFill>
-        <a:gradFill rotWithShape="1">
-          <a:gsLst>
-            <a:gs pos="0">
-              <a:schemeClr val="phClr">
-                <a:tint val="100000"/>
-                <a:shade val="100000"/>
-                <a:satMod val="130000"/>
-              </a:schemeClr>
-            </a:gs>
-            <a:gs pos="100000">
-              <a:schemeClr val="phClr">
-                <a:tint val="50000"/>
-                <a:shade val="100000"/>
-                <a:satMod val="350000"/>
-              </a:schemeClr>
-            </a:gs>
-          </a:gsLst>
-          <a:lin ang="16200000" scaled="0"/>
-        </a:gradFill>
-      </a:fillStyleLst>
-      <a:lnStyleLst>
-        <a:ln w="9525" cap="flat" cmpd="sng" algn="ctr">
-          <a:solidFill>
-            <a:schemeClr val="phClr">
-              <a:shade val="95000"/>
-              <a:satMod val="105000"/>
-            </a:schemeClr>
-          </a:solidFill>
-          <a:prstDash val="solid"/>
-        </a:ln>
-        <a:ln w="25400" cap="flat" cmpd="sng" algn="ctr">
-          <a:solidFill>
-            <a:schemeClr val="phClr"/>
-          </a:solidFill>
-          <a:prstDash val="solid"/>
-        </a:ln>
-        <a:ln w="38100" cap="flat" cmpd="sng" algn="ctr">
-          <a:solidFill>
-            <a:schemeClr val="phClr"/>
-          </a:solidFill>
-          <a:prstDash val="solid"/>
-        </a:ln>
-      </a:lnStyleLst>
-      <a:effectStyleLst>
-        <a:effectStyle>
-          <a:effectLst>
-            <a:outerShdw blurRad="40000" dist="20000" dir="5400000" rotWithShape="0">
-              <a:srgbClr val="000000">
-                <a:alpha val="38000"/>
-              </a:srgbClr>
-            </a:outerShdw>
-          </a:effectLst>
-        </a:effectStyle>
-        <a:effectStyle>
-          <a:effectLst>
-            <a:outerShdw blurRad="40000" dist="23000" dir="5400000" rotWithShape="0">
-              <a:srgbClr val="000000">
-                <a:alpha val="35000"/>
-              </a:srgbClr>
-            </a:outerShdw>
-          </a:effectLst>
-        </a:effectStyle>
-        <a:effectStyle>
-          <a:effectLst>
-            <a:outerShdw blurRad="40000" dist="23000" dir="5400000" rotWithShape="0">
-              <a:srgbClr val="000000">
-                <a:alpha val="35000"/>
-              </a:srgbClr>
-            </a:outerShdw>
-          </a:effectLst>
-          <a:scene3d>
-            <a:camera prst="orthographicFront">
-              <a:rot lat="0" lon="0" rev="0"/>
-            </a:camera>
-            <a:lightRig rig="threePt" dir="t">
-              <a:rot lat="0" lon="0" rev="1200000"/>
-            </a:lightRig>
-          </a:scene3d>
-          <a:sp3d>
-            <a:bevelT w="63500" h="25400"/>
-          </a:sp3d>
-        </a:effectStyle>
-      </a:effectStyleLst>
-      <a:bgFillStyleLst>
-        <a:solidFill>
-          <a:schemeClr val="phClr"/>
-        </a:solidFill>
-        <a:gradFill rotWithShape="1">
-          <a:gsLst>
-            <a:gs pos="0">
-              <a:schemeClr val="phClr">
-                <a:tint val="40000"/>
-                <a:satMod val="350000"/>
-              </a:schemeClr>
-            </a:gs>
-            <a:gs pos="40000">
-              <a:schemeClr val="phClr">
-                <a:tint val="45000"/>
-                <a:shade val="99000"/>
-                <a:satMod val="350000"/>
-              </a:schemeClr>
-            </a:gs>
-            <a:gs pos="100000">
-              <a:schemeClr val="phClr">
-                <a:shade val="20000"/>
-                <a:satMod val="255000"/>
-              </a:schemeClr>
-            </a:gs>
-          </a:gsLst>
-          <a:path path="circle">
-            <a:fillToRect l="50000" t="-80000" r="50000" b="180000"/>
-          </a:path>
-        </a:gradFill>
-        <a:gradFill rotWithShape="1">
-          <a:gsLst>
-            <a:gs pos="0">
-              <a:schemeClr val="phClr">
-                <a:tint val="80000"/>
-                <a:satMod val="300000"/>
-              </a:schemeClr>
-            </a:gs>
-            <a:gs pos="100000">
-              <a:schemeClr val="phClr">
-                <a:shade val="30000"/>
-                <a:satMod val="200000"/>
-              </a:schemeClr>
-            </a:gs>
-          </a:gsLst>
-          <a:path path="circle">
-            <a:fillToRect l="50000" t="50000" r="50000" b="50000"/>
-          </a:path>
-        </a:gradFill>
-      </a:bgFillStyleLst>
-    </a:fmtScheme>
-  </a:themeElements>
-</a:theme>
 </file>
--- a/docs/Fig MyM.pptx
+++ b/docs/Fig MyM.pptx
@@ -52,7 +52,7 @@
         <a:srgbClr val="000000"/>
       </a:buClr>
       <a:buFont typeface="Arial"/>
-      <a:defRPr b="0" i="0" sz="1400" u="none" cap="none" strike="noStrike">
+      <a:defRPr b="0" i="0" spc="0" sz="1400" u="none" cap="none" strike="noStrike">
         <a:solidFill>
           <a:srgbClr val="000000"/>
         </a:solidFill>
@@ -76,7 +76,7 @@
         <a:srgbClr val="000000"/>
       </a:buClr>
       <a:buFont typeface="Arial"/>
-      <a:defRPr b="0" i="0" sz="1400" u="none" cap="none" strike="noStrike">
+      <a:defRPr b="0" i="0" spc="0" sz="1400" u="none" cap="none" strike="noStrike">
         <a:solidFill>
           <a:srgbClr val="000000"/>
         </a:solidFill>
@@ -100,7 +100,7 @@
         <a:srgbClr val="000000"/>
       </a:buClr>
       <a:buFont typeface="Arial"/>
-      <a:defRPr b="0" i="0" sz="1400" u="none" cap="none" strike="noStrike">
+      <a:defRPr b="0" i="0" spc="0" sz="1400" u="none" cap="none" strike="noStrike">
         <a:solidFill>
           <a:srgbClr val="000000"/>
         </a:solidFill>
@@ -124,7 +124,7 @@
         <a:srgbClr val="000000"/>
       </a:buClr>
       <a:buFont typeface="Arial"/>
-      <a:defRPr b="0" i="0" sz="1400" u="none" cap="none" strike="noStrike">
+      <a:defRPr b="0" i="0" spc="0" sz="1400" u="none" cap="none" strike="noStrike">
         <a:solidFill>
           <a:srgbClr val="000000"/>
         </a:solidFill>
@@ -148,7 +148,7 @@
         <a:srgbClr val="000000"/>
       </a:buClr>
       <a:buFont typeface="Arial"/>
-      <a:defRPr b="0" i="0" sz="1400" u="none" cap="none" strike="noStrike">
+      <a:defRPr b="0" i="0" spc="0" sz="1400" u="none" cap="none" strike="noStrike">
         <a:solidFill>
           <a:srgbClr val="000000"/>
         </a:solidFill>
@@ -172,7 +172,7 @@
         <a:srgbClr val="000000"/>
       </a:buClr>
       <a:buFont typeface="Arial"/>
-      <a:defRPr b="0" i="0" sz="1400" u="none" cap="none" strike="noStrike">
+      <a:defRPr b="0" i="0" spc="0" sz="1400" u="none" cap="none" strike="noStrike">
         <a:solidFill>
           <a:srgbClr val="000000"/>
         </a:solidFill>
@@ -196,7 +196,7 @@
         <a:srgbClr val="000000"/>
       </a:buClr>
       <a:buFont typeface="Arial"/>
-      <a:defRPr b="0" i="0" sz="1400" u="none" cap="none" strike="noStrike">
+      <a:defRPr b="0" i="0" spc="0" sz="1400" u="none" cap="none" strike="noStrike">
         <a:solidFill>
           <a:srgbClr val="000000"/>
         </a:solidFill>
@@ -220,7 +220,7 @@
         <a:srgbClr val="000000"/>
       </a:buClr>
       <a:buFont typeface="Arial"/>
-      <a:defRPr b="0" i="0" sz="1400" u="none" cap="none" strike="noStrike">
+      <a:defRPr b="0" i="0" spc="0" sz="1400" u="none" cap="none" strike="noStrike">
         <a:solidFill>
           <a:srgbClr val="000000"/>
         </a:solidFill>
@@ -244,7 +244,7 @@
         <a:srgbClr val="000000"/>
       </a:buClr>
       <a:buFont typeface="Arial"/>
-      <a:defRPr b="0" i="0" sz="1400" u="none" cap="none" strike="noStrike">
+      <a:defRPr b="0" i="0" spc="0" sz="1400" u="none" cap="none" strike="noStrike">
         <a:solidFill>
           <a:srgbClr val="000000"/>
         </a:solidFill>
@@ -527,7 +527,7 @@
         <a:srgbClr val="000000"/>
       </a:buClr>
       <a:buFont typeface="Arial"/>
-      <a:defRPr b="0" i="0" sz="1400" u="none" cap="none" strike="noStrike">
+      <a:defRPr b="0" i="0" spc="0" sz="1400" u="none" cap="none" strike="noStrike">
         <a:solidFill>
           <a:srgbClr val="000000"/>
         </a:solidFill>
@@ -551,7 +551,7 @@
         <a:srgbClr val="000000"/>
       </a:buClr>
       <a:buFont typeface="Arial"/>
-      <a:defRPr b="0" i="0" sz="1400" u="none" cap="none" strike="noStrike">
+      <a:defRPr b="0" i="0" spc="0" sz="1400" u="none" cap="none" strike="noStrike">
         <a:solidFill>
           <a:srgbClr val="000000"/>
         </a:solidFill>
@@ -575,7 +575,7 @@
         <a:srgbClr val="000000"/>
       </a:buClr>
       <a:buFont typeface="Arial"/>
-      <a:defRPr b="0" i="0" sz="1400" u="none" cap="none" strike="noStrike">
+      <a:defRPr b="0" i="0" spc="0" sz="1400" u="none" cap="none" strike="noStrike">
         <a:solidFill>
           <a:srgbClr val="000000"/>
         </a:solidFill>
@@ -599,7 +599,7 @@
         <a:srgbClr val="000000"/>
       </a:buClr>
       <a:buFont typeface="Arial"/>
-      <a:defRPr b="0" i="0" sz="1400" u="none" cap="none" strike="noStrike">
+      <a:defRPr b="0" i="0" spc="0" sz="1400" u="none" cap="none" strike="noStrike">
         <a:solidFill>
           <a:srgbClr val="000000"/>
         </a:solidFill>
@@ -623,7 +623,7 @@
         <a:srgbClr val="000000"/>
       </a:buClr>
       <a:buFont typeface="Arial"/>
-      <a:defRPr b="0" i="0" sz="1400" u="none" cap="none" strike="noStrike">
+      <a:defRPr b="0" i="0" spc="0" sz="1400" u="none" cap="none" strike="noStrike">
         <a:solidFill>
           <a:srgbClr val="000000"/>
         </a:solidFill>
@@ -647,7 +647,7 @@
         <a:srgbClr val="000000"/>
       </a:buClr>
       <a:buFont typeface="Arial"/>
-      <a:defRPr b="0" i="0" sz="1400" u="none" cap="none" strike="noStrike">
+      <a:defRPr b="0" i="0" spc="0" sz="1400" u="none" cap="none" strike="noStrike">
         <a:solidFill>
           <a:srgbClr val="000000"/>
         </a:solidFill>
@@ -671,7 +671,7 @@
         <a:srgbClr val="000000"/>
       </a:buClr>
       <a:buFont typeface="Arial"/>
-      <a:defRPr b="0" i="0" sz="1400" u="none" cap="none" strike="noStrike">
+      <a:defRPr b="0" i="0" spc="0" sz="1400" u="none" cap="none" strike="noStrike">
         <a:solidFill>
           <a:srgbClr val="000000"/>
         </a:solidFill>
@@ -695,7 +695,7 @@
         <a:srgbClr val="000000"/>
       </a:buClr>
       <a:buFont typeface="Arial"/>
-      <a:defRPr b="0" i="0" sz="1400" u="none" cap="none" strike="noStrike">
+      <a:defRPr b="0" i="0" spc="0" sz="1400" u="none" cap="none" strike="noStrike">
         <a:solidFill>
           <a:srgbClr val="000000"/>
         </a:solidFill>
@@ -719,7 +719,7 @@
         <a:srgbClr val="000000"/>
       </a:buClr>
       <a:buFont typeface="Arial"/>
-      <a:defRPr b="0" i="0" sz="1400" u="none" cap="none" strike="noStrike">
+      <a:defRPr b="0" i="0" spc="0" sz="1400" u="none" cap="none" strike="noStrike">
         <a:solidFill>
           <a:srgbClr val="000000"/>
         </a:solidFill>
@@ -6202,7 +6202,7 @@
           <a:srgbClr val="000000"/>
         </a:buClr>
         <a:buFont typeface="Arial"/>
-        <a:defRPr b="0" i="0" sz="1400" u="none" cap="none" strike="noStrike">
+        <a:defRPr b="0" i="0" spc="0" sz="1400" u="none" cap="none" strike="noStrike">
           <a:solidFill>
             <a:srgbClr val="000000"/>
           </a:solidFill>
@@ -6226,7 +6226,7 @@
           <a:srgbClr val="000000"/>
         </a:buClr>
         <a:buFont typeface="Arial"/>
-        <a:defRPr b="0" i="0" sz="1400" u="none" cap="none" strike="noStrike">
+        <a:defRPr b="0" i="0" spc="0" sz="1400" u="none" cap="none" strike="noStrike">
           <a:solidFill>
             <a:srgbClr val="000000"/>
           </a:solidFill>
@@ -6250,7 +6250,7 @@
           <a:srgbClr val="000000"/>
         </a:buClr>
         <a:buFont typeface="Arial"/>
-        <a:defRPr b="0" i="0" sz="1400" u="none" cap="none" strike="noStrike">
+        <a:defRPr b="0" i="0" spc="0" sz="1400" u="none" cap="none" strike="noStrike">
           <a:solidFill>
             <a:srgbClr val="000000"/>
           </a:solidFill>
@@ -6274,7 +6274,7 @@
           <a:srgbClr val="000000"/>
         </a:buClr>
         <a:buFont typeface="Arial"/>
-        <a:defRPr b="0" i="0" sz="1400" u="none" cap="none" strike="noStrike">
+        <a:defRPr b="0" i="0" spc="0" sz="1400" u="none" cap="none" strike="noStrike">
           <a:solidFill>
             <a:srgbClr val="000000"/>
           </a:solidFill>
@@ -6298,7 +6298,7 @@
           <a:srgbClr val="000000"/>
         </a:buClr>
         <a:buFont typeface="Arial"/>
-        <a:defRPr b="0" i="0" sz="1400" u="none" cap="none" strike="noStrike">
+        <a:defRPr b="0" i="0" spc="0" sz="1400" u="none" cap="none" strike="noStrike">
           <a:solidFill>
             <a:srgbClr val="000000"/>
           </a:solidFill>
@@ -6322,7 +6322,7 @@
           <a:srgbClr val="000000"/>
         </a:buClr>
         <a:buFont typeface="Arial"/>
-        <a:defRPr b="0" i="0" sz="1400" u="none" cap="none" strike="noStrike">
+        <a:defRPr b="0" i="0" spc="0" sz="1400" u="none" cap="none" strike="noStrike">
           <a:solidFill>
             <a:srgbClr val="000000"/>
           </a:solidFill>
@@ -6346,7 +6346,7 @@
           <a:srgbClr val="000000"/>
         </a:buClr>
         <a:buFont typeface="Arial"/>
-        <a:defRPr b="0" i="0" sz="1400" u="none" cap="none" strike="noStrike">
+        <a:defRPr b="0" i="0" spc="0" sz="1400" u="none" cap="none" strike="noStrike">
           <a:solidFill>
             <a:srgbClr val="000000"/>
           </a:solidFill>
@@ -6370,7 +6370,7 @@
           <a:srgbClr val="000000"/>
         </a:buClr>
         <a:buFont typeface="Arial"/>
-        <a:defRPr b="0" i="0" sz="1400" u="none" cap="none" strike="noStrike">
+        <a:defRPr b="0" i="0" spc="0" sz="1400" u="none" cap="none" strike="noStrike">
           <a:solidFill>
             <a:srgbClr val="000000"/>
           </a:solidFill>
@@ -6394,7 +6394,7 @@
           <a:srgbClr val="000000"/>
         </a:buClr>
         <a:buFont typeface="Arial"/>
-        <a:defRPr b="0" i="0" sz="1400" u="none" cap="none" strike="noStrike">
+        <a:defRPr b="0" i="0" spc="0" sz="1400" u="none" cap="none" strike="noStrike">
           <a:solidFill>
             <a:srgbClr val="000000"/>
           </a:solidFill>
@@ -6431,7 +6431,7 @@
           <a:srgbClr val="000000"/>
         </a:buClr>
         <a:buFont typeface="Arial"/>
-        <a:defRPr b="0" i="0" sz="1400" u="none" cap="none" strike="noStrike">
+        <a:defRPr b="0" i="0" spc="0" sz="1400" u="none" cap="none" strike="noStrike">
           <a:solidFill>
             <a:srgbClr val="000000"/>
           </a:solidFill>
@@ -6455,7 +6455,7 @@
           <a:srgbClr val="000000"/>
         </a:buClr>
         <a:buFont typeface="Arial"/>
-        <a:defRPr b="0" i="0" sz="1400" u="none" cap="none" strike="noStrike">
+        <a:defRPr b="0" i="0" spc="0" sz="1400" u="none" cap="none" strike="noStrike">
           <a:solidFill>
             <a:srgbClr val="000000"/>
           </a:solidFill>
@@ -6479,7 +6479,7 @@
           <a:srgbClr val="000000"/>
         </a:buClr>
         <a:buFont typeface="Arial"/>
-        <a:defRPr b="0" i="0" sz="1400" u="none" cap="none" strike="noStrike">
+        <a:defRPr b="0" i="0" spc="0" sz="1400" u="none" cap="none" strike="noStrike">
           <a:solidFill>
             <a:srgbClr val="000000"/>
           </a:solidFill>
@@ -6503,7 +6503,7 @@
           <a:srgbClr val="000000"/>
         </a:buClr>
         <a:buFont typeface="Arial"/>
-        <a:defRPr b="0" i="0" sz="1400" u="none" cap="none" strike="noStrike">
+        <a:defRPr b="0" i="0" spc="0" sz="1400" u="none" cap="none" strike="noStrike">
           <a:solidFill>
             <a:srgbClr val="000000"/>
           </a:solidFill>
@@ -6527,7 +6527,7 @@
           <a:srgbClr val="000000"/>
         </a:buClr>
         <a:buFont typeface="Arial"/>
-        <a:defRPr b="0" i="0" sz="1400" u="none" cap="none" strike="noStrike">
+        <a:defRPr b="0" i="0" spc="0" sz="1400" u="none" cap="none" strike="noStrike">
           <a:solidFill>
             <a:srgbClr val="000000"/>
           </a:solidFill>
@@ -6551,7 +6551,7 @@
           <a:srgbClr val="000000"/>
         </a:buClr>
         <a:buFont typeface="Arial"/>
-        <a:defRPr b="0" i="0" sz="1400" u="none" cap="none" strike="noStrike">
+        <a:defRPr b="0" i="0" spc="0" sz="1400" u="none" cap="none" strike="noStrike">
           <a:solidFill>
             <a:srgbClr val="000000"/>
           </a:solidFill>
@@ -6575,7 +6575,7 @@
           <a:srgbClr val="000000"/>
         </a:buClr>
         <a:buFont typeface="Arial"/>
-        <a:defRPr b="0" i="0" sz="1400" u="none" cap="none" strike="noStrike">
+        <a:defRPr b="0" i="0" spc="0" sz="1400" u="none" cap="none" strike="noStrike">
           <a:solidFill>
             <a:srgbClr val="000000"/>
           </a:solidFill>
@@ -6599,7 +6599,7 @@
           <a:srgbClr val="000000"/>
         </a:buClr>
         <a:buFont typeface="Arial"/>
-        <a:defRPr b="0" i="0" sz="1400" u="none" cap="none" strike="noStrike">
+        <a:defRPr b="0" i="0" spc="0" sz="1400" u="none" cap="none" strike="noStrike">
           <a:solidFill>
             <a:srgbClr val="000000"/>
           </a:solidFill>
@@ -6623,7 +6623,7 @@
           <a:srgbClr val="000000"/>
         </a:buClr>
         <a:buFont typeface="Arial"/>
-        <a:defRPr b="0" i="0" sz="1400" u="none" cap="none" strike="noStrike">
+        <a:defRPr b="0" i="0" spc="0" sz="1400" u="none" cap="none" strike="noStrike">
           <a:solidFill>
             <a:srgbClr val="000000"/>
           </a:solidFill>
@@ -6660,7 +6660,7 @@
           <a:srgbClr val="000000"/>
         </a:buClr>
         <a:buFont typeface="Arial"/>
-        <a:defRPr b="0" i="0" sz="1400" u="none" cap="none" strike="noStrike">
+        <a:defRPr b="0" i="0" spc="0" sz="1400" u="none" cap="none" strike="noStrike">
           <a:solidFill>
             <a:srgbClr val="000000"/>
           </a:solidFill>
@@ -6684,7 +6684,7 @@
           <a:srgbClr val="000000"/>
         </a:buClr>
         <a:buFont typeface="Arial"/>
-        <a:defRPr b="0" i="0" sz="1400" u="none" cap="none" strike="noStrike">
+        <a:defRPr b="0" i="0" spc="0" sz="1400" u="none" cap="none" strike="noStrike">
           <a:solidFill>
             <a:srgbClr val="000000"/>
           </a:solidFill>
@@ -6708,7 +6708,7 @@
           <a:srgbClr val="000000"/>
         </a:buClr>
         <a:buFont typeface="Arial"/>
-        <a:defRPr b="0" i="0" sz="1400" u="none" cap="none" strike="noStrike">
+        <a:defRPr b="0" i="0" spc="0" sz="1400" u="none" cap="none" strike="noStrike">
           <a:solidFill>
             <a:srgbClr val="000000"/>
           </a:solidFill>
@@ -6732,7 +6732,7 @@
           <a:srgbClr val="000000"/>
         </a:buClr>
         <a:buFont typeface="Arial"/>
-        <a:defRPr b="0" i="0" sz="1400" u="none" cap="none" strike="noStrike">
+        <a:defRPr b="0" i="0" spc="0" sz="1400" u="none" cap="none" strike="noStrike">
           <a:solidFill>
             <a:srgbClr val="000000"/>
           </a:solidFill>
@@ -6756,7 +6756,7 @@
           <a:srgbClr val="000000"/>
         </a:buClr>
         <a:buFont typeface="Arial"/>
-        <a:defRPr b="0" i="0" sz="1400" u="none" cap="none" strike="noStrike">
+        <a:defRPr b="0" i="0" spc="0" sz="1400" u="none" cap="none" strike="noStrike">
           <a:solidFill>
             <a:srgbClr val="000000"/>
           </a:solidFill>
@@ -6780,7 +6780,7 @@
           <a:srgbClr val="000000"/>
         </a:buClr>
         <a:buFont typeface="Arial"/>
-        <a:defRPr b="0" i="0" sz="1400" u="none" cap="none" strike="noStrike">
+        <a:defRPr b="0" i="0" spc="0" sz="1400" u="none" cap="none" strike="noStrike">
           <a:solidFill>
             <a:srgbClr val="000000"/>
           </a:solidFill>
@@ -6804,7 +6804,7 @@
           <a:srgbClr val="000000"/>
         </a:buClr>
         <a:buFont typeface="Arial"/>
-        <a:defRPr b="0" i="0" sz="1400" u="none" cap="none" strike="noStrike">
+        <a:defRPr b="0" i="0" spc="0" sz="1400" u="none" cap="none" strike="noStrike">
           <a:solidFill>
             <a:srgbClr val="000000"/>
           </a:solidFill>
@@ -6828,7 +6828,7 @@
           <a:srgbClr val="000000"/>
         </a:buClr>
         <a:buFont typeface="Arial"/>
-        <a:defRPr b="0" i="0" sz="1400" u="none" cap="none" strike="noStrike">
+        <a:defRPr b="0" i="0" spc="0" sz="1400" u="none" cap="none" strike="noStrike">
           <a:solidFill>
             <a:srgbClr val="000000"/>
           </a:solidFill>
@@ -6852,7 +6852,7 @@
           <a:srgbClr val="000000"/>
         </a:buClr>
         <a:buFont typeface="Arial"/>
-        <a:defRPr b="0" i="0" sz="1400" u="none" cap="none" strike="noStrike">
+        <a:defRPr b="0" i="0" spc="0" sz="1400" u="none" cap="none" strike="noStrike">
           <a:solidFill>
             <a:srgbClr val="000000"/>
           </a:solidFill>

--- a/docs/Fig MyM.pptx
+++ b/docs/Fig MyM.pptx
@@ -12453,6 +12453,285 @@
 </file>
 
 <file path=ppt/theme/theme1.xml><?xml version="1.0" encoding="utf-8"?>
+<a:theme xmlns:a="http://schemas.openxmlformats.org/drawingml/2006/main" xmlns:r="http://schemas.openxmlformats.org/officeDocument/2006/relationships" name="Simple Light">
+  <a:themeElements>
+    <a:clrScheme name="Simple Light">
+      <a:dk1>
+        <a:srgbClr val="000000"/>
+      </a:dk1>
+      <a:lt1>
+        <a:srgbClr val="FFFFFF"/>
+      </a:lt1>
+      <a:dk2>
+        <a:srgbClr val="595959"/>
+      </a:dk2>
+      <a:lt2>
+        <a:srgbClr val="EEEEEE"/>
+      </a:lt2>
+      <a:accent1>
+        <a:srgbClr val="4285F4"/>
+      </a:accent1>
+      <a:accent2>
+        <a:srgbClr val="212121"/>
+      </a:accent2>
+      <a:accent3>
+        <a:srgbClr val="78909C"/>
+      </a:accent3>
+      <a:accent4>
+        <a:srgbClr val="FFAB40"/>
+      </a:accent4>
+      <a:accent5>
+        <a:srgbClr val="0097A7"/>
+      </a:accent5>
+      <a:accent6>
+        <a:srgbClr val="EEFF41"/>
+      </a:accent6>
+      <a:hlink>
+        <a:srgbClr val="0097A7"/>
+      </a:hlink>
+      <a:folHlink>
+        <a:srgbClr val="0097A7"/>
+      </a:folHlink>
+    </a:clrScheme>
+    <a:fontScheme name="Office">
+      <a:majorFont>
+        <a:latin typeface="Arial"/>
+        <a:ea typeface=""/>
+        <a:cs typeface=""/>
+        <a:font script="Jpan" typeface="ＭＳ Ｐゴシック"/>
+        <a:font script="Hang" typeface="맑은 고딕"/>
+        <a:font script="Hans" typeface="宋体"/>
+        <a:font script="Hant" typeface="新細明體"/>
+        <a:font script="Arab" typeface="Times New Roman"/>
+        <a:font script="Hebr" typeface="Times New Roman"/>
+        <a:font script="Thai" typeface="Angsana New"/>
+        <a:font script="Ethi" typeface="Nyala"/>
+        <a:font script="Beng" typeface="Vrinda"/>
+        <a:font script="Gujr" typeface="Shruti"/>
+        <a:font script="Khmr" typeface="MoolBoran"/>
+        <a:font script="Knda" typeface="Tunga"/>
+        <a:font script="Guru" typeface="Raavi"/>
+        <a:font script="Cans" typeface="Euphemia"/>
+        <a:font script="Cher" typeface="Plantagenet Cherokee"/>
+        <a:font script="Yiii" typeface="Microsoft Yi Baiti"/>
+        <a:font script="Tibt" typeface="Microsoft Himalaya"/>
+        <a:font script="Thaa" typeface="MV Boli"/>
+        <a:font script="Deva" typeface="Mangal"/>
+        <a:font script="Telu" typeface="Gautami"/>
+        <a:font script="Taml" typeface="Latha"/>
+        <a:font script="Syrc" typeface="Estrangelo Edessa"/>
+        <a:font script="Orya" typeface="Kalinga"/>
+        <a:font script="Mlym" typeface="Kartika"/>
+        <a:font script="Laoo" typeface="DokChampa"/>
+        <a:font script="Sinh" typeface="Iskoola Pota"/>
+        <a:font script="Mong" typeface="Mongolian Baiti"/>
+        <a:font script="Viet" typeface="Times New Roman"/>
+        <a:font script="Uigh" typeface="Microsoft Uighur"/>
+        <a:font script="Geor" typeface="Sylfaen"/>
+      </a:majorFont>
+      <a:minorFont>
+        <a:latin typeface="Arial"/>
+        <a:ea typeface=""/>
+        <a:cs typeface=""/>
+        <a:font script="Jpan" typeface="ＭＳ Ｐゴシック"/>
+        <a:font script="Hang" typeface="맑은 고딕"/>
+        <a:font script="Hans" typeface="宋体"/>
+        <a:font script="Hant" typeface="新細明體"/>
+        <a:font script="Arab" typeface="Arial"/>
+        <a:font script="Hebr" typeface="Arial"/>
+        <a:font script="Thai" typeface="Cordia New"/>
+        <a:font script="Ethi" typeface="Nyala"/>
+        <a:font script="Beng" typeface="Vrinda"/>
+        <a:font script="Gujr" typeface="Shruti"/>
+        <a:font script="Khmr" typeface="DaunPenh"/>
+        <a:font script="Knda" typeface="Tunga"/>
+        <a:font script="Guru" typeface="Raavi"/>
+        <a:font script="Cans" typeface="Euphemia"/>
+        <a:font script="Cher" typeface="Plantagenet Cherokee"/>
+        <a:font script="Yiii" typeface="Microsoft Yi Baiti"/>
+        <a:font script="Tibt" typeface="Microsoft Himalaya"/>
+        <a:font script="Thaa" typeface="MV Boli"/>
+        <a:font script="Deva" typeface="Mangal"/>
+        <a:font script="Telu" typeface="Gautami"/>
+        <a:font script="Taml" typeface="Latha"/>
+        <a:font script="Syrc" typeface="Estrangelo Edessa"/>
+        <a:font script="Orya" typeface="Kalinga"/>
+        <a:font script="Mlym" typeface="Kartika"/>
+        <a:font script="Laoo" typeface="DokChampa"/>
+        <a:font script="Sinh" typeface="Iskoola Pota"/>
+        <a:font script="Mong" typeface="Mongolian Baiti"/>
+        <a:font script="Viet" typeface="Arial"/>
+        <a:font script="Uigh" typeface="Microsoft Uighur"/>
+        <a:font script="Geor" typeface="Sylfaen"/>
+      </a:minorFont>
+    </a:fontScheme>
+    <a:fmtScheme name="Office">
+      <a:fillStyleLst>
+        <a:solidFill>
+          <a:schemeClr val="phClr"/>
+        </a:solidFill>
+        <a:gradFill rotWithShape="1">
+          <a:gsLst>
+            <a:gs pos="0">
+              <a:schemeClr val="phClr">
+                <a:tint val="50000"/>
+                <a:satMod val="300000"/>
+              </a:schemeClr>
+            </a:gs>
+            <a:gs pos="35000">
+              <a:schemeClr val="phClr">
+                <a:tint val="37000"/>
+                <a:satMod val="300000"/>
+              </a:schemeClr>
+            </a:gs>
+            <a:gs pos="100000">
+              <a:schemeClr val="phClr">
+                <a:tint val="15000"/>
+                <a:satMod val="350000"/>
+              </a:schemeClr>
+            </a:gs>
+          </a:gsLst>
+          <a:lin ang="16200000" scaled="1"/>
+        </a:gradFill>
+        <a:gradFill rotWithShape="1">
+          <a:gsLst>
+            <a:gs pos="0">
+              <a:schemeClr val="phClr">
+                <a:tint val="100000"/>
+                <a:shade val="100000"/>
+                <a:satMod val="130000"/>
+              </a:schemeClr>
+            </a:gs>
+            <a:gs pos="100000">
+              <a:schemeClr val="phClr">
+                <a:tint val="50000"/>
+                <a:shade val="100000"/>
+                <a:satMod val="350000"/>
+              </a:schemeClr>
+            </a:gs>
+          </a:gsLst>
+          <a:lin ang="16200000" scaled="0"/>
+        </a:gradFill>
+      </a:fillStyleLst>
+      <a:lnStyleLst>
+        <a:ln w="9525" cap="flat" cmpd="sng" algn="ctr">
+          <a:solidFill>
+            <a:schemeClr val="phClr">
+              <a:shade val="95000"/>
+              <a:satMod val="105000"/>
+            </a:schemeClr>
+          </a:solidFill>
+          <a:prstDash val="solid"/>
+        </a:ln>
+        <a:ln w="25400" cap="flat" cmpd="sng" algn="ctr">
+          <a:solidFill>
+            <a:schemeClr val="phClr"/>
+          </a:solidFill>
+          <a:prstDash val="solid"/>
+        </a:ln>
+        <a:ln w="38100" cap="flat" cmpd="sng" algn="ctr">
+          <a:solidFill>
+            <a:schemeClr val="phClr"/>
+          </a:solidFill>
+          <a:prstDash val="solid"/>
+        </a:ln>
+      </a:lnStyleLst>
+      <a:effectStyleLst>
+        <a:effectStyle>
+          <a:effectLst>
+            <a:outerShdw blurRad="40000" dist="20000" dir="5400000" rotWithShape="0">
+              <a:srgbClr val="000000">
+                <a:alpha val="38000"/>
+              </a:srgbClr>
+            </a:outerShdw>
+          </a:effectLst>
+        </a:effectStyle>
+        <a:effectStyle>
+          <a:effectLst>
+            <a:outerShdw blurRad="40000" dist="23000" dir="5400000" rotWithShape="0">
+              <a:srgbClr val="000000">
+                <a:alpha val="35000"/>
+              </a:srgbClr>
+            </a:outerShdw>
+          </a:effectLst>
+        </a:effectStyle>
+        <a:effectStyle>
+          <a:effectLst>
+            <a:outerShdw blurRad="40000" dist="23000" dir="5400000" rotWithShape="0">
+              <a:srgbClr val="000000">
+                <a:alpha val="35000"/>
+              </a:srgbClr>
+            </a:outerShdw>
+          </a:effectLst>
+          <a:scene3d>
+            <a:camera prst="orthographicFront">
+              <a:rot lat="0" lon="0" rev="0"/>
+            </a:camera>
+            <a:lightRig rig="threePt" dir="t">
+              <a:rot lat="0" lon="0" rev="1200000"/>
+            </a:lightRig>
+          </a:scene3d>
+          <a:sp3d>
+            <a:bevelT w="63500" h="25400"/>
+          </a:sp3d>
+        </a:effectStyle>
+      </a:effectStyleLst>
+      <a:bgFillStyleLst>
+        <a:solidFill>
+          <a:schemeClr val="phClr"/>
+        </a:solidFill>
+        <a:gradFill rotWithShape="1">
+          <a:gsLst>
+            <a:gs pos="0">
+              <a:schemeClr val="phClr">
+                <a:tint val="40000"/>
+                <a:satMod val="350000"/>
+              </a:schemeClr>
+            </a:gs>
+            <a:gs pos="40000">
+              <a:schemeClr val="phClr">
+                <a:tint val="45000"/>
+                <a:shade val="99000"/>
+                <a:satMod val="350000"/>
+              </a:schemeClr>
+            </a:gs>
+            <a:gs pos="100000">
+              <a:schemeClr val="phClr">
+                <a:shade val="20000"/>
+                <a:satMod val="255000"/>
+              </a:schemeClr>
+            </a:gs>
+          </a:gsLst>
+          <a:path path="circle">
+            <a:fillToRect l="50000" t="-80000" r="50000" b="180000"/>
+          </a:path>
+        </a:gradFill>
+        <a:gradFill rotWithShape="1">
+          <a:gsLst>
+            <a:gs pos="0">
+              <a:schemeClr val="phClr">
+                <a:tint val="80000"/>
+                <a:satMod val="300000"/>
+              </a:schemeClr>
+            </a:gs>
+            <a:gs pos="100000">
+              <a:schemeClr val="phClr">
+                <a:shade val="30000"/>
+                <a:satMod val="200000"/>
+              </a:schemeClr>
+            </a:gs>
+          </a:gsLst>
+          <a:path path="circle">
+            <a:fillToRect l="50000" t="50000" r="50000" b="50000"/>
+          </a:path>
+        </a:gradFill>
+      </a:bgFillStyleLst>
+    </a:fmtScheme>
+  </a:themeElements>
+</a:theme>
+</file>
+
+<file path=ppt/theme/theme2.xml><?xml version="1.0" encoding="utf-8"?>
 <a:theme xmlns:a="http://schemas.openxmlformats.org/drawingml/2006/main" xmlns:r="http://schemas.openxmlformats.org/officeDocument/2006/relationships">
   <a:themeElements>
     <a:clrScheme name="Default">
@@ -12729,283 +13008,4 @@
     </a:fmtScheme>
   </a:themeElements>
 </a:theme>
-</file>
-
-<file path=ppt/theme/theme2.xml><?xml version="1.0" encoding="utf-8"?>
-<a:theme xmlns:a="http://schemas.openxmlformats.org/drawingml/2006/main" xmlns:r="http://schemas.openxmlformats.org/officeDocument/2006/relationships" name="Simple Light">
-  <a:themeElements>
-    <a:clrScheme name="Simple Light">
-      <a:dk1>
-        <a:srgbClr val="000000"/>
-      </a:dk1>
-      <a:lt1>
-        <a:srgbClr val="FFFFFF"/>
-      </a:lt1>
-      <a:dk2>
-        <a:srgbClr val="595959"/>
-      </a:dk2>
-      <a:lt2>
-        <a:srgbClr val="EEEEEE"/>
-      </a:lt2>
-      <a:accent1>
-        <a:srgbClr val="4285F4"/>
-      </a:accent1>
-      <a:accent2>
-        <a:srgbClr val="212121"/>
-      </a:accent2>
-      <a:accent3>
-        <a:srgbClr val="78909C"/>
-      </a:accent3>
-      <a:accent4>
-        <a:srgbClr val="FFAB40"/>
-      </a:accent4>
-      <a:accent5>
-        <a:srgbClr val="0097A7"/>
-      </a:accent5>
-      <a:accent6>
-        <a:srgbClr val="EEFF41"/>
-      </a:accent6>
-      <a:hlink>
-        <a:srgbClr val="0097A7"/>
-      </a:hlink>
-      <a:folHlink>
-        <a:srgbClr val="0097A7"/>
-      </a:folHlink>
-    </a:clrScheme>
-    <a:fontScheme name="Office">
-      <a:majorFont>
-        <a:latin typeface="Arial"/>
-        <a:ea typeface=""/>
-        <a:cs typeface=""/>
-        <a:font script="Jpan" typeface="ＭＳ Ｐゴシック"/>
-        <a:font script="Hang" typeface="맑은 고딕"/>
-        <a:font script="Hans" typeface="宋体"/>
-        <a:font script="Hant" typeface="新細明體"/>
-        <a:font script="Arab" typeface="Times New Roman"/>
-        <a:font script="Hebr" typeface="Times New Roman"/>
-        <a:font script="Thai" typeface="Angsana New"/>
-        <a:font script="Ethi" typeface="Nyala"/>
-        <a:font script="Beng" typeface="Vrinda"/>
-        <a:font script="Gujr" typeface="Shruti"/>
-        <a:font script="Khmr" typeface="MoolBoran"/>
-        <a:font script="Knda" typeface="Tunga"/>
-        <a:font script="Guru" typeface="Raavi"/>
-        <a:font script="Cans" typeface="Euphemia"/>
-        <a:font script="Cher" typeface="Plantagenet Cherokee"/>
-        <a:font script="Yiii" typeface="Microsoft Yi Baiti"/>
-        <a:font script="Tibt" typeface="Microsoft Himalaya"/>
-        <a:font script="Thaa" typeface="MV Boli"/>
-        <a:font script="Deva" typeface="Mangal"/>
-        <a:font script="Telu" typeface="Gautami"/>
-        <a:font script="Taml" typeface="Latha"/>
-        <a:font script="Syrc" typeface="Estrangelo Edessa"/>
-        <a:font script="Orya" typeface="Kalinga"/>
-        <a:font script="Mlym" typeface="Kartika"/>
-        <a:font script="Laoo" typeface="DokChampa"/>
-        <a:font script="Sinh" typeface="Iskoola Pota"/>
-        <a:font script="Mong" typeface="Mongolian Baiti"/>
-        <a:font script="Viet" typeface="Times New Roman"/>
-        <a:font script="Uigh" typeface="Microsoft Uighur"/>
-        <a:font script="Geor" typeface="Sylfaen"/>
-      </a:majorFont>
-      <a:minorFont>
-        <a:latin typeface="Arial"/>
-        <a:ea typeface=""/>
-        <a:cs typeface=""/>
-        <a:font script="Jpan" typeface="ＭＳ Ｐゴシック"/>
-        <a:font script="Hang" typeface="맑은 고딕"/>
-        <a:font script="Hans" typeface="宋体"/>
-        <a:font script="Hant" typeface="新細明體"/>
-        <a:font script="Arab" typeface="Arial"/>
-        <a:font script="Hebr" typeface="Arial"/>
-        <a:font script="Thai" typeface="Cordia New"/>
-        <a:font script="Ethi" typeface="Nyala"/>
-        <a:font script="Beng" typeface="Vrinda"/>
-        <a:font script="Gujr" typeface="Shruti"/>
-        <a:font script="Khmr" typeface="DaunPenh"/>
-        <a:font script="Knda" typeface="Tunga"/>
-        <a:font script="Guru" typeface="Raavi"/>
-        <a:font script="Cans" typeface="Euphemia"/>
-        <a:font script="Cher" typeface="Plantagenet Cherokee"/>
-        <a:font script="Yiii" typeface="Microsoft Yi Baiti"/>
-        <a:font script="Tibt" typeface="Microsoft Himalaya"/>
-        <a:font script="Thaa" typeface="MV Boli"/>
-        <a:font script="Deva" typeface="Mangal"/>
-        <a:font script="Telu" typeface="Gautami"/>
-        <a:font script="Taml" typeface="Latha"/>
-        <a:font script="Syrc" typeface="Estrangelo Edessa"/>
-        <a:font script="Orya" typeface="Kalinga"/>
-        <a:font script="Mlym" typeface="Kartika"/>
-        <a:font script="Laoo" typeface="DokChampa"/>
-        <a:font script="Sinh" typeface="Iskoola Pota"/>
-        <a:font script="Mong" typeface="Mongolian Baiti"/>
-        <a:font script="Viet" typeface="Arial"/>
-        <a:font script="Uigh" typeface="Microsoft Uighur"/>
-        <a:font script="Geor" typeface="Sylfaen"/>
-      </a:minorFont>
-    </a:fontScheme>
-    <a:fmtScheme name="Office">
-      <a:fillStyleLst>
-        <a:solidFill>
-          <a:schemeClr val="phClr"/>
-        </a:solidFill>
-        <a:gradFill rotWithShape="1">
-          <a:gsLst>
-            <a:gs pos="0">
-              <a:schemeClr val="phClr">
-                <a:tint val="50000"/>
-                <a:satMod val="300000"/>
-              </a:schemeClr>
-            </a:gs>
-            <a:gs pos="35000">
-              <a:schemeClr val="phClr">
-                <a:tint val="37000"/>
-                <a:satMod val="300000"/>
-              </a:schemeClr>
-            </a:gs>
-            <a:gs pos="100000">
-              <a:schemeClr val="phClr">
-                <a:tint val="15000"/>
-                <a:satMod val="350000"/>
-              </a:schemeClr>
-            </a:gs>
-          </a:gsLst>
-          <a:lin ang="16200000" scaled="1"/>
-        </a:gradFill>
-        <a:gradFill rotWithShape="1">
-          <a:gsLst>
-            <a:gs pos="0">
-              <a:schemeClr val="phClr">
-                <a:tint val="100000"/>
-                <a:shade val="100000"/>
-                <a:satMod val="130000"/>
-              </a:schemeClr>
-            </a:gs>
-            <a:gs pos="100000">
-              <a:schemeClr val="phClr">
-                <a:tint val="50000"/>
-                <a:shade val="100000"/>
-                <a:satMod val="350000"/>
-              </a:schemeClr>
-            </a:gs>
-          </a:gsLst>
-          <a:lin ang="16200000" scaled="0"/>
-        </a:gradFill>
-      </a:fillStyleLst>
-      <a:lnStyleLst>
-        <a:ln w="9525" cap="flat" cmpd="sng" algn="ctr">
-          <a:solidFill>
-            <a:schemeClr val="phClr">
-              <a:shade val="95000"/>
-              <a:satMod val="105000"/>
-            </a:schemeClr>
-          </a:solidFill>
-          <a:prstDash val="solid"/>
-        </a:ln>
-        <a:ln w="25400" cap="flat" cmpd="sng" algn="ctr">
-          <a:solidFill>
-            <a:schemeClr val="phClr"/>
-          </a:solidFill>
-          <a:prstDash val="solid"/>
-        </a:ln>
-        <a:ln w="38100" cap="flat" cmpd="sng" algn="ctr">
-          <a:solidFill>
-            <a:schemeClr val="phClr"/>
-          </a:solidFill>
-          <a:prstDash val="solid"/>
-        </a:ln>
-      </a:lnStyleLst>
-      <a:effectStyleLst>
-        <a:effectStyle>
-          <a:effectLst>
-            <a:outerShdw blurRad="40000" dist="20000" dir="5400000" rotWithShape="0">
-              <a:srgbClr val="000000">
-                <a:alpha val="38000"/>
-              </a:srgbClr>
-            </a:outerShdw>
-          </a:effectLst>
-        </a:effectStyle>
-        <a:effectStyle>
-          <a:effectLst>
-            <a:outerShdw blurRad="40000" dist="23000" dir="5400000" rotWithShape="0">
-              <a:srgbClr val="000000">
-                <a:alpha val="35000"/>
-              </a:srgbClr>
-            </a:outerShdw>
-          </a:effectLst>
-        </a:effectStyle>
-        <a:effectStyle>
-          <a:effectLst>
-            <a:outerShdw blurRad="40000" dist="23000" dir="5400000" rotWithShape="0">
-              <a:srgbClr val="000000">
-                <a:alpha val="35000"/>
-              </a:srgbClr>
-            </a:outerShdw>
-          </a:effectLst>
-          <a:scene3d>
-            <a:camera prst="orthographicFront">
-              <a:rot lat="0" lon="0" rev="0"/>
-            </a:camera>
-            <a:lightRig rig="threePt" dir="t">
-              <a:rot lat="0" lon="0" rev="1200000"/>
-            </a:lightRig>
-          </a:scene3d>
-          <a:sp3d>
-            <a:bevelT w="63500" h="25400"/>
-          </a:sp3d>
-        </a:effectStyle>
-      </a:effectStyleLst>
-      <a:bgFillStyleLst>
-        <a:solidFill>
-          <a:schemeClr val="phClr"/>
-        </a:solidFill>
-        <a:gradFill rotWithShape="1">
-          <a:gsLst>
-            <a:gs pos="0">
-              <a:schemeClr val="phClr">
-                <a:tint val="40000"/>
-                <a:satMod val="350000"/>
-              </a:schemeClr>
-            </a:gs>
-            <a:gs pos="40000">
-              <a:schemeClr val="phClr">
-                <a:tint val="45000"/>
-                <a:shade val="99000"/>
-                <a:satMod val="350000"/>
-              </a:schemeClr>
-            </a:gs>
-            <a:gs pos="100000">
-              <a:schemeClr val="phClr">
-                <a:shade val="20000"/>
-                <a:satMod val="255000"/>
-              </a:schemeClr>
-            </a:gs>
-          </a:gsLst>
-          <a:path path="circle">
-            <a:fillToRect l="50000" t="-80000" r="50000" b="180000"/>
-          </a:path>
-        </a:gradFill>
-        <a:gradFill rotWithShape="1">
-          <a:gsLst>
-            <a:gs pos="0">
-              <a:schemeClr val="phClr">
-                <a:tint val="80000"/>
-                <a:satMod val="300000"/>
-              </a:schemeClr>
-            </a:gs>
-            <a:gs pos="100000">
-              <a:schemeClr val="phClr">
-                <a:shade val="30000"/>
-                <a:satMod val="200000"/>
-              </a:schemeClr>
-            </a:gs>
-          </a:gsLst>
-          <a:path path="circle">
-            <a:fillToRect l="50000" t="50000" r="50000" b="50000"/>
-          </a:path>
-        </a:gradFill>
-      </a:bgFillStyleLst>
-    </a:fmtScheme>
-  </a:themeElements>
-</a:theme>
 </file>